--- a/docs/theme-preview/pptx/skeuomorphism.pptx
+++ b/docs/theme-preview/pptx/skeuomorphism.pptx
@@ -366,7 +366,7 @@
             <a:pPr>
               <a:defRPr sz="1100" b="0" i="0" u="none" strike="noStrike">
                 <a:solidFill>
-                  <a:srgbClr val="1F2937"/>
+                  <a:srgbClr val="111111"/>
                 </a:solidFill>
                 <a:latin typeface="Pretendard"/>
               </a:defRPr>
@@ -418,7 +418,7 @@
             <a:pPr>
               <a:defRPr sz="1100" b="0" i="0" u="none" strike="noStrike">
                 <a:solidFill>
-                  <a:srgbClr val="4B5563"/>
+                  <a:srgbClr val="8E8E8E"/>
                 </a:solidFill>
                 <a:latin typeface="Pretendard"/>
               </a:defRPr>
@@ -448,7 +448,7 @@
           <a:pPr>
             <a:defRPr sz="1100">
               <a:solidFill>
-                <a:srgbClr val="4B5563"/>
+                <a:srgbClr val="8E8E8E"/>
               </a:solidFill>
               <a:latin typeface="Pretendard"/>
               <a:cs typeface="Pretendard"/>
@@ -626,7 +626,7 @@
             <a:pPr>
               <a:defRPr sz="1100" b="0" i="0" u="none" strike="noStrike">
                 <a:solidFill>
-                  <a:srgbClr val="1F2937"/>
+                  <a:srgbClr val="111111"/>
                 </a:solidFill>
                 <a:latin typeface="Pretendard"/>
               </a:defRPr>
@@ -678,7 +678,7 @@
             <a:pPr>
               <a:defRPr sz="1100" b="0" i="0" u="none" strike="noStrike">
                 <a:solidFill>
-                  <a:srgbClr val="4B5563"/>
+                  <a:srgbClr val="8E8E8E"/>
                 </a:solidFill>
                 <a:latin typeface="Pretendard"/>
               </a:defRPr>
@@ -4204,7 +4204,7 @@
             <a:r>
               <a:rPr lang="en-US" sz="3400" b="1" dirty="0">
                 <a:solidFill>
-                  <a:srgbClr val="1F2937"/>
+                  <a:srgbClr val="111111"/>
                 </a:solidFill>
                 <a:latin typeface="Pretendard" pitchFamily="34" charset="0"/>
                 <a:ea typeface="Pretendard" pitchFamily="34" charset="-122"/>
@@ -4263,7 +4263,7 @@
             <a:r>
               <a:rPr lang="en-US" sz="2200" dirty="0">
                 <a:solidFill>
-                  <a:srgbClr val="1F2937"/>
+                  <a:srgbClr val="111111"/>
                 </a:solidFill>
                 <a:latin typeface="Pretendard" pitchFamily="34" charset="0"/>
                 <a:ea typeface="Pretendard" pitchFamily="34" charset="-122"/>
@@ -4322,7 +4322,7 @@
             <a:r>
               <a:rPr lang="en-US" sz="2200" dirty="0">
                 <a:solidFill>
-                  <a:srgbClr val="1F2937"/>
+                  <a:srgbClr val="111111"/>
                 </a:solidFill>
                 <a:latin typeface="Pretendard" pitchFamily="34" charset="0"/>
                 <a:ea typeface="Pretendard" pitchFamily="34" charset="-122"/>
@@ -4594,7 +4594,7 @@
             <a:r>
               <a:rPr lang="en-US" sz="3400" b="1" dirty="0">
                 <a:solidFill>
-                  <a:srgbClr val="1F2937"/>
+                  <a:srgbClr val="111111"/>
                 </a:solidFill>
                 <a:latin typeface="Pretendard" pitchFamily="34" charset="0"/>
                 <a:ea typeface="Pretendard" pitchFamily="34" charset="-122"/>
@@ -4890,7 +4890,7 @@
             <a:r>
               <a:rPr lang="en-US" sz="1600" dirty="0">
                 <a:solidFill>
-                  <a:srgbClr val="1F2937"/>
+                  <a:srgbClr val="111111"/>
                 </a:solidFill>
                 <a:latin typeface="Pretendard" pitchFamily="34" charset="0"/>
                 <a:ea typeface="Pretendard" pitchFamily="34" charset="-122"/>
@@ -5066,7 +5066,7 @@
             <a:r>
               <a:rPr lang="en-US" sz="1600" dirty="0">
                 <a:solidFill>
-                  <a:srgbClr val="1F2937"/>
+                  <a:srgbClr val="111111"/>
                 </a:solidFill>
                 <a:latin typeface="Pretendard" pitchFamily="34" charset="0"/>
                 <a:ea typeface="Pretendard" pitchFamily="34" charset="-122"/>
@@ -5242,7 +5242,7 @@
             <a:r>
               <a:rPr lang="en-US" sz="1600" dirty="0">
                 <a:solidFill>
-                  <a:srgbClr val="1F2937"/>
+                  <a:srgbClr val="111111"/>
                 </a:solidFill>
                 <a:latin typeface="Pretendard" pitchFamily="34" charset="0"/>
                 <a:ea typeface="Pretendard" pitchFamily="34" charset="-122"/>
@@ -5418,7 +5418,7 @@
             <a:r>
               <a:rPr lang="en-US" sz="1600" dirty="0">
                 <a:solidFill>
-                  <a:srgbClr val="1F2937"/>
+                  <a:srgbClr val="111111"/>
                 </a:solidFill>
                 <a:latin typeface="Pretendard" pitchFamily="34" charset="0"/>
                 <a:ea typeface="Pretendard" pitchFamily="34" charset="-122"/>
@@ -5594,7 +5594,7 @@
             <a:r>
               <a:rPr lang="en-US" sz="1600" dirty="0">
                 <a:solidFill>
-                  <a:srgbClr val="1F2937"/>
+                  <a:srgbClr val="111111"/>
                 </a:solidFill>
                 <a:latin typeface="Pretendard" pitchFamily="34" charset="0"/>
                 <a:ea typeface="Pretendard" pitchFamily="34" charset="-122"/>
@@ -5770,7 +5770,7 @@
             <a:r>
               <a:rPr lang="en-US" sz="1600" dirty="0">
                 <a:solidFill>
-                  <a:srgbClr val="1F2937"/>
+                  <a:srgbClr val="111111"/>
                 </a:solidFill>
                 <a:latin typeface="Pretendard" pitchFamily="34" charset="0"/>
                 <a:ea typeface="Pretendard" pitchFamily="34" charset="-122"/>
@@ -6414,7 +6414,7 @@
             <a:r>
               <a:rPr lang="en-US" sz="3400" b="1" dirty="0">
                 <a:solidFill>
-                  <a:srgbClr val="1F2937"/>
+                  <a:srgbClr val="111111"/>
                 </a:solidFill>
                 <a:latin typeface="Pretendard" pitchFamily="34" charset="0"/>
                 <a:ea typeface="Pretendard" pitchFamily="34" charset="-122"/>
@@ -6530,7 +6530,7 @@
             <a:r>
               <a:rPr lang="en-US" sz="2200" dirty="0">
                 <a:solidFill>
-                  <a:srgbClr val="1F2937"/>
+                  <a:srgbClr val="111111"/>
                 </a:solidFill>
                 <a:latin typeface="Pretendard" pitchFamily="34" charset="0"/>
                 <a:ea typeface="Pretendard" pitchFamily="34" charset="-122"/>
@@ -6646,7 +6646,7 @@
             <a:r>
               <a:rPr lang="en-US" sz="2200" dirty="0">
                 <a:solidFill>
-                  <a:srgbClr val="1F2937"/>
+                  <a:srgbClr val="111111"/>
                 </a:solidFill>
                 <a:latin typeface="Pretendard" pitchFamily="34" charset="0"/>
                 <a:ea typeface="Pretendard" pitchFamily="34" charset="-122"/>
@@ -6762,7 +6762,7 @@
             <a:r>
               <a:rPr lang="en-US" sz="2200" dirty="0">
                 <a:solidFill>
-                  <a:srgbClr val="1F2937"/>
+                  <a:srgbClr val="111111"/>
                 </a:solidFill>
                 <a:latin typeface="Pretendard" pitchFamily="34" charset="0"/>
                 <a:ea typeface="Pretendard" pitchFamily="34" charset="-122"/>
@@ -6878,7 +6878,7 @@
             <a:r>
               <a:rPr lang="en-US" sz="2200" dirty="0">
                 <a:solidFill>
-                  <a:srgbClr val="1F2937"/>
+                  <a:srgbClr val="111111"/>
                 </a:solidFill>
                 <a:latin typeface="Pretendard" pitchFamily="34" charset="0"/>
                 <a:ea typeface="Pretendard" pitchFamily="34" charset="-122"/>
@@ -7204,7 +7204,7 @@
             <a:r>
               <a:rPr lang="en-US" sz="3400" b="1" dirty="0">
                 <a:solidFill>
-                  <a:srgbClr val="1F2937"/>
+                  <a:srgbClr val="111111"/>
                 </a:solidFill>
                 <a:latin typeface="Pretendard" pitchFamily="34" charset="0"/>
                 <a:ea typeface="Pretendard" pitchFamily="34" charset="-122"/>
@@ -7263,7 +7263,7 @@
             <a:r>
               <a:rPr lang="en-US" sz="2200" dirty="0">
                 <a:solidFill>
-                  <a:srgbClr val="1F2937"/>
+                  <a:srgbClr val="111111"/>
                 </a:solidFill>
                 <a:latin typeface="Pretendard" pitchFamily="34" charset="0"/>
                 <a:ea typeface="Pretendard" pitchFamily="34" charset="-122"/>
@@ -7322,7 +7322,7 @@
             <a:r>
               <a:rPr lang="en-US" sz="2200" dirty="0">
                 <a:solidFill>
-                  <a:srgbClr val="1F2937"/>
+                  <a:srgbClr val="111111"/>
                 </a:solidFill>
                 <a:latin typeface="Pretendard" pitchFamily="34" charset="0"/>
                 <a:ea typeface="Pretendard" pitchFamily="34" charset="-122"/>
@@ -7660,7 +7660,7 @@
             <a:r>
               <a:rPr lang="en-US" sz="3400" b="1" dirty="0">
                 <a:solidFill>
-                  <a:srgbClr val="1F2937"/>
+                  <a:srgbClr val="111111"/>
                 </a:solidFill>
                 <a:latin typeface="Pretendard" pitchFamily="34" charset="0"/>
                 <a:ea typeface="Pretendard" pitchFamily="34" charset="-122"/>
@@ -7917,7 +7917,7 @@
                       <a:r>
                         <a:rPr lang="en-US" sz="1800" b="1" dirty="0">
                           <a:solidFill>
-                            <a:srgbClr val="1F2937"/>
+                            <a:srgbClr val="111111"/>
                           </a:solidFill>
                           <a:latin typeface="Pretendard" pitchFamily="34" charset="0"/>
                           <a:ea typeface="Pretendard" pitchFamily="34" charset="-122"/>
@@ -7982,7 +7982,7 @@
                       <a:r>
                         <a:rPr lang="en-US" sz="1800" dirty="0">
                           <a:solidFill>
-                            <a:srgbClr val="1F2937"/>
+                            <a:srgbClr val="111111"/>
                           </a:solidFill>
                           <a:latin typeface="Pretendard" pitchFamily="34" charset="0"/>
                           <a:ea typeface="Pretendard" pitchFamily="34" charset="-122"/>
@@ -8047,7 +8047,7 @@
                       <a:r>
                         <a:rPr lang="en-US" sz="1800" dirty="0">
                           <a:solidFill>
-                            <a:srgbClr val="1F2937"/>
+                            <a:srgbClr val="111111"/>
                           </a:solidFill>
                           <a:latin typeface="Pretendard" pitchFamily="34" charset="0"/>
                           <a:ea typeface="Pretendard" pitchFamily="34" charset="-122"/>
@@ -8114,7 +8114,7 @@
                       <a:r>
                         <a:rPr lang="en-US" sz="1800" b="1" dirty="0">
                           <a:solidFill>
-                            <a:srgbClr val="1F2937"/>
+                            <a:srgbClr val="111111"/>
                           </a:solidFill>
                           <a:latin typeface="Pretendard" pitchFamily="34" charset="0"/>
                           <a:ea typeface="Pretendard" pitchFamily="34" charset="-122"/>
@@ -8184,7 +8184,7 @@
                       <a:r>
                         <a:rPr lang="en-US" sz="1800" dirty="0">
                           <a:solidFill>
-                            <a:srgbClr val="1F2937"/>
+                            <a:srgbClr val="111111"/>
                           </a:solidFill>
                           <a:latin typeface="Pretendard" pitchFamily="34" charset="0"/>
                           <a:ea typeface="Pretendard" pitchFamily="34" charset="-122"/>
@@ -8254,7 +8254,7 @@
                       <a:r>
                         <a:rPr lang="en-US" sz="1800" dirty="0">
                           <a:solidFill>
-                            <a:srgbClr val="1F2937"/>
+                            <a:srgbClr val="111111"/>
                           </a:solidFill>
                           <a:latin typeface="Pretendard" pitchFamily="34" charset="0"/>
                           <a:ea typeface="Pretendard" pitchFamily="34" charset="-122"/>
@@ -8326,7 +8326,7 @@
                       <a:r>
                         <a:rPr lang="en-US" sz="1800" b="1" dirty="0">
                           <a:solidFill>
-                            <a:srgbClr val="1F2937"/>
+                            <a:srgbClr val="111111"/>
                           </a:solidFill>
                           <a:latin typeface="Pretendard" pitchFamily="34" charset="0"/>
                           <a:ea typeface="Pretendard" pitchFamily="34" charset="-122"/>
@@ -8391,7 +8391,7 @@
                       <a:r>
                         <a:rPr lang="en-US" sz="1800" dirty="0">
                           <a:solidFill>
-                            <a:srgbClr val="1F2937"/>
+                            <a:srgbClr val="111111"/>
                           </a:solidFill>
                           <a:latin typeface="Pretendard" pitchFamily="34" charset="0"/>
                           <a:ea typeface="Pretendard" pitchFamily="34" charset="-122"/>
@@ -8456,7 +8456,7 @@
                       <a:r>
                         <a:rPr lang="en-US" sz="1800" dirty="0">
                           <a:solidFill>
-                            <a:srgbClr val="1F2937"/>
+                            <a:srgbClr val="111111"/>
                           </a:solidFill>
                           <a:latin typeface="Pretendard" pitchFamily="34" charset="0"/>
                           <a:ea typeface="Pretendard" pitchFamily="34" charset="-122"/>
@@ -8523,7 +8523,7 @@
                       <a:r>
                         <a:rPr lang="en-US" sz="1800" b="1" dirty="0">
                           <a:solidFill>
-                            <a:srgbClr val="1F2937"/>
+                            <a:srgbClr val="111111"/>
                           </a:solidFill>
                           <a:latin typeface="Pretendard" pitchFamily="34" charset="0"/>
                           <a:ea typeface="Pretendard" pitchFamily="34" charset="-122"/>
@@ -8593,7 +8593,7 @@
                       <a:r>
                         <a:rPr lang="en-US" sz="1800" dirty="0">
                           <a:solidFill>
-                            <a:srgbClr val="1F2937"/>
+                            <a:srgbClr val="111111"/>
                           </a:solidFill>
                           <a:latin typeface="Pretendard" pitchFamily="34" charset="0"/>
                           <a:ea typeface="Pretendard" pitchFamily="34" charset="-122"/>
@@ -8663,7 +8663,7 @@
                       <a:r>
                         <a:rPr lang="en-US" sz="1800" dirty="0">
                           <a:solidFill>
-                            <a:srgbClr val="1F2937"/>
+                            <a:srgbClr val="111111"/>
                           </a:solidFill>
                           <a:latin typeface="Pretendard" pitchFamily="34" charset="0"/>
                           <a:ea typeface="Pretendard" pitchFamily="34" charset="-122"/>
@@ -9080,7 +9080,7 @@
             <a:r>
               <a:rPr lang="en-US" sz="3400" b="1" dirty="0">
                 <a:solidFill>
-                  <a:srgbClr val="1F2937"/>
+                  <a:srgbClr val="111111"/>
                 </a:solidFill>
                 <a:latin typeface="Pretendard" pitchFamily="34" charset="0"/>
                 <a:ea typeface="Pretendard" pitchFamily="34" charset="-122"/>
@@ -9139,7 +9139,7 @@
             <a:r>
               <a:rPr lang="en-US" sz="2200" dirty="0">
                 <a:solidFill>
-                  <a:srgbClr val="1F2937"/>
+                  <a:srgbClr val="111111"/>
                 </a:solidFill>
                 <a:latin typeface="Pretendard" pitchFamily="34" charset="0"/>
                 <a:ea typeface="Pretendard" pitchFamily="34" charset="-122"/>
@@ -9179,7 +9179,7 @@
             <a:r>
               <a:rPr lang="en-US" sz="2200" dirty="0">
                 <a:solidFill>
-                  <a:srgbClr val="1F2937"/>
+                  <a:srgbClr val="111111"/>
                 </a:solidFill>
                 <a:latin typeface="Pretendard" pitchFamily="34" charset="0"/>
                 <a:ea typeface="Pretendard" pitchFamily="34" charset="-122"/>
@@ -9219,7 +9219,7 @@
             <a:r>
               <a:rPr lang="en-US" sz="2200" dirty="0">
                 <a:solidFill>
-                  <a:srgbClr val="1F2937"/>
+                  <a:srgbClr val="111111"/>
                 </a:solidFill>
                 <a:latin typeface="Pretendard" pitchFamily="34" charset="0"/>
                 <a:ea typeface="Pretendard" pitchFamily="34" charset="-122"/>
@@ -9573,7 +9573,7 @@
             <a:r>
               <a:rPr lang="en-US" sz="3400" b="1" dirty="0">
                 <a:solidFill>
-                  <a:srgbClr val="1F2937"/>
+                  <a:srgbClr val="111111"/>
                 </a:solidFill>
                 <a:latin typeface="Pretendard" pitchFamily="34" charset="0"/>
                 <a:ea typeface="Pretendard" pitchFamily="34" charset="-122"/>
@@ -9830,7 +9830,7 @@
                       <a:r>
                         <a:rPr lang="en-US" sz="1800" b="1" dirty="0">
                           <a:solidFill>
-                            <a:srgbClr val="1F2937"/>
+                            <a:srgbClr val="111111"/>
                           </a:solidFill>
                           <a:latin typeface="Pretendard" pitchFamily="34" charset="0"/>
                           <a:ea typeface="Pretendard" pitchFamily="34" charset="-122"/>
@@ -9895,7 +9895,7 @@
                       <a:r>
                         <a:rPr lang="en-US" sz="1800" dirty="0">
                           <a:solidFill>
-                            <a:srgbClr val="1F2937"/>
+                            <a:srgbClr val="111111"/>
                           </a:solidFill>
                           <a:latin typeface="Pretendard" pitchFamily="34" charset="0"/>
                           <a:ea typeface="Pretendard" pitchFamily="34" charset="-122"/>
@@ -9960,7 +9960,7 @@
                       <a:r>
                         <a:rPr lang="en-US" sz="1800" dirty="0">
                           <a:solidFill>
-                            <a:srgbClr val="1F2937"/>
+                            <a:srgbClr val="111111"/>
                           </a:solidFill>
                           <a:latin typeface="Pretendard" pitchFamily="34" charset="0"/>
                           <a:ea typeface="Pretendard" pitchFamily="34" charset="-122"/>
@@ -10027,7 +10027,7 @@
                       <a:r>
                         <a:rPr lang="en-US" sz="1800" b="1" dirty="0">
                           <a:solidFill>
-                            <a:srgbClr val="1F2937"/>
+                            <a:srgbClr val="111111"/>
                           </a:solidFill>
                           <a:latin typeface="Pretendard" pitchFamily="34" charset="0"/>
                           <a:ea typeface="Pretendard" pitchFamily="34" charset="-122"/>
@@ -10097,7 +10097,7 @@
                       <a:r>
                         <a:rPr lang="en-US" sz="1800" dirty="0">
                           <a:solidFill>
-                            <a:srgbClr val="1F2937"/>
+                            <a:srgbClr val="111111"/>
                           </a:solidFill>
                           <a:latin typeface="Pretendard" pitchFamily="34" charset="0"/>
                           <a:ea typeface="Pretendard" pitchFamily="34" charset="-122"/>
@@ -10167,7 +10167,7 @@
                       <a:r>
                         <a:rPr lang="en-US" sz="1800" dirty="0">
                           <a:solidFill>
-                            <a:srgbClr val="1F2937"/>
+                            <a:srgbClr val="111111"/>
                           </a:solidFill>
                           <a:latin typeface="Pretendard" pitchFamily="34" charset="0"/>
                           <a:ea typeface="Pretendard" pitchFamily="34" charset="-122"/>
@@ -10239,7 +10239,7 @@
                       <a:r>
                         <a:rPr lang="en-US" sz="1800" b="1" dirty="0">
                           <a:solidFill>
-                            <a:srgbClr val="1F2937"/>
+                            <a:srgbClr val="111111"/>
                           </a:solidFill>
                           <a:latin typeface="Pretendard" pitchFamily="34" charset="0"/>
                           <a:ea typeface="Pretendard" pitchFamily="34" charset="-122"/>
@@ -10304,7 +10304,7 @@
                       <a:r>
                         <a:rPr lang="en-US" sz="1800" dirty="0">
                           <a:solidFill>
-                            <a:srgbClr val="1F2937"/>
+                            <a:srgbClr val="111111"/>
                           </a:solidFill>
                           <a:latin typeface="Pretendard" pitchFamily="34" charset="0"/>
                           <a:ea typeface="Pretendard" pitchFamily="34" charset="-122"/>
@@ -10369,7 +10369,7 @@
                       <a:r>
                         <a:rPr lang="en-US" sz="1800" dirty="0">
                           <a:solidFill>
-                            <a:srgbClr val="1F2937"/>
+                            <a:srgbClr val="111111"/>
                           </a:solidFill>
                           <a:latin typeface="Pretendard" pitchFamily="34" charset="0"/>
                           <a:ea typeface="Pretendard" pitchFamily="34" charset="-122"/>
@@ -10754,7 +10754,7 @@
             <a:r>
               <a:rPr lang="en-US" sz="3400" b="1" dirty="0">
                 <a:solidFill>
-                  <a:srgbClr val="1F2937"/>
+                  <a:srgbClr val="111111"/>
                 </a:solidFill>
                 <a:latin typeface="Pretendard" pitchFamily="34" charset="0"/>
                 <a:ea typeface="Pretendard" pitchFamily="34" charset="-122"/>
@@ -10945,7 +10945,7 @@
             <a:r>
               <a:rPr lang="en-US" sz="3000" b="1" dirty="0">
                 <a:solidFill>
-                  <a:srgbClr val="1F2937"/>
+                  <a:srgbClr val="111111"/>
                 </a:solidFill>
                 <a:latin typeface="Pretendard" pitchFamily="34" charset="0"/>
                 <a:ea typeface="Pretendard" pitchFamily="34" charset="-122"/>
@@ -10987,7 +10987,7 @@
             <a:r>
               <a:rPr lang="en-US" sz="1600" dirty="0">
                 <a:solidFill>
-                  <a:srgbClr val="4B5563"/>
+                  <a:srgbClr val="8E8E8E"/>
                 </a:solidFill>
                 <a:latin typeface="Pretendard" pitchFamily="34" charset="0"/>
                 <a:ea typeface="Pretendard" pitchFamily="34" charset="-122"/>
@@ -11058,7 +11058,7 @@
             <a:r>
               <a:rPr lang="en-US" sz="1600" b="1" dirty="0">
                 <a:solidFill>
-                  <a:srgbClr val="1F2937"/>
+                  <a:srgbClr val="111111"/>
                 </a:solidFill>
                 <a:latin typeface="Pretendard" pitchFamily="34" charset="0"/>
                 <a:ea typeface="Pretendard" pitchFamily="34" charset="-122"/>
@@ -11129,7 +11129,7 @@
             <a:r>
               <a:rPr lang="en-US" sz="1600" dirty="0">
                 <a:solidFill>
-                  <a:srgbClr val="4B5563"/>
+                  <a:srgbClr val="8E8E8E"/>
                 </a:solidFill>
                 <a:latin typeface="Pretendard" pitchFamily="34" charset="0"/>
                 <a:ea typeface="Pretendard" pitchFamily="34" charset="-122"/>
@@ -11218,7 +11218,7 @@
           <a:noFill/>
           <a:ln w="12700">
             <a:solidFill>
-              <a:srgbClr val="1F2937"/>
+              <a:srgbClr val="111111"/>
             </a:solidFill>
             <a:prstDash val="solid"/>
           </a:ln>
@@ -11331,7 +11331,7 @@
             <a:r>
               <a:rPr lang="en-US" sz="3200" b="1" dirty="0">
                 <a:solidFill>
-                  <a:srgbClr val="1F2937"/>
+                  <a:srgbClr val="111111"/>
                 </a:solidFill>
                 <a:latin typeface="Pretendard" pitchFamily="34" charset="0"/>
                 <a:ea typeface="Pretendard" pitchFamily="34" charset="-122"/>
@@ -11373,7 +11373,7 @@
             <a:r>
               <a:rPr lang="en-US" sz="1700" dirty="0">
                 <a:solidFill>
-                  <a:srgbClr val="4B5563"/>
+                  <a:srgbClr val="8E8E8E"/>
                 </a:solidFill>
                 <a:latin typeface="Pretendard" pitchFamily="34" charset="0"/>
                 <a:ea typeface="Pretendard" pitchFamily="34" charset="-122"/>
@@ -11415,7 +11415,7 @@
             <a:r>
               <a:rPr lang="en-US" sz="1400" dirty="0">
                 <a:solidFill>
-                  <a:srgbClr val="4B5563"/>
+                  <a:srgbClr val="8E8E8E"/>
                 </a:solidFill>
                 <a:latin typeface="Pretendard" pitchFamily="34" charset="0"/>
                 <a:ea typeface="Pretendard" pitchFamily="34" charset="-122"/>
@@ -11457,7 +11457,7 @@
             <a:r>
               <a:rPr lang="en-US" sz="1400" dirty="0">
                 <a:solidFill>
-                  <a:srgbClr val="4B5563"/>
+                  <a:srgbClr val="8E8E8E"/>
                 </a:solidFill>
                 <a:latin typeface="Pretendard" pitchFamily="34" charset="0"/>
                 <a:ea typeface="Pretendard" pitchFamily="34" charset="-122"/>
@@ -11795,7 +11795,7 @@
             <a:r>
               <a:rPr lang="en-US" sz="3400" b="1" dirty="0">
                 <a:solidFill>
-                  <a:srgbClr val="1F2937"/>
+                  <a:srgbClr val="111111"/>
                 </a:solidFill>
                 <a:latin typeface="Pretendard" pitchFamily="34" charset="0"/>
                 <a:ea typeface="Pretendard" pitchFamily="34" charset="-122"/>
@@ -11893,7 +11893,7 @@
             <a:r>
               <a:rPr lang="en-US" sz="1800" b="1" dirty="0">
                 <a:solidFill>
-                  <a:srgbClr val="1F2937"/>
+                  <a:srgbClr val="111111"/>
                 </a:solidFill>
                 <a:latin typeface="Pretendard" pitchFamily="34" charset="0"/>
                 <a:ea typeface="Pretendard" pitchFamily="34" charset="-122"/>
@@ -12035,7 +12035,7 @@
             <a:r>
               <a:rPr lang="en-US" sz="1800" b="1" dirty="0">
                 <a:solidFill>
-                  <a:srgbClr val="1F2937"/>
+                  <a:srgbClr val="111111"/>
                 </a:solidFill>
                 <a:latin typeface="Pretendard" pitchFamily="34" charset="0"/>
                 <a:ea typeface="Pretendard" pitchFamily="34" charset="-122"/>
@@ -12177,7 +12177,7 @@
             <a:r>
               <a:rPr lang="en-US" sz="1800" b="1" dirty="0">
                 <a:solidFill>
-                  <a:srgbClr val="1F2937"/>
+                  <a:srgbClr val="111111"/>
                 </a:solidFill>
                 <a:latin typeface="Pretendard" pitchFamily="34" charset="0"/>
                 <a:ea typeface="Pretendard" pitchFamily="34" charset="-122"/>
@@ -12319,7 +12319,7 @@
             <a:r>
               <a:rPr lang="en-US" sz="1800" b="1" dirty="0">
                 <a:solidFill>
-                  <a:srgbClr val="1F2937"/>
+                  <a:srgbClr val="111111"/>
                 </a:solidFill>
                 <a:latin typeface="Pretendard" pitchFamily="34" charset="0"/>
                 <a:ea typeface="Pretendard" pitchFamily="34" charset="-122"/>
@@ -13015,7 +13015,7 @@
             <a:r>
               <a:rPr lang="en-US" sz="3400" b="1" dirty="0">
                 <a:solidFill>
-                  <a:srgbClr val="1F2937"/>
+                  <a:srgbClr val="111111"/>
                 </a:solidFill>
                 <a:latin typeface="Pretendard" pitchFamily="34" charset="0"/>
                 <a:ea typeface="Pretendard" pitchFamily="34" charset="-122"/>
@@ -13131,7 +13131,7 @@
             <a:r>
               <a:rPr lang="en-US" sz="2200" dirty="0">
                 <a:solidFill>
-                  <a:srgbClr val="1F2937"/>
+                  <a:srgbClr val="111111"/>
                 </a:solidFill>
                 <a:latin typeface="Pretendard" pitchFamily="34" charset="0"/>
                 <a:ea typeface="Pretendard" pitchFamily="34" charset="-122"/>
@@ -13247,7 +13247,7 @@
             <a:r>
               <a:rPr lang="en-US" sz="2200" dirty="0">
                 <a:solidFill>
-                  <a:srgbClr val="1F2937"/>
+                  <a:srgbClr val="111111"/>
                 </a:solidFill>
                 <a:latin typeface="Pretendard" pitchFamily="34" charset="0"/>
                 <a:ea typeface="Pretendard" pitchFamily="34" charset="-122"/>
@@ -13363,7 +13363,7 @@
             <a:r>
               <a:rPr lang="en-US" sz="2200" dirty="0">
                 <a:solidFill>
-                  <a:srgbClr val="1F2937"/>
+                  <a:srgbClr val="111111"/>
                 </a:solidFill>
                 <a:latin typeface="Pretendard" pitchFamily="34" charset="0"/>
                 <a:ea typeface="Pretendard" pitchFamily="34" charset="-122"/>
@@ -14096,7 +14096,7 @@
             <a:r>
               <a:rPr lang="en-US" sz="3800" b="1" dirty="0">
                 <a:solidFill>
-                  <a:srgbClr val="1F2937"/>
+                  <a:srgbClr val="111111"/>
                 </a:solidFill>
                 <a:latin typeface="Pretendard" pitchFamily="34" charset="0"/>
                 <a:ea typeface="Pretendard" pitchFamily="34" charset="-122"/>
@@ -14138,7 +14138,7 @@
             <a:r>
               <a:rPr lang="en-US" sz="1800" dirty="0">
                 <a:solidFill>
-                  <a:srgbClr val="1F2937"/>
+                  <a:srgbClr val="111111"/>
                 </a:solidFill>
                 <a:latin typeface="Pretendard" pitchFamily="34" charset="0"/>
                 <a:ea typeface="Pretendard" pitchFamily="34" charset="-122"/>
@@ -14180,7 +14180,7 @@
             <a:r>
               <a:rPr lang="en-US" sz="1800" dirty="0">
                 <a:solidFill>
-                  <a:srgbClr val="1F2937"/>
+                  <a:srgbClr val="111111"/>
                 </a:solidFill>
                 <a:latin typeface="Pretendard" pitchFamily="34" charset="0"/>
                 <a:ea typeface="Pretendard" pitchFamily="34" charset="-122"/>
@@ -14222,7 +14222,7 @@
             <a:r>
               <a:rPr lang="en-US" sz="1800" dirty="0">
                 <a:solidFill>
-                  <a:srgbClr val="1F2937"/>
+                  <a:srgbClr val="111111"/>
                 </a:solidFill>
                 <a:latin typeface="Pretendard" pitchFamily="34" charset="0"/>
                 <a:ea typeface="Pretendard" pitchFamily="34" charset="-122"/>
@@ -14264,7 +14264,7 @@
             <a:r>
               <a:rPr lang="en-US" sz="1800" dirty="0">
                 <a:solidFill>
-                  <a:srgbClr val="1F2937"/>
+                  <a:srgbClr val="111111"/>
                 </a:solidFill>
                 <a:latin typeface="Pretendard" pitchFamily="34" charset="0"/>
                 <a:ea typeface="Pretendard" pitchFamily="34" charset="-122"/>
@@ -14306,7 +14306,7 @@
             <a:r>
               <a:rPr lang="en-US" sz="1800" dirty="0">
                 <a:solidFill>
-                  <a:srgbClr val="1F2937"/>
+                  <a:srgbClr val="111111"/>
                 </a:solidFill>
                 <a:latin typeface="Pretendard" pitchFamily="34" charset="0"/>
                 <a:ea typeface="Pretendard" pitchFamily="34" charset="-122"/>
@@ -14348,7 +14348,7 @@
             <a:r>
               <a:rPr lang="en-US" sz="1800" dirty="0">
                 <a:solidFill>
-                  <a:srgbClr val="1F2937"/>
+                  <a:srgbClr val="111111"/>
                 </a:solidFill>
                 <a:latin typeface="Pretendard" pitchFamily="34" charset="0"/>
                 <a:ea typeface="Pretendard" pitchFamily="34" charset="-122"/>
@@ -14390,7 +14390,7 @@
             <a:r>
               <a:rPr lang="en-US" sz="1800" dirty="0">
                 <a:solidFill>
-                  <a:srgbClr val="1F2937"/>
+                  <a:srgbClr val="111111"/>
                 </a:solidFill>
                 <a:latin typeface="Pretendard" pitchFamily="34" charset="0"/>
                 <a:ea typeface="Pretendard" pitchFamily="34" charset="-122"/>
@@ -14432,7 +14432,7 @@
             <a:r>
               <a:rPr lang="en-US" sz="1800" dirty="0">
                 <a:solidFill>
-                  <a:srgbClr val="1F2937"/>
+                  <a:srgbClr val="111111"/>
                 </a:solidFill>
                 <a:latin typeface="Pretendard" pitchFamily="34" charset="0"/>
                 <a:ea typeface="Pretendard" pitchFamily="34" charset="-122"/>
@@ -14474,7 +14474,7 @@
             <a:r>
               <a:rPr lang="en-US" sz="1800" dirty="0">
                 <a:solidFill>
-                  <a:srgbClr val="1F2937"/>
+                  <a:srgbClr val="111111"/>
                 </a:solidFill>
                 <a:latin typeface="Pretendard" pitchFamily="34" charset="0"/>
                 <a:ea typeface="Pretendard" pitchFamily="34" charset="-122"/>
@@ -14516,7 +14516,7 @@
             <a:r>
               <a:rPr lang="en-US" sz="1800" dirty="0">
                 <a:solidFill>
-                  <a:srgbClr val="1F2937"/>
+                  <a:srgbClr val="111111"/>
                 </a:solidFill>
                 <a:latin typeface="Pretendard" pitchFamily="34" charset="0"/>
                 <a:ea typeface="Pretendard" pitchFamily="34" charset="-122"/>
@@ -14558,7 +14558,7 @@
             <a:r>
               <a:rPr lang="en-US" sz="1800" dirty="0">
                 <a:solidFill>
-                  <a:srgbClr val="1F2937"/>
+                  <a:srgbClr val="111111"/>
                 </a:solidFill>
                 <a:latin typeface="Pretendard" pitchFamily="34" charset="0"/>
                 <a:ea typeface="Pretendard" pitchFamily="34" charset="-122"/>
@@ -14600,7 +14600,7 @@
             <a:r>
               <a:rPr lang="en-US" sz="1800" dirty="0">
                 <a:solidFill>
-                  <a:srgbClr val="1F2937"/>
+                  <a:srgbClr val="111111"/>
                 </a:solidFill>
                 <a:latin typeface="Pretendard" pitchFamily="34" charset="0"/>
                 <a:ea typeface="Pretendard" pitchFamily="34" charset="-122"/>
@@ -14642,7 +14642,7 @@
             <a:r>
               <a:rPr lang="en-US" sz="1800" dirty="0">
                 <a:solidFill>
-                  <a:srgbClr val="1F2937"/>
+                  <a:srgbClr val="111111"/>
                 </a:solidFill>
                 <a:latin typeface="Pretendard" pitchFamily="34" charset="0"/>
                 <a:ea typeface="Pretendard" pitchFamily="34" charset="-122"/>
@@ -14684,7 +14684,7 @@
             <a:r>
               <a:rPr lang="en-US" sz="1800" dirty="0">
                 <a:solidFill>
-                  <a:srgbClr val="1F2937"/>
+                  <a:srgbClr val="111111"/>
                 </a:solidFill>
                 <a:latin typeface="Pretendard" pitchFamily="34" charset="0"/>
                 <a:ea typeface="Pretendard" pitchFamily="34" charset="-122"/>
@@ -15010,7 +15010,7 @@
             <a:r>
               <a:rPr lang="en-US" sz="3400" b="1" dirty="0">
                 <a:solidFill>
-                  <a:srgbClr val="1F2937"/>
+                  <a:srgbClr val="111111"/>
                 </a:solidFill>
                 <a:latin typeface="Pretendard" pitchFamily="34" charset="0"/>
                 <a:ea typeface="Pretendard" pitchFamily="34" charset="-122"/>
@@ -15069,7 +15069,7 @@
             <a:r>
               <a:rPr lang="en-US" sz="2200" dirty="0">
                 <a:solidFill>
-                  <a:srgbClr val="1F2937"/>
+                  <a:srgbClr val="111111"/>
                 </a:solidFill>
                 <a:latin typeface="Pretendard" pitchFamily="34" charset="0"/>
                 <a:ea typeface="Pretendard" pitchFamily="34" charset="-122"/>
@@ -15128,7 +15128,7 @@
             <a:r>
               <a:rPr lang="en-US" sz="2200" dirty="0">
                 <a:solidFill>
-                  <a:srgbClr val="1F2937"/>
+                  <a:srgbClr val="111111"/>
                 </a:solidFill>
                 <a:latin typeface="Pretendard" pitchFamily="34" charset="0"/>
                 <a:ea typeface="Pretendard" pitchFamily="34" charset="-122"/>
@@ -15772,7 +15772,7 @@
             <a:r>
               <a:rPr lang="en-US" sz="3400" b="1" dirty="0">
                 <a:solidFill>
-                  <a:srgbClr val="1F2937"/>
+                  <a:srgbClr val="111111"/>
                 </a:solidFill>
                 <a:latin typeface="Pretendard" pitchFamily="34" charset="0"/>
                 <a:ea typeface="Pretendard" pitchFamily="34" charset="-122"/>
@@ -15888,7 +15888,7 @@
             <a:r>
               <a:rPr lang="en-US" sz="2200" dirty="0">
                 <a:solidFill>
-                  <a:srgbClr val="1F2937"/>
+                  <a:srgbClr val="111111"/>
                 </a:solidFill>
                 <a:latin typeface="Pretendard" pitchFamily="34" charset="0"/>
                 <a:ea typeface="Pretendard" pitchFamily="34" charset="-122"/>
@@ -16004,7 +16004,7 @@
             <a:r>
               <a:rPr lang="en-US" sz="2200" dirty="0">
                 <a:solidFill>
-                  <a:srgbClr val="1F2937"/>
+                  <a:srgbClr val="111111"/>
                 </a:solidFill>
                 <a:latin typeface="Pretendard" pitchFamily="34" charset="0"/>
                 <a:ea typeface="Pretendard" pitchFamily="34" charset="-122"/>
@@ -16120,7 +16120,7 @@
             <a:r>
               <a:rPr lang="en-US" sz="2200" dirty="0">
                 <a:solidFill>
-                  <a:srgbClr val="1F2937"/>
+                  <a:srgbClr val="111111"/>
                 </a:solidFill>
                 <a:latin typeface="Pretendard" pitchFamily="34" charset="0"/>
                 <a:ea typeface="Pretendard" pitchFamily="34" charset="-122"/>
@@ -16236,7 +16236,7 @@
             <a:r>
               <a:rPr lang="en-US" sz="2200" dirty="0">
                 <a:solidFill>
-                  <a:srgbClr val="1F2937"/>
+                  <a:srgbClr val="111111"/>
                 </a:solidFill>
                 <a:latin typeface="Pretendard" pitchFamily="34" charset="0"/>
                 <a:ea typeface="Pretendard" pitchFamily="34" charset="-122"/>
@@ -16880,7 +16880,7 @@
             <a:r>
               <a:rPr lang="en-US" sz="3400" b="1" dirty="0">
                 <a:solidFill>
-                  <a:srgbClr val="1F2937"/>
+                  <a:srgbClr val="111111"/>
                 </a:solidFill>
                 <a:latin typeface="Pretendard" pitchFamily="34" charset="0"/>
                 <a:ea typeface="Pretendard" pitchFamily="34" charset="-122"/>
@@ -16996,7 +16996,7 @@
             <a:r>
               <a:rPr lang="en-US" sz="2200" dirty="0">
                 <a:solidFill>
-                  <a:srgbClr val="1F2937"/>
+                  <a:srgbClr val="111111"/>
                 </a:solidFill>
                 <a:latin typeface="Pretendard" pitchFamily="34" charset="0"/>
                 <a:ea typeface="Pretendard" pitchFamily="34" charset="-122"/>
@@ -17112,7 +17112,7 @@
             <a:r>
               <a:rPr lang="en-US" sz="2200" dirty="0">
                 <a:solidFill>
-                  <a:srgbClr val="1F2937"/>
+                  <a:srgbClr val="111111"/>
                 </a:solidFill>
                 <a:latin typeface="Pretendard" pitchFamily="34" charset="0"/>
                 <a:ea typeface="Pretendard" pitchFamily="34" charset="-122"/>
@@ -17228,7 +17228,7 @@
             <a:r>
               <a:rPr lang="en-US" sz="2200" dirty="0">
                 <a:solidFill>
-                  <a:srgbClr val="1F2937"/>
+                  <a:srgbClr val="111111"/>
                 </a:solidFill>
                 <a:latin typeface="Pretendard" pitchFamily="34" charset="0"/>
                 <a:ea typeface="Pretendard" pitchFamily="34" charset="-122"/>
@@ -17344,7 +17344,7 @@
             <a:r>
               <a:rPr lang="en-US" sz="2200" dirty="0">
                 <a:solidFill>
-                  <a:srgbClr val="1F2937"/>
+                  <a:srgbClr val="111111"/>
                 </a:solidFill>
                 <a:latin typeface="Pretendard" pitchFamily="34" charset="0"/>
                 <a:ea typeface="Pretendard" pitchFamily="34" charset="-122"/>
@@ -17709,7 +17709,7 @@
             <a:r>
               <a:rPr lang="en-US" sz="3400" b="1" dirty="0">
                 <a:solidFill>
-                  <a:srgbClr val="1F2937"/>
+                  <a:srgbClr val="111111"/>
                 </a:solidFill>
                 <a:latin typeface="Pretendard" pitchFamily="34" charset="0"/>
                 <a:ea typeface="Pretendard" pitchFamily="34" charset="-122"/>
@@ -17768,7 +17768,7 @@
             <a:r>
               <a:rPr lang="en-US" sz="2200" dirty="0">
                 <a:solidFill>
-                  <a:srgbClr val="1F2937"/>
+                  <a:srgbClr val="111111"/>
                 </a:solidFill>
                 <a:latin typeface="Pretendard" pitchFamily="34" charset="0"/>
                 <a:ea typeface="Pretendard" pitchFamily="34" charset="-122"/>
@@ -17808,7 +17808,7 @@
             <a:r>
               <a:rPr lang="en-US" sz="2200" dirty="0">
                 <a:solidFill>
-                  <a:srgbClr val="1F2937"/>
+                  <a:srgbClr val="111111"/>
                 </a:solidFill>
                 <a:latin typeface="Pretendard" pitchFamily="34" charset="0"/>
                 <a:ea typeface="Pretendard" pitchFamily="34" charset="-122"/>
@@ -17848,7 +17848,7 @@
             <a:r>
               <a:rPr lang="en-US" sz="2200" dirty="0">
                 <a:solidFill>
-                  <a:srgbClr val="1F2937"/>
+                  <a:srgbClr val="111111"/>
                 </a:solidFill>
                 <a:latin typeface="Pretendard" pitchFamily="34" charset="0"/>
                 <a:ea typeface="Pretendard" pitchFamily="34" charset="-122"/>
@@ -18375,7 +18375,7 @@
             <a:r>
               <a:rPr lang="en-US" sz="3400" b="1" dirty="0">
                 <a:solidFill>
-                  <a:srgbClr val="1F2937"/>
+                  <a:srgbClr val="111111"/>
                 </a:solidFill>
                 <a:latin typeface="Pretendard" pitchFamily="34" charset="0"/>
                 <a:ea typeface="Pretendard" pitchFamily="34" charset="-122"/>
@@ -18579,7 +18579,7 @@
                       <a:r>
                         <a:rPr lang="en-US" sz="1800" b="1" dirty="0">
                           <a:solidFill>
-                            <a:srgbClr val="1F2937"/>
+                            <a:srgbClr val="111111"/>
                           </a:solidFill>
                           <a:latin typeface="Pretendard" pitchFamily="34" charset="0"/>
                           <a:ea typeface="Pretendard" pitchFamily="34" charset="-122"/>
@@ -18644,7 +18644,7 @@
                       <a:r>
                         <a:rPr lang="en-US" sz="1800" dirty="0">
                           <a:solidFill>
-                            <a:srgbClr val="1F2937"/>
+                            <a:srgbClr val="111111"/>
                           </a:solidFill>
                           <a:latin typeface="Pretendard" pitchFamily="34" charset="0"/>
                           <a:ea typeface="Pretendard" pitchFamily="34" charset="-122"/>
@@ -18711,7 +18711,7 @@
                       <a:r>
                         <a:rPr lang="en-US" sz="1800" b="1" dirty="0">
                           <a:solidFill>
-                            <a:srgbClr val="1F2937"/>
+                            <a:srgbClr val="111111"/>
                           </a:solidFill>
                           <a:latin typeface="Pretendard" pitchFamily="34" charset="0"/>
                           <a:ea typeface="Pretendard" pitchFamily="34" charset="-122"/>
@@ -18781,7 +18781,7 @@
                       <a:r>
                         <a:rPr lang="en-US" sz="1800" dirty="0">
                           <a:solidFill>
-                            <a:srgbClr val="1F2937"/>
+                            <a:srgbClr val="111111"/>
                           </a:solidFill>
                           <a:latin typeface="Pretendard" pitchFamily="34" charset="0"/>
                           <a:ea typeface="Pretendard" pitchFamily="34" charset="-122"/>
@@ -18892,7 +18892,7 @@
             <a:r>
               <a:rPr lang="en-US" sz="1800" dirty="0">
                 <a:solidFill>
-                  <a:srgbClr val="1F2937"/>
+                  <a:srgbClr val="111111"/>
                 </a:solidFill>
                 <a:latin typeface="Pretendard" pitchFamily="34" charset="0"/>
                 <a:ea typeface="Pretendard" pitchFamily="34" charset="-122"/>
@@ -18932,7 +18932,7 @@
             <a:r>
               <a:rPr lang="en-US" sz="1800" dirty="0">
                 <a:solidFill>
-                  <a:srgbClr val="1F2937"/>
+                  <a:srgbClr val="111111"/>
                 </a:solidFill>
                 <a:latin typeface="Pretendard" pitchFamily="34" charset="0"/>
                 <a:ea typeface="Pretendard" pitchFamily="34" charset="-122"/>
@@ -19542,7 +19542,7 @@
             <a:r>
               <a:rPr lang="en-US" sz="3400" b="1" dirty="0">
                 <a:solidFill>
-                  <a:srgbClr val="1F2937"/>
+                  <a:srgbClr val="111111"/>
                 </a:solidFill>
                 <a:latin typeface="Pretendard" pitchFamily="34" charset="0"/>
                 <a:ea typeface="Pretendard" pitchFamily="34" charset="-122"/>
@@ -19658,7 +19658,7 @@
             <a:r>
               <a:rPr lang="en-US" sz="2200" dirty="0">
                 <a:solidFill>
-                  <a:srgbClr val="1F2937"/>
+                  <a:srgbClr val="111111"/>
                 </a:solidFill>
                 <a:latin typeface="Pretendard" pitchFamily="34" charset="0"/>
                 <a:ea typeface="Pretendard" pitchFamily="34" charset="-122"/>
@@ -19774,7 +19774,7 @@
             <a:r>
               <a:rPr lang="en-US" sz="2200" dirty="0">
                 <a:solidFill>
-                  <a:srgbClr val="1F2937"/>
+                  <a:srgbClr val="111111"/>
                 </a:solidFill>
                 <a:latin typeface="Pretendard" pitchFamily="34" charset="0"/>
                 <a:ea typeface="Pretendard" pitchFamily="34" charset="-122"/>
@@ -19890,7 +19890,7 @@
             <a:r>
               <a:rPr lang="en-US" sz="2200" dirty="0">
                 <a:solidFill>
-                  <a:srgbClr val="1F2937"/>
+                  <a:srgbClr val="111111"/>
                 </a:solidFill>
                 <a:latin typeface="Pretendard" pitchFamily="34" charset="0"/>
                 <a:ea typeface="Pretendard" pitchFamily="34" charset="-122"/>
@@ -20243,7 +20243,7 @@
             <a:r>
               <a:rPr lang="en-US" sz="3800" b="1" dirty="0">
                 <a:solidFill>
-                  <a:srgbClr val="1F2937"/>
+                  <a:srgbClr val="111111"/>
                 </a:solidFill>
                 <a:latin typeface="Pretendard" pitchFamily="34" charset="0"/>
                 <a:ea typeface="Pretendard" pitchFamily="34" charset="-122"/>
@@ -20285,7 +20285,7 @@
             <a:r>
               <a:rPr lang="en-US" sz="2200" dirty="0">
                 <a:solidFill>
-                  <a:srgbClr val="1F2937"/>
+                  <a:srgbClr val="111111"/>
                 </a:solidFill>
                 <a:latin typeface="Pretendard" pitchFamily="34" charset="0"/>
                 <a:ea typeface="Pretendard" pitchFamily="34" charset="-122"/>
@@ -20679,7 +20679,7 @@
             <a:r>
               <a:rPr lang="en-US" sz="3400" b="1" dirty="0">
                 <a:solidFill>
-                  <a:srgbClr val="1F2937"/>
+                  <a:srgbClr val="111111"/>
                 </a:solidFill>
                 <a:latin typeface="Pretendard" pitchFamily="34" charset="0"/>
                 <a:ea typeface="Pretendard" pitchFamily="34" charset="-122"/>
@@ -20721,7 +20721,7 @@
             <a:r>
               <a:rPr lang="en-US" sz="2200" b="1" dirty="0">
                 <a:solidFill>
-                  <a:srgbClr val="1F2937"/>
+                  <a:srgbClr val="111111"/>
                 </a:solidFill>
                 <a:latin typeface="Pretendard" pitchFamily="34" charset="0"/>
                 <a:ea typeface="Pretendard" pitchFamily="34" charset="-122"/>
@@ -20780,7 +20780,7 @@
             <a:r>
               <a:rPr lang="en-US" sz="2200" dirty="0">
                 <a:solidFill>
-                  <a:srgbClr val="1F2937"/>
+                  <a:srgbClr val="111111"/>
                 </a:solidFill>
                 <a:latin typeface="Pretendard" pitchFamily="34" charset="0"/>
                 <a:ea typeface="Pretendard" pitchFamily="34" charset="-122"/>
@@ -20820,7 +20820,7 @@
             <a:r>
               <a:rPr lang="en-US" sz="2200" dirty="0">
                 <a:solidFill>
-                  <a:srgbClr val="1F2937"/>
+                  <a:srgbClr val="111111"/>
                 </a:solidFill>
                 <a:latin typeface="Pretendard" pitchFamily="34" charset="0"/>
                 <a:ea typeface="Pretendard" pitchFamily="34" charset="-122"/>
@@ -20860,7 +20860,7 @@
             <a:r>
               <a:rPr lang="en-US" sz="2200" dirty="0">
                 <a:solidFill>
-                  <a:srgbClr val="1F2937"/>
+                  <a:srgbClr val="111111"/>
                 </a:solidFill>
                 <a:latin typeface="Pretendard" pitchFamily="34" charset="0"/>
                 <a:ea typeface="Pretendard" pitchFamily="34" charset="-122"/>
@@ -20900,7 +20900,7 @@
             <a:r>
               <a:rPr lang="en-US" sz="2200" dirty="0">
                 <a:solidFill>
-                  <a:srgbClr val="1F2937"/>
+                  <a:srgbClr val="111111"/>
                 </a:solidFill>
                 <a:latin typeface="Pretendard" pitchFamily="34" charset="0"/>
                 <a:ea typeface="Pretendard" pitchFamily="34" charset="-122"/>
@@ -21480,7 +21480,7 @@
             <a:r>
               <a:rPr lang="en-US" sz="3400" b="1" dirty="0">
                 <a:solidFill>
-                  <a:srgbClr val="1F2937"/>
+                  <a:srgbClr val="111111"/>
                 </a:solidFill>
                 <a:latin typeface="Pretendard" pitchFamily="34" charset="0"/>
                 <a:ea typeface="Pretendard" pitchFamily="34" charset="-122"/>
@@ -21596,7 +21596,7 @@
             <a:r>
               <a:rPr lang="en-US" sz="2200" dirty="0">
                 <a:solidFill>
-                  <a:srgbClr val="1F2937"/>
+                  <a:srgbClr val="111111"/>
                 </a:solidFill>
                 <a:latin typeface="Pretendard" pitchFamily="34" charset="0"/>
                 <a:ea typeface="Pretendard" pitchFamily="34" charset="-122"/>
@@ -21712,7 +21712,7 @@
             <a:r>
               <a:rPr lang="en-US" sz="2200" dirty="0">
                 <a:solidFill>
-                  <a:srgbClr val="1F2937"/>
+                  <a:srgbClr val="111111"/>
                 </a:solidFill>
                 <a:latin typeface="Pretendard" pitchFamily="34" charset="0"/>
                 <a:ea typeface="Pretendard" pitchFamily="34" charset="-122"/>
@@ -21828,7 +21828,7 @@
             <a:r>
               <a:rPr lang="en-US" sz="2200" dirty="0">
                 <a:solidFill>
-                  <a:srgbClr val="1F2937"/>
+                  <a:srgbClr val="111111"/>
                 </a:solidFill>
                 <a:latin typeface="Pretendard" pitchFamily="34" charset="0"/>
                 <a:ea typeface="Pretendard" pitchFamily="34" charset="-122"/>
@@ -22154,7 +22154,7 @@
             <a:r>
               <a:rPr lang="en-US" sz="3400" b="1" dirty="0">
                 <a:solidFill>
-                  <a:srgbClr val="1F2937"/>
+                  <a:srgbClr val="111111"/>
                 </a:solidFill>
                 <a:latin typeface="Pretendard" pitchFamily="34" charset="0"/>
                 <a:ea typeface="Pretendard" pitchFamily="34" charset="-122"/>
@@ -22213,7 +22213,7 @@
             <a:r>
               <a:rPr lang="en-US" sz="2200" dirty="0">
                 <a:solidFill>
-                  <a:srgbClr val="1F2937"/>
+                  <a:srgbClr val="111111"/>
                 </a:solidFill>
                 <a:latin typeface="Pretendard" pitchFamily="34" charset="0"/>
                 <a:ea typeface="Pretendard" pitchFamily="34" charset="-122"/>
@@ -22272,7 +22272,7 @@
             <a:r>
               <a:rPr lang="en-US" sz="2200" dirty="0">
                 <a:solidFill>
-                  <a:srgbClr val="1F2937"/>
+                  <a:srgbClr val="111111"/>
                 </a:solidFill>
                 <a:latin typeface="Pretendard" pitchFamily="34" charset="0"/>
                 <a:ea typeface="Pretendard" pitchFamily="34" charset="-122"/>
@@ -22852,7 +22852,7 @@
             <a:r>
               <a:rPr lang="en-US" sz="3400" b="1" dirty="0">
                 <a:solidFill>
-                  <a:srgbClr val="1F2937"/>
+                  <a:srgbClr val="111111"/>
                 </a:solidFill>
                 <a:latin typeface="Pretendard" pitchFamily="34" charset="0"/>
                 <a:ea typeface="Pretendard" pitchFamily="34" charset="-122"/>
@@ -22968,7 +22968,7 @@
             <a:r>
               <a:rPr lang="en-US" sz="2200" dirty="0">
                 <a:solidFill>
-                  <a:srgbClr val="1F2937"/>
+                  <a:srgbClr val="111111"/>
                 </a:solidFill>
                 <a:latin typeface="Pretendard" pitchFamily="34" charset="0"/>
                 <a:ea typeface="Pretendard" pitchFamily="34" charset="-122"/>
@@ -23084,7 +23084,7 @@
             <a:r>
               <a:rPr lang="en-US" sz="2200" dirty="0">
                 <a:solidFill>
-                  <a:srgbClr val="1F2937"/>
+                  <a:srgbClr val="111111"/>
                 </a:solidFill>
                 <a:latin typeface="Pretendard" pitchFamily="34" charset="0"/>
                 <a:ea typeface="Pretendard" pitchFamily="34" charset="-122"/>
@@ -23200,7 +23200,7 @@
             <a:r>
               <a:rPr lang="en-US" sz="2200" dirty="0">
                 <a:solidFill>
-                  <a:srgbClr val="1F2937"/>
+                  <a:srgbClr val="111111"/>
                 </a:solidFill>
                 <a:latin typeface="Pretendard" pitchFamily="34" charset="0"/>
                 <a:ea typeface="Pretendard" pitchFamily="34" charset="-122"/>
@@ -23526,7 +23526,7 @@
             <a:r>
               <a:rPr lang="en-US" sz="3400" b="1" dirty="0">
                 <a:solidFill>
-                  <a:srgbClr val="1F2937"/>
+                  <a:srgbClr val="111111"/>
                 </a:solidFill>
                 <a:latin typeface="Pretendard" pitchFamily="34" charset="0"/>
                 <a:ea typeface="Pretendard" pitchFamily="34" charset="-122"/>
@@ -23585,7 +23585,7 @@
             <a:r>
               <a:rPr lang="en-US" sz="2200" dirty="0">
                 <a:solidFill>
-                  <a:srgbClr val="1F2937"/>
+                  <a:srgbClr val="111111"/>
                 </a:solidFill>
                 <a:latin typeface="Pretendard" pitchFamily="34" charset="0"/>
                 <a:ea typeface="Pretendard" pitchFamily="34" charset="-122"/>
@@ -23644,7 +23644,7 @@
             <a:r>
               <a:rPr lang="en-US" sz="2200" dirty="0">
                 <a:solidFill>
-                  <a:srgbClr val="1F2937"/>
+                  <a:srgbClr val="111111"/>
                 </a:solidFill>
                 <a:latin typeface="Pretendard" pitchFamily="34" charset="0"/>
                 <a:ea typeface="Pretendard" pitchFamily="34" charset="-122"/>
@@ -23970,7 +23970,7 @@
             <a:r>
               <a:rPr lang="en-US" sz="3400" b="1" dirty="0">
                 <a:solidFill>
-                  <a:srgbClr val="1F2937"/>
+                  <a:srgbClr val="111111"/>
                 </a:solidFill>
                 <a:latin typeface="Pretendard" pitchFamily="34" charset="0"/>
                 <a:ea typeface="Pretendard" pitchFamily="34" charset="-122"/>
@@ -24029,7 +24029,7 @@
             <a:r>
               <a:rPr lang="en-US" sz="2200" dirty="0">
                 <a:solidFill>
-                  <a:srgbClr val="1F2937"/>
+                  <a:srgbClr val="111111"/>
                 </a:solidFill>
                 <a:latin typeface="Pretendard" pitchFamily="34" charset="0"/>
                 <a:ea typeface="Pretendard" pitchFamily="34" charset="-122"/>
@@ -24088,7 +24088,7 @@
             <a:r>
               <a:rPr lang="en-US" sz="2200" dirty="0">
                 <a:solidFill>
-                  <a:srgbClr val="1F2937"/>
+                  <a:srgbClr val="111111"/>
                 </a:solidFill>
                 <a:latin typeface="Pretendard" pitchFamily="34" charset="0"/>
                 <a:ea typeface="Pretendard" pitchFamily="34" charset="-122"/>
@@ -24113,13 +24113,13 @@
   <a:themeElements>
     <a:clrScheme name="Office">
       <a:dk1>
-        <a:srgbClr val="1F2937"/>
+        <a:srgbClr val="111111"/>
       </a:dk1>
       <a:lt1>
         <a:srgbClr val="F4F6F8"/>
       </a:lt1>
       <a:dk2>
-        <a:srgbClr val="4B5563"/>
+        <a:srgbClr val="8E8E8E"/>
       </a:dk2>
       <a:lt2>
         <a:srgbClr val="FDFDFE"/>
@@ -24134,13 +24134,13 @@
         <a:srgbClr val="6B7280"/>
       </a:accent3>
       <a:accent4>
-        <a:srgbClr val="4B5563"/>
+        <a:srgbClr val="8E8E8E"/>
       </a:accent4>
       <a:accent5>
         <a:srgbClr val="AEB7C4"/>
       </a:accent5>
       <a:accent6>
-        <a:srgbClr val="1F2937"/>
+        <a:srgbClr val="111111"/>
       </a:accent6>
       <a:hlink>
         <a:srgbClr val="6B7280"/>

--- a/docs/theme-preview/pptx/skeuomorphism.pptx
+++ b/docs/theme-preview/pptx/skeuomorphism.pptx
@@ -3602,6 +3602,42 @@
         </p:nvSpPr>
         <p:spPr>
           <a:xfrm>
+            <a:off x="457200" y="402336"/>
+            <a:ext cx="11277295" cy="6053328"/>
+          </a:xfrm>
+          <a:prstGeom prst="roundRect">
+            <a:avLst>
+              <a:gd name="adj" fmla="val 2115"/>
+            </a:avLst>
+          </a:prstGeom>
+          <a:solidFill>
+            <a:srgbClr val="E6EAF0"/>
+          </a:solidFill>
+          <a:ln w="12700">
+            <a:solidFill>
+              <a:srgbClr val="8793A3">
+                <a:alpha val="84000"/>
+              </a:srgbClr>
+            </a:solidFill>
+            <a:prstDash val="solid"/>
+          </a:ln>
+          <a:effectLst>
+            <a:outerShdw sx="100000" sy="100000" kx="0" ky="0" algn="bl" rotWithShape="0" blurRad="13970" dist="50800" dir="2700000">
+              <a:srgbClr val="475569">
+                <a:alpha val="18000"/>
+              </a:srgbClr>
+            </a:outerShdw>
+          </a:effectLst>
+        </p:spPr>
+      </p:sp>
+      <p:sp>
+        <p:nvSpPr>
+          <p:cNvPr id="3" name="Shape 1"/>
+          <p:cNvSpPr/>
+          <p:nvPr/>
+        </p:nvSpPr>
+        <p:spPr>
+          <a:xfrm>
             <a:off x="530352" y="457200"/>
             <a:ext cx="11130991" cy="5943600"/>
           </a:xfrm>
@@ -3632,7 +3668,7 @@
       </p:sp>
       <p:sp>
         <p:nvSpPr>
-          <p:cNvPr id="3" name="Shape 1"/>
+          <p:cNvPr id="4" name="Shape 2"/>
           <p:cNvSpPr/>
           <p:nvPr/>
         </p:nvSpPr>
@@ -3655,7 +3691,63 @@
       </p:sp>
       <p:sp>
         <p:nvSpPr>
-          <p:cNvPr id="4" name="Shape 2"/>
+          <p:cNvPr id="5" name="Shape 3"/>
+          <p:cNvSpPr/>
+          <p:nvPr/>
+        </p:nvSpPr>
+        <p:spPr>
+          <a:xfrm>
+            <a:off x="658368" y="6217920"/>
+            <a:ext cx="10874959" cy="0"/>
+          </a:xfrm>
+          <a:prstGeom prst="line">
+            <a:avLst/>
+          </a:prstGeom>
+          <a:noFill/>
+          <a:ln w="12700">
+            <a:solidFill>
+              <a:srgbClr val="94A3B8">
+                <a:alpha val="66000"/>
+              </a:srgbClr>
+            </a:solidFill>
+            <a:prstDash val="solid"/>
+          </a:ln>
+        </p:spPr>
+      </p:sp>
+      <p:sp>
+        <p:nvSpPr>
+          <p:cNvPr id="6" name="Shape 4"/>
+          <p:cNvSpPr/>
+          <p:nvPr/>
+        </p:nvSpPr>
+        <p:spPr>
+          <a:xfrm>
+            <a:off x="10600639" y="512064"/>
+            <a:ext cx="877824" cy="201168"/>
+          </a:xfrm>
+          <a:prstGeom prst="roundRect">
+            <a:avLst>
+              <a:gd name="adj" fmla="val 18182"/>
+            </a:avLst>
+          </a:prstGeom>
+          <a:solidFill>
+            <a:srgbClr val="D7DDE6">
+              <a:alpha val="92000"/>
+            </a:srgbClr>
+          </a:solidFill>
+          <a:ln w="12700">
+            <a:solidFill>
+              <a:srgbClr val="FFFFFF">
+                <a:alpha val="82000"/>
+              </a:srgbClr>
+            </a:solidFill>
+            <a:prstDash val="solid"/>
+          </a:ln>
+        </p:spPr>
+      </p:sp>
+      <p:sp>
+        <p:nvSpPr>
+          <p:cNvPr id="7" name="Shape 5"/>
           <p:cNvSpPr/>
           <p:nvPr/>
         </p:nvSpPr>
@@ -3684,7 +3776,7 @@
       </p:sp>
       <p:sp>
         <p:nvSpPr>
-          <p:cNvPr id="5" name="Shape 3"/>
+          <p:cNvPr id="8" name="Shape 6"/>
           <p:cNvSpPr/>
           <p:nvPr/>
         </p:nvSpPr>
@@ -3713,7 +3805,7 @@
       </p:sp>
       <p:sp>
         <p:nvSpPr>
-          <p:cNvPr id="6" name="Shape 4"/>
+          <p:cNvPr id="9" name="Shape 7"/>
           <p:cNvSpPr/>
           <p:nvPr/>
         </p:nvSpPr>
@@ -3740,7 +3832,7 @@
       </p:sp>
       <p:sp>
         <p:nvSpPr>
-          <p:cNvPr id="7" name="Shape 5"/>
+          <p:cNvPr id="10" name="Shape 8"/>
           <p:cNvSpPr/>
           <p:nvPr/>
         </p:nvSpPr>
@@ -3767,7 +3859,7 @@
       </p:sp>
       <p:sp>
         <p:nvSpPr>
-          <p:cNvPr id="8" name="Shape 6"/>
+          <p:cNvPr id="11" name="Shape 9"/>
           <p:cNvSpPr/>
           <p:nvPr/>
         </p:nvSpPr>
@@ -3794,7 +3886,7 @@
       </p:sp>
       <p:sp>
         <p:nvSpPr>
-          <p:cNvPr id="9" name="Shape 7"/>
+          <p:cNvPr id="12" name="Shape 10"/>
           <p:cNvSpPr/>
           <p:nvPr/>
         </p:nvSpPr>
@@ -3821,7 +3913,7 @@
       </p:sp>
       <p:sp>
         <p:nvSpPr>
-          <p:cNvPr id="10" name="Shape 8"/>
+          <p:cNvPr id="13" name="Shape 11"/>
           <p:cNvSpPr/>
           <p:nvPr/>
         </p:nvSpPr>
@@ -3850,7 +3942,7 @@
       </p:sp>
       <p:sp>
         <p:nvSpPr>
-          <p:cNvPr id="11" name="mdpr:mdpr-design-grammar-b3a462:title:__title:mdpr-design-grammar-b3a462"/>
+          <p:cNvPr id="14" name="mdpr:mdpr-design-grammar-b3a462:title:__title:mdpr-design-grammar-b3a462"/>
           <p:cNvSpPr txBox="1"/>
           <p:nvPr/>
         </p:nvSpPr>
@@ -3930,6 +4022,42 @@
         </p:nvSpPr>
         <p:spPr>
           <a:xfrm>
+            <a:off x="457200" y="402336"/>
+            <a:ext cx="11277295" cy="6053328"/>
+          </a:xfrm>
+          <a:prstGeom prst="roundRect">
+            <a:avLst>
+              <a:gd name="adj" fmla="val 2115"/>
+            </a:avLst>
+          </a:prstGeom>
+          <a:solidFill>
+            <a:srgbClr val="E6EAF0"/>
+          </a:solidFill>
+          <a:ln w="12700">
+            <a:solidFill>
+              <a:srgbClr val="8793A3">
+                <a:alpha val="84000"/>
+              </a:srgbClr>
+            </a:solidFill>
+            <a:prstDash val="solid"/>
+          </a:ln>
+          <a:effectLst>
+            <a:outerShdw sx="100000" sy="100000" kx="0" ky="0" algn="bl" rotWithShape="0" blurRad="13970" dist="50800" dir="2700000">
+              <a:srgbClr val="475569">
+                <a:alpha val="18000"/>
+              </a:srgbClr>
+            </a:outerShdw>
+          </a:effectLst>
+        </p:spPr>
+      </p:sp>
+      <p:sp>
+        <p:nvSpPr>
+          <p:cNvPr id="3" name="Shape 1"/>
+          <p:cNvSpPr/>
+          <p:nvPr/>
+        </p:nvSpPr>
+        <p:spPr>
+          <a:xfrm>
             <a:off x="530352" y="457200"/>
             <a:ext cx="11130991" cy="5943600"/>
           </a:xfrm>
@@ -3960,7 +4088,7 @@
       </p:sp>
       <p:sp>
         <p:nvSpPr>
-          <p:cNvPr id="3" name="Shape 1"/>
+          <p:cNvPr id="4" name="Shape 2"/>
           <p:cNvSpPr/>
           <p:nvPr/>
         </p:nvSpPr>
@@ -3983,7 +4111,63 @@
       </p:sp>
       <p:sp>
         <p:nvSpPr>
-          <p:cNvPr id="4" name="Shape 2"/>
+          <p:cNvPr id="5" name="Shape 3"/>
+          <p:cNvSpPr/>
+          <p:nvPr/>
+        </p:nvSpPr>
+        <p:spPr>
+          <a:xfrm>
+            <a:off x="658368" y="6217920"/>
+            <a:ext cx="10874959" cy="0"/>
+          </a:xfrm>
+          <a:prstGeom prst="line">
+            <a:avLst/>
+          </a:prstGeom>
+          <a:noFill/>
+          <a:ln w="12700">
+            <a:solidFill>
+              <a:srgbClr val="94A3B8">
+                <a:alpha val="66000"/>
+              </a:srgbClr>
+            </a:solidFill>
+            <a:prstDash val="solid"/>
+          </a:ln>
+        </p:spPr>
+      </p:sp>
+      <p:sp>
+        <p:nvSpPr>
+          <p:cNvPr id="6" name="Shape 4"/>
+          <p:cNvSpPr/>
+          <p:nvPr/>
+        </p:nvSpPr>
+        <p:spPr>
+          <a:xfrm>
+            <a:off x="10600639" y="512064"/>
+            <a:ext cx="877824" cy="201168"/>
+          </a:xfrm>
+          <a:prstGeom prst="roundRect">
+            <a:avLst>
+              <a:gd name="adj" fmla="val 18182"/>
+            </a:avLst>
+          </a:prstGeom>
+          <a:solidFill>
+            <a:srgbClr val="D7DDE6">
+              <a:alpha val="92000"/>
+            </a:srgbClr>
+          </a:solidFill>
+          <a:ln w="12700">
+            <a:solidFill>
+              <a:srgbClr val="FFFFFF">
+                <a:alpha val="82000"/>
+              </a:srgbClr>
+            </a:solidFill>
+            <a:prstDash val="solid"/>
+          </a:ln>
+        </p:spPr>
+      </p:sp>
+      <p:sp>
+        <p:nvSpPr>
+          <p:cNvPr id="7" name="Shape 5"/>
           <p:cNvSpPr/>
           <p:nvPr/>
         </p:nvSpPr>
@@ -4012,7 +4196,7 @@
       </p:sp>
       <p:sp>
         <p:nvSpPr>
-          <p:cNvPr id="5" name="Shape 3"/>
+          <p:cNvPr id="8" name="Shape 6"/>
           <p:cNvSpPr/>
           <p:nvPr/>
         </p:nvSpPr>
@@ -4041,7 +4225,7 @@
       </p:sp>
       <p:sp>
         <p:nvSpPr>
-          <p:cNvPr id="6" name="Shape 4"/>
+          <p:cNvPr id="9" name="Shape 7"/>
           <p:cNvSpPr/>
           <p:nvPr/>
         </p:nvSpPr>
@@ -4068,7 +4252,7 @@
       </p:sp>
       <p:sp>
         <p:nvSpPr>
-          <p:cNvPr id="7" name="Shape 5"/>
+          <p:cNvPr id="10" name="Shape 8"/>
           <p:cNvSpPr/>
           <p:nvPr/>
         </p:nvSpPr>
@@ -4095,7 +4279,7 @@
       </p:sp>
       <p:sp>
         <p:nvSpPr>
-          <p:cNvPr id="8" name="Shape 6"/>
+          <p:cNvPr id="11" name="Shape 9"/>
           <p:cNvSpPr/>
           <p:nvPr/>
         </p:nvSpPr>
@@ -4122,7 +4306,7 @@
       </p:sp>
       <p:sp>
         <p:nvSpPr>
-          <p:cNvPr id="9" name="Shape 7"/>
+          <p:cNvPr id="12" name="Shape 10"/>
           <p:cNvSpPr/>
           <p:nvPr/>
         </p:nvSpPr>
@@ -4149,7 +4333,7 @@
       </p:sp>
       <p:sp>
         <p:nvSpPr>
-          <p:cNvPr id="10" name="Shape 8"/>
+          <p:cNvPr id="13" name="Shape 11"/>
           <p:cNvSpPr/>
           <p:nvPr/>
         </p:nvSpPr>
@@ -4176,7 +4360,7 @@
       </p:sp>
       <p:sp>
         <p:nvSpPr>
-          <p:cNvPr id="11" name="mdpr:2-2-a9df10:title:__title:2-2-a9df10"/>
+          <p:cNvPr id="14" name="mdpr:2-2-a9df10:title:__title:2-2-a9df10"/>
           <p:cNvSpPr txBox="1"/>
           <p:nvPr/>
         </p:nvSpPr>
@@ -4218,7 +4402,7 @@
       </p:sp>
       <p:sp>
         <p:nvSpPr>
-          <p:cNvPr id="12" name="mdpr:2-2-a9df10:left:block-10-chunk-2"/>
+          <p:cNvPr id="15" name="mdpr:2-2-a9df10:left:block-10-chunk-2"/>
           <p:cNvSpPr txBox="1"/>
           <p:nvPr/>
         </p:nvSpPr>
@@ -4277,7 +4461,7 @@
       </p:sp>
       <p:sp>
         <p:nvSpPr>
-          <p:cNvPr id="13" name="mdpr:2-2-a9df10:right:block-10-chunk-2"/>
+          <p:cNvPr id="16" name="mdpr:2-2-a9df10:right:block-10-chunk-2"/>
           <p:cNvSpPr txBox="1"/>
           <p:nvPr/>
         </p:nvSpPr>
@@ -4374,6 +4558,42 @@
         </p:nvSpPr>
         <p:spPr>
           <a:xfrm>
+            <a:off x="457200" y="402336"/>
+            <a:ext cx="11277295" cy="6053328"/>
+          </a:xfrm>
+          <a:prstGeom prst="roundRect">
+            <a:avLst>
+              <a:gd name="adj" fmla="val 2115"/>
+            </a:avLst>
+          </a:prstGeom>
+          <a:solidFill>
+            <a:srgbClr val="E6EAF0"/>
+          </a:solidFill>
+          <a:ln w="12700">
+            <a:solidFill>
+              <a:srgbClr val="8793A3">
+                <a:alpha val="84000"/>
+              </a:srgbClr>
+            </a:solidFill>
+            <a:prstDash val="solid"/>
+          </a:ln>
+          <a:effectLst>
+            <a:outerShdw sx="100000" sy="100000" kx="0" ky="0" algn="bl" rotWithShape="0" blurRad="13970" dist="50800" dir="2700000">
+              <a:srgbClr val="475569">
+                <a:alpha val="18000"/>
+              </a:srgbClr>
+            </a:outerShdw>
+          </a:effectLst>
+        </p:spPr>
+      </p:sp>
+      <p:sp>
+        <p:nvSpPr>
+          <p:cNvPr id="3" name="Shape 1"/>
+          <p:cNvSpPr/>
+          <p:nvPr/>
+        </p:nvSpPr>
+        <p:spPr>
+          <a:xfrm>
             <a:off x="530352" y="457200"/>
             <a:ext cx="11130991" cy="5943600"/>
           </a:xfrm>
@@ -4404,7 +4624,7 @@
       </p:sp>
       <p:sp>
         <p:nvSpPr>
-          <p:cNvPr id="3" name="Shape 1"/>
+          <p:cNvPr id="4" name="Shape 2"/>
           <p:cNvSpPr/>
           <p:nvPr/>
         </p:nvSpPr>
@@ -4427,7 +4647,63 @@
       </p:sp>
       <p:sp>
         <p:nvSpPr>
-          <p:cNvPr id="4" name="Shape 2"/>
+          <p:cNvPr id="5" name="Shape 3"/>
+          <p:cNvSpPr/>
+          <p:nvPr/>
+        </p:nvSpPr>
+        <p:spPr>
+          <a:xfrm>
+            <a:off x="658368" y="6217920"/>
+            <a:ext cx="10874959" cy="0"/>
+          </a:xfrm>
+          <a:prstGeom prst="line">
+            <a:avLst/>
+          </a:prstGeom>
+          <a:noFill/>
+          <a:ln w="12700">
+            <a:solidFill>
+              <a:srgbClr val="94A3B8">
+                <a:alpha val="66000"/>
+              </a:srgbClr>
+            </a:solidFill>
+            <a:prstDash val="solid"/>
+          </a:ln>
+        </p:spPr>
+      </p:sp>
+      <p:sp>
+        <p:nvSpPr>
+          <p:cNvPr id="6" name="Shape 4"/>
+          <p:cNvSpPr/>
+          <p:nvPr/>
+        </p:nvSpPr>
+        <p:spPr>
+          <a:xfrm>
+            <a:off x="10600639" y="512064"/>
+            <a:ext cx="877824" cy="201168"/>
+          </a:xfrm>
+          <a:prstGeom prst="roundRect">
+            <a:avLst>
+              <a:gd name="adj" fmla="val 18182"/>
+            </a:avLst>
+          </a:prstGeom>
+          <a:solidFill>
+            <a:srgbClr val="D7DDE6">
+              <a:alpha val="92000"/>
+            </a:srgbClr>
+          </a:solidFill>
+          <a:ln w="12700">
+            <a:solidFill>
+              <a:srgbClr val="FFFFFF">
+                <a:alpha val="82000"/>
+              </a:srgbClr>
+            </a:solidFill>
+            <a:prstDash val="solid"/>
+          </a:ln>
+        </p:spPr>
+      </p:sp>
+      <p:sp>
+        <p:nvSpPr>
+          <p:cNvPr id="7" name="Shape 5"/>
           <p:cNvSpPr/>
           <p:nvPr/>
         </p:nvSpPr>
@@ -4456,7 +4732,7 @@
       </p:sp>
       <p:sp>
         <p:nvSpPr>
-          <p:cNvPr id="5" name="Shape 3"/>
+          <p:cNvPr id="8" name="Shape 6"/>
           <p:cNvSpPr/>
           <p:nvPr/>
         </p:nvSpPr>
@@ -4485,7 +4761,7 @@
       </p:sp>
       <p:sp>
         <p:nvSpPr>
-          <p:cNvPr id="6" name="Shape 4"/>
+          <p:cNvPr id="9" name="Shape 7"/>
           <p:cNvSpPr/>
           <p:nvPr/>
         </p:nvSpPr>
@@ -4512,7 +4788,7 @@
       </p:sp>
       <p:sp>
         <p:nvSpPr>
-          <p:cNvPr id="7" name="Shape 5"/>
+          <p:cNvPr id="10" name="Shape 8"/>
           <p:cNvSpPr/>
           <p:nvPr/>
         </p:nvSpPr>
@@ -4539,7 +4815,7 @@
       </p:sp>
       <p:sp>
         <p:nvSpPr>
-          <p:cNvPr id="8" name="Shape 6"/>
+          <p:cNvPr id="11" name="Shape 9"/>
           <p:cNvSpPr/>
           <p:nvPr/>
         </p:nvSpPr>
@@ -4566,7 +4842,7 @@
       </p:sp>
       <p:sp>
         <p:nvSpPr>
-          <p:cNvPr id="9" name="mdpr:pipeline-diagram-51792c:title:__title:pipeline-diagram-51792c"/>
+          <p:cNvPr id="12" name="mdpr:pipeline-diagram-51792c:title:__title:pipeline-diagram-51792c"/>
           <p:cNvSpPr txBox="1"/>
           <p:nvPr/>
         </p:nvSpPr>
@@ -4608,7 +4884,7 @@
       </p:sp>
       <p:sp>
         <p:nvSpPr>
-          <p:cNvPr id="10" name="Shape 8"/>
+          <p:cNvPr id="13" name="Shape 11"/>
           <p:cNvSpPr/>
           <p:nvPr/>
         </p:nvSpPr>
@@ -4632,7 +4908,7 @@
       </p:sp>
       <p:sp>
         <p:nvSpPr>
-          <p:cNvPr id="11" name="Shape 9"/>
+          <p:cNvPr id="14" name="Shape 12"/>
           <p:cNvSpPr/>
           <p:nvPr/>
         </p:nvSpPr>
@@ -4656,7 +4932,7 @@
       </p:sp>
       <p:sp>
         <p:nvSpPr>
-          <p:cNvPr id="12" name="Shape 10"/>
+          <p:cNvPr id="15" name="Shape 13"/>
           <p:cNvSpPr/>
           <p:nvPr/>
         </p:nvSpPr>
@@ -4680,7 +4956,7 @@
       </p:sp>
       <p:sp>
         <p:nvSpPr>
-          <p:cNvPr id="13" name="Shape 11"/>
+          <p:cNvPr id="16" name="Shape 14"/>
           <p:cNvSpPr/>
           <p:nvPr/>
         </p:nvSpPr>
@@ -4704,7 +4980,7 @@
       </p:sp>
       <p:sp>
         <p:nvSpPr>
-          <p:cNvPr id="14" name="Shape 12"/>
+          <p:cNvPr id="17" name="Shape 15"/>
           <p:cNvSpPr/>
           <p:nvPr/>
         </p:nvSpPr>
@@ -4728,7 +5004,7 @@
       </p:sp>
       <p:sp>
         <p:nvSpPr>
-          <p:cNvPr id="15" name="Shape 13"/>
+          <p:cNvPr id="18" name="Shape 16"/>
           <p:cNvSpPr/>
           <p:nvPr/>
         </p:nvSpPr>
@@ -4762,7 +5038,7 @@
       </p:sp>
       <p:sp>
         <p:nvSpPr>
-          <p:cNvPr id="16" name="Shape 14"/>
+          <p:cNvPr id="19" name="Shape 17"/>
           <p:cNvSpPr/>
           <p:nvPr/>
         </p:nvSpPr>
@@ -4789,7 +5065,7 @@
       </p:sp>
       <p:sp>
         <p:nvSpPr>
-          <p:cNvPr id="17" name="Shape 15"/>
+          <p:cNvPr id="20" name="Shape 18"/>
           <p:cNvSpPr/>
           <p:nvPr/>
         </p:nvSpPr>
@@ -4816,7 +5092,7 @@
       </p:sp>
       <p:sp>
         <p:nvSpPr>
-          <p:cNvPr id="18" name="Text 16"/>
+          <p:cNvPr id="21" name="Text 19"/>
           <p:cNvSpPr txBox="1"/>
           <p:nvPr/>
         </p:nvSpPr>
@@ -4860,7 +5136,7 @@
       </p:sp>
       <p:sp>
         <p:nvSpPr>
-          <p:cNvPr id="19" name="Text 17"/>
+          <p:cNvPr id="22" name="Text 20"/>
           <p:cNvSpPr txBox="1"/>
           <p:nvPr/>
         </p:nvSpPr>
@@ -4904,7 +5180,7 @@
       </p:sp>
       <p:sp>
         <p:nvSpPr>
-          <p:cNvPr id="20" name="Shape 18"/>
+          <p:cNvPr id="23" name="Shape 21"/>
           <p:cNvSpPr/>
           <p:nvPr/>
         </p:nvSpPr>
@@ -4938,7 +5214,7 @@
       </p:sp>
       <p:sp>
         <p:nvSpPr>
-          <p:cNvPr id="21" name="Shape 19"/>
+          <p:cNvPr id="24" name="Shape 22"/>
           <p:cNvSpPr/>
           <p:nvPr/>
         </p:nvSpPr>
@@ -4965,7 +5241,7 @@
       </p:sp>
       <p:sp>
         <p:nvSpPr>
-          <p:cNvPr id="22" name="Shape 20"/>
+          <p:cNvPr id="25" name="Shape 23"/>
           <p:cNvSpPr/>
           <p:nvPr/>
         </p:nvSpPr>
@@ -4992,7 +5268,7 @@
       </p:sp>
       <p:sp>
         <p:nvSpPr>
-          <p:cNvPr id="23" name="Text 21"/>
+          <p:cNvPr id="26" name="Text 24"/>
           <p:cNvSpPr txBox="1"/>
           <p:nvPr/>
         </p:nvSpPr>
@@ -5036,7 +5312,7 @@
       </p:sp>
       <p:sp>
         <p:nvSpPr>
-          <p:cNvPr id="24" name="Text 22"/>
+          <p:cNvPr id="27" name="Text 25"/>
           <p:cNvSpPr txBox="1"/>
           <p:nvPr/>
         </p:nvSpPr>
@@ -5080,7 +5356,7 @@
       </p:sp>
       <p:sp>
         <p:nvSpPr>
-          <p:cNvPr id="25" name="Shape 23"/>
+          <p:cNvPr id="28" name="Shape 26"/>
           <p:cNvSpPr/>
           <p:nvPr/>
         </p:nvSpPr>
@@ -5114,7 +5390,7 @@
       </p:sp>
       <p:sp>
         <p:nvSpPr>
-          <p:cNvPr id="26" name="Shape 24"/>
+          <p:cNvPr id="29" name="Shape 27"/>
           <p:cNvSpPr/>
           <p:nvPr/>
         </p:nvSpPr>
@@ -5141,7 +5417,7 @@
       </p:sp>
       <p:sp>
         <p:nvSpPr>
-          <p:cNvPr id="27" name="Shape 25"/>
+          <p:cNvPr id="30" name="Shape 28"/>
           <p:cNvSpPr/>
           <p:nvPr/>
         </p:nvSpPr>
@@ -5168,7 +5444,7 @@
       </p:sp>
       <p:sp>
         <p:nvSpPr>
-          <p:cNvPr id="28" name="Text 26"/>
+          <p:cNvPr id="31" name="Text 29"/>
           <p:cNvSpPr txBox="1"/>
           <p:nvPr/>
         </p:nvSpPr>
@@ -5212,7 +5488,7 @@
       </p:sp>
       <p:sp>
         <p:nvSpPr>
-          <p:cNvPr id="29" name="Text 27"/>
+          <p:cNvPr id="32" name="Text 30"/>
           <p:cNvSpPr txBox="1"/>
           <p:nvPr/>
         </p:nvSpPr>
@@ -5256,7 +5532,7 @@
       </p:sp>
       <p:sp>
         <p:nvSpPr>
-          <p:cNvPr id="30" name="Shape 28"/>
+          <p:cNvPr id="33" name="Shape 31"/>
           <p:cNvSpPr/>
           <p:nvPr/>
         </p:nvSpPr>
@@ -5290,7 +5566,7 @@
       </p:sp>
       <p:sp>
         <p:nvSpPr>
-          <p:cNvPr id="31" name="Shape 29"/>
+          <p:cNvPr id="34" name="Shape 32"/>
           <p:cNvSpPr/>
           <p:nvPr/>
         </p:nvSpPr>
@@ -5317,7 +5593,7 @@
       </p:sp>
       <p:sp>
         <p:nvSpPr>
-          <p:cNvPr id="32" name="Shape 30"/>
+          <p:cNvPr id="35" name="Shape 33"/>
           <p:cNvSpPr/>
           <p:nvPr/>
         </p:nvSpPr>
@@ -5344,7 +5620,7 @@
       </p:sp>
       <p:sp>
         <p:nvSpPr>
-          <p:cNvPr id="33" name="Text 31"/>
+          <p:cNvPr id="36" name="Text 34"/>
           <p:cNvSpPr txBox="1"/>
           <p:nvPr/>
         </p:nvSpPr>
@@ -5388,7 +5664,7 @@
       </p:sp>
       <p:sp>
         <p:nvSpPr>
-          <p:cNvPr id="34" name="Text 32"/>
+          <p:cNvPr id="37" name="Text 35"/>
           <p:cNvSpPr txBox="1"/>
           <p:nvPr/>
         </p:nvSpPr>
@@ -5432,7 +5708,7 @@
       </p:sp>
       <p:sp>
         <p:nvSpPr>
-          <p:cNvPr id="35" name="Shape 33"/>
+          <p:cNvPr id="38" name="Shape 36"/>
           <p:cNvSpPr/>
           <p:nvPr/>
         </p:nvSpPr>
@@ -5466,7 +5742,7 @@
       </p:sp>
       <p:sp>
         <p:nvSpPr>
-          <p:cNvPr id="36" name="Shape 34"/>
+          <p:cNvPr id="39" name="Shape 37"/>
           <p:cNvSpPr/>
           <p:nvPr/>
         </p:nvSpPr>
@@ -5493,7 +5769,7 @@
       </p:sp>
       <p:sp>
         <p:nvSpPr>
-          <p:cNvPr id="37" name="Shape 35"/>
+          <p:cNvPr id="40" name="Shape 38"/>
           <p:cNvSpPr/>
           <p:nvPr/>
         </p:nvSpPr>
@@ -5520,7 +5796,7 @@
       </p:sp>
       <p:sp>
         <p:nvSpPr>
-          <p:cNvPr id="38" name="Text 36"/>
+          <p:cNvPr id="41" name="Text 39"/>
           <p:cNvSpPr txBox="1"/>
           <p:nvPr/>
         </p:nvSpPr>
@@ -5564,7 +5840,7 @@
       </p:sp>
       <p:sp>
         <p:nvSpPr>
-          <p:cNvPr id="39" name="Text 37"/>
+          <p:cNvPr id="42" name="Text 40"/>
           <p:cNvSpPr txBox="1"/>
           <p:nvPr/>
         </p:nvSpPr>
@@ -5608,7 +5884,7 @@
       </p:sp>
       <p:sp>
         <p:nvSpPr>
-          <p:cNvPr id="40" name="Shape 38"/>
+          <p:cNvPr id="43" name="Shape 41"/>
           <p:cNvSpPr/>
           <p:nvPr/>
         </p:nvSpPr>
@@ -5642,7 +5918,7 @@
       </p:sp>
       <p:sp>
         <p:nvSpPr>
-          <p:cNvPr id="41" name="Shape 39"/>
+          <p:cNvPr id="44" name="Shape 42"/>
           <p:cNvSpPr/>
           <p:nvPr/>
         </p:nvSpPr>
@@ -5669,7 +5945,7 @@
       </p:sp>
       <p:sp>
         <p:nvSpPr>
-          <p:cNvPr id="42" name="Shape 40"/>
+          <p:cNvPr id="45" name="Shape 43"/>
           <p:cNvSpPr/>
           <p:nvPr/>
         </p:nvSpPr>
@@ -5696,7 +5972,7 @@
       </p:sp>
       <p:sp>
         <p:nvSpPr>
-          <p:cNvPr id="43" name="Text 41"/>
+          <p:cNvPr id="46" name="Text 44"/>
           <p:cNvSpPr txBox="1"/>
           <p:nvPr/>
         </p:nvSpPr>
@@ -5740,7 +6016,7 @@
       </p:sp>
       <p:sp>
         <p:nvSpPr>
-          <p:cNvPr id="44" name="Text 42"/>
+          <p:cNvPr id="47" name="Text 45"/>
           <p:cNvSpPr txBox="1"/>
           <p:nvPr/>
         </p:nvSpPr>
@@ -5822,6 +6098,42 @@
         </p:nvSpPr>
         <p:spPr>
           <a:xfrm>
+            <a:off x="457200" y="402336"/>
+            <a:ext cx="11277295" cy="6053328"/>
+          </a:xfrm>
+          <a:prstGeom prst="roundRect">
+            <a:avLst>
+              <a:gd name="adj" fmla="val 2115"/>
+            </a:avLst>
+          </a:prstGeom>
+          <a:solidFill>
+            <a:srgbClr val="E6EAF0"/>
+          </a:solidFill>
+          <a:ln w="12700">
+            <a:solidFill>
+              <a:srgbClr val="8793A3">
+                <a:alpha val="84000"/>
+              </a:srgbClr>
+            </a:solidFill>
+            <a:prstDash val="solid"/>
+          </a:ln>
+          <a:effectLst>
+            <a:outerShdw sx="100000" sy="100000" kx="0" ky="0" algn="bl" rotWithShape="0" blurRad="13970" dist="50800" dir="2700000">
+              <a:srgbClr val="475569">
+                <a:alpha val="18000"/>
+              </a:srgbClr>
+            </a:outerShdw>
+          </a:effectLst>
+        </p:spPr>
+      </p:sp>
+      <p:sp>
+        <p:nvSpPr>
+          <p:cNvPr id="3" name="Shape 1"/>
+          <p:cNvSpPr/>
+          <p:nvPr/>
+        </p:nvSpPr>
+        <p:spPr>
+          <a:xfrm>
             <a:off x="530352" y="457200"/>
             <a:ext cx="11130991" cy="5943600"/>
           </a:xfrm>
@@ -5852,7 +6164,7 @@
       </p:sp>
       <p:sp>
         <p:nvSpPr>
-          <p:cNvPr id="3" name="Shape 1"/>
+          <p:cNvPr id="4" name="Shape 2"/>
           <p:cNvSpPr/>
           <p:nvPr/>
         </p:nvSpPr>
@@ -5875,7 +6187,63 @@
       </p:sp>
       <p:sp>
         <p:nvSpPr>
-          <p:cNvPr id="4" name="Shape 2"/>
+          <p:cNvPr id="5" name="Shape 3"/>
+          <p:cNvSpPr/>
+          <p:nvPr/>
+        </p:nvSpPr>
+        <p:spPr>
+          <a:xfrm>
+            <a:off x="658368" y="6217920"/>
+            <a:ext cx="10874959" cy="0"/>
+          </a:xfrm>
+          <a:prstGeom prst="line">
+            <a:avLst/>
+          </a:prstGeom>
+          <a:noFill/>
+          <a:ln w="12700">
+            <a:solidFill>
+              <a:srgbClr val="94A3B8">
+                <a:alpha val="66000"/>
+              </a:srgbClr>
+            </a:solidFill>
+            <a:prstDash val="solid"/>
+          </a:ln>
+        </p:spPr>
+      </p:sp>
+      <p:sp>
+        <p:nvSpPr>
+          <p:cNvPr id="6" name="Shape 4"/>
+          <p:cNvSpPr/>
+          <p:nvPr/>
+        </p:nvSpPr>
+        <p:spPr>
+          <a:xfrm>
+            <a:off x="10600639" y="512064"/>
+            <a:ext cx="877824" cy="201168"/>
+          </a:xfrm>
+          <a:prstGeom prst="roundRect">
+            <a:avLst>
+              <a:gd name="adj" fmla="val 18182"/>
+            </a:avLst>
+          </a:prstGeom>
+          <a:solidFill>
+            <a:srgbClr val="D7DDE6">
+              <a:alpha val="92000"/>
+            </a:srgbClr>
+          </a:solidFill>
+          <a:ln w="12700">
+            <a:solidFill>
+              <a:srgbClr val="FFFFFF">
+                <a:alpha val="82000"/>
+              </a:srgbClr>
+            </a:solidFill>
+            <a:prstDash val="solid"/>
+          </a:ln>
+        </p:spPr>
+      </p:sp>
+      <p:sp>
+        <p:nvSpPr>
+          <p:cNvPr id="7" name="Shape 5"/>
           <p:cNvSpPr/>
           <p:nvPr/>
         </p:nvSpPr>
@@ -5904,7 +6272,7 @@
       </p:sp>
       <p:sp>
         <p:nvSpPr>
-          <p:cNvPr id="5" name="Shape 3"/>
+          <p:cNvPr id="8" name="Shape 6"/>
           <p:cNvSpPr/>
           <p:nvPr/>
         </p:nvSpPr>
@@ -5933,7 +6301,7 @@
       </p:sp>
       <p:sp>
         <p:nvSpPr>
-          <p:cNvPr id="6" name="Shape 4"/>
+          <p:cNvPr id="9" name="Shape 7"/>
           <p:cNvSpPr/>
           <p:nvPr/>
         </p:nvSpPr>
@@ -5960,7 +6328,7 @@
       </p:sp>
       <p:sp>
         <p:nvSpPr>
-          <p:cNvPr id="7" name="Shape 5"/>
+          <p:cNvPr id="10" name="Shape 8"/>
           <p:cNvSpPr/>
           <p:nvPr/>
         </p:nvSpPr>
@@ -5987,7 +6355,7 @@
       </p:sp>
       <p:sp>
         <p:nvSpPr>
-          <p:cNvPr id="8" name="Shape 6"/>
+          <p:cNvPr id="11" name="Shape 9"/>
           <p:cNvSpPr/>
           <p:nvPr/>
         </p:nvSpPr>
@@ -6014,7 +6382,7 @@
       </p:sp>
       <p:pic>
         <p:nvPicPr>
-          <p:cNvPr id="9" name="Image 0" descr="preencoded.png">    </p:cNvPr>
+          <p:cNvPr id="12" name="Image 0" descr="preencoded.png">    </p:cNvPr>
           <p:cNvPicPr>
             <a:picLocks noChangeAspect="1"/>
           </p:cNvPicPr>
@@ -6044,7 +6412,7 @@
       </p:pic>
       <p:sp>
         <p:nvSpPr>
-          <p:cNvPr id="10" name="Shape 7"/>
+          <p:cNvPr id="13" name="Shape 10"/>
           <p:cNvSpPr/>
           <p:nvPr/>
         </p:nvSpPr>
@@ -6080,7 +6448,7 @@
       </p:sp>
       <p:pic>
         <p:nvPicPr>
-          <p:cNvPr id="11" name="Image 1" descr="preencoded.png">    </p:cNvPr>
+          <p:cNvPr id="14" name="Image 1" descr="preencoded.png">    </p:cNvPr>
           <p:cNvPicPr>
             <a:picLocks noChangeAspect="1"/>
           </p:cNvPicPr>
@@ -6110,7 +6478,7 @@
       </p:pic>
       <p:sp>
         <p:nvSpPr>
-          <p:cNvPr id="12" name="Shape 8"/>
+          <p:cNvPr id="15" name="Shape 11"/>
           <p:cNvSpPr/>
           <p:nvPr/>
         </p:nvSpPr>
@@ -6146,7 +6514,7 @@
       </p:sp>
       <p:pic>
         <p:nvPicPr>
-          <p:cNvPr id="13" name="Image 2" descr="preencoded.png">    </p:cNvPr>
+          <p:cNvPr id="16" name="Image 2" descr="preencoded.png">    </p:cNvPr>
           <p:cNvPicPr>
             <a:picLocks noChangeAspect="1"/>
           </p:cNvPicPr>
@@ -6176,7 +6544,7 @@
       </p:pic>
       <p:sp>
         <p:nvSpPr>
-          <p:cNvPr id="14" name="Shape 9"/>
+          <p:cNvPr id="17" name="Shape 12"/>
           <p:cNvSpPr/>
           <p:nvPr/>
         </p:nvSpPr>
@@ -6212,7 +6580,7 @@
       </p:sp>
       <p:pic>
         <p:nvPicPr>
-          <p:cNvPr id="15" name="Image 3" descr="preencoded.png">    </p:cNvPr>
+          <p:cNvPr id="18" name="Image 3" descr="preencoded.png">    </p:cNvPr>
           <p:cNvPicPr>
             <a:picLocks noChangeAspect="1"/>
           </p:cNvPicPr>
@@ -6242,7 +6610,7 @@
       </p:pic>
       <p:sp>
         <p:nvSpPr>
-          <p:cNvPr id="16" name="Shape 10"/>
+          <p:cNvPr id="19" name="Shape 13"/>
           <p:cNvSpPr/>
           <p:nvPr/>
         </p:nvSpPr>
@@ -6278,7 +6646,7 @@
       </p:sp>
       <p:sp>
         <p:nvSpPr>
-          <p:cNvPr id="17" name="Shape 11"/>
+          <p:cNvPr id="20" name="Shape 14"/>
           <p:cNvSpPr/>
           <p:nvPr/>
         </p:nvSpPr>
@@ -6305,7 +6673,7 @@
       </p:sp>
       <p:sp>
         <p:nvSpPr>
-          <p:cNvPr id="18" name="Shape 12"/>
+          <p:cNvPr id="21" name="Shape 15"/>
           <p:cNvSpPr/>
           <p:nvPr/>
         </p:nvSpPr>
@@ -6332,7 +6700,7 @@
       </p:sp>
       <p:sp>
         <p:nvSpPr>
-          <p:cNvPr id="19" name="Shape 13"/>
+          <p:cNvPr id="22" name="Shape 16"/>
           <p:cNvSpPr/>
           <p:nvPr/>
         </p:nvSpPr>
@@ -6359,7 +6727,7 @@
       </p:sp>
       <p:sp>
         <p:nvSpPr>
-          <p:cNvPr id="20" name="Shape 14"/>
+          <p:cNvPr id="23" name="Shape 17"/>
           <p:cNvSpPr/>
           <p:nvPr/>
         </p:nvSpPr>
@@ -6386,7 +6754,7 @@
       </p:sp>
       <p:sp>
         <p:nvSpPr>
-          <p:cNvPr id="21" name="mdpr:1-2-e3669a:title:__title:1-2-e3669a"/>
+          <p:cNvPr id="24" name="mdpr:1-2-e3669a:title:__title:1-2-e3669a"/>
           <p:cNvSpPr txBox="1"/>
           <p:nvPr/>
         </p:nvSpPr>
@@ -6428,7 +6796,7 @@
       </p:sp>
       <p:sp>
         <p:nvSpPr>
-          <p:cNvPr id="22" name="Shape 16"/>
+          <p:cNvPr id="25" name="Shape 19"/>
           <p:cNvSpPr/>
           <p:nvPr/>
         </p:nvSpPr>
@@ -6455,7 +6823,7 @@
       </p:sp>
       <p:pic>
         <p:nvPicPr>
-          <p:cNvPr id="23" name="Image 4" descr="article icon from tabler-icons (MIT)">    </p:cNvPr>
+          <p:cNvPr id="26" name="Image 4" descr="article icon from tabler-icons (MIT)">    </p:cNvPr>
           <p:cNvPicPr>
             <a:picLocks noChangeAspect="1"/>
           </p:cNvPicPr>
@@ -6485,7 +6853,7 @@
       </p:pic>
       <p:sp>
         <p:nvSpPr>
-          <p:cNvPr id="24" name="mdpr:1-2-e3669a:item-1:block-15-chunk-1"/>
+          <p:cNvPr id="27" name="mdpr:1-2-e3669a:item-1:block-15-chunk-1"/>
           <p:cNvSpPr txBox="1"/>
           <p:nvPr/>
         </p:nvSpPr>
@@ -6544,7 +6912,7 @@
       </p:sp>
       <p:sp>
         <p:nvSpPr>
-          <p:cNvPr id="25" name="Shape 18"/>
+          <p:cNvPr id="28" name="Shape 21"/>
           <p:cNvSpPr/>
           <p:nvPr/>
         </p:nvSpPr>
@@ -6571,7 +6939,7 @@
       </p:sp>
       <p:pic>
         <p:nvPicPr>
-          <p:cNvPr id="26" name="Image 5" descr="table icon from tabler-icons (MIT)">    </p:cNvPr>
+          <p:cNvPr id="29" name="Image 5" descr="table icon from tabler-icons (MIT)">    </p:cNvPr>
           <p:cNvPicPr>
             <a:picLocks noChangeAspect="1"/>
           </p:cNvPicPr>
@@ -6601,7 +6969,7 @@
       </p:pic>
       <p:sp>
         <p:nvSpPr>
-          <p:cNvPr id="27" name="mdpr:1-2-e3669a:item-2:block-15-chunk-1"/>
+          <p:cNvPr id="30" name="mdpr:1-2-e3669a:item-2:block-15-chunk-1"/>
           <p:cNvSpPr txBox="1"/>
           <p:nvPr/>
         </p:nvSpPr>
@@ -6660,7 +7028,7 @@
       </p:sp>
       <p:sp>
         <p:nvSpPr>
-          <p:cNvPr id="28" name="Shape 20"/>
+          <p:cNvPr id="31" name="Shape 23"/>
           <p:cNvSpPr/>
           <p:nvPr/>
         </p:nvSpPr>
@@ -6687,7 +7055,7 @@
       </p:sp>
       <p:pic>
         <p:nvPicPr>
-          <p:cNvPr id="29" name="Image 6" descr="chart icon from tabler-icons (MIT)">    </p:cNvPr>
+          <p:cNvPr id="32" name="Image 6" descr="chart icon from tabler-icons (MIT)">    </p:cNvPr>
           <p:cNvPicPr>
             <a:picLocks noChangeAspect="1"/>
           </p:cNvPicPr>
@@ -6717,7 +7085,7 @@
       </p:pic>
       <p:sp>
         <p:nvSpPr>
-          <p:cNvPr id="30" name="mdpr:1-2-e3669a:item-3:block-15-chunk-1"/>
+          <p:cNvPr id="33" name="mdpr:1-2-e3669a:item-3:block-15-chunk-1"/>
           <p:cNvSpPr txBox="1"/>
           <p:nvPr/>
         </p:nvSpPr>
@@ -6776,7 +7144,7 @@
       </p:sp>
       <p:sp>
         <p:nvSpPr>
-          <p:cNvPr id="31" name="Shape 22"/>
+          <p:cNvPr id="34" name="Shape 25"/>
           <p:cNvSpPr/>
           <p:nvPr/>
         </p:nvSpPr>
@@ -6803,7 +7171,7 @@
       </p:sp>
       <p:pic>
         <p:nvPicPr>
-          <p:cNvPr id="32" name="Image 7" descr="flow icon from tabler-icons (MIT)">    </p:cNvPr>
+          <p:cNvPr id="35" name="Image 7" descr="flow icon from tabler-icons (MIT)">    </p:cNvPr>
           <p:cNvPicPr>
             <a:picLocks noChangeAspect="1"/>
           </p:cNvPicPr>
@@ -6833,7 +7201,7 @@
       </p:pic>
       <p:sp>
         <p:nvSpPr>
-          <p:cNvPr id="33" name="mdpr:1-2-e3669a:item-4:block-15-chunk-1"/>
+          <p:cNvPr id="36" name="mdpr:1-2-e3669a:item-4:block-15-chunk-1"/>
           <p:cNvSpPr txBox="1"/>
           <p:nvPr/>
         </p:nvSpPr>
@@ -6930,6 +7298,42 @@
         </p:nvSpPr>
         <p:spPr>
           <a:xfrm>
+            <a:off x="457200" y="402336"/>
+            <a:ext cx="11277295" cy="6053328"/>
+          </a:xfrm>
+          <a:prstGeom prst="roundRect">
+            <a:avLst>
+              <a:gd name="adj" fmla="val 2115"/>
+            </a:avLst>
+          </a:prstGeom>
+          <a:solidFill>
+            <a:srgbClr val="E6EAF0"/>
+          </a:solidFill>
+          <a:ln w="12700">
+            <a:solidFill>
+              <a:srgbClr val="8793A3">
+                <a:alpha val="84000"/>
+              </a:srgbClr>
+            </a:solidFill>
+            <a:prstDash val="solid"/>
+          </a:ln>
+          <a:effectLst>
+            <a:outerShdw sx="100000" sy="100000" kx="0" ky="0" algn="bl" rotWithShape="0" blurRad="13970" dist="50800" dir="2700000">
+              <a:srgbClr val="475569">
+                <a:alpha val="18000"/>
+              </a:srgbClr>
+            </a:outerShdw>
+          </a:effectLst>
+        </p:spPr>
+      </p:sp>
+      <p:sp>
+        <p:nvSpPr>
+          <p:cNvPr id="3" name="Shape 1"/>
+          <p:cNvSpPr/>
+          <p:nvPr/>
+        </p:nvSpPr>
+        <p:spPr>
+          <a:xfrm>
             <a:off x="530352" y="457200"/>
             <a:ext cx="11130991" cy="5943600"/>
           </a:xfrm>
@@ -6960,7 +7364,7 @@
       </p:sp>
       <p:sp>
         <p:nvSpPr>
-          <p:cNvPr id="3" name="Shape 1"/>
+          <p:cNvPr id="4" name="Shape 2"/>
           <p:cNvSpPr/>
           <p:nvPr/>
         </p:nvSpPr>
@@ -6983,7 +7387,63 @@
       </p:sp>
       <p:sp>
         <p:nvSpPr>
-          <p:cNvPr id="4" name="Shape 2"/>
+          <p:cNvPr id="5" name="Shape 3"/>
+          <p:cNvSpPr/>
+          <p:nvPr/>
+        </p:nvSpPr>
+        <p:spPr>
+          <a:xfrm>
+            <a:off x="658368" y="6217920"/>
+            <a:ext cx="10874959" cy="0"/>
+          </a:xfrm>
+          <a:prstGeom prst="line">
+            <a:avLst/>
+          </a:prstGeom>
+          <a:noFill/>
+          <a:ln w="12700">
+            <a:solidFill>
+              <a:srgbClr val="94A3B8">
+                <a:alpha val="66000"/>
+              </a:srgbClr>
+            </a:solidFill>
+            <a:prstDash val="solid"/>
+          </a:ln>
+        </p:spPr>
+      </p:sp>
+      <p:sp>
+        <p:nvSpPr>
+          <p:cNvPr id="6" name="Shape 4"/>
+          <p:cNvSpPr/>
+          <p:nvPr/>
+        </p:nvSpPr>
+        <p:spPr>
+          <a:xfrm>
+            <a:off x="10600639" y="512064"/>
+            <a:ext cx="877824" cy="201168"/>
+          </a:xfrm>
+          <a:prstGeom prst="roundRect">
+            <a:avLst>
+              <a:gd name="adj" fmla="val 18182"/>
+            </a:avLst>
+          </a:prstGeom>
+          <a:solidFill>
+            <a:srgbClr val="D7DDE6">
+              <a:alpha val="92000"/>
+            </a:srgbClr>
+          </a:solidFill>
+          <a:ln w="12700">
+            <a:solidFill>
+              <a:srgbClr val="FFFFFF">
+                <a:alpha val="82000"/>
+              </a:srgbClr>
+            </a:solidFill>
+            <a:prstDash val="solid"/>
+          </a:ln>
+        </p:spPr>
+      </p:sp>
+      <p:sp>
+        <p:nvSpPr>
+          <p:cNvPr id="7" name="Shape 5"/>
           <p:cNvSpPr/>
           <p:nvPr/>
         </p:nvSpPr>
@@ -7012,7 +7472,7 @@
       </p:sp>
       <p:sp>
         <p:nvSpPr>
-          <p:cNvPr id="5" name="Shape 3"/>
+          <p:cNvPr id="8" name="Shape 6"/>
           <p:cNvSpPr/>
           <p:nvPr/>
         </p:nvSpPr>
@@ -7041,7 +7501,7 @@
       </p:sp>
       <p:sp>
         <p:nvSpPr>
-          <p:cNvPr id="6" name="Shape 4"/>
+          <p:cNvPr id="9" name="Shape 7"/>
           <p:cNvSpPr/>
           <p:nvPr/>
         </p:nvSpPr>
@@ -7068,7 +7528,7 @@
       </p:sp>
       <p:sp>
         <p:nvSpPr>
-          <p:cNvPr id="7" name="Shape 5"/>
+          <p:cNvPr id="10" name="Shape 8"/>
           <p:cNvSpPr/>
           <p:nvPr/>
         </p:nvSpPr>
@@ -7095,7 +7555,7 @@
       </p:sp>
       <p:sp>
         <p:nvSpPr>
-          <p:cNvPr id="8" name="Shape 6"/>
+          <p:cNvPr id="11" name="Shape 9"/>
           <p:cNvSpPr/>
           <p:nvPr/>
         </p:nvSpPr>
@@ -7122,7 +7582,7 @@
       </p:sp>
       <p:sp>
         <p:nvSpPr>
-          <p:cNvPr id="9" name="Shape 7"/>
+          <p:cNvPr id="12" name="Shape 10"/>
           <p:cNvSpPr/>
           <p:nvPr/>
         </p:nvSpPr>
@@ -7149,7 +7609,7 @@
       </p:sp>
       <p:sp>
         <p:nvSpPr>
-          <p:cNvPr id="10" name="Shape 8"/>
+          <p:cNvPr id="13" name="Shape 11"/>
           <p:cNvSpPr/>
           <p:nvPr/>
         </p:nvSpPr>
@@ -7176,7 +7636,7 @@
       </p:sp>
       <p:sp>
         <p:nvSpPr>
-          <p:cNvPr id="11" name="mdpr:2-2-c23e9b:title:__title:2-2-c23e9b"/>
+          <p:cNvPr id="14" name="mdpr:2-2-c23e9b:title:__title:2-2-c23e9b"/>
           <p:cNvSpPr txBox="1"/>
           <p:nvPr/>
         </p:nvSpPr>
@@ -7218,7 +7678,7 @@
       </p:sp>
       <p:sp>
         <p:nvSpPr>
-          <p:cNvPr id="12" name="mdpr:2-2-c23e9b:left:block-15-chunk-2"/>
+          <p:cNvPr id="15" name="mdpr:2-2-c23e9b:left:block-15-chunk-2"/>
           <p:cNvSpPr txBox="1"/>
           <p:nvPr/>
         </p:nvSpPr>
@@ -7277,7 +7737,7 @@
       </p:sp>
       <p:sp>
         <p:nvSpPr>
-          <p:cNvPr id="13" name="mdpr:2-2-c23e9b:right:block-15-chunk-2"/>
+          <p:cNvPr id="16" name="mdpr:2-2-c23e9b:right:block-15-chunk-2"/>
           <p:cNvSpPr txBox="1"/>
           <p:nvPr/>
         </p:nvSpPr>
@@ -7374,6 +7834,42 @@
         </p:nvSpPr>
         <p:spPr>
           <a:xfrm>
+            <a:off x="457200" y="402336"/>
+            <a:ext cx="11277295" cy="6053328"/>
+          </a:xfrm>
+          <a:prstGeom prst="roundRect">
+            <a:avLst>
+              <a:gd name="adj" fmla="val 2115"/>
+            </a:avLst>
+          </a:prstGeom>
+          <a:solidFill>
+            <a:srgbClr val="E6EAF0"/>
+          </a:solidFill>
+          <a:ln w="12700">
+            <a:solidFill>
+              <a:srgbClr val="8793A3">
+                <a:alpha val="84000"/>
+              </a:srgbClr>
+            </a:solidFill>
+            <a:prstDash val="solid"/>
+          </a:ln>
+          <a:effectLst>
+            <a:outerShdw sx="100000" sy="100000" kx="0" ky="0" algn="bl" rotWithShape="0" blurRad="13970" dist="50800" dir="2700000">
+              <a:srgbClr val="475569">
+                <a:alpha val="18000"/>
+              </a:srgbClr>
+            </a:outerShdw>
+          </a:effectLst>
+        </p:spPr>
+      </p:sp>
+      <p:sp>
+        <p:nvSpPr>
+          <p:cNvPr id="3" name="Shape 1"/>
+          <p:cNvSpPr/>
+          <p:nvPr/>
+        </p:nvSpPr>
+        <p:spPr>
+          <a:xfrm>
             <a:off x="530352" y="457200"/>
             <a:ext cx="11130991" cy="5943600"/>
           </a:xfrm>
@@ -7404,7 +7900,7 @@
       </p:sp>
       <p:sp>
         <p:nvSpPr>
-          <p:cNvPr id="3" name="Shape 1"/>
+          <p:cNvPr id="4" name="Shape 2"/>
           <p:cNvSpPr/>
           <p:nvPr/>
         </p:nvSpPr>
@@ -7427,7 +7923,63 @@
       </p:sp>
       <p:sp>
         <p:nvSpPr>
-          <p:cNvPr id="4" name="Shape 2"/>
+          <p:cNvPr id="5" name="Shape 3"/>
+          <p:cNvSpPr/>
+          <p:nvPr/>
+        </p:nvSpPr>
+        <p:spPr>
+          <a:xfrm>
+            <a:off x="658368" y="6217920"/>
+            <a:ext cx="10874959" cy="0"/>
+          </a:xfrm>
+          <a:prstGeom prst="line">
+            <a:avLst/>
+          </a:prstGeom>
+          <a:noFill/>
+          <a:ln w="12700">
+            <a:solidFill>
+              <a:srgbClr val="94A3B8">
+                <a:alpha val="66000"/>
+              </a:srgbClr>
+            </a:solidFill>
+            <a:prstDash val="solid"/>
+          </a:ln>
+        </p:spPr>
+      </p:sp>
+      <p:sp>
+        <p:nvSpPr>
+          <p:cNvPr id="6" name="Shape 4"/>
+          <p:cNvSpPr/>
+          <p:nvPr/>
+        </p:nvSpPr>
+        <p:spPr>
+          <a:xfrm>
+            <a:off x="10600639" y="512064"/>
+            <a:ext cx="877824" cy="201168"/>
+          </a:xfrm>
+          <a:prstGeom prst="roundRect">
+            <a:avLst>
+              <a:gd name="adj" fmla="val 18182"/>
+            </a:avLst>
+          </a:prstGeom>
+          <a:solidFill>
+            <a:srgbClr val="D7DDE6">
+              <a:alpha val="92000"/>
+            </a:srgbClr>
+          </a:solidFill>
+          <a:ln w="12700">
+            <a:solidFill>
+              <a:srgbClr val="FFFFFF">
+                <a:alpha val="82000"/>
+              </a:srgbClr>
+            </a:solidFill>
+            <a:prstDash val="solid"/>
+          </a:ln>
+        </p:spPr>
+      </p:sp>
+      <p:sp>
+        <p:nvSpPr>
+          <p:cNvPr id="7" name="Shape 5"/>
           <p:cNvSpPr/>
           <p:nvPr/>
         </p:nvSpPr>
@@ -7456,7 +8008,7 @@
       </p:sp>
       <p:sp>
         <p:nvSpPr>
-          <p:cNvPr id="5" name="Shape 3"/>
+          <p:cNvPr id="8" name="Shape 6"/>
           <p:cNvSpPr/>
           <p:nvPr/>
         </p:nvSpPr>
@@ -7485,7 +8037,7 @@
       </p:sp>
       <p:sp>
         <p:nvSpPr>
-          <p:cNvPr id="6" name="Shape 4"/>
+          <p:cNvPr id="9" name="Shape 7"/>
           <p:cNvSpPr/>
           <p:nvPr/>
         </p:nvSpPr>
@@ -7512,7 +8064,7 @@
       </p:sp>
       <p:sp>
         <p:nvSpPr>
-          <p:cNvPr id="7" name="Shape 5"/>
+          <p:cNvPr id="10" name="Shape 8"/>
           <p:cNvSpPr/>
           <p:nvPr/>
         </p:nvSpPr>
@@ -7539,7 +8091,7 @@
       </p:sp>
       <p:sp>
         <p:nvSpPr>
-          <p:cNvPr id="8" name="Shape 6"/>
+          <p:cNvPr id="11" name="Shape 9"/>
           <p:cNvSpPr/>
           <p:nvPr/>
         </p:nvSpPr>
@@ -7566,7 +8118,7 @@
       </p:sp>
       <p:pic>
         <p:nvPicPr>
-          <p:cNvPr id="9" name="Image 0" descr="preencoded.png">    </p:cNvPr>
+          <p:cNvPr id="12" name="Image 0" descr="preencoded.png">    </p:cNvPr>
           <p:cNvPicPr>
             <a:picLocks noChangeAspect="1"/>
           </p:cNvPicPr>
@@ -7596,7 +8148,7 @@
       </p:pic>
       <p:sp>
         <p:nvSpPr>
-          <p:cNvPr id="10" name="Shape 7"/>
+          <p:cNvPr id="13" name="Shape 10"/>
           <p:cNvSpPr/>
           <p:nvPr/>
         </p:nvSpPr>
@@ -7632,7 +8184,7 @@
       </p:sp>
       <p:sp>
         <p:nvSpPr>
-          <p:cNvPr id="11" name="mdpr:table-coherence-2f9a7b:title:__title:table-coherence-2f9a7b"/>
+          <p:cNvPr id="14" name="mdpr:table-coherence-2f9a7b:title:__title:table-coherence-2f9a7b"/>
           <p:cNvSpPr txBox="1"/>
           <p:nvPr/>
         </p:nvSpPr>
@@ -8767,6 +9319,42 @@
         </p:nvSpPr>
         <p:spPr>
           <a:xfrm>
+            <a:off x="457200" y="402336"/>
+            <a:ext cx="11277295" cy="6053328"/>
+          </a:xfrm>
+          <a:prstGeom prst="roundRect">
+            <a:avLst>
+              <a:gd name="adj" fmla="val 2115"/>
+            </a:avLst>
+          </a:prstGeom>
+          <a:solidFill>
+            <a:srgbClr val="E6EAF0"/>
+          </a:solidFill>
+          <a:ln w="12700">
+            <a:solidFill>
+              <a:srgbClr val="8793A3">
+                <a:alpha val="84000"/>
+              </a:srgbClr>
+            </a:solidFill>
+            <a:prstDash val="solid"/>
+          </a:ln>
+          <a:effectLst>
+            <a:outerShdw sx="100000" sy="100000" kx="0" ky="0" algn="bl" rotWithShape="0" blurRad="13970" dist="50800" dir="2700000">
+              <a:srgbClr val="475569">
+                <a:alpha val="18000"/>
+              </a:srgbClr>
+            </a:outerShdw>
+          </a:effectLst>
+        </p:spPr>
+      </p:sp>
+      <p:sp>
+        <p:nvSpPr>
+          <p:cNvPr id="3" name="Shape 1"/>
+          <p:cNvSpPr/>
+          <p:nvPr/>
+        </p:nvSpPr>
+        <p:spPr>
+          <a:xfrm>
             <a:off x="530352" y="457200"/>
             <a:ext cx="11130991" cy="5943600"/>
           </a:xfrm>
@@ -8797,7 +9385,7 @@
       </p:sp>
       <p:sp>
         <p:nvSpPr>
-          <p:cNvPr id="3" name="Shape 1"/>
+          <p:cNvPr id="4" name="Shape 2"/>
           <p:cNvSpPr/>
           <p:nvPr/>
         </p:nvSpPr>
@@ -8820,7 +9408,63 @@
       </p:sp>
       <p:sp>
         <p:nvSpPr>
-          <p:cNvPr id="4" name="Shape 2"/>
+          <p:cNvPr id="5" name="Shape 3"/>
+          <p:cNvSpPr/>
+          <p:nvPr/>
+        </p:nvSpPr>
+        <p:spPr>
+          <a:xfrm>
+            <a:off x="658368" y="6217920"/>
+            <a:ext cx="10874959" cy="0"/>
+          </a:xfrm>
+          <a:prstGeom prst="line">
+            <a:avLst/>
+          </a:prstGeom>
+          <a:noFill/>
+          <a:ln w="12700">
+            <a:solidFill>
+              <a:srgbClr val="94A3B8">
+                <a:alpha val="66000"/>
+              </a:srgbClr>
+            </a:solidFill>
+            <a:prstDash val="solid"/>
+          </a:ln>
+        </p:spPr>
+      </p:sp>
+      <p:sp>
+        <p:nvSpPr>
+          <p:cNvPr id="6" name="Shape 4"/>
+          <p:cNvSpPr/>
+          <p:nvPr/>
+        </p:nvSpPr>
+        <p:spPr>
+          <a:xfrm>
+            <a:off x="10600639" y="512064"/>
+            <a:ext cx="877824" cy="201168"/>
+          </a:xfrm>
+          <a:prstGeom prst="roundRect">
+            <a:avLst>
+              <a:gd name="adj" fmla="val 18182"/>
+            </a:avLst>
+          </a:prstGeom>
+          <a:solidFill>
+            <a:srgbClr val="D7DDE6">
+              <a:alpha val="92000"/>
+            </a:srgbClr>
+          </a:solidFill>
+          <a:ln w="12700">
+            <a:solidFill>
+              <a:srgbClr val="FFFFFF">
+                <a:alpha val="82000"/>
+              </a:srgbClr>
+            </a:solidFill>
+            <a:prstDash val="solid"/>
+          </a:ln>
+        </p:spPr>
+      </p:sp>
+      <p:sp>
+        <p:nvSpPr>
+          <p:cNvPr id="7" name="Shape 5"/>
           <p:cNvSpPr/>
           <p:nvPr/>
         </p:nvSpPr>
@@ -8849,7 +9493,7 @@
       </p:sp>
       <p:sp>
         <p:nvSpPr>
-          <p:cNvPr id="5" name="Shape 3"/>
+          <p:cNvPr id="8" name="Shape 6"/>
           <p:cNvSpPr/>
           <p:nvPr/>
         </p:nvSpPr>
@@ -8878,7 +9522,7 @@
       </p:sp>
       <p:sp>
         <p:nvSpPr>
-          <p:cNvPr id="6" name="Shape 4"/>
+          <p:cNvPr id="9" name="Shape 7"/>
           <p:cNvSpPr/>
           <p:nvPr/>
         </p:nvSpPr>
@@ -8905,7 +9549,7 @@
       </p:sp>
       <p:sp>
         <p:nvSpPr>
-          <p:cNvPr id="7" name="Shape 5"/>
+          <p:cNvPr id="10" name="Shape 8"/>
           <p:cNvSpPr/>
           <p:nvPr/>
         </p:nvSpPr>
@@ -8932,7 +9576,7 @@
       </p:sp>
       <p:sp>
         <p:nvSpPr>
-          <p:cNvPr id="8" name="Shape 6"/>
+          <p:cNvPr id="11" name="Shape 9"/>
           <p:cNvSpPr/>
           <p:nvPr/>
         </p:nvSpPr>
@@ -8959,7 +9603,7 @@
       </p:sp>
       <p:pic>
         <p:nvPicPr>
-          <p:cNvPr id="9" name="Image 0" descr="preencoded.png">    </p:cNvPr>
+          <p:cNvPr id="12" name="Image 0" descr="preencoded.png">    </p:cNvPr>
           <p:cNvPicPr>
             <a:picLocks noChangeAspect="1"/>
           </p:cNvPicPr>
@@ -8989,7 +9633,7 @@
       </p:pic>
       <p:sp>
         <p:nvSpPr>
-          <p:cNvPr id="10" name="Shape 7"/>
+          <p:cNvPr id="13" name="Shape 10"/>
           <p:cNvSpPr/>
           <p:nvPr/>
         </p:nvSpPr>
@@ -9025,7 +9669,7 @@
       </p:sp>
       <p:sp>
         <p:nvSpPr>
-          <p:cNvPr id="11" name="Shape 8"/>
+          <p:cNvPr id="14" name="Shape 11"/>
           <p:cNvSpPr/>
           <p:nvPr/>
         </p:nvSpPr>
@@ -9052,7 +9696,7 @@
       </p:sp>
       <p:sp>
         <p:nvSpPr>
-          <p:cNvPr id="12" name="mdpr:1-2-2ff3f0:title:__title:1-2-2ff3f0"/>
+          <p:cNvPr id="15" name="mdpr:1-2-2ff3f0:title:__title:1-2-2ff3f0"/>
           <p:cNvSpPr txBox="1"/>
           <p:nvPr/>
         </p:nvSpPr>
@@ -9094,7 +9738,7 @@
       </p:sp>
       <p:sp>
         <p:nvSpPr>
-          <p:cNvPr id="13" name="mdpr:1-2-2ff3f0:body:block-19"/>
+          <p:cNvPr id="16" name="mdpr:1-2-2ff3f0:body:block-19"/>
           <p:cNvSpPr txBox="1"/>
           <p:nvPr/>
         </p:nvSpPr>
@@ -9233,7 +9877,7 @@
       </p:sp>
       <p:graphicFrame>
         <p:nvGraphicFramePr>
-          <p:cNvPr id="14" name="Chart 0" descr=""/>
+          <p:cNvPr id="17" name="Chart 0" descr=""/>
           <p:cNvGraphicFramePr/>
           <p:nvPr/>
         </p:nvGraphicFramePr>
@@ -9287,6 +9931,42 @@
         </p:nvSpPr>
         <p:spPr>
           <a:xfrm>
+            <a:off x="457200" y="402336"/>
+            <a:ext cx="11277295" cy="6053328"/>
+          </a:xfrm>
+          <a:prstGeom prst="roundRect">
+            <a:avLst>
+              <a:gd name="adj" fmla="val 2115"/>
+            </a:avLst>
+          </a:prstGeom>
+          <a:solidFill>
+            <a:srgbClr val="E6EAF0"/>
+          </a:solidFill>
+          <a:ln w="12700">
+            <a:solidFill>
+              <a:srgbClr val="8793A3">
+                <a:alpha val="84000"/>
+              </a:srgbClr>
+            </a:solidFill>
+            <a:prstDash val="solid"/>
+          </a:ln>
+          <a:effectLst>
+            <a:outerShdw sx="100000" sy="100000" kx="0" ky="0" algn="bl" rotWithShape="0" blurRad="13970" dist="50800" dir="2700000">
+              <a:srgbClr val="475569">
+                <a:alpha val="18000"/>
+              </a:srgbClr>
+            </a:outerShdw>
+          </a:effectLst>
+        </p:spPr>
+      </p:sp>
+      <p:sp>
+        <p:nvSpPr>
+          <p:cNvPr id="3" name="Shape 1"/>
+          <p:cNvSpPr/>
+          <p:nvPr/>
+        </p:nvSpPr>
+        <p:spPr>
+          <a:xfrm>
             <a:off x="530352" y="457200"/>
             <a:ext cx="11130991" cy="5943600"/>
           </a:xfrm>
@@ -9317,7 +9997,7 @@
       </p:sp>
       <p:sp>
         <p:nvSpPr>
-          <p:cNvPr id="3" name="Shape 1"/>
+          <p:cNvPr id="4" name="Shape 2"/>
           <p:cNvSpPr/>
           <p:nvPr/>
         </p:nvSpPr>
@@ -9340,7 +10020,63 @@
       </p:sp>
       <p:sp>
         <p:nvSpPr>
-          <p:cNvPr id="4" name="Shape 2"/>
+          <p:cNvPr id="5" name="Shape 3"/>
+          <p:cNvSpPr/>
+          <p:nvPr/>
+        </p:nvSpPr>
+        <p:spPr>
+          <a:xfrm>
+            <a:off x="658368" y="6217920"/>
+            <a:ext cx="10874959" cy="0"/>
+          </a:xfrm>
+          <a:prstGeom prst="line">
+            <a:avLst/>
+          </a:prstGeom>
+          <a:noFill/>
+          <a:ln w="12700">
+            <a:solidFill>
+              <a:srgbClr val="94A3B8">
+                <a:alpha val="66000"/>
+              </a:srgbClr>
+            </a:solidFill>
+            <a:prstDash val="solid"/>
+          </a:ln>
+        </p:spPr>
+      </p:sp>
+      <p:sp>
+        <p:nvSpPr>
+          <p:cNvPr id="6" name="Shape 4"/>
+          <p:cNvSpPr/>
+          <p:nvPr/>
+        </p:nvSpPr>
+        <p:spPr>
+          <a:xfrm>
+            <a:off x="10600639" y="512064"/>
+            <a:ext cx="877824" cy="201168"/>
+          </a:xfrm>
+          <a:prstGeom prst="roundRect">
+            <a:avLst>
+              <a:gd name="adj" fmla="val 18182"/>
+            </a:avLst>
+          </a:prstGeom>
+          <a:solidFill>
+            <a:srgbClr val="D7DDE6">
+              <a:alpha val="92000"/>
+            </a:srgbClr>
+          </a:solidFill>
+          <a:ln w="12700">
+            <a:solidFill>
+              <a:srgbClr val="FFFFFF">
+                <a:alpha val="82000"/>
+              </a:srgbClr>
+            </a:solidFill>
+            <a:prstDash val="solid"/>
+          </a:ln>
+        </p:spPr>
+      </p:sp>
+      <p:sp>
+        <p:nvSpPr>
+          <p:cNvPr id="7" name="Shape 5"/>
           <p:cNvSpPr/>
           <p:nvPr/>
         </p:nvSpPr>
@@ -9369,7 +10105,7 @@
       </p:sp>
       <p:sp>
         <p:nvSpPr>
-          <p:cNvPr id="5" name="Shape 3"/>
+          <p:cNvPr id="8" name="Shape 6"/>
           <p:cNvSpPr/>
           <p:nvPr/>
         </p:nvSpPr>
@@ -9398,7 +10134,7 @@
       </p:sp>
       <p:sp>
         <p:nvSpPr>
-          <p:cNvPr id="6" name="Shape 4"/>
+          <p:cNvPr id="9" name="Shape 7"/>
           <p:cNvSpPr/>
           <p:nvPr/>
         </p:nvSpPr>
@@ -9425,7 +10161,7 @@
       </p:sp>
       <p:sp>
         <p:nvSpPr>
-          <p:cNvPr id="7" name="Shape 5"/>
+          <p:cNvPr id="10" name="Shape 8"/>
           <p:cNvSpPr/>
           <p:nvPr/>
         </p:nvSpPr>
@@ -9452,7 +10188,7 @@
       </p:sp>
       <p:sp>
         <p:nvSpPr>
-          <p:cNvPr id="8" name="Shape 6"/>
+          <p:cNvPr id="11" name="Shape 9"/>
           <p:cNvSpPr/>
           <p:nvPr/>
         </p:nvSpPr>
@@ -9479,7 +10215,7 @@
       </p:sp>
       <p:pic>
         <p:nvPicPr>
-          <p:cNvPr id="9" name="Image 0" descr="preencoded.png">    </p:cNvPr>
+          <p:cNvPr id="12" name="Image 0" descr="preencoded.png">    </p:cNvPr>
           <p:cNvPicPr>
             <a:picLocks noChangeAspect="1"/>
           </p:cNvPicPr>
@@ -9509,7 +10245,7 @@
       </p:pic>
       <p:sp>
         <p:nvSpPr>
-          <p:cNvPr id="10" name="Shape 7"/>
+          <p:cNvPr id="13" name="Shape 10"/>
           <p:cNvSpPr/>
           <p:nvPr/>
         </p:nvSpPr>
@@ -9545,7 +10281,7 @@
       </p:sp>
       <p:sp>
         <p:nvSpPr>
-          <p:cNvPr id="11" name="mdpr:2-2-542095:title:__title:2-2-542095"/>
+          <p:cNvPr id="14" name="mdpr:2-2-542095:title:__title:2-2-542095"/>
           <p:cNvSpPr txBox="1"/>
           <p:nvPr/>
         </p:nvSpPr>
@@ -10468,6 +11204,42 @@
         </p:nvSpPr>
         <p:spPr>
           <a:xfrm>
+            <a:off x="457200" y="402336"/>
+            <a:ext cx="11277295" cy="6053328"/>
+          </a:xfrm>
+          <a:prstGeom prst="roundRect">
+            <a:avLst>
+              <a:gd name="adj" fmla="val 2115"/>
+            </a:avLst>
+          </a:prstGeom>
+          <a:solidFill>
+            <a:srgbClr val="E6EAF0"/>
+          </a:solidFill>
+          <a:ln w="12700">
+            <a:solidFill>
+              <a:srgbClr val="8793A3">
+                <a:alpha val="84000"/>
+              </a:srgbClr>
+            </a:solidFill>
+            <a:prstDash val="solid"/>
+          </a:ln>
+          <a:effectLst>
+            <a:outerShdw sx="100000" sy="100000" kx="0" ky="0" algn="bl" rotWithShape="0" blurRad="13970" dist="50800" dir="2700000">
+              <a:srgbClr val="475569">
+                <a:alpha val="18000"/>
+              </a:srgbClr>
+            </a:outerShdw>
+          </a:effectLst>
+        </p:spPr>
+      </p:sp>
+      <p:sp>
+        <p:nvSpPr>
+          <p:cNvPr id="3" name="Shape 1"/>
+          <p:cNvSpPr/>
+          <p:nvPr/>
+        </p:nvSpPr>
+        <p:spPr>
+          <a:xfrm>
             <a:off x="530352" y="457200"/>
             <a:ext cx="11130991" cy="5943600"/>
           </a:xfrm>
@@ -10498,7 +11270,7 @@
       </p:sp>
       <p:sp>
         <p:nvSpPr>
-          <p:cNvPr id="3" name="Shape 1"/>
+          <p:cNvPr id="4" name="Shape 2"/>
           <p:cNvSpPr/>
           <p:nvPr/>
         </p:nvSpPr>
@@ -10521,7 +11293,63 @@
       </p:sp>
       <p:sp>
         <p:nvSpPr>
-          <p:cNvPr id="4" name="Shape 2"/>
+          <p:cNvPr id="5" name="Shape 3"/>
+          <p:cNvSpPr/>
+          <p:nvPr/>
+        </p:nvSpPr>
+        <p:spPr>
+          <a:xfrm>
+            <a:off x="658368" y="6217920"/>
+            <a:ext cx="10874959" cy="0"/>
+          </a:xfrm>
+          <a:prstGeom prst="line">
+            <a:avLst/>
+          </a:prstGeom>
+          <a:noFill/>
+          <a:ln w="12700">
+            <a:solidFill>
+              <a:srgbClr val="94A3B8">
+                <a:alpha val="66000"/>
+              </a:srgbClr>
+            </a:solidFill>
+            <a:prstDash val="solid"/>
+          </a:ln>
+        </p:spPr>
+      </p:sp>
+      <p:sp>
+        <p:nvSpPr>
+          <p:cNvPr id="6" name="Shape 4"/>
+          <p:cNvSpPr/>
+          <p:nvPr/>
+        </p:nvSpPr>
+        <p:spPr>
+          <a:xfrm>
+            <a:off x="10600639" y="512064"/>
+            <a:ext cx="877824" cy="201168"/>
+          </a:xfrm>
+          <a:prstGeom prst="roundRect">
+            <a:avLst>
+              <a:gd name="adj" fmla="val 18182"/>
+            </a:avLst>
+          </a:prstGeom>
+          <a:solidFill>
+            <a:srgbClr val="D7DDE6">
+              <a:alpha val="92000"/>
+            </a:srgbClr>
+          </a:solidFill>
+          <a:ln w="12700">
+            <a:solidFill>
+              <a:srgbClr val="FFFFFF">
+                <a:alpha val="82000"/>
+              </a:srgbClr>
+            </a:solidFill>
+            <a:prstDash val="solid"/>
+          </a:ln>
+        </p:spPr>
+      </p:sp>
+      <p:sp>
+        <p:nvSpPr>
+          <p:cNvPr id="7" name="Shape 5"/>
           <p:cNvSpPr/>
           <p:nvPr/>
         </p:nvSpPr>
@@ -10550,7 +11378,7 @@
       </p:sp>
       <p:sp>
         <p:nvSpPr>
-          <p:cNvPr id="5" name="Shape 3"/>
+          <p:cNvPr id="8" name="Shape 6"/>
           <p:cNvSpPr/>
           <p:nvPr/>
         </p:nvSpPr>
@@ -10579,7 +11407,7 @@
       </p:sp>
       <p:sp>
         <p:nvSpPr>
-          <p:cNvPr id="6" name="Shape 4"/>
+          <p:cNvPr id="9" name="Shape 7"/>
           <p:cNvSpPr/>
           <p:nvPr/>
         </p:nvSpPr>
@@ -10606,7 +11434,7 @@
       </p:sp>
       <p:sp>
         <p:nvSpPr>
-          <p:cNvPr id="7" name="Shape 5"/>
+          <p:cNvPr id="10" name="Shape 8"/>
           <p:cNvSpPr/>
           <p:nvPr/>
         </p:nvSpPr>
@@ -10633,7 +11461,7 @@
       </p:sp>
       <p:sp>
         <p:nvSpPr>
-          <p:cNvPr id="8" name="Shape 6"/>
+          <p:cNvPr id="11" name="Shape 9"/>
           <p:cNvSpPr/>
           <p:nvPr/>
         </p:nvSpPr>
@@ -10660,7 +11488,7 @@
       </p:sp>
       <p:pic>
         <p:nvPicPr>
-          <p:cNvPr id="9" name="Image 0" descr="preencoded.png">    </p:cNvPr>
+          <p:cNvPr id="12" name="Image 0" descr="preencoded.png">    </p:cNvPr>
           <p:cNvPicPr>
             <a:picLocks noChangeAspect="1"/>
           </p:cNvPicPr>
@@ -10690,7 +11518,7 @@
       </p:pic>
       <p:sp>
         <p:nvSpPr>
-          <p:cNvPr id="10" name="Shape 7"/>
+          <p:cNvPr id="13" name="Shape 10"/>
           <p:cNvSpPr/>
           <p:nvPr/>
         </p:nvSpPr>
@@ -10726,7 +11554,7 @@
       </p:sp>
       <p:sp>
         <p:nvSpPr>
-          <p:cNvPr id="11" name="mdpr:1-2-b8955f:title:__title:1-2-b8955f"/>
+          <p:cNvPr id="14" name="mdpr:1-2-b8955f:title:__title:1-2-b8955f"/>
           <p:cNvSpPr txBox="1"/>
           <p:nvPr/>
         </p:nvSpPr>
@@ -10768,7 +11596,7 @@
       </p:sp>
       <p:sp>
         <p:nvSpPr>
-          <p:cNvPr id="12" name="Shape 9"/>
+          <p:cNvPr id="15" name="Shape 12"/>
           <p:cNvSpPr/>
           <p:nvPr/>
         </p:nvSpPr>
@@ -10801,7 +11629,7 @@
       </p:sp>
       <p:sp>
         <p:nvSpPr>
-          <p:cNvPr id="13" name="Shape 10"/>
+          <p:cNvPr id="16" name="Shape 13"/>
           <p:cNvSpPr/>
           <p:nvPr/>
         </p:nvSpPr>
@@ -10832,7 +11660,7 @@
       </p:sp>
       <p:sp>
         <p:nvSpPr>
-          <p:cNvPr id="14" name="Shape 11"/>
+          <p:cNvPr id="17" name="Shape 14"/>
           <p:cNvSpPr/>
           <p:nvPr/>
         </p:nvSpPr>
@@ -10863,7 +11691,7 @@
       </p:sp>
       <p:sp>
         <p:nvSpPr>
-          <p:cNvPr id="15" name="Shape 12"/>
+          <p:cNvPr id="18" name="Shape 15"/>
           <p:cNvSpPr/>
           <p:nvPr/>
         </p:nvSpPr>
@@ -10888,7 +11716,7 @@
       </p:sp>
       <p:sp>
         <p:nvSpPr>
-          <p:cNvPr id="16" name="Shape 13"/>
+          <p:cNvPr id="19" name="Shape 16"/>
           <p:cNvSpPr/>
           <p:nvPr/>
         </p:nvSpPr>
@@ -10915,7 +11743,7 @@
       </p:sp>
       <p:sp>
         <p:nvSpPr>
-          <p:cNvPr id="17" name="Text 14"/>
+          <p:cNvPr id="20" name="Text 17"/>
           <p:cNvSpPr txBox="1"/>
           <p:nvPr/>
         </p:nvSpPr>
@@ -10959,7 +11787,7 @@
       </p:sp>
       <p:sp>
         <p:nvSpPr>
-          <p:cNvPr id="18" name="Text 15"/>
+          <p:cNvPr id="21" name="Text 18"/>
           <p:cNvSpPr txBox="1"/>
           <p:nvPr/>
         </p:nvSpPr>
@@ -11001,7 +11829,7 @@
       </p:sp>
       <p:sp>
         <p:nvSpPr>
-          <p:cNvPr id="19" name="Shape 16"/>
+          <p:cNvPr id="22" name="Shape 19"/>
           <p:cNvSpPr/>
           <p:nvPr/>
         </p:nvSpPr>
@@ -11028,7 +11856,7 @@
       </p:sp>
       <p:sp>
         <p:nvSpPr>
-          <p:cNvPr id="20" name="Text 17"/>
+          <p:cNvPr id="23" name="Text 20"/>
           <p:cNvSpPr txBox="1"/>
           <p:nvPr/>
         </p:nvSpPr>
@@ -11072,7 +11900,7 @@
       </p:sp>
       <p:sp>
         <p:nvSpPr>
-          <p:cNvPr id="21" name="Shape 18"/>
+          <p:cNvPr id="24" name="Shape 21"/>
           <p:cNvSpPr/>
           <p:nvPr/>
         </p:nvSpPr>
@@ -11099,7 +11927,7 @@
       </p:sp>
       <p:sp>
         <p:nvSpPr>
-          <p:cNvPr id="22" name="Text 19"/>
+          <p:cNvPr id="25" name="Text 22"/>
           <p:cNvSpPr txBox="1"/>
           <p:nvPr/>
         </p:nvSpPr>
@@ -11143,7 +11971,7 @@
       </p:sp>
       <p:sp>
         <p:nvSpPr>
-          <p:cNvPr id="23" name="Shape 20"/>
+          <p:cNvPr id="26" name="Shape 23"/>
           <p:cNvSpPr/>
           <p:nvPr/>
         </p:nvSpPr>
@@ -11174,7 +12002,7 @@
       </p:sp>
       <p:sp>
         <p:nvSpPr>
-          <p:cNvPr id="24" name="Shape 21"/>
+          <p:cNvPr id="27" name="Shape 24"/>
           <p:cNvSpPr/>
           <p:nvPr/>
         </p:nvSpPr>
@@ -11203,7 +12031,7 @@
       </p:sp>
       <p:sp>
         <p:nvSpPr>
-          <p:cNvPr id="25" name="Shape 22"/>
+          <p:cNvPr id="28" name="Shape 25"/>
           <p:cNvSpPr/>
           <p:nvPr/>
         </p:nvSpPr>
@@ -11226,7 +12054,7 @@
       </p:sp>
       <p:sp>
         <p:nvSpPr>
-          <p:cNvPr id="26" name="Shape 23"/>
+          <p:cNvPr id="29" name="Shape 26"/>
           <p:cNvSpPr/>
           <p:nvPr/>
         </p:nvSpPr>
@@ -11251,7 +12079,7 @@
       </p:sp>
       <p:sp>
         <p:nvSpPr>
-          <p:cNvPr id="27" name="Shape 24"/>
+          <p:cNvPr id="30" name="Shape 27"/>
           <p:cNvSpPr/>
           <p:nvPr/>
         </p:nvSpPr>
@@ -11276,7 +12104,7 @@
       </p:sp>
       <p:sp>
         <p:nvSpPr>
-          <p:cNvPr id="28" name="Shape 25"/>
+          <p:cNvPr id="31" name="Shape 28"/>
           <p:cNvSpPr/>
           <p:nvPr/>
         </p:nvSpPr>
@@ -11301,7 +12129,7 @@
       </p:sp>
       <p:sp>
         <p:nvSpPr>
-          <p:cNvPr id="29" name="Text 26"/>
+          <p:cNvPr id="32" name="Text 29"/>
           <p:cNvSpPr txBox="1"/>
           <p:nvPr/>
         </p:nvSpPr>
@@ -11345,7 +12173,7 @@
       </p:sp>
       <p:sp>
         <p:nvSpPr>
-          <p:cNvPr id="30" name="Text 27"/>
+          <p:cNvPr id="33" name="Text 30"/>
           <p:cNvSpPr txBox="1"/>
           <p:nvPr/>
         </p:nvSpPr>
@@ -11387,7 +12215,7 @@
       </p:sp>
       <p:sp>
         <p:nvSpPr>
-          <p:cNvPr id="31" name="Text 28"/>
+          <p:cNvPr id="34" name="Text 31"/>
           <p:cNvSpPr txBox="1"/>
           <p:nvPr/>
         </p:nvSpPr>
@@ -11429,7 +12257,7 @@
       </p:sp>
       <p:sp>
         <p:nvSpPr>
-          <p:cNvPr id="32" name="Text 29"/>
+          <p:cNvPr id="35" name="Text 32"/>
           <p:cNvSpPr txBox="1"/>
           <p:nvPr/>
         </p:nvSpPr>
@@ -11509,6 +12337,42 @@
         </p:nvSpPr>
         <p:spPr>
           <a:xfrm>
+            <a:off x="457200" y="402336"/>
+            <a:ext cx="11277295" cy="6053328"/>
+          </a:xfrm>
+          <a:prstGeom prst="roundRect">
+            <a:avLst>
+              <a:gd name="adj" fmla="val 2115"/>
+            </a:avLst>
+          </a:prstGeom>
+          <a:solidFill>
+            <a:srgbClr val="E6EAF0"/>
+          </a:solidFill>
+          <a:ln w="12700">
+            <a:solidFill>
+              <a:srgbClr val="8793A3">
+                <a:alpha val="84000"/>
+              </a:srgbClr>
+            </a:solidFill>
+            <a:prstDash val="solid"/>
+          </a:ln>
+          <a:effectLst>
+            <a:outerShdw sx="100000" sy="100000" kx="0" ky="0" algn="bl" rotWithShape="0" blurRad="13970" dist="50800" dir="2700000">
+              <a:srgbClr val="475569">
+                <a:alpha val="18000"/>
+              </a:srgbClr>
+            </a:outerShdw>
+          </a:effectLst>
+        </p:spPr>
+      </p:sp>
+      <p:sp>
+        <p:nvSpPr>
+          <p:cNvPr id="3" name="Shape 1"/>
+          <p:cNvSpPr/>
+          <p:nvPr/>
+        </p:nvSpPr>
+        <p:spPr>
+          <a:xfrm>
             <a:off x="530352" y="457200"/>
             <a:ext cx="11130991" cy="5943600"/>
           </a:xfrm>
@@ -11539,7 +12403,7 @@
       </p:sp>
       <p:sp>
         <p:nvSpPr>
-          <p:cNvPr id="3" name="Shape 1"/>
+          <p:cNvPr id="4" name="Shape 2"/>
           <p:cNvSpPr/>
           <p:nvPr/>
         </p:nvSpPr>
@@ -11562,7 +12426,63 @@
       </p:sp>
       <p:sp>
         <p:nvSpPr>
-          <p:cNvPr id="4" name="Shape 2"/>
+          <p:cNvPr id="5" name="Shape 3"/>
+          <p:cNvSpPr/>
+          <p:nvPr/>
+        </p:nvSpPr>
+        <p:spPr>
+          <a:xfrm>
+            <a:off x="658368" y="6217920"/>
+            <a:ext cx="10874959" cy="0"/>
+          </a:xfrm>
+          <a:prstGeom prst="line">
+            <a:avLst/>
+          </a:prstGeom>
+          <a:noFill/>
+          <a:ln w="12700">
+            <a:solidFill>
+              <a:srgbClr val="94A3B8">
+                <a:alpha val="66000"/>
+              </a:srgbClr>
+            </a:solidFill>
+            <a:prstDash val="solid"/>
+          </a:ln>
+        </p:spPr>
+      </p:sp>
+      <p:sp>
+        <p:nvSpPr>
+          <p:cNvPr id="6" name="Shape 4"/>
+          <p:cNvSpPr/>
+          <p:nvPr/>
+        </p:nvSpPr>
+        <p:spPr>
+          <a:xfrm>
+            <a:off x="10600639" y="512064"/>
+            <a:ext cx="877824" cy="201168"/>
+          </a:xfrm>
+          <a:prstGeom prst="roundRect">
+            <a:avLst>
+              <a:gd name="adj" fmla="val 18182"/>
+            </a:avLst>
+          </a:prstGeom>
+          <a:solidFill>
+            <a:srgbClr val="D7DDE6">
+              <a:alpha val="92000"/>
+            </a:srgbClr>
+          </a:solidFill>
+          <a:ln w="12700">
+            <a:solidFill>
+              <a:srgbClr val="FFFFFF">
+                <a:alpha val="82000"/>
+              </a:srgbClr>
+            </a:solidFill>
+            <a:prstDash val="solid"/>
+          </a:ln>
+        </p:spPr>
+      </p:sp>
+      <p:sp>
+        <p:nvSpPr>
+          <p:cNvPr id="7" name="Shape 5"/>
           <p:cNvSpPr/>
           <p:nvPr/>
         </p:nvSpPr>
@@ -11591,7 +12511,7 @@
       </p:sp>
       <p:sp>
         <p:nvSpPr>
-          <p:cNvPr id="5" name="Shape 3"/>
+          <p:cNvPr id="8" name="Shape 6"/>
           <p:cNvSpPr/>
           <p:nvPr/>
         </p:nvSpPr>
@@ -11620,7 +12540,7 @@
       </p:sp>
       <p:sp>
         <p:nvSpPr>
-          <p:cNvPr id="6" name="Shape 4"/>
+          <p:cNvPr id="9" name="Shape 7"/>
           <p:cNvSpPr/>
           <p:nvPr/>
         </p:nvSpPr>
@@ -11647,7 +12567,7 @@
       </p:sp>
       <p:sp>
         <p:nvSpPr>
-          <p:cNvPr id="7" name="Shape 5"/>
+          <p:cNvPr id="10" name="Shape 8"/>
           <p:cNvSpPr/>
           <p:nvPr/>
         </p:nvSpPr>
@@ -11674,7 +12594,7 @@
       </p:sp>
       <p:sp>
         <p:nvSpPr>
-          <p:cNvPr id="8" name="Shape 6"/>
+          <p:cNvPr id="11" name="Shape 9"/>
           <p:cNvSpPr/>
           <p:nvPr/>
         </p:nvSpPr>
@@ -11701,7 +12621,7 @@
       </p:sp>
       <p:pic>
         <p:nvPicPr>
-          <p:cNvPr id="9" name="Image 0" descr="preencoded.png">    </p:cNvPr>
+          <p:cNvPr id="12" name="Image 0" descr="preencoded.png">    </p:cNvPr>
           <p:cNvPicPr>
             <a:picLocks noChangeAspect="1"/>
           </p:cNvPicPr>
@@ -11731,7 +12651,7 @@
       </p:pic>
       <p:sp>
         <p:nvSpPr>
-          <p:cNvPr id="10" name="Shape 7"/>
+          <p:cNvPr id="13" name="Shape 10"/>
           <p:cNvSpPr/>
           <p:nvPr/>
         </p:nvSpPr>
@@ -11767,7 +12687,7 @@
       </p:sp>
       <p:sp>
         <p:nvSpPr>
-          <p:cNvPr id="11" name="mdpr:2-2-4dc4c1:title:__title:2-2-4dc4c1"/>
+          <p:cNvPr id="14" name="mdpr:2-2-4dc4c1:title:__title:2-2-4dc4c1"/>
           <p:cNvSpPr txBox="1"/>
           <p:nvPr/>
         </p:nvSpPr>
@@ -11809,7 +12729,7 @@
       </p:sp>
       <p:sp>
         <p:nvSpPr>
-          <p:cNvPr id="12" name="Shape 9"/>
+          <p:cNvPr id="15" name="Shape 12"/>
           <p:cNvSpPr/>
           <p:nvPr/>
         </p:nvSpPr>
@@ -11836,7 +12756,7 @@
       </p:sp>
       <p:sp>
         <p:nvSpPr>
-          <p:cNvPr id="13" name="Shape 10"/>
+          <p:cNvPr id="16" name="Shape 13"/>
           <p:cNvSpPr/>
           <p:nvPr/>
         </p:nvSpPr>
@@ -11863,7 +12783,7 @@
       </p:sp>
       <p:sp>
         <p:nvSpPr>
-          <p:cNvPr id="14" name="Text 11"/>
+          <p:cNvPr id="17" name="Text 14"/>
           <p:cNvSpPr txBox="1"/>
           <p:nvPr/>
         </p:nvSpPr>
@@ -11907,7 +12827,7 @@
       </p:sp>
       <p:sp>
         <p:nvSpPr>
-          <p:cNvPr id="15" name="Text 12"/>
+          <p:cNvPr id="18" name="Text 15"/>
           <p:cNvSpPr txBox="1"/>
           <p:nvPr/>
         </p:nvSpPr>
@@ -11951,7 +12871,7 @@
       </p:sp>
       <p:sp>
         <p:nvSpPr>
-          <p:cNvPr id="16" name="Shape 13"/>
+          <p:cNvPr id="19" name="Shape 16"/>
           <p:cNvSpPr/>
           <p:nvPr/>
         </p:nvSpPr>
@@ -11978,7 +12898,7 @@
       </p:sp>
       <p:sp>
         <p:nvSpPr>
-          <p:cNvPr id="17" name="Shape 14"/>
+          <p:cNvPr id="20" name="Shape 17"/>
           <p:cNvSpPr/>
           <p:nvPr/>
         </p:nvSpPr>
@@ -12005,7 +12925,7 @@
       </p:sp>
       <p:sp>
         <p:nvSpPr>
-          <p:cNvPr id="18" name="Text 15"/>
+          <p:cNvPr id="21" name="Text 18"/>
           <p:cNvSpPr txBox="1"/>
           <p:nvPr/>
         </p:nvSpPr>
@@ -12049,7 +12969,7 @@
       </p:sp>
       <p:sp>
         <p:nvSpPr>
-          <p:cNvPr id="19" name="Text 16"/>
+          <p:cNvPr id="22" name="Text 19"/>
           <p:cNvSpPr txBox="1"/>
           <p:nvPr/>
         </p:nvSpPr>
@@ -12093,7 +13013,7 @@
       </p:sp>
       <p:sp>
         <p:nvSpPr>
-          <p:cNvPr id="20" name="Shape 17"/>
+          <p:cNvPr id="23" name="Shape 20"/>
           <p:cNvSpPr/>
           <p:nvPr/>
         </p:nvSpPr>
@@ -12120,7 +13040,7 @@
       </p:sp>
       <p:sp>
         <p:nvSpPr>
-          <p:cNvPr id="21" name="Shape 18"/>
+          <p:cNvPr id="24" name="Shape 21"/>
           <p:cNvSpPr/>
           <p:nvPr/>
         </p:nvSpPr>
@@ -12147,7 +13067,7 @@
       </p:sp>
       <p:sp>
         <p:nvSpPr>
-          <p:cNvPr id="22" name="Text 19"/>
+          <p:cNvPr id="25" name="Text 22"/>
           <p:cNvSpPr txBox="1"/>
           <p:nvPr/>
         </p:nvSpPr>
@@ -12191,7 +13111,7 @@
       </p:sp>
       <p:sp>
         <p:nvSpPr>
-          <p:cNvPr id="23" name="Text 20"/>
+          <p:cNvPr id="26" name="Text 23"/>
           <p:cNvSpPr txBox="1"/>
           <p:nvPr/>
         </p:nvSpPr>
@@ -12235,7 +13155,7 @@
       </p:sp>
       <p:sp>
         <p:nvSpPr>
-          <p:cNvPr id="24" name="Shape 21"/>
+          <p:cNvPr id="27" name="Shape 24"/>
           <p:cNvSpPr/>
           <p:nvPr/>
         </p:nvSpPr>
@@ -12262,7 +13182,7 @@
       </p:sp>
       <p:sp>
         <p:nvSpPr>
-          <p:cNvPr id="25" name="Shape 22"/>
+          <p:cNvPr id="28" name="Shape 25"/>
           <p:cNvSpPr/>
           <p:nvPr/>
         </p:nvSpPr>
@@ -12289,7 +13209,7 @@
       </p:sp>
       <p:sp>
         <p:nvSpPr>
-          <p:cNvPr id="26" name="Text 23"/>
+          <p:cNvPr id="29" name="Text 26"/>
           <p:cNvSpPr txBox="1"/>
           <p:nvPr/>
         </p:nvSpPr>
@@ -12333,7 +13253,7 @@
       </p:sp>
       <p:sp>
         <p:nvSpPr>
-          <p:cNvPr id="27" name="Text 24"/>
+          <p:cNvPr id="30" name="Text 27"/>
           <p:cNvSpPr txBox="1"/>
           <p:nvPr/>
         </p:nvSpPr>
@@ -12377,7 +13297,7 @@
       </p:sp>
       <p:sp>
         <p:nvSpPr>
-          <p:cNvPr id="28" name="Shape 25"/>
+          <p:cNvPr id="31" name="Shape 28"/>
           <p:cNvSpPr/>
           <p:nvPr/>
         </p:nvSpPr>
@@ -12401,7 +13321,7 @@
       </p:sp>
       <p:sp>
         <p:nvSpPr>
-          <p:cNvPr id="29" name="Shape 26"/>
+          <p:cNvPr id="32" name="Shape 29"/>
           <p:cNvSpPr/>
           <p:nvPr/>
         </p:nvSpPr>
@@ -12425,7 +13345,7 @@
       </p:sp>
       <p:sp>
         <p:nvSpPr>
-          <p:cNvPr id="30" name="Shape 27"/>
+          <p:cNvPr id="33" name="Shape 30"/>
           <p:cNvSpPr/>
           <p:nvPr/>
         </p:nvSpPr>
@@ -12487,6 +13407,42 @@
         </p:nvSpPr>
         <p:spPr>
           <a:xfrm>
+            <a:off x="457200" y="402336"/>
+            <a:ext cx="11277295" cy="6053328"/>
+          </a:xfrm>
+          <a:prstGeom prst="roundRect">
+            <a:avLst>
+              <a:gd name="adj" fmla="val 2115"/>
+            </a:avLst>
+          </a:prstGeom>
+          <a:solidFill>
+            <a:srgbClr val="E6EAF0"/>
+          </a:solidFill>
+          <a:ln w="12700">
+            <a:solidFill>
+              <a:srgbClr val="8793A3">
+                <a:alpha val="84000"/>
+              </a:srgbClr>
+            </a:solidFill>
+            <a:prstDash val="solid"/>
+          </a:ln>
+          <a:effectLst>
+            <a:outerShdw sx="100000" sy="100000" kx="0" ky="0" algn="bl" rotWithShape="0" blurRad="13970" dist="50800" dir="2700000">
+              <a:srgbClr val="475569">
+                <a:alpha val="18000"/>
+              </a:srgbClr>
+            </a:outerShdw>
+          </a:effectLst>
+        </p:spPr>
+      </p:sp>
+      <p:sp>
+        <p:nvSpPr>
+          <p:cNvPr id="3" name="Shape 1"/>
+          <p:cNvSpPr/>
+          <p:nvPr/>
+        </p:nvSpPr>
+        <p:spPr>
+          <a:xfrm>
             <a:off x="530352" y="457200"/>
             <a:ext cx="11130991" cy="5943600"/>
           </a:xfrm>
@@ -12517,7 +13473,7 @@
       </p:sp>
       <p:sp>
         <p:nvSpPr>
-          <p:cNvPr id="3" name="Shape 1"/>
+          <p:cNvPr id="4" name="Shape 2"/>
           <p:cNvSpPr/>
           <p:nvPr/>
         </p:nvSpPr>
@@ -12540,7 +13496,63 @@
       </p:sp>
       <p:sp>
         <p:nvSpPr>
-          <p:cNvPr id="4" name="Shape 2"/>
+          <p:cNvPr id="5" name="Shape 3"/>
+          <p:cNvSpPr/>
+          <p:nvPr/>
+        </p:nvSpPr>
+        <p:spPr>
+          <a:xfrm>
+            <a:off x="658368" y="6217920"/>
+            <a:ext cx="10874959" cy="0"/>
+          </a:xfrm>
+          <a:prstGeom prst="line">
+            <a:avLst/>
+          </a:prstGeom>
+          <a:noFill/>
+          <a:ln w="12700">
+            <a:solidFill>
+              <a:srgbClr val="94A3B8">
+                <a:alpha val="66000"/>
+              </a:srgbClr>
+            </a:solidFill>
+            <a:prstDash val="solid"/>
+          </a:ln>
+        </p:spPr>
+      </p:sp>
+      <p:sp>
+        <p:nvSpPr>
+          <p:cNvPr id="6" name="Shape 4"/>
+          <p:cNvSpPr/>
+          <p:nvPr/>
+        </p:nvSpPr>
+        <p:spPr>
+          <a:xfrm>
+            <a:off x="10600639" y="512064"/>
+            <a:ext cx="877824" cy="201168"/>
+          </a:xfrm>
+          <a:prstGeom prst="roundRect">
+            <a:avLst>
+              <a:gd name="adj" fmla="val 18182"/>
+            </a:avLst>
+          </a:prstGeom>
+          <a:solidFill>
+            <a:srgbClr val="D7DDE6">
+              <a:alpha val="92000"/>
+            </a:srgbClr>
+          </a:solidFill>
+          <a:ln w="12700">
+            <a:solidFill>
+              <a:srgbClr val="FFFFFF">
+                <a:alpha val="82000"/>
+              </a:srgbClr>
+            </a:solidFill>
+            <a:prstDash val="solid"/>
+          </a:ln>
+        </p:spPr>
+      </p:sp>
+      <p:sp>
+        <p:nvSpPr>
+          <p:cNvPr id="7" name="Shape 5"/>
           <p:cNvSpPr/>
           <p:nvPr/>
         </p:nvSpPr>
@@ -12569,7 +13581,7 @@
       </p:sp>
       <p:sp>
         <p:nvSpPr>
-          <p:cNvPr id="5" name="Shape 3"/>
+          <p:cNvPr id="8" name="Shape 6"/>
           <p:cNvSpPr/>
           <p:nvPr/>
         </p:nvSpPr>
@@ -12598,7 +13610,7 @@
       </p:sp>
       <p:sp>
         <p:nvSpPr>
-          <p:cNvPr id="6" name="Shape 4"/>
+          <p:cNvPr id="9" name="Shape 7"/>
           <p:cNvSpPr/>
           <p:nvPr/>
         </p:nvSpPr>
@@ -12625,7 +13637,7 @@
       </p:sp>
       <p:sp>
         <p:nvSpPr>
-          <p:cNvPr id="7" name="Shape 5"/>
+          <p:cNvPr id="10" name="Shape 8"/>
           <p:cNvSpPr/>
           <p:nvPr/>
         </p:nvSpPr>
@@ -12652,7 +13664,7 @@
       </p:sp>
       <p:sp>
         <p:nvSpPr>
-          <p:cNvPr id="8" name="Shape 6"/>
+          <p:cNvPr id="11" name="Shape 9"/>
           <p:cNvSpPr/>
           <p:nvPr/>
         </p:nvSpPr>
@@ -12679,7 +13691,7 @@
       </p:sp>
       <p:pic>
         <p:nvPicPr>
-          <p:cNvPr id="9" name="Image 0" descr="preencoded.png">    </p:cNvPr>
+          <p:cNvPr id="12" name="Image 0" descr="preencoded.png">    </p:cNvPr>
           <p:cNvPicPr>
             <a:picLocks noChangeAspect="1"/>
           </p:cNvPicPr>
@@ -12709,7 +13721,7 @@
       </p:pic>
       <p:sp>
         <p:nvSpPr>
-          <p:cNvPr id="10" name="Shape 7"/>
+          <p:cNvPr id="13" name="Shape 10"/>
           <p:cNvSpPr/>
           <p:nvPr/>
         </p:nvSpPr>
@@ -12745,7 +13757,7 @@
       </p:sp>
       <p:pic>
         <p:nvPicPr>
-          <p:cNvPr id="11" name="Image 1" descr="preencoded.png">    </p:cNvPr>
+          <p:cNvPr id="14" name="Image 1" descr="preencoded.png">    </p:cNvPr>
           <p:cNvPicPr>
             <a:picLocks noChangeAspect="1"/>
           </p:cNvPicPr>
@@ -12775,7 +13787,7 @@
       </p:pic>
       <p:sp>
         <p:nvSpPr>
-          <p:cNvPr id="12" name="Shape 8"/>
+          <p:cNvPr id="15" name="Shape 11"/>
           <p:cNvSpPr/>
           <p:nvPr/>
         </p:nvSpPr>
@@ -12811,7 +13823,7 @@
       </p:sp>
       <p:pic>
         <p:nvPicPr>
-          <p:cNvPr id="13" name="Image 2" descr="preencoded.png">    </p:cNvPr>
+          <p:cNvPr id="16" name="Image 2" descr="preencoded.png">    </p:cNvPr>
           <p:cNvPicPr>
             <a:picLocks noChangeAspect="1"/>
           </p:cNvPicPr>
@@ -12841,7 +13853,7 @@
       </p:pic>
       <p:sp>
         <p:nvSpPr>
-          <p:cNvPr id="14" name="Shape 9"/>
+          <p:cNvPr id="17" name="Shape 12"/>
           <p:cNvSpPr/>
           <p:nvPr/>
         </p:nvSpPr>
@@ -12877,7 +13889,7 @@
       </p:sp>
       <p:sp>
         <p:nvSpPr>
-          <p:cNvPr id="15" name="Shape 10"/>
+          <p:cNvPr id="18" name="Shape 13"/>
           <p:cNvSpPr/>
           <p:nvPr/>
         </p:nvSpPr>
@@ -12906,7 +13918,7 @@
       </p:sp>
       <p:sp>
         <p:nvSpPr>
-          <p:cNvPr id="16" name="Shape 11"/>
+          <p:cNvPr id="19" name="Shape 14"/>
           <p:cNvSpPr/>
           <p:nvPr/>
         </p:nvSpPr>
@@ -12933,7 +13945,7 @@
       </p:sp>
       <p:sp>
         <p:nvSpPr>
-          <p:cNvPr id="17" name="Shape 12"/>
+          <p:cNvPr id="20" name="Shape 15"/>
           <p:cNvSpPr/>
           <p:nvPr/>
         </p:nvSpPr>
@@ -12960,7 +13972,7 @@
       </p:sp>
       <p:sp>
         <p:nvSpPr>
-          <p:cNvPr id="18" name="Shape 13"/>
+          <p:cNvPr id="21" name="Shape 16"/>
           <p:cNvSpPr/>
           <p:nvPr/>
         </p:nvSpPr>
@@ -12987,7 +13999,7 @@
       </p:sp>
       <p:sp>
         <p:nvSpPr>
-          <p:cNvPr id="19" name="mdpr:1-2-ea42c8:title:__title:1-2-ea42c8"/>
+          <p:cNvPr id="22" name="mdpr:1-2-ea42c8:title:__title:1-2-ea42c8"/>
           <p:cNvSpPr txBox="1"/>
           <p:nvPr/>
         </p:nvSpPr>
@@ -13029,7 +14041,7 @@
       </p:sp>
       <p:sp>
         <p:nvSpPr>
-          <p:cNvPr id="20" name="Shape 15"/>
+          <p:cNvPr id="23" name="Shape 18"/>
           <p:cNvSpPr/>
           <p:nvPr/>
         </p:nvSpPr>
@@ -13056,7 +14068,7 @@
       </p:sp>
       <p:pic>
         <p:nvPicPr>
-          <p:cNvPr id="21" name="Image 3" descr="article icon from tabler-icons (MIT)">    </p:cNvPr>
+          <p:cNvPr id="24" name="Image 3" descr="article icon from tabler-icons (MIT)">    </p:cNvPr>
           <p:cNvPicPr>
             <a:picLocks noChangeAspect="1"/>
           </p:cNvPicPr>
@@ -13086,7 +14098,7 @@
       </p:pic>
       <p:sp>
         <p:nvSpPr>
-          <p:cNvPr id="22" name="mdpr:1-2-ea42c8:item-1:block-27-chunk-1"/>
+          <p:cNvPr id="25" name="mdpr:1-2-ea42c8:item-1:block-27-chunk-1"/>
           <p:cNvSpPr txBox="1"/>
           <p:nvPr/>
         </p:nvSpPr>
@@ -13145,7 +14157,7 @@
       </p:sp>
       <p:sp>
         <p:nvSpPr>
-          <p:cNvPr id="23" name="Shape 17"/>
+          <p:cNvPr id="26" name="Shape 20"/>
           <p:cNvSpPr/>
           <p:nvPr/>
         </p:nvSpPr>
@@ -13172,7 +14184,7 @@
       </p:sp>
       <p:pic>
         <p:nvPicPr>
-          <p:cNvPr id="24" name="Image 4" descr="article icon from tabler-icons (MIT)">    </p:cNvPr>
+          <p:cNvPr id="27" name="Image 4" descr="article icon from tabler-icons (MIT)">    </p:cNvPr>
           <p:cNvPicPr>
             <a:picLocks noChangeAspect="1"/>
           </p:cNvPicPr>
@@ -13202,7 +14214,7 @@
       </p:pic>
       <p:sp>
         <p:nvSpPr>
-          <p:cNvPr id="25" name="mdpr:1-2-ea42c8:item-2:block-27-chunk-1"/>
+          <p:cNvPr id="28" name="mdpr:1-2-ea42c8:item-2:block-27-chunk-1"/>
           <p:cNvSpPr txBox="1"/>
           <p:nvPr/>
         </p:nvSpPr>
@@ -13261,7 +14273,7 @@
       </p:sp>
       <p:sp>
         <p:nvSpPr>
-          <p:cNvPr id="26" name="Shape 19"/>
+          <p:cNvPr id="29" name="Shape 22"/>
           <p:cNvSpPr/>
           <p:nvPr/>
         </p:nvSpPr>
@@ -13288,7 +14300,7 @@
       </p:sp>
       <p:pic>
         <p:nvPicPr>
-          <p:cNvPr id="27" name="Image 5" descr="article icon from tabler-icons (MIT)">    </p:cNvPr>
+          <p:cNvPr id="30" name="Image 5" descr="article icon from tabler-icons (MIT)">    </p:cNvPr>
           <p:cNvPicPr>
             <a:picLocks noChangeAspect="1"/>
           </p:cNvPicPr>
@@ -13318,7 +14330,7 @@
       </p:pic>
       <p:sp>
         <p:nvSpPr>
-          <p:cNvPr id="28" name="mdpr:1-2-ea42c8:item-3:block-27-chunk-1"/>
+          <p:cNvPr id="31" name="mdpr:1-2-ea42c8:item-3:block-27-chunk-1"/>
           <p:cNvSpPr txBox="1"/>
           <p:nvPr/>
         </p:nvSpPr>
@@ -13415,6 +14427,42 @@
         </p:nvSpPr>
         <p:spPr>
           <a:xfrm>
+            <a:off x="457200" y="402336"/>
+            <a:ext cx="11277295" cy="6053328"/>
+          </a:xfrm>
+          <a:prstGeom prst="roundRect">
+            <a:avLst>
+              <a:gd name="adj" fmla="val 2115"/>
+            </a:avLst>
+          </a:prstGeom>
+          <a:solidFill>
+            <a:srgbClr val="E6EAF0"/>
+          </a:solidFill>
+          <a:ln w="12700">
+            <a:solidFill>
+              <a:srgbClr val="8793A3">
+                <a:alpha val="84000"/>
+              </a:srgbClr>
+            </a:solidFill>
+            <a:prstDash val="solid"/>
+          </a:ln>
+          <a:effectLst>
+            <a:outerShdw sx="100000" sy="100000" kx="0" ky="0" algn="bl" rotWithShape="0" blurRad="13970" dist="50800" dir="2700000">
+              <a:srgbClr val="475569">
+                <a:alpha val="18000"/>
+              </a:srgbClr>
+            </a:outerShdw>
+          </a:effectLst>
+        </p:spPr>
+      </p:sp>
+      <p:sp>
+        <p:nvSpPr>
+          <p:cNvPr id="3" name="Shape 1"/>
+          <p:cNvSpPr/>
+          <p:nvPr/>
+        </p:nvSpPr>
+        <p:spPr>
+          <a:xfrm>
             <a:off x="530352" y="457200"/>
             <a:ext cx="11130991" cy="5943600"/>
           </a:xfrm>
@@ -13445,7 +14493,7 @@
       </p:sp>
       <p:sp>
         <p:nvSpPr>
-          <p:cNvPr id="3" name="Shape 1"/>
+          <p:cNvPr id="4" name="Shape 2"/>
           <p:cNvSpPr/>
           <p:nvPr/>
         </p:nvSpPr>
@@ -13468,7 +14516,63 @@
       </p:sp>
       <p:sp>
         <p:nvSpPr>
-          <p:cNvPr id="4" name="Shape 2"/>
+          <p:cNvPr id="5" name="Shape 3"/>
+          <p:cNvSpPr/>
+          <p:nvPr/>
+        </p:nvSpPr>
+        <p:spPr>
+          <a:xfrm>
+            <a:off x="658368" y="6217920"/>
+            <a:ext cx="10874959" cy="0"/>
+          </a:xfrm>
+          <a:prstGeom prst="line">
+            <a:avLst/>
+          </a:prstGeom>
+          <a:noFill/>
+          <a:ln w="12700">
+            <a:solidFill>
+              <a:srgbClr val="94A3B8">
+                <a:alpha val="66000"/>
+              </a:srgbClr>
+            </a:solidFill>
+            <a:prstDash val="solid"/>
+          </a:ln>
+        </p:spPr>
+      </p:sp>
+      <p:sp>
+        <p:nvSpPr>
+          <p:cNvPr id="6" name="Shape 4"/>
+          <p:cNvSpPr/>
+          <p:nvPr/>
+        </p:nvSpPr>
+        <p:spPr>
+          <a:xfrm>
+            <a:off x="10600639" y="512064"/>
+            <a:ext cx="877824" cy="201168"/>
+          </a:xfrm>
+          <a:prstGeom prst="roundRect">
+            <a:avLst>
+              <a:gd name="adj" fmla="val 18182"/>
+            </a:avLst>
+          </a:prstGeom>
+          <a:solidFill>
+            <a:srgbClr val="D7DDE6">
+              <a:alpha val="92000"/>
+            </a:srgbClr>
+          </a:solidFill>
+          <a:ln w="12700">
+            <a:solidFill>
+              <a:srgbClr val="FFFFFF">
+                <a:alpha val="82000"/>
+              </a:srgbClr>
+            </a:solidFill>
+            <a:prstDash val="solid"/>
+          </a:ln>
+        </p:spPr>
+      </p:sp>
+      <p:sp>
+        <p:nvSpPr>
+          <p:cNvPr id="7" name="Shape 5"/>
           <p:cNvSpPr/>
           <p:nvPr/>
         </p:nvSpPr>
@@ -13497,7 +14601,7 @@
       </p:sp>
       <p:sp>
         <p:nvSpPr>
-          <p:cNvPr id="5" name="Shape 3"/>
+          <p:cNvPr id="8" name="Shape 6"/>
           <p:cNvSpPr/>
           <p:nvPr/>
         </p:nvSpPr>
@@ -13526,7 +14630,7 @@
       </p:sp>
       <p:sp>
         <p:nvSpPr>
-          <p:cNvPr id="6" name="Shape 4"/>
+          <p:cNvPr id="9" name="Shape 7"/>
           <p:cNvSpPr/>
           <p:nvPr/>
         </p:nvSpPr>
@@ -13553,7 +14657,7 @@
       </p:sp>
       <p:sp>
         <p:nvSpPr>
-          <p:cNvPr id="7" name="Shape 5"/>
+          <p:cNvPr id="10" name="Shape 8"/>
           <p:cNvSpPr/>
           <p:nvPr/>
         </p:nvSpPr>
@@ -13580,7 +14684,7 @@
       </p:sp>
       <p:sp>
         <p:nvSpPr>
-          <p:cNvPr id="8" name="Shape 6"/>
+          <p:cNvPr id="11" name="Shape 9"/>
           <p:cNvSpPr/>
           <p:nvPr/>
         </p:nvSpPr>
@@ -13607,7 +14711,7 @@
       </p:sp>
       <p:sp>
         <p:nvSpPr>
-          <p:cNvPr id="9" name="Shape 7"/>
+          <p:cNvPr id="12" name="Shape 10"/>
           <p:cNvSpPr/>
           <p:nvPr/>
         </p:nvSpPr>
@@ -13634,7 +14738,7 @@
       </p:sp>
       <p:sp>
         <p:nvSpPr>
-          <p:cNvPr id="10" name="Shape 8"/>
+          <p:cNvPr id="13" name="Shape 11"/>
           <p:cNvSpPr/>
           <p:nvPr/>
         </p:nvSpPr>
@@ -13661,7 +14765,7 @@
       </p:sp>
       <p:sp>
         <p:nvSpPr>
-          <p:cNvPr id="11" name="Shape 9"/>
+          <p:cNvPr id="14" name="Shape 12"/>
           <p:cNvSpPr/>
           <p:nvPr/>
         </p:nvSpPr>
@@ -13690,7 +14794,7 @@
       </p:sp>
       <p:sp>
         <p:nvSpPr>
-          <p:cNvPr id="12" name="Shape 10"/>
+          <p:cNvPr id="15" name="Shape 13"/>
           <p:cNvSpPr/>
           <p:nvPr/>
         </p:nvSpPr>
@@ -13717,7 +14821,7 @@
       </p:sp>
       <p:sp>
         <p:nvSpPr>
-          <p:cNvPr id="13" name="Shape 11"/>
+          <p:cNvPr id="16" name="Shape 14"/>
           <p:cNvSpPr/>
           <p:nvPr/>
         </p:nvSpPr>
@@ -13744,7 +14848,7 @@
       </p:sp>
       <p:sp>
         <p:nvSpPr>
-          <p:cNvPr id="14" name="Shape 12"/>
+          <p:cNvPr id="17" name="Shape 15"/>
           <p:cNvSpPr/>
           <p:nvPr/>
         </p:nvSpPr>
@@ -13771,7 +14875,7 @@
       </p:sp>
       <p:sp>
         <p:nvSpPr>
-          <p:cNvPr id="15" name="Shape 13"/>
+          <p:cNvPr id="18" name="Shape 16"/>
           <p:cNvSpPr/>
           <p:nvPr/>
         </p:nvSpPr>
@@ -13798,7 +14902,7 @@
       </p:sp>
       <p:sp>
         <p:nvSpPr>
-          <p:cNvPr id="16" name="Shape 14"/>
+          <p:cNvPr id="19" name="Shape 17"/>
           <p:cNvSpPr/>
           <p:nvPr/>
         </p:nvSpPr>
@@ -13825,7 +14929,7 @@
       </p:sp>
       <p:sp>
         <p:nvSpPr>
-          <p:cNvPr id="17" name="Shape 15"/>
+          <p:cNvPr id="20" name="Shape 18"/>
           <p:cNvSpPr/>
           <p:nvPr/>
         </p:nvSpPr>
@@ -13852,7 +14956,7 @@
       </p:sp>
       <p:sp>
         <p:nvSpPr>
-          <p:cNvPr id="18" name="Shape 16"/>
+          <p:cNvPr id="21" name="Shape 19"/>
           <p:cNvSpPr/>
           <p:nvPr/>
         </p:nvSpPr>
@@ -13879,7 +14983,7 @@
       </p:sp>
       <p:sp>
         <p:nvSpPr>
-          <p:cNvPr id="19" name="Shape 17"/>
+          <p:cNvPr id="22" name="Shape 20"/>
           <p:cNvSpPr/>
           <p:nvPr/>
         </p:nvSpPr>
@@ -13906,7 +15010,7 @@
       </p:sp>
       <p:sp>
         <p:nvSpPr>
-          <p:cNvPr id="20" name="Shape 18"/>
+          <p:cNvPr id="23" name="Shape 21"/>
           <p:cNvSpPr/>
           <p:nvPr/>
         </p:nvSpPr>
@@ -13933,7 +15037,7 @@
       </p:sp>
       <p:sp>
         <p:nvSpPr>
-          <p:cNvPr id="21" name="Shape 19"/>
+          <p:cNvPr id="24" name="Shape 22"/>
           <p:cNvSpPr/>
           <p:nvPr/>
         </p:nvSpPr>
@@ -13960,7 +15064,7 @@
       </p:sp>
       <p:sp>
         <p:nvSpPr>
-          <p:cNvPr id="22" name="Shape 20"/>
+          <p:cNvPr id="25" name="Shape 23"/>
           <p:cNvSpPr/>
           <p:nvPr/>
         </p:nvSpPr>
@@ -13987,7 +15091,7 @@
       </p:sp>
       <p:sp>
         <p:nvSpPr>
-          <p:cNvPr id="23" name="Shape 21"/>
+          <p:cNvPr id="26" name="Shape 24"/>
           <p:cNvSpPr/>
           <p:nvPr/>
         </p:nvSpPr>
@@ -14014,7 +15118,7 @@
       </p:sp>
       <p:sp>
         <p:nvSpPr>
-          <p:cNvPr id="24" name="Shape 22"/>
+          <p:cNvPr id="27" name="Shape 25"/>
           <p:cNvSpPr/>
           <p:nvPr/>
         </p:nvSpPr>
@@ -14041,7 +15145,7 @@
       </p:sp>
       <p:sp>
         <p:nvSpPr>
-          <p:cNvPr id="25" name="Shape 23"/>
+          <p:cNvPr id="28" name="Shape 26"/>
           <p:cNvSpPr/>
           <p:nvPr/>
         </p:nvSpPr>
@@ -14068,7 +15172,7 @@
       </p:sp>
       <p:sp>
         <p:nvSpPr>
-          <p:cNvPr id="26" name="mdpr:1-2-0772f8:title:__title:1-2-0772f8"/>
+          <p:cNvPr id="29" name="mdpr:1-2-0772f8:title:__title:1-2-0772f8"/>
           <p:cNvSpPr txBox="1"/>
           <p:nvPr/>
         </p:nvSpPr>
@@ -14110,7 +15214,7 @@
       </p:sp>
       <p:sp>
         <p:nvSpPr>
-          <p:cNvPr id="27" name="mdpr:1-2-0772f8:toc-item-1:toc-item-1"/>
+          <p:cNvPr id="30" name="mdpr:1-2-0772f8:toc-item-1:toc-item-1"/>
           <p:cNvSpPr txBox="1"/>
           <p:nvPr/>
         </p:nvSpPr>
@@ -14152,7 +15256,7 @@
       </p:sp>
       <p:sp>
         <p:nvSpPr>
-          <p:cNvPr id="28" name="mdpr:1-2-0772f8:toc-item-2:toc-item-2"/>
+          <p:cNvPr id="31" name="mdpr:1-2-0772f8:toc-item-2:toc-item-2"/>
           <p:cNvSpPr txBox="1"/>
           <p:nvPr/>
         </p:nvSpPr>
@@ -14194,7 +15298,7 @@
       </p:sp>
       <p:sp>
         <p:nvSpPr>
-          <p:cNvPr id="29" name="mdpr:1-2-0772f8:toc-item-3:toc-item-3"/>
+          <p:cNvPr id="32" name="mdpr:1-2-0772f8:toc-item-3:toc-item-3"/>
           <p:cNvSpPr txBox="1"/>
           <p:nvPr/>
         </p:nvSpPr>
@@ -14236,7 +15340,7 @@
       </p:sp>
       <p:sp>
         <p:nvSpPr>
-          <p:cNvPr id="30" name="mdpr:1-2-0772f8:toc-item-4:toc-item-4"/>
+          <p:cNvPr id="33" name="mdpr:1-2-0772f8:toc-item-4:toc-item-4"/>
           <p:cNvSpPr txBox="1"/>
           <p:nvPr/>
         </p:nvSpPr>
@@ -14278,7 +15382,7 @@
       </p:sp>
       <p:sp>
         <p:nvSpPr>
-          <p:cNvPr id="31" name="mdpr:1-2-0772f8:toc-item-5:toc-item-5"/>
+          <p:cNvPr id="34" name="mdpr:1-2-0772f8:toc-item-5:toc-item-5"/>
           <p:cNvSpPr txBox="1"/>
           <p:nvPr/>
         </p:nvSpPr>
@@ -14320,7 +15424,7 @@
       </p:sp>
       <p:sp>
         <p:nvSpPr>
-          <p:cNvPr id="32" name="mdpr:1-2-0772f8:toc-item-6:toc-item-6"/>
+          <p:cNvPr id="35" name="mdpr:1-2-0772f8:toc-item-6:toc-item-6"/>
           <p:cNvSpPr txBox="1"/>
           <p:nvPr/>
         </p:nvSpPr>
@@ -14362,7 +15466,7 @@
       </p:sp>
       <p:sp>
         <p:nvSpPr>
-          <p:cNvPr id="33" name="mdpr:1-2-0772f8:toc-item-7:toc-item-7"/>
+          <p:cNvPr id="36" name="mdpr:1-2-0772f8:toc-item-7:toc-item-7"/>
           <p:cNvSpPr txBox="1"/>
           <p:nvPr/>
         </p:nvSpPr>
@@ -14404,7 +15508,7 @@
       </p:sp>
       <p:sp>
         <p:nvSpPr>
-          <p:cNvPr id="34" name="mdpr:1-2-0772f8:toc-item-8:toc-item-8"/>
+          <p:cNvPr id="37" name="mdpr:1-2-0772f8:toc-item-8:toc-item-8"/>
           <p:cNvSpPr txBox="1"/>
           <p:nvPr/>
         </p:nvSpPr>
@@ -14446,7 +15550,7 @@
       </p:sp>
       <p:sp>
         <p:nvSpPr>
-          <p:cNvPr id="35" name="mdpr:1-2-0772f8:toc-item-9:toc-item-9"/>
+          <p:cNvPr id="38" name="mdpr:1-2-0772f8:toc-item-9:toc-item-9"/>
           <p:cNvSpPr txBox="1"/>
           <p:nvPr/>
         </p:nvSpPr>
@@ -14488,7 +15592,7 @@
       </p:sp>
       <p:sp>
         <p:nvSpPr>
-          <p:cNvPr id="36" name="mdpr:1-2-0772f8:toc-item-10:toc-item-10"/>
+          <p:cNvPr id="39" name="mdpr:1-2-0772f8:toc-item-10:toc-item-10"/>
           <p:cNvSpPr txBox="1"/>
           <p:nvPr/>
         </p:nvSpPr>
@@ -14530,7 +15634,7 @@
       </p:sp>
       <p:sp>
         <p:nvSpPr>
-          <p:cNvPr id="37" name="mdpr:1-2-0772f8:toc-item-11:toc-item-11"/>
+          <p:cNvPr id="40" name="mdpr:1-2-0772f8:toc-item-11:toc-item-11"/>
           <p:cNvSpPr txBox="1"/>
           <p:nvPr/>
         </p:nvSpPr>
@@ -14572,7 +15676,7 @@
       </p:sp>
       <p:sp>
         <p:nvSpPr>
-          <p:cNvPr id="38" name="mdpr:1-2-0772f8:toc-item-12:toc-item-12"/>
+          <p:cNvPr id="41" name="mdpr:1-2-0772f8:toc-item-12:toc-item-12"/>
           <p:cNvSpPr txBox="1"/>
           <p:nvPr/>
         </p:nvSpPr>
@@ -14614,7 +15718,7 @@
       </p:sp>
       <p:sp>
         <p:nvSpPr>
-          <p:cNvPr id="39" name="mdpr:1-2-0772f8:toc-item-13:toc-item-13"/>
+          <p:cNvPr id="42" name="mdpr:1-2-0772f8:toc-item-13:toc-item-13"/>
           <p:cNvSpPr txBox="1"/>
           <p:nvPr/>
         </p:nvSpPr>
@@ -14656,7 +15760,7 @@
       </p:sp>
       <p:sp>
         <p:nvSpPr>
-          <p:cNvPr id="40" name="mdpr:1-2-0772f8:toc-item-14:toc-item-14"/>
+          <p:cNvPr id="43" name="mdpr:1-2-0772f8:toc-item-14:toc-item-14"/>
           <p:cNvSpPr txBox="1"/>
           <p:nvPr/>
         </p:nvSpPr>
@@ -14736,6 +15840,42 @@
         </p:nvSpPr>
         <p:spPr>
           <a:xfrm>
+            <a:off x="457200" y="402336"/>
+            <a:ext cx="11277295" cy="6053328"/>
+          </a:xfrm>
+          <a:prstGeom prst="roundRect">
+            <a:avLst>
+              <a:gd name="adj" fmla="val 2115"/>
+            </a:avLst>
+          </a:prstGeom>
+          <a:solidFill>
+            <a:srgbClr val="E6EAF0"/>
+          </a:solidFill>
+          <a:ln w="12700">
+            <a:solidFill>
+              <a:srgbClr val="8793A3">
+                <a:alpha val="84000"/>
+              </a:srgbClr>
+            </a:solidFill>
+            <a:prstDash val="solid"/>
+          </a:ln>
+          <a:effectLst>
+            <a:outerShdw sx="100000" sy="100000" kx="0" ky="0" algn="bl" rotWithShape="0" blurRad="13970" dist="50800" dir="2700000">
+              <a:srgbClr val="475569">
+                <a:alpha val="18000"/>
+              </a:srgbClr>
+            </a:outerShdw>
+          </a:effectLst>
+        </p:spPr>
+      </p:sp>
+      <p:sp>
+        <p:nvSpPr>
+          <p:cNvPr id="3" name="Shape 1"/>
+          <p:cNvSpPr/>
+          <p:nvPr/>
+        </p:nvSpPr>
+        <p:spPr>
+          <a:xfrm>
             <a:off x="530352" y="457200"/>
             <a:ext cx="11130991" cy="5943600"/>
           </a:xfrm>
@@ -14766,7 +15906,7 @@
       </p:sp>
       <p:sp>
         <p:nvSpPr>
-          <p:cNvPr id="3" name="Shape 1"/>
+          <p:cNvPr id="4" name="Shape 2"/>
           <p:cNvSpPr/>
           <p:nvPr/>
         </p:nvSpPr>
@@ -14789,7 +15929,63 @@
       </p:sp>
       <p:sp>
         <p:nvSpPr>
-          <p:cNvPr id="4" name="Shape 2"/>
+          <p:cNvPr id="5" name="Shape 3"/>
+          <p:cNvSpPr/>
+          <p:nvPr/>
+        </p:nvSpPr>
+        <p:spPr>
+          <a:xfrm>
+            <a:off x="658368" y="6217920"/>
+            <a:ext cx="10874959" cy="0"/>
+          </a:xfrm>
+          <a:prstGeom prst="line">
+            <a:avLst/>
+          </a:prstGeom>
+          <a:noFill/>
+          <a:ln w="12700">
+            <a:solidFill>
+              <a:srgbClr val="94A3B8">
+                <a:alpha val="66000"/>
+              </a:srgbClr>
+            </a:solidFill>
+            <a:prstDash val="solid"/>
+          </a:ln>
+        </p:spPr>
+      </p:sp>
+      <p:sp>
+        <p:nvSpPr>
+          <p:cNvPr id="6" name="Shape 4"/>
+          <p:cNvSpPr/>
+          <p:nvPr/>
+        </p:nvSpPr>
+        <p:spPr>
+          <a:xfrm>
+            <a:off x="10600639" y="512064"/>
+            <a:ext cx="877824" cy="201168"/>
+          </a:xfrm>
+          <a:prstGeom prst="roundRect">
+            <a:avLst>
+              <a:gd name="adj" fmla="val 18182"/>
+            </a:avLst>
+          </a:prstGeom>
+          <a:solidFill>
+            <a:srgbClr val="D7DDE6">
+              <a:alpha val="92000"/>
+            </a:srgbClr>
+          </a:solidFill>
+          <a:ln w="12700">
+            <a:solidFill>
+              <a:srgbClr val="FFFFFF">
+                <a:alpha val="82000"/>
+              </a:srgbClr>
+            </a:solidFill>
+            <a:prstDash val="solid"/>
+          </a:ln>
+        </p:spPr>
+      </p:sp>
+      <p:sp>
+        <p:nvSpPr>
+          <p:cNvPr id="7" name="Shape 5"/>
           <p:cNvSpPr/>
           <p:nvPr/>
         </p:nvSpPr>
@@ -14818,7 +16014,7 @@
       </p:sp>
       <p:sp>
         <p:nvSpPr>
-          <p:cNvPr id="5" name="Shape 3"/>
+          <p:cNvPr id="8" name="Shape 6"/>
           <p:cNvSpPr/>
           <p:nvPr/>
         </p:nvSpPr>
@@ -14847,7 +16043,7 @@
       </p:sp>
       <p:sp>
         <p:nvSpPr>
-          <p:cNvPr id="6" name="Shape 4"/>
+          <p:cNvPr id="9" name="Shape 7"/>
           <p:cNvSpPr/>
           <p:nvPr/>
         </p:nvSpPr>
@@ -14874,7 +16070,7 @@
       </p:sp>
       <p:sp>
         <p:nvSpPr>
-          <p:cNvPr id="7" name="Shape 5"/>
+          <p:cNvPr id="10" name="Shape 8"/>
           <p:cNvSpPr/>
           <p:nvPr/>
         </p:nvSpPr>
@@ -14901,7 +16097,7 @@
       </p:sp>
       <p:sp>
         <p:nvSpPr>
-          <p:cNvPr id="8" name="Shape 6"/>
+          <p:cNvPr id="11" name="Shape 9"/>
           <p:cNvSpPr/>
           <p:nvPr/>
         </p:nvSpPr>
@@ -14928,7 +16124,7 @@
       </p:sp>
       <p:sp>
         <p:nvSpPr>
-          <p:cNvPr id="9" name="Shape 7"/>
+          <p:cNvPr id="12" name="Shape 10"/>
           <p:cNvSpPr/>
           <p:nvPr/>
         </p:nvSpPr>
@@ -14955,7 +16151,7 @@
       </p:sp>
       <p:sp>
         <p:nvSpPr>
-          <p:cNvPr id="10" name="Shape 8"/>
+          <p:cNvPr id="13" name="Shape 11"/>
           <p:cNvSpPr/>
           <p:nvPr/>
         </p:nvSpPr>
@@ -14982,7 +16178,7 @@
       </p:sp>
       <p:sp>
         <p:nvSpPr>
-          <p:cNvPr id="11" name="mdpr:2-2-4f71ba:title:__title:2-2-4f71ba"/>
+          <p:cNvPr id="14" name="mdpr:2-2-4f71ba:title:__title:2-2-4f71ba"/>
           <p:cNvSpPr txBox="1"/>
           <p:nvPr/>
         </p:nvSpPr>
@@ -15024,7 +16220,7 @@
       </p:sp>
       <p:sp>
         <p:nvSpPr>
-          <p:cNvPr id="12" name="mdpr:2-2-4f71ba:left:block-27-chunk-2"/>
+          <p:cNvPr id="15" name="mdpr:2-2-4f71ba:left:block-27-chunk-2"/>
           <p:cNvSpPr txBox="1"/>
           <p:nvPr/>
         </p:nvSpPr>
@@ -15083,7 +16279,7 @@
       </p:sp>
       <p:sp>
         <p:nvSpPr>
-          <p:cNvPr id="13" name="mdpr:2-2-4f71ba:right:block-27-chunk-2"/>
+          <p:cNvPr id="16" name="mdpr:2-2-4f71ba:right:block-27-chunk-2"/>
           <p:cNvSpPr txBox="1"/>
           <p:nvPr/>
         </p:nvSpPr>
@@ -15180,6 +16376,42 @@
         </p:nvSpPr>
         <p:spPr>
           <a:xfrm>
+            <a:off x="457200" y="402336"/>
+            <a:ext cx="11277295" cy="6053328"/>
+          </a:xfrm>
+          <a:prstGeom prst="roundRect">
+            <a:avLst>
+              <a:gd name="adj" fmla="val 2115"/>
+            </a:avLst>
+          </a:prstGeom>
+          <a:solidFill>
+            <a:srgbClr val="E6EAF0"/>
+          </a:solidFill>
+          <a:ln w="12700">
+            <a:solidFill>
+              <a:srgbClr val="8793A3">
+                <a:alpha val="84000"/>
+              </a:srgbClr>
+            </a:solidFill>
+            <a:prstDash val="solid"/>
+          </a:ln>
+          <a:effectLst>
+            <a:outerShdw sx="100000" sy="100000" kx="0" ky="0" algn="bl" rotWithShape="0" blurRad="13970" dist="50800" dir="2700000">
+              <a:srgbClr val="475569">
+                <a:alpha val="18000"/>
+              </a:srgbClr>
+            </a:outerShdw>
+          </a:effectLst>
+        </p:spPr>
+      </p:sp>
+      <p:sp>
+        <p:nvSpPr>
+          <p:cNvPr id="3" name="Shape 1"/>
+          <p:cNvSpPr/>
+          <p:nvPr/>
+        </p:nvSpPr>
+        <p:spPr>
+          <a:xfrm>
             <a:off x="530352" y="457200"/>
             <a:ext cx="11130991" cy="5943600"/>
           </a:xfrm>
@@ -15210,7 +16442,7 @@
       </p:sp>
       <p:sp>
         <p:nvSpPr>
-          <p:cNvPr id="3" name="Shape 1"/>
+          <p:cNvPr id="4" name="Shape 2"/>
           <p:cNvSpPr/>
           <p:nvPr/>
         </p:nvSpPr>
@@ -15233,7 +16465,63 @@
       </p:sp>
       <p:sp>
         <p:nvSpPr>
-          <p:cNvPr id="4" name="Shape 2"/>
+          <p:cNvPr id="5" name="Shape 3"/>
+          <p:cNvSpPr/>
+          <p:nvPr/>
+        </p:nvSpPr>
+        <p:spPr>
+          <a:xfrm>
+            <a:off x="658368" y="6217920"/>
+            <a:ext cx="10874959" cy="0"/>
+          </a:xfrm>
+          <a:prstGeom prst="line">
+            <a:avLst/>
+          </a:prstGeom>
+          <a:noFill/>
+          <a:ln w="12700">
+            <a:solidFill>
+              <a:srgbClr val="94A3B8">
+                <a:alpha val="66000"/>
+              </a:srgbClr>
+            </a:solidFill>
+            <a:prstDash val="solid"/>
+          </a:ln>
+        </p:spPr>
+      </p:sp>
+      <p:sp>
+        <p:nvSpPr>
+          <p:cNvPr id="6" name="Shape 4"/>
+          <p:cNvSpPr/>
+          <p:nvPr/>
+        </p:nvSpPr>
+        <p:spPr>
+          <a:xfrm>
+            <a:off x="10600639" y="512064"/>
+            <a:ext cx="877824" cy="201168"/>
+          </a:xfrm>
+          <a:prstGeom prst="roundRect">
+            <a:avLst>
+              <a:gd name="adj" fmla="val 18182"/>
+            </a:avLst>
+          </a:prstGeom>
+          <a:solidFill>
+            <a:srgbClr val="D7DDE6">
+              <a:alpha val="92000"/>
+            </a:srgbClr>
+          </a:solidFill>
+          <a:ln w="12700">
+            <a:solidFill>
+              <a:srgbClr val="FFFFFF">
+                <a:alpha val="82000"/>
+              </a:srgbClr>
+            </a:solidFill>
+            <a:prstDash val="solid"/>
+          </a:ln>
+        </p:spPr>
+      </p:sp>
+      <p:sp>
+        <p:nvSpPr>
+          <p:cNvPr id="7" name="Shape 5"/>
           <p:cNvSpPr/>
           <p:nvPr/>
         </p:nvSpPr>
@@ -15262,7 +16550,7 @@
       </p:sp>
       <p:sp>
         <p:nvSpPr>
-          <p:cNvPr id="5" name="Shape 3"/>
+          <p:cNvPr id="8" name="Shape 6"/>
           <p:cNvSpPr/>
           <p:nvPr/>
         </p:nvSpPr>
@@ -15291,7 +16579,7 @@
       </p:sp>
       <p:sp>
         <p:nvSpPr>
-          <p:cNvPr id="6" name="Shape 4"/>
+          <p:cNvPr id="9" name="Shape 7"/>
           <p:cNvSpPr/>
           <p:nvPr/>
         </p:nvSpPr>
@@ -15318,7 +16606,7 @@
       </p:sp>
       <p:sp>
         <p:nvSpPr>
-          <p:cNvPr id="7" name="Shape 5"/>
+          <p:cNvPr id="10" name="Shape 8"/>
           <p:cNvSpPr/>
           <p:nvPr/>
         </p:nvSpPr>
@@ -15345,7 +16633,7 @@
       </p:sp>
       <p:sp>
         <p:nvSpPr>
-          <p:cNvPr id="8" name="Shape 6"/>
+          <p:cNvPr id="11" name="Shape 9"/>
           <p:cNvSpPr/>
           <p:nvPr/>
         </p:nvSpPr>
@@ -15372,7 +16660,7 @@
       </p:sp>
       <p:pic>
         <p:nvPicPr>
-          <p:cNvPr id="9" name="Image 0" descr="preencoded.png">    </p:cNvPr>
+          <p:cNvPr id="12" name="Image 0" descr="preencoded.png">    </p:cNvPr>
           <p:cNvPicPr>
             <a:picLocks noChangeAspect="1"/>
           </p:cNvPicPr>
@@ -15402,7 +16690,7 @@
       </p:pic>
       <p:sp>
         <p:nvSpPr>
-          <p:cNvPr id="10" name="Shape 7"/>
+          <p:cNvPr id="13" name="Shape 10"/>
           <p:cNvSpPr/>
           <p:nvPr/>
         </p:nvSpPr>
@@ -15438,7 +16726,7 @@
       </p:sp>
       <p:pic>
         <p:nvPicPr>
-          <p:cNvPr id="11" name="Image 1" descr="preencoded.png">    </p:cNvPr>
+          <p:cNvPr id="14" name="Image 1" descr="preencoded.png">    </p:cNvPr>
           <p:cNvPicPr>
             <a:picLocks noChangeAspect="1"/>
           </p:cNvPicPr>
@@ -15468,7 +16756,7 @@
       </p:pic>
       <p:sp>
         <p:nvSpPr>
-          <p:cNvPr id="12" name="Shape 8"/>
+          <p:cNvPr id="15" name="Shape 11"/>
           <p:cNvSpPr/>
           <p:nvPr/>
         </p:nvSpPr>
@@ -15504,7 +16792,7 @@
       </p:sp>
       <p:pic>
         <p:nvPicPr>
-          <p:cNvPr id="13" name="Image 2" descr="preencoded.png">    </p:cNvPr>
+          <p:cNvPr id="16" name="Image 2" descr="preencoded.png">    </p:cNvPr>
           <p:cNvPicPr>
             <a:picLocks noChangeAspect="1"/>
           </p:cNvPicPr>
@@ -15534,7 +16822,7 @@
       </p:pic>
       <p:sp>
         <p:nvSpPr>
-          <p:cNvPr id="14" name="Shape 9"/>
+          <p:cNvPr id="17" name="Shape 12"/>
           <p:cNvSpPr/>
           <p:nvPr/>
         </p:nvSpPr>
@@ -15570,7 +16858,7 @@
       </p:sp>
       <p:pic>
         <p:nvPicPr>
-          <p:cNvPr id="15" name="Image 3" descr="preencoded.png">    </p:cNvPr>
+          <p:cNvPr id="18" name="Image 3" descr="preencoded.png">    </p:cNvPr>
           <p:cNvPicPr>
             <a:picLocks noChangeAspect="1"/>
           </p:cNvPicPr>
@@ -15600,7 +16888,7 @@
       </p:pic>
       <p:sp>
         <p:nvSpPr>
-          <p:cNvPr id="16" name="Shape 10"/>
+          <p:cNvPr id="19" name="Shape 13"/>
           <p:cNvSpPr/>
           <p:nvPr/>
         </p:nvSpPr>
@@ -15636,7 +16924,7 @@
       </p:sp>
       <p:sp>
         <p:nvSpPr>
-          <p:cNvPr id="17" name="Shape 11"/>
+          <p:cNvPr id="20" name="Shape 14"/>
           <p:cNvSpPr/>
           <p:nvPr/>
         </p:nvSpPr>
@@ -15663,7 +16951,7 @@
       </p:sp>
       <p:sp>
         <p:nvSpPr>
-          <p:cNvPr id="18" name="Shape 12"/>
+          <p:cNvPr id="21" name="Shape 15"/>
           <p:cNvSpPr/>
           <p:nvPr/>
         </p:nvSpPr>
@@ -15690,7 +16978,7 @@
       </p:sp>
       <p:sp>
         <p:nvSpPr>
-          <p:cNvPr id="19" name="Shape 13"/>
+          <p:cNvPr id="22" name="Shape 16"/>
           <p:cNvSpPr/>
           <p:nvPr/>
         </p:nvSpPr>
@@ -15717,7 +17005,7 @@
       </p:sp>
       <p:sp>
         <p:nvSpPr>
-          <p:cNvPr id="20" name="Shape 14"/>
+          <p:cNvPr id="23" name="Shape 17"/>
           <p:cNvSpPr/>
           <p:nvPr/>
         </p:nvSpPr>
@@ -15744,7 +17032,7 @@
       </p:sp>
       <p:sp>
         <p:nvSpPr>
-          <p:cNvPr id="21" name="mdpr:icon-and-text-aside-8429fc:title:__title:icon-and-text-aside-8429fc"/>
+          <p:cNvPr id="24" name="mdpr:icon-and-text-aside-8429fc:title:__title:icon-and-text-aside-8429fc"/>
           <p:cNvSpPr txBox="1"/>
           <p:nvPr/>
         </p:nvSpPr>
@@ -15786,7 +17074,7 @@
       </p:sp>
       <p:sp>
         <p:nvSpPr>
-          <p:cNvPr id="22" name="Shape 16"/>
+          <p:cNvPr id="25" name="Shape 19"/>
           <p:cNvSpPr/>
           <p:nvPr/>
         </p:nvSpPr>
@@ -15813,7 +17101,7 @@
       </p:sp>
       <p:pic>
         <p:nvPicPr>
-          <p:cNvPr id="23" name="Image 4" descr="article icon from tabler-icons (MIT)">    </p:cNvPr>
+          <p:cNvPr id="26" name="Image 4" descr="article icon from tabler-icons (MIT)">    </p:cNvPr>
           <p:cNvPicPr>
             <a:picLocks noChangeAspect="1"/>
           </p:cNvPicPr>
@@ -15843,7 +17131,7 @@
       </p:pic>
       <p:sp>
         <p:nvSpPr>
-          <p:cNvPr id="24" name="mdpr:icon-and-text-aside-8429fc:item-1:block-29"/>
+          <p:cNvPr id="27" name="mdpr:icon-and-text-aside-8429fc:item-1:block-29"/>
           <p:cNvSpPr txBox="1"/>
           <p:nvPr/>
         </p:nvSpPr>
@@ -15902,7 +17190,7 @@
       </p:sp>
       <p:sp>
         <p:nvSpPr>
-          <p:cNvPr id="25" name="Shape 18"/>
+          <p:cNvPr id="28" name="Shape 21"/>
           <p:cNvSpPr/>
           <p:nvPr/>
         </p:nvSpPr>
@@ -15929,7 +17217,7 @@
       </p:sp>
       <p:pic>
         <p:nvPicPr>
-          <p:cNvPr id="26" name="Image 5" descr="article icon from tabler-icons (MIT)">    </p:cNvPr>
+          <p:cNvPr id="29" name="Image 5" descr="article icon from tabler-icons (MIT)">    </p:cNvPr>
           <p:cNvPicPr>
             <a:picLocks noChangeAspect="1"/>
           </p:cNvPicPr>
@@ -15959,7 +17247,7 @@
       </p:pic>
       <p:sp>
         <p:nvSpPr>
-          <p:cNvPr id="27" name="mdpr:icon-and-text-aside-8429fc:item-2:block-29"/>
+          <p:cNvPr id="30" name="mdpr:icon-and-text-aside-8429fc:item-2:block-29"/>
           <p:cNvSpPr txBox="1"/>
           <p:nvPr/>
         </p:nvSpPr>
@@ -16018,7 +17306,7 @@
       </p:sp>
       <p:sp>
         <p:nvSpPr>
-          <p:cNvPr id="28" name="Shape 20"/>
+          <p:cNvPr id="31" name="Shape 23"/>
           <p:cNvSpPr/>
           <p:nvPr/>
         </p:nvSpPr>
@@ -16045,7 +17333,7 @@
       </p:sp>
       <p:pic>
         <p:nvPicPr>
-          <p:cNvPr id="29" name="Image 6" descr="article icon from tabler-icons (MIT)">    </p:cNvPr>
+          <p:cNvPr id="32" name="Image 6" descr="article icon from tabler-icons (MIT)">    </p:cNvPr>
           <p:cNvPicPr>
             <a:picLocks noChangeAspect="1"/>
           </p:cNvPicPr>
@@ -16075,7 +17363,7 @@
       </p:pic>
       <p:sp>
         <p:nvSpPr>
-          <p:cNvPr id="30" name="mdpr:icon-and-text-aside-8429fc:item-3:block-29"/>
+          <p:cNvPr id="33" name="mdpr:icon-and-text-aside-8429fc:item-3:block-29"/>
           <p:cNvSpPr txBox="1"/>
           <p:nvPr/>
         </p:nvSpPr>
@@ -16134,7 +17422,7 @@
       </p:sp>
       <p:sp>
         <p:nvSpPr>
-          <p:cNvPr id="31" name="Shape 22"/>
+          <p:cNvPr id="34" name="Shape 25"/>
           <p:cNvSpPr/>
           <p:nvPr/>
         </p:nvSpPr>
@@ -16161,7 +17449,7 @@
       </p:sp>
       <p:pic>
         <p:nvPicPr>
-          <p:cNvPr id="32" name="Image 7" descr="table icon from tabler-icons (MIT)">    </p:cNvPr>
+          <p:cNvPr id="35" name="Image 7" descr="table icon from tabler-icons (MIT)">    </p:cNvPr>
           <p:cNvPicPr>
             <a:picLocks noChangeAspect="1"/>
           </p:cNvPicPr>
@@ -16191,7 +17479,7 @@
       </p:pic>
       <p:sp>
         <p:nvSpPr>
-          <p:cNvPr id="33" name="mdpr:icon-and-text-aside-8429fc:item-4:block-29"/>
+          <p:cNvPr id="36" name="mdpr:icon-and-text-aside-8429fc:item-4:block-29"/>
           <p:cNvSpPr txBox="1"/>
           <p:nvPr/>
         </p:nvSpPr>
@@ -16288,6 +17576,42 @@
         </p:nvSpPr>
         <p:spPr>
           <a:xfrm>
+            <a:off x="457200" y="402336"/>
+            <a:ext cx="11277295" cy="6053328"/>
+          </a:xfrm>
+          <a:prstGeom prst="roundRect">
+            <a:avLst>
+              <a:gd name="adj" fmla="val 2115"/>
+            </a:avLst>
+          </a:prstGeom>
+          <a:solidFill>
+            <a:srgbClr val="E6EAF0"/>
+          </a:solidFill>
+          <a:ln w="12700">
+            <a:solidFill>
+              <a:srgbClr val="8793A3">
+                <a:alpha val="84000"/>
+              </a:srgbClr>
+            </a:solidFill>
+            <a:prstDash val="solid"/>
+          </a:ln>
+          <a:effectLst>
+            <a:outerShdw sx="100000" sy="100000" kx="0" ky="0" algn="bl" rotWithShape="0" blurRad="13970" dist="50800" dir="2700000">
+              <a:srgbClr val="475569">
+                <a:alpha val="18000"/>
+              </a:srgbClr>
+            </a:outerShdw>
+          </a:effectLst>
+        </p:spPr>
+      </p:sp>
+      <p:sp>
+        <p:nvSpPr>
+          <p:cNvPr id="3" name="Shape 1"/>
+          <p:cNvSpPr/>
+          <p:nvPr/>
+        </p:nvSpPr>
+        <p:spPr>
+          <a:xfrm>
             <a:off x="530352" y="457200"/>
             <a:ext cx="11130991" cy="5943600"/>
           </a:xfrm>
@@ -16318,7 +17642,7 @@
       </p:sp>
       <p:sp>
         <p:nvSpPr>
-          <p:cNvPr id="3" name="Shape 1"/>
+          <p:cNvPr id="4" name="Shape 2"/>
           <p:cNvSpPr/>
           <p:nvPr/>
         </p:nvSpPr>
@@ -16341,7 +17665,63 @@
       </p:sp>
       <p:sp>
         <p:nvSpPr>
-          <p:cNvPr id="4" name="Shape 2"/>
+          <p:cNvPr id="5" name="Shape 3"/>
+          <p:cNvSpPr/>
+          <p:nvPr/>
+        </p:nvSpPr>
+        <p:spPr>
+          <a:xfrm>
+            <a:off x="658368" y="6217920"/>
+            <a:ext cx="10874959" cy="0"/>
+          </a:xfrm>
+          <a:prstGeom prst="line">
+            <a:avLst/>
+          </a:prstGeom>
+          <a:noFill/>
+          <a:ln w="12700">
+            <a:solidFill>
+              <a:srgbClr val="94A3B8">
+                <a:alpha val="66000"/>
+              </a:srgbClr>
+            </a:solidFill>
+            <a:prstDash val="solid"/>
+          </a:ln>
+        </p:spPr>
+      </p:sp>
+      <p:sp>
+        <p:nvSpPr>
+          <p:cNvPr id="6" name="Shape 4"/>
+          <p:cNvSpPr/>
+          <p:nvPr/>
+        </p:nvSpPr>
+        <p:spPr>
+          <a:xfrm>
+            <a:off x="10600639" y="512064"/>
+            <a:ext cx="877824" cy="201168"/>
+          </a:xfrm>
+          <a:prstGeom prst="roundRect">
+            <a:avLst>
+              <a:gd name="adj" fmla="val 18182"/>
+            </a:avLst>
+          </a:prstGeom>
+          <a:solidFill>
+            <a:srgbClr val="D7DDE6">
+              <a:alpha val="92000"/>
+            </a:srgbClr>
+          </a:solidFill>
+          <a:ln w="12700">
+            <a:solidFill>
+              <a:srgbClr val="FFFFFF">
+                <a:alpha val="82000"/>
+              </a:srgbClr>
+            </a:solidFill>
+            <a:prstDash val="solid"/>
+          </a:ln>
+        </p:spPr>
+      </p:sp>
+      <p:sp>
+        <p:nvSpPr>
+          <p:cNvPr id="7" name="Shape 5"/>
           <p:cNvSpPr/>
           <p:nvPr/>
         </p:nvSpPr>
@@ -16370,7 +17750,7 @@
       </p:sp>
       <p:sp>
         <p:nvSpPr>
-          <p:cNvPr id="5" name="Shape 3"/>
+          <p:cNvPr id="8" name="Shape 6"/>
           <p:cNvSpPr/>
           <p:nvPr/>
         </p:nvSpPr>
@@ -16399,7 +17779,7 @@
       </p:sp>
       <p:sp>
         <p:nvSpPr>
-          <p:cNvPr id="6" name="Shape 4"/>
+          <p:cNvPr id="9" name="Shape 7"/>
           <p:cNvSpPr/>
           <p:nvPr/>
         </p:nvSpPr>
@@ -16426,7 +17806,7 @@
       </p:sp>
       <p:sp>
         <p:nvSpPr>
-          <p:cNvPr id="7" name="Shape 5"/>
+          <p:cNvPr id="10" name="Shape 8"/>
           <p:cNvSpPr/>
           <p:nvPr/>
         </p:nvSpPr>
@@ -16453,7 +17833,7 @@
       </p:sp>
       <p:sp>
         <p:nvSpPr>
-          <p:cNvPr id="8" name="Shape 6"/>
+          <p:cNvPr id="11" name="Shape 9"/>
           <p:cNvSpPr/>
           <p:nvPr/>
         </p:nvSpPr>
@@ -16480,7 +17860,7 @@
       </p:sp>
       <p:pic>
         <p:nvPicPr>
-          <p:cNvPr id="9" name="Image 0" descr="preencoded.png">    </p:cNvPr>
+          <p:cNvPr id="12" name="Image 0" descr="preencoded.png">    </p:cNvPr>
           <p:cNvPicPr>
             <a:picLocks noChangeAspect="1"/>
           </p:cNvPicPr>
@@ -16510,7 +17890,7 @@
       </p:pic>
       <p:sp>
         <p:nvSpPr>
-          <p:cNvPr id="10" name="Shape 7"/>
+          <p:cNvPr id="13" name="Shape 10"/>
           <p:cNvSpPr/>
           <p:nvPr/>
         </p:nvSpPr>
@@ -16546,7 +17926,7 @@
       </p:sp>
       <p:pic>
         <p:nvPicPr>
-          <p:cNvPr id="11" name="Image 1" descr="preencoded.png">    </p:cNvPr>
+          <p:cNvPr id="14" name="Image 1" descr="preencoded.png">    </p:cNvPr>
           <p:cNvPicPr>
             <a:picLocks noChangeAspect="1"/>
           </p:cNvPicPr>
@@ -16576,7 +17956,7 @@
       </p:pic>
       <p:sp>
         <p:nvSpPr>
-          <p:cNvPr id="12" name="Shape 8"/>
+          <p:cNvPr id="15" name="Shape 11"/>
           <p:cNvSpPr/>
           <p:nvPr/>
         </p:nvSpPr>
@@ -16612,7 +17992,7 @@
       </p:sp>
       <p:pic>
         <p:nvPicPr>
-          <p:cNvPr id="13" name="Image 2" descr="preencoded.png">    </p:cNvPr>
+          <p:cNvPr id="16" name="Image 2" descr="preencoded.png">    </p:cNvPr>
           <p:cNvPicPr>
             <a:picLocks noChangeAspect="1"/>
           </p:cNvPicPr>
@@ -16642,7 +18022,7 @@
       </p:pic>
       <p:sp>
         <p:nvSpPr>
-          <p:cNvPr id="14" name="Shape 9"/>
+          <p:cNvPr id="17" name="Shape 12"/>
           <p:cNvSpPr/>
           <p:nvPr/>
         </p:nvSpPr>
@@ -16678,7 +18058,7 @@
       </p:sp>
       <p:pic>
         <p:nvPicPr>
-          <p:cNvPr id="15" name="Image 3" descr="preencoded.png">    </p:cNvPr>
+          <p:cNvPr id="18" name="Image 3" descr="preencoded.png">    </p:cNvPr>
           <p:cNvPicPr>
             <a:picLocks noChangeAspect="1"/>
           </p:cNvPicPr>
@@ -16708,7 +18088,7 @@
       </p:pic>
       <p:sp>
         <p:nvSpPr>
-          <p:cNvPr id="16" name="Shape 10"/>
+          <p:cNvPr id="19" name="Shape 13"/>
           <p:cNvSpPr/>
           <p:nvPr/>
         </p:nvSpPr>
@@ -16744,7 +18124,7 @@
       </p:sp>
       <p:sp>
         <p:nvSpPr>
-          <p:cNvPr id="17" name="Shape 11"/>
+          <p:cNvPr id="20" name="Shape 14"/>
           <p:cNvSpPr/>
           <p:nvPr/>
         </p:nvSpPr>
@@ -16771,7 +18151,7 @@
       </p:sp>
       <p:sp>
         <p:nvSpPr>
-          <p:cNvPr id="18" name="Shape 12"/>
+          <p:cNvPr id="21" name="Shape 15"/>
           <p:cNvSpPr/>
           <p:nvPr/>
         </p:nvSpPr>
@@ -16798,7 +18178,7 @@
       </p:sp>
       <p:sp>
         <p:nvSpPr>
-          <p:cNvPr id="19" name="Shape 13"/>
+          <p:cNvPr id="22" name="Shape 16"/>
           <p:cNvSpPr/>
           <p:nvPr/>
         </p:nvSpPr>
@@ -16825,7 +18205,7 @@
       </p:sp>
       <p:sp>
         <p:nvSpPr>
-          <p:cNvPr id="20" name="Shape 14"/>
+          <p:cNvPr id="23" name="Shape 17"/>
           <p:cNvSpPr/>
           <p:nvPr/>
         </p:nvSpPr>
@@ -16852,7 +18232,7 @@
       </p:sp>
       <p:sp>
         <p:nvSpPr>
-          <p:cNvPr id="21" name="mdpr:overflow-guard-f8d03e:title:__title:overflow-guard-f8d03e"/>
+          <p:cNvPr id="24" name="mdpr:overflow-guard-f8d03e:title:__title:overflow-guard-f8d03e"/>
           <p:cNvSpPr txBox="1"/>
           <p:nvPr/>
         </p:nvSpPr>
@@ -16894,7 +18274,7 @@
       </p:sp>
       <p:sp>
         <p:nvSpPr>
-          <p:cNvPr id="22" name="Shape 16"/>
+          <p:cNvPr id="25" name="Shape 19"/>
           <p:cNvSpPr/>
           <p:nvPr/>
         </p:nvSpPr>
@@ -16921,7 +18301,7 @@
       </p:sp>
       <p:pic>
         <p:nvPicPr>
-          <p:cNvPr id="23" name="Image 4" descr="verified icon from tabler-icons (MIT)">    </p:cNvPr>
+          <p:cNvPr id="26" name="Image 4" descr="verified icon from tabler-icons (MIT)">    </p:cNvPr>
           <p:cNvPicPr>
             <a:picLocks noChangeAspect="1"/>
           </p:cNvPicPr>
@@ -16951,7 +18331,7 @@
       </p:pic>
       <p:sp>
         <p:nvSpPr>
-          <p:cNvPr id="24" name="mdpr:overflow-guard-f8d03e:item-1:block-31"/>
+          <p:cNvPr id="27" name="mdpr:overflow-guard-f8d03e:item-1:block-31"/>
           <p:cNvSpPr txBox="1"/>
           <p:nvPr/>
         </p:nvSpPr>
@@ -17010,7 +18390,7 @@
       </p:sp>
       <p:sp>
         <p:nvSpPr>
-          <p:cNvPr id="25" name="Shape 18"/>
+          <p:cNvPr id="28" name="Shape 21"/>
           <p:cNvSpPr/>
           <p:nvPr/>
         </p:nvSpPr>
@@ -17037,7 +18417,7 @@
       </p:sp>
       <p:pic>
         <p:nvPicPr>
-          <p:cNvPr id="26" name="Image 5" descr="table icon from tabler-icons (MIT)">    </p:cNvPr>
+          <p:cNvPr id="29" name="Image 5" descr="table icon from tabler-icons (MIT)">    </p:cNvPr>
           <p:cNvPicPr>
             <a:picLocks noChangeAspect="1"/>
           </p:cNvPicPr>
@@ -17067,7 +18447,7 @@
       </p:pic>
       <p:sp>
         <p:nvSpPr>
-          <p:cNvPr id="27" name="mdpr:overflow-guard-f8d03e:item-2:block-31"/>
+          <p:cNvPr id="30" name="mdpr:overflow-guard-f8d03e:item-2:block-31"/>
           <p:cNvSpPr txBox="1"/>
           <p:nvPr/>
         </p:nvSpPr>
@@ -17126,7 +18506,7 @@
       </p:sp>
       <p:sp>
         <p:nvSpPr>
-          <p:cNvPr id="28" name="Shape 20"/>
+          <p:cNvPr id="31" name="Shape 23"/>
           <p:cNvSpPr/>
           <p:nvPr/>
         </p:nvSpPr>
@@ -17153,7 +18533,7 @@
       </p:sp>
       <p:pic>
         <p:nvPicPr>
-          <p:cNvPr id="29" name="Image 6" descr="article icon from tabler-icons (MIT)">    </p:cNvPr>
+          <p:cNvPr id="32" name="Image 6" descr="article icon from tabler-icons (MIT)">    </p:cNvPr>
           <p:cNvPicPr>
             <a:picLocks noChangeAspect="1"/>
           </p:cNvPicPr>
@@ -17183,7 +18563,7 @@
       </p:pic>
       <p:sp>
         <p:nvSpPr>
-          <p:cNvPr id="30" name="mdpr:overflow-guard-f8d03e:item-3:block-31"/>
+          <p:cNvPr id="33" name="mdpr:overflow-guard-f8d03e:item-3:block-31"/>
           <p:cNvSpPr txBox="1"/>
           <p:nvPr/>
         </p:nvSpPr>
@@ -17242,7 +18622,7 @@
       </p:sp>
       <p:sp>
         <p:nvSpPr>
-          <p:cNvPr id="31" name="Shape 22"/>
+          <p:cNvPr id="34" name="Shape 25"/>
           <p:cNvSpPr/>
           <p:nvPr/>
         </p:nvSpPr>
@@ -17269,7 +18649,7 @@
       </p:sp>
       <p:pic>
         <p:nvPicPr>
-          <p:cNvPr id="32" name="Image 7" descr="article icon from tabler-icons (MIT)">    </p:cNvPr>
+          <p:cNvPr id="35" name="Image 7" descr="article icon from tabler-icons (MIT)">    </p:cNvPr>
           <p:cNvPicPr>
             <a:picLocks noChangeAspect="1"/>
           </p:cNvPicPr>
@@ -17299,7 +18679,7 @@
       </p:pic>
       <p:sp>
         <p:nvSpPr>
-          <p:cNvPr id="33" name="mdpr:overflow-guard-f8d03e:item-4:block-31"/>
+          <p:cNvPr id="36" name="mdpr:overflow-guard-f8d03e:item-4:block-31"/>
           <p:cNvSpPr txBox="1"/>
           <p:nvPr/>
         </p:nvSpPr>
@@ -17396,6 +18776,42 @@
         </p:nvSpPr>
         <p:spPr>
           <a:xfrm>
+            <a:off x="457200" y="402336"/>
+            <a:ext cx="11277295" cy="6053328"/>
+          </a:xfrm>
+          <a:prstGeom prst="roundRect">
+            <a:avLst>
+              <a:gd name="adj" fmla="val 2115"/>
+            </a:avLst>
+          </a:prstGeom>
+          <a:solidFill>
+            <a:srgbClr val="E6EAF0"/>
+          </a:solidFill>
+          <a:ln w="12700">
+            <a:solidFill>
+              <a:srgbClr val="8793A3">
+                <a:alpha val="84000"/>
+              </a:srgbClr>
+            </a:solidFill>
+            <a:prstDash val="solid"/>
+          </a:ln>
+          <a:effectLst>
+            <a:outerShdw sx="100000" sy="100000" kx="0" ky="0" algn="bl" rotWithShape="0" blurRad="13970" dist="50800" dir="2700000">
+              <a:srgbClr val="475569">
+                <a:alpha val="18000"/>
+              </a:srgbClr>
+            </a:outerShdw>
+          </a:effectLst>
+        </p:spPr>
+      </p:sp>
+      <p:sp>
+        <p:nvSpPr>
+          <p:cNvPr id="3" name="Shape 1"/>
+          <p:cNvSpPr/>
+          <p:nvPr/>
+        </p:nvSpPr>
+        <p:spPr>
+          <a:xfrm>
             <a:off x="530352" y="457200"/>
             <a:ext cx="11130991" cy="5943600"/>
           </a:xfrm>
@@ -17426,7 +18842,7 @@
       </p:sp>
       <p:sp>
         <p:nvSpPr>
-          <p:cNvPr id="3" name="Shape 1"/>
+          <p:cNvPr id="4" name="Shape 2"/>
           <p:cNvSpPr/>
           <p:nvPr/>
         </p:nvSpPr>
@@ -17449,7 +18865,63 @@
       </p:sp>
       <p:sp>
         <p:nvSpPr>
-          <p:cNvPr id="4" name="Shape 2"/>
+          <p:cNvPr id="5" name="Shape 3"/>
+          <p:cNvSpPr/>
+          <p:nvPr/>
+        </p:nvSpPr>
+        <p:spPr>
+          <a:xfrm>
+            <a:off x="658368" y="6217920"/>
+            <a:ext cx="10874959" cy="0"/>
+          </a:xfrm>
+          <a:prstGeom prst="line">
+            <a:avLst/>
+          </a:prstGeom>
+          <a:noFill/>
+          <a:ln w="12700">
+            <a:solidFill>
+              <a:srgbClr val="94A3B8">
+                <a:alpha val="66000"/>
+              </a:srgbClr>
+            </a:solidFill>
+            <a:prstDash val="solid"/>
+          </a:ln>
+        </p:spPr>
+      </p:sp>
+      <p:sp>
+        <p:nvSpPr>
+          <p:cNvPr id="6" name="Shape 4"/>
+          <p:cNvSpPr/>
+          <p:nvPr/>
+        </p:nvSpPr>
+        <p:spPr>
+          <a:xfrm>
+            <a:off x="10600639" y="512064"/>
+            <a:ext cx="877824" cy="201168"/>
+          </a:xfrm>
+          <a:prstGeom prst="roundRect">
+            <a:avLst>
+              <a:gd name="adj" fmla="val 18182"/>
+            </a:avLst>
+          </a:prstGeom>
+          <a:solidFill>
+            <a:srgbClr val="D7DDE6">
+              <a:alpha val="92000"/>
+            </a:srgbClr>
+          </a:solidFill>
+          <a:ln w="12700">
+            <a:solidFill>
+              <a:srgbClr val="FFFFFF">
+                <a:alpha val="82000"/>
+              </a:srgbClr>
+            </a:solidFill>
+            <a:prstDash val="solid"/>
+          </a:ln>
+        </p:spPr>
+      </p:sp>
+      <p:sp>
+        <p:nvSpPr>
+          <p:cNvPr id="7" name="Shape 5"/>
           <p:cNvSpPr/>
           <p:nvPr/>
         </p:nvSpPr>
@@ -17478,7 +18950,7 @@
       </p:sp>
       <p:sp>
         <p:nvSpPr>
-          <p:cNvPr id="5" name="Shape 3"/>
+          <p:cNvPr id="8" name="Shape 6"/>
           <p:cNvSpPr/>
           <p:nvPr/>
         </p:nvSpPr>
@@ -17507,7 +18979,7 @@
       </p:sp>
       <p:sp>
         <p:nvSpPr>
-          <p:cNvPr id="6" name="Shape 4"/>
+          <p:cNvPr id="9" name="Shape 7"/>
           <p:cNvSpPr/>
           <p:nvPr/>
         </p:nvSpPr>
@@ -17534,7 +19006,7 @@
       </p:sp>
       <p:sp>
         <p:nvSpPr>
-          <p:cNvPr id="7" name="Shape 5"/>
+          <p:cNvPr id="10" name="Shape 8"/>
           <p:cNvSpPr/>
           <p:nvPr/>
         </p:nvSpPr>
@@ -17561,7 +19033,7 @@
       </p:sp>
       <p:sp>
         <p:nvSpPr>
-          <p:cNvPr id="8" name="Shape 6"/>
+          <p:cNvPr id="11" name="Shape 9"/>
           <p:cNvSpPr/>
           <p:nvPr/>
         </p:nvSpPr>
@@ -17588,7 +19060,7 @@
       </p:sp>
       <p:pic>
         <p:nvPicPr>
-          <p:cNvPr id="9" name="Image 0" descr="preencoded.png">    </p:cNvPr>
+          <p:cNvPr id="12" name="Image 0" descr="preencoded.png">    </p:cNvPr>
           <p:cNvPicPr>
             <a:picLocks noChangeAspect="1"/>
           </p:cNvPicPr>
@@ -17618,7 +19090,7 @@
       </p:pic>
       <p:sp>
         <p:nvSpPr>
-          <p:cNvPr id="10" name="Shape 7"/>
+          <p:cNvPr id="13" name="Shape 10"/>
           <p:cNvSpPr/>
           <p:nvPr/>
         </p:nvSpPr>
@@ -17654,7 +19126,7 @@
       </p:sp>
       <p:sp>
         <p:nvSpPr>
-          <p:cNvPr id="11" name="Shape 8"/>
+          <p:cNvPr id="14" name="Shape 11"/>
           <p:cNvSpPr/>
           <p:nvPr/>
         </p:nvSpPr>
@@ -17681,7 +19153,7 @@
       </p:sp>
       <p:sp>
         <p:nvSpPr>
-          <p:cNvPr id="12" name="mdpr:image-safe-frame-d4d6a4:title:__title:image-safe-frame-d4d6a4"/>
+          <p:cNvPr id="15" name="mdpr:image-safe-frame-d4d6a4:title:__title:image-safe-frame-d4d6a4"/>
           <p:cNvSpPr txBox="1"/>
           <p:nvPr/>
         </p:nvSpPr>
@@ -17723,7 +19195,7 @@
       </p:sp>
       <p:sp>
         <p:nvSpPr>
-          <p:cNvPr id="13" name="mdpr:image-safe-frame-d4d6a4:body:block-33-block-33-block-33"/>
+          <p:cNvPr id="16" name="mdpr:image-safe-frame-d4d6a4:body:block-33-block-33-block-33"/>
           <p:cNvSpPr txBox="1"/>
           <p:nvPr/>
         </p:nvSpPr>
@@ -17862,7 +19334,7 @@
       </p:sp>
       <p:pic>
         <p:nvPicPr>
-          <p:cNvPr id="14" name="mdpr:image-safe-frame-d4d6a4:image-1:block-34" descr="{&quot;mdpr&quot;:{&quot;slideId&quot;:&quot;image-safe-frame-d4d6a4&quot;,&quot;layoutSlideId&quot;:&quot;layout-image-safe-frame-d4d6a4&quot;,&quot;regionId&quot;:&quot;image-1&quot;,&quot;blockIds&quot;:[&quot;block-34&quot;],&quot;objectKind&quot;:&quot;native-image&quot;,&quot;role&quot;:&quot;image&quot;,&quot;editable&quot;:false}}">    </p:cNvPr>
+          <p:cNvPr id="17" name="mdpr:image-safe-frame-d4d6a4:image-1:block-34" descr="{&quot;mdpr&quot;:{&quot;slideId&quot;:&quot;image-safe-frame-d4d6a4&quot;,&quot;layoutSlideId&quot;:&quot;layout-image-safe-frame-d4d6a4&quot;,&quot;regionId&quot;:&quot;image-1&quot;,&quot;blockIds&quot;:[&quot;block-34&quot;],&quot;objectKind&quot;:&quot;native-image&quot;,&quot;role&quot;:&quot;image&quot;,&quot;editable&quot;:false}}">    </p:cNvPr>
           <p:cNvPicPr>
             <a:picLocks noChangeAspect="1"/>
           </p:cNvPicPr>
@@ -17930,6 +19402,42 @@
         </p:nvSpPr>
         <p:spPr>
           <a:xfrm>
+            <a:off x="457200" y="402336"/>
+            <a:ext cx="11277295" cy="6053328"/>
+          </a:xfrm>
+          <a:prstGeom prst="roundRect">
+            <a:avLst>
+              <a:gd name="adj" fmla="val 2115"/>
+            </a:avLst>
+          </a:prstGeom>
+          <a:solidFill>
+            <a:srgbClr val="E6EAF0"/>
+          </a:solidFill>
+          <a:ln w="12700">
+            <a:solidFill>
+              <a:srgbClr val="8793A3">
+                <a:alpha val="84000"/>
+              </a:srgbClr>
+            </a:solidFill>
+            <a:prstDash val="solid"/>
+          </a:ln>
+          <a:effectLst>
+            <a:outerShdw sx="100000" sy="100000" kx="0" ky="0" algn="bl" rotWithShape="0" blurRad="13970" dist="50800" dir="2700000">
+              <a:srgbClr val="475569">
+                <a:alpha val="18000"/>
+              </a:srgbClr>
+            </a:outerShdw>
+          </a:effectLst>
+        </p:spPr>
+      </p:sp>
+      <p:sp>
+        <p:nvSpPr>
+          <p:cNvPr id="3" name="Shape 1"/>
+          <p:cNvSpPr/>
+          <p:nvPr/>
+        </p:nvSpPr>
+        <p:spPr>
+          <a:xfrm>
             <a:off x="530352" y="457200"/>
             <a:ext cx="11130991" cy="5943600"/>
           </a:xfrm>
@@ -17960,7 +19468,7 @@
       </p:sp>
       <p:sp>
         <p:nvSpPr>
-          <p:cNvPr id="3" name="Shape 1"/>
+          <p:cNvPr id="4" name="Shape 2"/>
           <p:cNvSpPr/>
           <p:nvPr/>
         </p:nvSpPr>
@@ -17983,7 +19491,63 @@
       </p:sp>
       <p:sp>
         <p:nvSpPr>
-          <p:cNvPr id="4" name="Shape 2"/>
+          <p:cNvPr id="5" name="Shape 3"/>
+          <p:cNvSpPr/>
+          <p:nvPr/>
+        </p:nvSpPr>
+        <p:spPr>
+          <a:xfrm>
+            <a:off x="658368" y="6217920"/>
+            <a:ext cx="10874959" cy="0"/>
+          </a:xfrm>
+          <a:prstGeom prst="line">
+            <a:avLst/>
+          </a:prstGeom>
+          <a:noFill/>
+          <a:ln w="12700">
+            <a:solidFill>
+              <a:srgbClr val="94A3B8">
+                <a:alpha val="66000"/>
+              </a:srgbClr>
+            </a:solidFill>
+            <a:prstDash val="solid"/>
+          </a:ln>
+        </p:spPr>
+      </p:sp>
+      <p:sp>
+        <p:nvSpPr>
+          <p:cNvPr id="6" name="Shape 4"/>
+          <p:cNvSpPr/>
+          <p:nvPr/>
+        </p:nvSpPr>
+        <p:spPr>
+          <a:xfrm>
+            <a:off x="10600639" y="512064"/>
+            <a:ext cx="877824" cy="201168"/>
+          </a:xfrm>
+          <a:prstGeom prst="roundRect">
+            <a:avLst>
+              <a:gd name="adj" fmla="val 18182"/>
+            </a:avLst>
+          </a:prstGeom>
+          <a:solidFill>
+            <a:srgbClr val="D7DDE6">
+              <a:alpha val="92000"/>
+            </a:srgbClr>
+          </a:solidFill>
+          <a:ln w="12700">
+            <a:solidFill>
+              <a:srgbClr val="FFFFFF">
+                <a:alpha val="82000"/>
+              </a:srgbClr>
+            </a:solidFill>
+            <a:prstDash val="solid"/>
+          </a:ln>
+        </p:spPr>
+      </p:sp>
+      <p:sp>
+        <p:nvSpPr>
+          <p:cNvPr id="7" name="Shape 5"/>
           <p:cNvSpPr/>
           <p:nvPr/>
         </p:nvSpPr>
@@ -18012,7 +19576,7 @@
       </p:sp>
       <p:sp>
         <p:nvSpPr>
-          <p:cNvPr id="5" name="Shape 3"/>
+          <p:cNvPr id="8" name="Shape 6"/>
           <p:cNvSpPr/>
           <p:nvPr/>
         </p:nvSpPr>
@@ -18041,7 +19605,7 @@
       </p:sp>
       <p:sp>
         <p:nvSpPr>
-          <p:cNvPr id="6" name="Shape 4"/>
+          <p:cNvPr id="9" name="Shape 7"/>
           <p:cNvSpPr/>
           <p:nvPr/>
         </p:nvSpPr>
@@ -18068,7 +19632,7 @@
       </p:sp>
       <p:sp>
         <p:nvSpPr>
-          <p:cNvPr id="7" name="Shape 5"/>
+          <p:cNvPr id="10" name="Shape 8"/>
           <p:cNvSpPr/>
           <p:nvPr/>
         </p:nvSpPr>
@@ -18095,7 +19659,7 @@
       </p:sp>
       <p:sp>
         <p:nvSpPr>
-          <p:cNvPr id="8" name="Shape 6"/>
+          <p:cNvPr id="11" name="Shape 9"/>
           <p:cNvSpPr/>
           <p:nvPr/>
         </p:nvSpPr>
@@ -18122,7 +19686,7 @@
       </p:sp>
       <p:pic>
         <p:nvPicPr>
-          <p:cNvPr id="9" name="Image 0" descr="preencoded.png">    </p:cNvPr>
+          <p:cNvPr id="12" name="Image 0" descr="preencoded.png">    </p:cNvPr>
           <p:cNvPicPr>
             <a:picLocks noChangeAspect="1"/>
           </p:cNvPicPr>
@@ -18152,7 +19716,7 @@
       </p:pic>
       <p:sp>
         <p:nvSpPr>
-          <p:cNvPr id="10" name="Shape 7"/>
+          <p:cNvPr id="13" name="Shape 10"/>
           <p:cNvSpPr/>
           <p:nvPr/>
         </p:nvSpPr>
@@ -18188,7 +19752,7 @@
       </p:sp>
       <p:pic>
         <p:nvPicPr>
-          <p:cNvPr id="11" name="Image 1" descr="preencoded.png">    </p:cNvPr>
+          <p:cNvPr id="14" name="Image 1" descr="preencoded.png">    </p:cNvPr>
           <p:cNvPicPr>
             <a:picLocks noChangeAspect="1"/>
           </p:cNvPicPr>
@@ -18218,7 +19782,7 @@
       </p:pic>
       <p:sp>
         <p:nvSpPr>
-          <p:cNvPr id="12" name="Shape 8"/>
+          <p:cNvPr id="15" name="Shape 11"/>
           <p:cNvSpPr/>
           <p:nvPr/>
         </p:nvSpPr>
@@ -18254,7 +19818,7 @@
       </p:sp>
       <p:pic>
         <p:nvPicPr>
-          <p:cNvPr id="13" name="Image 2" descr="preencoded.png">    </p:cNvPr>
+          <p:cNvPr id="16" name="Image 2" descr="preencoded.png">    </p:cNvPr>
           <p:cNvPicPr>
             <a:picLocks noChangeAspect="1"/>
           </p:cNvPicPr>
@@ -18284,7 +19848,7 @@
       </p:pic>
       <p:sp>
         <p:nvSpPr>
-          <p:cNvPr id="14" name="Shape 9"/>
+          <p:cNvPr id="17" name="Shape 12"/>
           <p:cNvSpPr/>
           <p:nvPr/>
         </p:nvSpPr>
@@ -18320,7 +19884,7 @@
       </p:sp>
       <p:sp>
         <p:nvSpPr>
-          <p:cNvPr id="15" name="Shape 10"/>
+          <p:cNvPr id="18" name="Shape 13"/>
           <p:cNvSpPr/>
           <p:nvPr/>
         </p:nvSpPr>
@@ -18347,7 +19911,7 @@
       </p:sp>
       <p:sp>
         <p:nvSpPr>
-          <p:cNvPr id="16" name="mdpr:mixed-object-packing-438299:title:__title:mixed-object-packing-438299"/>
+          <p:cNvPr id="19" name="mdpr:mixed-object-packing-438299:title:__title:mixed-object-packing-438299"/>
           <p:cNvSpPr txBox="1"/>
           <p:nvPr/>
         </p:nvSpPr>
@@ -18389,7 +19953,7 @@
       </p:sp>
       <p:graphicFrame>
         <p:nvGraphicFramePr>
-          <p:cNvPr id="17" name="Chart 0" descr=""/>
+          <p:cNvPr id="20" name="Chart 0" descr=""/>
           <p:cNvGraphicFramePr/>
           <p:nvPr/>
         </p:nvGraphicFramePr>
@@ -18847,7 +20411,7 @@
       </p:graphicFrame>
       <p:sp>
         <p:nvSpPr>
-          <p:cNvPr id="19" name="mdpr:mixed-object-packing-438299:body:block-36"/>
+          <p:cNvPr id="22" name="mdpr:mixed-object-packing-438299:body:block-36"/>
           <p:cNvSpPr txBox="1"/>
           <p:nvPr/>
         </p:nvSpPr>
@@ -18946,7 +20510,7 @@
       </p:sp>
       <p:pic>
         <p:nvPicPr>
-          <p:cNvPr id="20" name="mdpr:mixed-object-packing-438299:image-1:block-39" descr="{&quot;mdpr&quot;:{&quot;slideId&quot;:&quot;mixed-object-packing-438299&quot;,&quot;layoutSlideId&quot;:&quot;layout-mixed-object-packing-438299&quot;,&quot;regionId&quot;:&quot;image-1&quot;,&quot;blockIds&quot;:[&quot;block-39&quot;],&quot;objectKind&quot;:&quot;native-image&quot;,&quot;role&quot;:&quot;image&quot;,&quot;editable&quot;:false}}">    </p:cNvPr>
+          <p:cNvPr id="23" name="mdpr:mixed-object-packing-438299:image-1:block-39" descr="{&quot;mdpr&quot;:{&quot;slideId&quot;:&quot;mixed-object-packing-438299&quot;,&quot;layoutSlideId&quot;:&quot;layout-mixed-object-packing-438299&quot;,&quot;regionId&quot;:&quot;image-1&quot;,&quot;blockIds&quot;:[&quot;block-39&quot;],&quot;objectKind&quot;:&quot;native-image&quot;,&quot;role&quot;:&quot;image&quot;,&quot;editable&quot;:false}}">    </p:cNvPr>
           <p:cNvPicPr>
             <a:picLocks noChangeAspect="1"/>
           </p:cNvPicPr>
@@ -19014,6 +20578,42 @@
         </p:nvSpPr>
         <p:spPr>
           <a:xfrm>
+            <a:off x="457200" y="402336"/>
+            <a:ext cx="11277295" cy="6053328"/>
+          </a:xfrm>
+          <a:prstGeom prst="roundRect">
+            <a:avLst>
+              <a:gd name="adj" fmla="val 2115"/>
+            </a:avLst>
+          </a:prstGeom>
+          <a:solidFill>
+            <a:srgbClr val="E6EAF0"/>
+          </a:solidFill>
+          <a:ln w="12700">
+            <a:solidFill>
+              <a:srgbClr val="8793A3">
+                <a:alpha val="84000"/>
+              </a:srgbClr>
+            </a:solidFill>
+            <a:prstDash val="solid"/>
+          </a:ln>
+          <a:effectLst>
+            <a:outerShdw sx="100000" sy="100000" kx="0" ky="0" algn="bl" rotWithShape="0" blurRad="13970" dist="50800" dir="2700000">
+              <a:srgbClr val="475569">
+                <a:alpha val="18000"/>
+              </a:srgbClr>
+            </a:outerShdw>
+          </a:effectLst>
+        </p:spPr>
+      </p:sp>
+      <p:sp>
+        <p:nvSpPr>
+          <p:cNvPr id="3" name="Shape 1"/>
+          <p:cNvSpPr/>
+          <p:nvPr/>
+        </p:nvSpPr>
+        <p:spPr>
+          <a:xfrm>
             <a:off x="530352" y="457200"/>
             <a:ext cx="11130991" cy="5943600"/>
           </a:xfrm>
@@ -19044,7 +20644,7 @@
       </p:sp>
       <p:sp>
         <p:nvSpPr>
-          <p:cNvPr id="3" name="Shape 1"/>
+          <p:cNvPr id="4" name="Shape 2"/>
           <p:cNvSpPr/>
           <p:nvPr/>
         </p:nvSpPr>
@@ -19067,7 +20667,63 @@
       </p:sp>
       <p:sp>
         <p:nvSpPr>
-          <p:cNvPr id="4" name="Shape 2"/>
+          <p:cNvPr id="5" name="Shape 3"/>
+          <p:cNvSpPr/>
+          <p:nvPr/>
+        </p:nvSpPr>
+        <p:spPr>
+          <a:xfrm>
+            <a:off x="658368" y="6217920"/>
+            <a:ext cx="10874959" cy="0"/>
+          </a:xfrm>
+          <a:prstGeom prst="line">
+            <a:avLst/>
+          </a:prstGeom>
+          <a:noFill/>
+          <a:ln w="12700">
+            <a:solidFill>
+              <a:srgbClr val="94A3B8">
+                <a:alpha val="66000"/>
+              </a:srgbClr>
+            </a:solidFill>
+            <a:prstDash val="solid"/>
+          </a:ln>
+        </p:spPr>
+      </p:sp>
+      <p:sp>
+        <p:nvSpPr>
+          <p:cNvPr id="6" name="Shape 4"/>
+          <p:cNvSpPr/>
+          <p:nvPr/>
+        </p:nvSpPr>
+        <p:spPr>
+          <a:xfrm>
+            <a:off x="10600639" y="512064"/>
+            <a:ext cx="877824" cy="201168"/>
+          </a:xfrm>
+          <a:prstGeom prst="roundRect">
+            <a:avLst>
+              <a:gd name="adj" fmla="val 18182"/>
+            </a:avLst>
+          </a:prstGeom>
+          <a:solidFill>
+            <a:srgbClr val="D7DDE6">
+              <a:alpha val="92000"/>
+            </a:srgbClr>
+          </a:solidFill>
+          <a:ln w="12700">
+            <a:solidFill>
+              <a:srgbClr val="FFFFFF">
+                <a:alpha val="82000"/>
+              </a:srgbClr>
+            </a:solidFill>
+            <a:prstDash val="solid"/>
+          </a:ln>
+        </p:spPr>
+      </p:sp>
+      <p:sp>
+        <p:nvSpPr>
+          <p:cNvPr id="7" name="Shape 5"/>
           <p:cNvSpPr/>
           <p:nvPr/>
         </p:nvSpPr>
@@ -19096,7 +20752,7 @@
       </p:sp>
       <p:sp>
         <p:nvSpPr>
-          <p:cNvPr id="5" name="Shape 3"/>
+          <p:cNvPr id="8" name="Shape 6"/>
           <p:cNvSpPr/>
           <p:nvPr/>
         </p:nvSpPr>
@@ -19125,7 +20781,7 @@
       </p:sp>
       <p:sp>
         <p:nvSpPr>
-          <p:cNvPr id="6" name="Shape 4"/>
+          <p:cNvPr id="9" name="Shape 7"/>
           <p:cNvSpPr/>
           <p:nvPr/>
         </p:nvSpPr>
@@ -19152,7 +20808,7 @@
       </p:sp>
       <p:sp>
         <p:nvSpPr>
-          <p:cNvPr id="7" name="Shape 5"/>
+          <p:cNvPr id="10" name="Shape 8"/>
           <p:cNvSpPr/>
           <p:nvPr/>
         </p:nvSpPr>
@@ -19179,7 +20835,7 @@
       </p:sp>
       <p:sp>
         <p:nvSpPr>
-          <p:cNvPr id="8" name="Shape 6"/>
+          <p:cNvPr id="11" name="Shape 9"/>
           <p:cNvSpPr/>
           <p:nvPr/>
         </p:nvSpPr>
@@ -19206,7 +20862,7 @@
       </p:sp>
       <p:pic>
         <p:nvPicPr>
-          <p:cNvPr id="9" name="Image 0" descr="preencoded.png">    </p:cNvPr>
+          <p:cNvPr id="12" name="Image 0" descr="preencoded.png">    </p:cNvPr>
           <p:cNvPicPr>
             <a:picLocks noChangeAspect="1"/>
           </p:cNvPicPr>
@@ -19236,7 +20892,7 @@
       </p:pic>
       <p:sp>
         <p:nvSpPr>
-          <p:cNvPr id="10" name="Shape 7"/>
+          <p:cNvPr id="13" name="Shape 10"/>
           <p:cNvSpPr/>
           <p:nvPr/>
         </p:nvSpPr>
@@ -19272,7 +20928,7 @@
       </p:sp>
       <p:pic>
         <p:nvPicPr>
-          <p:cNvPr id="11" name="Image 1" descr="preencoded.png">    </p:cNvPr>
+          <p:cNvPr id="14" name="Image 1" descr="preencoded.png">    </p:cNvPr>
           <p:cNvPicPr>
             <a:picLocks noChangeAspect="1"/>
           </p:cNvPicPr>
@@ -19302,7 +20958,7 @@
       </p:pic>
       <p:sp>
         <p:nvSpPr>
-          <p:cNvPr id="12" name="Shape 8"/>
+          <p:cNvPr id="15" name="Shape 11"/>
           <p:cNvSpPr/>
           <p:nvPr/>
         </p:nvSpPr>
@@ -19338,7 +20994,7 @@
       </p:sp>
       <p:pic>
         <p:nvPicPr>
-          <p:cNvPr id="13" name="Image 2" descr="preencoded.png">    </p:cNvPr>
+          <p:cNvPr id="16" name="Image 2" descr="preencoded.png">    </p:cNvPr>
           <p:cNvPicPr>
             <a:picLocks noChangeAspect="1"/>
           </p:cNvPicPr>
@@ -19368,7 +21024,7 @@
       </p:pic>
       <p:sp>
         <p:nvSpPr>
-          <p:cNvPr id="14" name="Shape 9"/>
+          <p:cNvPr id="17" name="Shape 12"/>
           <p:cNvSpPr/>
           <p:nvPr/>
         </p:nvSpPr>
@@ -19404,7 +21060,7 @@
       </p:sp>
       <p:sp>
         <p:nvSpPr>
-          <p:cNvPr id="15" name="Shape 10"/>
+          <p:cNvPr id="18" name="Shape 13"/>
           <p:cNvSpPr/>
           <p:nvPr/>
         </p:nvSpPr>
@@ -19433,7 +21089,7 @@
       </p:sp>
       <p:sp>
         <p:nvSpPr>
-          <p:cNvPr id="16" name="Shape 11"/>
+          <p:cNvPr id="19" name="Shape 14"/>
           <p:cNvSpPr/>
           <p:nvPr/>
         </p:nvSpPr>
@@ -19460,7 +21116,7 @@
       </p:sp>
       <p:sp>
         <p:nvSpPr>
-          <p:cNvPr id="17" name="Shape 12"/>
+          <p:cNvPr id="20" name="Shape 15"/>
           <p:cNvSpPr/>
           <p:nvPr/>
         </p:nvSpPr>
@@ -19487,7 +21143,7 @@
       </p:sp>
       <p:sp>
         <p:nvSpPr>
-          <p:cNvPr id="18" name="Shape 13"/>
+          <p:cNvPr id="21" name="Shape 16"/>
           <p:cNvSpPr/>
           <p:nvPr/>
         </p:nvSpPr>
@@ -19514,7 +21170,7 @@
       </p:sp>
       <p:sp>
         <p:nvSpPr>
-          <p:cNvPr id="19" name="mdpr:actions-output-review-326e07:title:__title:actions-output-review-326e07"/>
+          <p:cNvPr id="22" name="mdpr:actions-output-review-326e07:title:__title:actions-output-review-326e07"/>
           <p:cNvSpPr txBox="1"/>
           <p:nvPr/>
         </p:nvSpPr>
@@ -19556,7 +21212,7 @@
       </p:sp>
       <p:sp>
         <p:nvSpPr>
-          <p:cNvPr id="20" name="Shape 15"/>
+          <p:cNvPr id="23" name="Shape 18"/>
           <p:cNvSpPr/>
           <p:nvPr/>
         </p:nvSpPr>
@@ -19583,7 +21239,7 @@
       </p:sp>
       <p:pic>
         <p:nvPicPr>
-          <p:cNvPr id="21" name="Image 3" descr="flow icon from tabler-icons (MIT)">    </p:cNvPr>
+          <p:cNvPr id="24" name="Image 3" descr="flow icon from tabler-icons (MIT)">    </p:cNvPr>
           <p:cNvPicPr>
             <a:picLocks noChangeAspect="1"/>
           </p:cNvPicPr>
@@ -19613,7 +21269,7 @@
       </p:pic>
       <p:sp>
         <p:nvSpPr>
-          <p:cNvPr id="22" name="mdpr:actions-output-review-326e07:item-1:block-41"/>
+          <p:cNvPr id="25" name="mdpr:actions-output-review-326e07:item-1:block-41"/>
           <p:cNvSpPr txBox="1"/>
           <p:nvPr/>
         </p:nvSpPr>
@@ -19672,7 +21328,7 @@
       </p:sp>
       <p:sp>
         <p:nvSpPr>
-          <p:cNvPr id="23" name="Shape 17"/>
+          <p:cNvPr id="26" name="Shape 20"/>
           <p:cNvSpPr/>
           <p:nvPr/>
         </p:nvSpPr>
@@ -19699,7 +21355,7 @@
       </p:sp>
       <p:pic>
         <p:nvPicPr>
-          <p:cNvPr id="24" name="Image 4" descr="verified icon from tabler-icons (MIT)">    </p:cNvPr>
+          <p:cNvPr id="27" name="Image 4" descr="verified icon from tabler-icons (MIT)">    </p:cNvPr>
           <p:cNvPicPr>
             <a:picLocks noChangeAspect="1"/>
           </p:cNvPicPr>
@@ -19729,7 +21385,7 @@
       </p:pic>
       <p:sp>
         <p:nvSpPr>
-          <p:cNvPr id="25" name="mdpr:actions-output-review-326e07:item-2:block-41"/>
+          <p:cNvPr id="28" name="mdpr:actions-output-review-326e07:item-2:block-41"/>
           <p:cNvSpPr txBox="1"/>
           <p:nvPr/>
         </p:nvSpPr>
@@ -19788,7 +21444,7 @@
       </p:sp>
       <p:sp>
         <p:nvSpPr>
-          <p:cNvPr id="26" name="Shape 19"/>
+          <p:cNvPr id="29" name="Shape 22"/>
           <p:cNvSpPr/>
           <p:nvPr/>
         </p:nvSpPr>
@@ -19815,7 +21471,7 @@
       </p:sp>
       <p:pic>
         <p:nvPicPr>
-          <p:cNvPr id="27" name="Image 5" descr="spark icon from tabler-icons (MIT)">    </p:cNvPr>
+          <p:cNvPr id="30" name="Image 5" descr="spark icon from tabler-icons (MIT)">    </p:cNvPr>
           <p:cNvPicPr>
             <a:picLocks noChangeAspect="1"/>
           </p:cNvPicPr>
@@ -19845,7 +21501,7 @@
       </p:pic>
       <p:sp>
         <p:nvSpPr>
-          <p:cNvPr id="28" name="mdpr:actions-output-review-326e07:item-3:block-41"/>
+          <p:cNvPr id="31" name="mdpr:actions-output-review-326e07:item-3:block-41"/>
           <p:cNvSpPr txBox="1"/>
           <p:nvPr/>
         </p:nvSpPr>
@@ -19942,6 +21598,42 @@
         </p:nvSpPr>
         <p:spPr>
           <a:xfrm>
+            <a:off x="457200" y="402336"/>
+            <a:ext cx="11277295" cy="6053328"/>
+          </a:xfrm>
+          <a:prstGeom prst="roundRect">
+            <a:avLst>
+              <a:gd name="adj" fmla="val 2115"/>
+            </a:avLst>
+          </a:prstGeom>
+          <a:solidFill>
+            <a:srgbClr val="E6EAF0"/>
+          </a:solidFill>
+          <a:ln w="12700">
+            <a:solidFill>
+              <a:srgbClr val="8793A3">
+                <a:alpha val="84000"/>
+              </a:srgbClr>
+            </a:solidFill>
+            <a:prstDash val="solid"/>
+          </a:ln>
+          <a:effectLst>
+            <a:outerShdw sx="100000" sy="100000" kx="0" ky="0" algn="bl" rotWithShape="0" blurRad="13970" dist="50800" dir="2700000">
+              <a:srgbClr val="475569">
+                <a:alpha val="18000"/>
+              </a:srgbClr>
+            </a:outerShdw>
+          </a:effectLst>
+        </p:spPr>
+      </p:sp>
+      <p:sp>
+        <p:nvSpPr>
+          <p:cNvPr id="3" name="Shape 1"/>
+          <p:cNvSpPr/>
+          <p:nvPr/>
+        </p:nvSpPr>
+        <p:spPr>
+          <a:xfrm>
             <a:off x="530352" y="457200"/>
             <a:ext cx="11130991" cy="5943600"/>
           </a:xfrm>
@@ -19972,7 +21664,7 @@
       </p:sp>
       <p:sp>
         <p:nvSpPr>
-          <p:cNvPr id="3" name="Shape 1"/>
+          <p:cNvPr id="4" name="Shape 2"/>
           <p:cNvSpPr/>
           <p:nvPr/>
         </p:nvSpPr>
@@ -19995,7 +21687,63 @@
       </p:sp>
       <p:sp>
         <p:nvSpPr>
-          <p:cNvPr id="4" name="Shape 2"/>
+          <p:cNvPr id="5" name="Shape 3"/>
+          <p:cNvSpPr/>
+          <p:nvPr/>
+        </p:nvSpPr>
+        <p:spPr>
+          <a:xfrm>
+            <a:off x="658368" y="6217920"/>
+            <a:ext cx="10874959" cy="0"/>
+          </a:xfrm>
+          <a:prstGeom prst="line">
+            <a:avLst/>
+          </a:prstGeom>
+          <a:noFill/>
+          <a:ln w="12700">
+            <a:solidFill>
+              <a:srgbClr val="94A3B8">
+                <a:alpha val="66000"/>
+              </a:srgbClr>
+            </a:solidFill>
+            <a:prstDash val="solid"/>
+          </a:ln>
+        </p:spPr>
+      </p:sp>
+      <p:sp>
+        <p:nvSpPr>
+          <p:cNvPr id="6" name="Shape 4"/>
+          <p:cNvSpPr/>
+          <p:nvPr/>
+        </p:nvSpPr>
+        <p:spPr>
+          <a:xfrm>
+            <a:off x="10600639" y="512064"/>
+            <a:ext cx="877824" cy="201168"/>
+          </a:xfrm>
+          <a:prstGeom prst="roundRect">
+            <a:avLst>
+              <a:gd name="adj" fmla="val 18182"/>
+            </a:avLst>
+          </a:prstGeom>
+          <a:solidFill>
+            <a:srgbClr val="D7DDE6">
+              <a:alpha val="92000"/>
+            </a:srgbClr>
+          </a:solidFill>
+          <a:ln w="12700">
+            <a:solidFill>
+              <a:srgbClr val="FFFFFF">
+                <a:alpha val="82000"/>
+              </a:srgbClr>
+            </a:solidFill>
+            <a:prstDash val="solid"/>
+          </a:ln>
+        </p:spPr>
+      </p:sp>
+      <p:sp>
+        <p:nvSpPr>
+          <p:cNvPr id="7" name="Shape 5"/>
           <p:cNvSpPr/>
           <p:nvPr/>
         </p:nvSpPr>
@@ -20024,7 +21772,7 @@
       </p:sp>
       <p:sp>
         <p:nvSpPr>
-          <p:cNvPr id="5" name="Shape 3"/>
+          <p:cNvPr id="8" name="Shape 6"/>
           <p:cNvSpPr/>
           <p:nvPr/>
         </p:nvSpPr>
@@ -20053,7 +21801,7 @@
       </p:sp>
       <p:sp>
         <p:nvSpPr>
-          <p:cNvPr id="6" name="Shape 4"/>
+          <p:cNvPr id="9" name="Shape 7"/>
           <p:cNvSpPr/>
           <p:nvPr/>
         </p:nvSpPr>
@@ -20080,7 +21828,7 @@
       </p:sp>
       <p:sp>
         <p:nvSpPr>
-          <p:cNvPr id="7" name="Shape 5"/>
+          <p:cNvPr id="10" name="Shape 8"/>
           <p:cNvSpPr/>
           <p:nvPr/>
         </p:nvSpPr>
@@ -20107,7 +21855,7 @@
       </p:sp>
       <p:sp>
         <p:nvSpPr>
-          <p:cNvPr id="8" name="Shape 6"/>
+          <p:cNvPr id="11" name="Shape 9"/>
           <p:cNvSpPr/>
           <p:nvPr/>
         </p:nvSpPr>
@@ -20134,7 +21882,7 @@
       </p:sp>
       <p:sp>
         <p:nvSpPr>
-          <p:cNvPr id="9" name="Shape 7"/>
+          <p:cNvPr id="12" name="Shape 10"/>
           <p:cNvSpPr/>
           <p:nvPr/>
         </p:nvSpPr>
@@ -20161,7 +21909,7 @@
       </p:sp>
       <p:sp>
         <p:nvSpPr>
-          <p:cNvPr id="10" name="Shape 8"/>
+          <p:cNvPr id="13" name="Shape 11"/>
           <p:cNvSpPr/>
           <p:nvPr/>
         </p:nvSpPr>
@@ -20188,7 +21936,7 @@
       </p:sp>
       <p:sp>
         <p:nvSpPr>
-          <p:cNvPr id="11" name="Shape 9"/>
+          <p:cNvPr id="14" name="Shape 12"/>
           <p:cNvSpPr/>
           <p:nvPr/>
         </p:nvSpPr>
@@ -20215,7 +21963,7 @@
       </p:sp>
       <p:sp>
         <p:nvSpPr>
-          <p:cNvPr id="12" name="mdpr:2-2-7bfb60:title:__title:2-2-7bfb60"/>
+          <p:cNvPr id="15" name="mdpr:2-2-7bfb60:title:__title:2-2-7bfb60"/>
           <p:cNvSpPr txBox="1"/>
           <p:nvPr/>
         </p:nvSpPr>
@@ -20257,7 +22005,7 @@
       </p:sp>
       <p:sp>
         <p:nvSpPr>
-          <p:cNvPr id="13" name="mdpr:2-2-7bfb60:toc-item-1:toc-item-15"/>
+          <p:cNvPr id="16" name="mdpr:2-2-7bfb60:toc-item-1:toc-item-15"/>
           <p:cNvSpPr txBox="1"/>
           <p:nvPr/>
         </p:nvSpPr>
@@ -20337,6 +22085,42 @@
         </p:nvSpPr>
         <p:spPr>
           <a:xfrm>
+            <a:off x="457200" y="402336"/>
+            <a:ext cx="11277295" cy="6053328"/>
+          </a:xfrm>
+          <a:prstGeom prst="roundRect">
+            <a:avLst>
+              <a:gd name="adj" fmla="val 2115"/>
+            </a:avLst>
+          </a:prstGeom>
+          <a:solidFill>
+            <a:srgbClr val="E6EAF0"/>
+          </a:solidFill>
+          <a:ln w="12700">
+            <a:solidFill>
+              <a:srgbClr val="8793A3">
+                <a:alpha val="84000"/>
+              </a:srgbClr>
+            </a:solidFill>
+            <a:prstDash val="solid"/>
+          </a:ln>
+          <a:effectLst>
+            <a:outerShdw sx="100000" sy="100000" kx="0" ky="0" algn="bl" rotWithShape="0" blurRad="13970" dist="50800" dir="2700000">
+              <a:srgbClr val="475569">
+                <a:alpha val="18000"/>
+              </a:srgbClr>
+            </a:outerShdw>
+          </a:effectLst>
+        </p:spPr>
+      </p:sp>
+      <p:sp>
+        <p:nvSpPr>
+          <p:cNvPr id="3" name="Shape 1"/>
+          <p:cNvSpPr/>
+          <p:nvPr/>
+        </p:nvSpPr>
+        <p:spPr>
+          <a:xfrm>
             <a:off x="530352" y="457200"/>
             <a:ext cx="11130991" cy="5943600"/>
           </a:xfrm>
@@ -20367,7 +22151,7 @@
       </p:sp>
       <p:sp>
         <p:nvSpPr>
-          <p:cNvPr id="3" name="Shape 1"/>
+          <p:cNvPr id="4" name="Shape 2"/>
           <p:cNvSpPr/>
           <p:nvPr/>
         </p:nvSpPr>
@@ -20390,7 +22174,63 @@
       </p:sp>
       <p:sp>
         <p:nvSpPr>
-          <p:cNvPr id="4" name="Shape 2"/>
+          <p:cNvPr id="5" name="Shape 3"/>
+          <p:cNvSpPr/>
+          <p:nvPr/>
+        </p:nvSpPr>
+        <p:spPr>
+          <a:xfrm>
+            <a:off x="658368" y="6217920"/>
+            <a:ext cx="10874959" cy="0"/>
+          </a:xfrm>
+          <a:prstGeom prst="line">
+            <a:avLst/>
+          </a:prstGeom>
+          <a:noFill/>
+          <a:ln w="12700">
+            <a:solidFill>
+              <a:srgbClr val="94A3B8">
+                <a:alpha val="66000"/>
+              </a:srgbClr>
+            </a:solidFill>
+            <a:prstDash val="solid"/>
+          </a:ln>
+        </p:spPr>
+      </p:sp>
+      <p:sp>
+        <p:nvSpPr>
+          <p:cNvPr id="6" name="Shape 4"/>
+          <p:cNvSpPr/>
+          <p:nvPr/>
+        </p:nvSpPr>
+        <p:spPr>
+          <a:xfrm>
+            <a:off x="10600639" y="512064"/>
+            <a:ext cx="877824" cy="201168"/>
+          </a:xfrm>
+          <a:prstGeom prst="roundRect">
+            <a:avLst>
+              <a:gd name="adj" fmla="val 18182"/>
+            </a:avLst>
+          </a:prstGeom>
+          <a:solidFill>
+            <a:srgbClr val="D7DDE6">
+              <a:alpha val="92000"/>
+            </a:srgbClr>
+          </a:solidFill>
+          <a:ln w="12700">
+            <a:solidFill>
+              <a:srgbClr val="FFFFFF">
+                <a:alpha val="82000"/>
+              </a:srgbClr>
+            </a:solidFill>
+            <a:prstDash val="solid"/>
+          </a:ln>
+        </p:spPr>
+      </p:sp>
+      <p:sp>
+        <p:nvSpPr>
+          <p:cNvPr id="7" name="Shape 5"/>
           <p:cNvSpPr/>
           <p:nvPr/>
         </p:nvSpPr>
@@ -20419,7 +22259,7 @@
       </p:sp>
       <p:sp>
         <p:nvSpPr>
-          <p:cNvPr id="5" name="Shape 3"/>
+          <p:cNvPr id="8" name="Shape 6"/>
           <p:cNvSpPr/>
           <p:nvPr/>
         </p:nvSpPr>
@@ -20448,7 +22288,7 @@
       </p:sp>
       <p:sp>
         <p:nvSpPr>
-          <p:cNvPr id="6" name="Shape 4"/>
+          <p:cNvPr id="9" name="Shape 7"/>
           <p:cNvSpPr/>
           <p:nvPr/>
         </p:nvSpPr>
@@ -20475,7 +22315,7 @@
       </p:sp>
       <p:sp>
         <p:nvSpPr>
-          <p:cNvPr id="7" name="Shape 5"/>
+          <p:cNvPr id="10" name="Shape 8"/>
           <p:cNvSpPr/>
           <p:nvPr/>
         </p:nvSpPr>
@@ -20502,7 +22342,7 @@
       </p:sp>
       <p:sp>
         <p:nvSpPr>
-          <p:cNvPr id="8" name="Shape 6"/>
+          <p:cNvPr id="11" name="Shape 9"/>
           <p:cNvSpPr/>
           <p:nvPr/>
         </p:nvSpPr>
@@ -20529,7 +22369,7 @@
       </p:sp>
       <p:pic>
         <p:nvPicPr>
-          <p:cNvPr id="9" name="Image 0" descr="preencoded.png">    </p:cNvPr>
+          <p:cNvPr id="12" name="Image 0" descr="preencoded.png">    </p:cNvPr>
           <p:cNvPicPr>
             <a:picLocks noChangeAspect="1"/>
           </p:cNvPicPr>
@@ -20559,7 +22399,7 @@
       </p:pic>
       <p:sp>
         <p:nvSpPr>
-          <p:cNvPr id="10" name="Shape 7"/>
+          <p:cNvPr id="13" name="Shape 10"/>
           <p:cNvSpPr/>
           <p:nvPr/>
         </p:nvSpPr>
@@ -20595,7 +22435,7 @@
       </p:sp>
       <p:sp>
         <p:nvSpPr>
-          <p:cNvPr id="11" name="Shape 8"/>
+          <p:cNvPr id="14" name="Shape 11"/>
           <p:cNvSpPr/>
           <p:nvPr/>
         </p:nvSpPr>
@@ -20624,7 +22464,7 @@
       </p:sp>
       <p:sp>
         <p:nvSpPr>
-          <p:cNvPr id="12" name="Shape 9"/>
+          <p:cNvPr id="15" name="Shape 12"/>
           <p:cNvSpPr/>
           <p:nvPr/>
         </p:nvSpPr>
@@ -20651,7 +22491,7 @@
       </p:sp>
       <p:sp>
         <p:nvSpPr>
-          <p:cNvPr id="13" name="mdpr:teaser-summary-7731dc:title:__title:teaser-summary-7731dc"/>
+          <p:cNvPr id="16" name="mdpr:teaser-summary-7731dc:title:__title:teaser-summary-7731dc"/>
           <p:cNvSpPr txBox="1"/>
           <p:nvPr/>
         </p:nvSpPr>
@@ -20693,7 +22533,7 @@
       </p:sp>
       <p:sp>
         <p:nvSpPr>
-          <p:cNvPr id="14" name="mdpr:teaser-summary-7731dc:key-message:block-3"/>
+          <p:cNvPr id="17" name="mdpr:teaser-summary-7731dc:key-message:block-3"/>
           <p:cNvSpPr txBox="1"/>
           <p:nvPr/>
         </p:nvSpPr>
@@ -20735,7 +22575,7 @@
       </p:sp>
       <p:sp>
         <p:nvSpPr>
-          <p:cNvPr id="15" name="mdpr:teaser-summary-7731dc:body:block-4"/>
+          <p:cNvPr id="18" name="mdpr:teaser-summary-7731dc:body:block-4"/>
           <p:cNvSpPr txBox="1"/>
           <p:nvPr/>
         </p:nvSpPr>
@@ -20952,6 +22792,42 @@
         </p:nvSpPr>
         <p:spPr>
           <a:xfrm>
+            <a:off x="457200" y="402336"/>
+            <a:ext cx="11277295" cy="6053328"/>
+          </a:xfrm>
+          <a:prstGeom prst="roundRect">
+            <a:avLst>
+              <a:gd name="adj" fmla="val 2115"/>
+            </a:avLst>
+          </a:prstGeom>
+          <a:solidFill>
+            <a:srgbClr val="E6EAF0"/>
+          </a:solidFill>
+          <a:ln w="12700">
+            <a:solidFill>
+              <a:srgbClr val="8793A3">
+                <a:alpha val="84000"/>
+              </a:srgbClr>
+            </a:solidFill>
+            <a:prstDash val="solid"/>
+          </a:ln>
+          <a:effectLst>
+            <a:outerShdw sx="100000" sy="100000" kx="0" ky="0" algn="bl" rotWithShape="0" blurRad="13970" dist="50800" dir="2700000">
+              <a:srgbClr val="475569">
+                <a:alpha val="18000"/>
+              </a:srgbClr>
+            </a:outerShdw>
+          </a:effectLst>
+        </p:spPr>
+      </p:sp>
+      <p:sp>
+        <p:nvSpPr>
+          <p:cNvPr id="3" name="Shape 1"/>
+          <p:cNvSpPr/>
+          <p:nvPr/>
+        </p:nvSpPr>
+        <p:spPr>
+          <a:xfrm>
             <a:off x="530352" y="457200"/>
             <a:ext cx="11130991" cy="5943600"/>
           </a:xfrm>
@@ -20982,7 +22858,7 @@
       </p:sp>
       <p:sp>
         <p:nvSpPr>
-          <p:cNvPr id="3" name="Shape 1"/>
+          <p:cNvPr id="4" name="Shape 2"/>
           <p:cNvSpPr/>
           <p:nvPr/>
         </p:nvSpPr>
@@ -21005,7 +22881,63 @@
       </p:sp>
       <p:sp>
         <p:nvSpPr>
-          <p:cNvPr id="4" name="Shape 2"/>
+          <p:cNvPr id="5" name="Shape 3"/>
+          <p:cNvSpPr/>
+          <p:nvPr/>
+        </p:nvSpPr>
+        <p:spPr>
+          <a:xfrm>
+            <a:off x="658368" y="6217920"/>
+            <a:ext cx="10874959" cy="0"/>
+          </a:xfrm>
+          <a:prstGeom prst="line">
+            <a:avLst/>
+          </a:prstGeom>
+          <a:noFill/>
+          <a:ln w="12700">
+            <a:solidFill>
+              <a:srgbClr val="94A3B8">
+                <a:alpha val="66000"/>
+              </a:srgbClr>
+            </a:solidFill>
+            <a:prstDash val="solid"/>
+          </a:ln>
+        </p:spPr>
+      </p:sp>
+      <p:sp>
+        <p:nvSpPr>
+          <p:cNvPr id="6" name="Shape 4"/>
+          <p:cNvSpPr/>
+          <p:nvPr/>
+        </p:nvSpPr>
+        <p:spPr>
+          <a:xfrm>
+            <a:off x="10600639" y="512064"/>
+            <a:ext cx="877824" cy="201168"/>
+          </a:xfrm>
+          <a:prstGeom prst="roundRect">
+            <a:avLst>
+              <a:gd name="adj" fmla="val 18182"/>
+            </a:avLst>
+          </a:prstGeom>
+          <a:solidFill>
+            <a:srgbClr val="D7DDE6">
+              <a:alpha val="92000"/>
+            </a:srgbClr>
+          </a:solidFill>
+          <a:ln w="12700">
+            <a:solidFill>
+              <a:srgbClr val="FFFFFF">
+                <a:alpha val="82000"/>
+              </a:srgbClr>
+            </a:solidFill>
+            <a:prstDash val="solid"/>
+          </a:ln>
+        </p:spPr>
+      </p:sp>
+      <p:sp>
+        <p:nvSpPr>
+          <p:cNvPr id="7" name="Shape 5"/>
           <p:cNvSpPr/>
           <p:nvPr/>
         </p:nvSpPr>
@@ -21034,7 +22966,7 @@
       </p:sp>
       <p:sp>
         <p:nvSpPr>
-          <p:cNvPr id="5" name="Shape 3"/>
+          <p:cNvPr id="8" name="Shape 6"/>
           <p:cNvSpPr/>
           <p:nvPr/>
         </p:nvSpPr>
@@ -21063,7 +22995,7 @@
       </p:sp>
       <p:sp>
         <p:nvSpPr>
-          <p:cNvPr id="6" name="Shape 4"/>
+          <p:cNvPr id="9" name="Shape 7"/>
           <p:cNvSpPr/>
           <p:nvPr/>
         </p:nvSpPr>
@@ -21090,7 +23022,7 @@
       </p:sp>
       <p:sp>
         <p:nvSpPr>
-          <p:cNvPr id="7" name="Shape 5"/>
+          <p:cNvPr id="10" name="Shape 8"/>
           <p:cNvSpPr/>
           <p:nvPr/>
         </p:nvSpPr>
@@ -21117,7 +23049,7 @@
       </p:sp>
       <p:sp>
         <p:nvSpPr>
-          <p:cNvPr id="8" name="Shape 6"/>
+          <p:cNvPr id="11" name="Shape 9"/>
           <p:cNvSpPr/>
           <p:nvPr/>
         </p:nvSpPr>
@@ -21144,7 +23076,7 @@
       </p:sp>
       <p:pic>
         <p:nvPicPr>
-          <p:cNvPr id="9" name="Image 0" descr="preencoded.png">    </p:cNvPr>
+          <p:cNvPr id="12" name="Image 0" descr="preencoded.png">    </p:cNvPr>
           <p:cNvPicPr>
             <a:picLocks noChangeAspect="1"/>
           </p:cNvPicPr>
@@ -21174,7 +23106,7 @@
       </p:pic>
       <p:sp>
         <p:nvSpPr>
-          <p:cNvPr id="10" name="Shape 7"/>
+          <p:cNvPr id="13" name="Shape 10"/>
           <p:cNvSpPr/>
           <p:nvPr/>
         </p:nvSpPr>
@@ -21210,7 +23142,7 @@
       </p:sp>
       <p:pic>
         <p:nvPicPr>
-          <p:cNvPr id="11" name="Image 1" descr="preencoded.png">    </p:cNvPr>
+          <p:cNvPr id="14" name="Image 1" descr="preencoded.png">    </p:cNvPr>
           <p:cNvPicPr>
             <a:picLocks noChangeAspect="1"/>
           </p:cNvPicPr>
@@ -21240,7 +23172,7 @@
       </p:pic>
       <p:sp>
         <p:nvSpPr>
-          <p:cNvPr id="12" name="Shape 8"/>
+          <p:cNvPr id="15" name="Shape 11"/>
           <p:cNvSpPr/>
           <p:nvPr/>
         </p:nvSpPr>
@@ -21276,7 +23208,7 @@
       </p:sp>
       <p:pic>
         <p:nvPicPr>
-          <p:cNvPr id="13" name="Image 2" descr="preencoded.png">    </p:cNvPr>
+          <p:cNvPr id="16" name="Image 2" descr="preencoded.png">    </p:cNvPr>
           <p:cNvPicPr>
             <a:picLocks noChangeAspect="1"/>
           </p:cNvPicPr>
@@ -21306,7 +23238,7 @@
       </p:pic>
       <p:sp>
         <p:nvSpPr>
-          <p:cNvPr id="14" name="Shape 9"/>
+          <p:cNvPr id="17" name="Shape 12"/>
           <p:cNvSpPr/>
           <p:nvPr/>
         </p:nvSpPr>
@@ -21342,7 +23274,7 @@
       </p:sp>
       <p:sp>
         <p:nvSpPr>
-          <p:cNvPr id="15" name="Shape 10"/>
+          <p:cNvPr id="18" name="Shape 13"/>
           <p:cNvSpPr/>
           <p:nvPr/>
         </p:nvSpPr>
@@ -21371,7 +23303,7 @@
       </p:sp>
       <p:sp>
         <p:nvSpPr>
-          <p:cNvPr id="16" name="Shape 11"/>
+          <p:cNvPr id="19" name="Shape 14"/>
           <p:cNvSpPr/>
           <p:nvPr/>
         </p:nvSpPr>
@@ -21398,7 +23330,7 @@
       </p:sp>
       <p:sp>
         <p:nvSpPr>
-          <p:cNvPr id="17" name="Shape 12"/>
+          <p:cNvPr id="20" name="Shape 15"/>
           <p:cNvSpPr/>
           <p:nvPr/>
         </p:nvSpPr>
@@ -21425,7 +23357,7 @@
       </p:sp>
       <p:sp>
         <p:nvSpPr>
-          <p:cNvPr id="18" name="Shape 13"/>
+          <p:cNvPr id="21" name="Shape 16"/>
           <p:cNvSpPr/>
           <p:nvPr/>
         </p:nvSpPr>
@@ -21452,7 +23384,7 @@
       </p:sp>
       <p:sp>
         <p:nvSpPr>
-          <p:cNvPr id="19" name="mdpr:1-2-32ac08:title:__title:1-2-32ac08"/>
+          <p:cNvPr id="22" name="mdpr:1-2-32ac08:title:__title:1-2-32ac08"/>
           <p:cNvSpPr txBox="1"/>
           <p:nvPr/>
         </p:nvSpPr>
@@ -21494,7 +23426,7 @@
       </p:sp>
       <p:sp>
         <p:nvSpPr>
-          <p:cNvPr id="20" name="Shape 15"/>
+          <p:cNvPr id="23" name="Shape 18"/>
           <p:cNvSpPr/>
           <p:nvPr/>
         </p:nvSpPr>
@@ -21521,7 +23453,7 @@
       </p:sp>
       <p:pic>
         <p:nvPicPr>
-          <p:cNvPr id="21" name="Image 3" descr="article icon from tabler-icons (MIT)">    </p:cNvPr>
+          <p:cNvPr id="24" name="Image 3" descr="article icon from tabler-icons (MIT)">    </p:cNvPr>
           <p:cNvPicPr>
             <a:picLocks noChangeAspect="1"/>
           </p:cNvPicPr>
@@ -21551,7 +23483,7 @@
       </p:pic>
       <p:sp>
         <p:nvSpPr>
-          <p:cNvPr id="22" name="mdpr:1-2-32ac08:item-1:block-6-chunk-1"/>
+          <p:cNvPr id="25" name="mdpr:1-2-32ac08:item-1:block-6-chunk-1"/>
           <p:cNvSpPr txBox="1"/>
           <p:nvPr/>
         </p:nvSpPr>
@@ -21610,7 +23542,7 @@
       </p:sp>
       <p:sp>
         <p:nvSpPr>
-          <p:cNvPr id="23" name="Shape 17"/>
+          <p:cNvPr id="26" name="Shape 20"/>
           <p:cNvSpPr/>
           <p:nvPr/>
         </p:nvSpPr>
@@ -21637,7 +23569,7 @@
       </p:sp>
       <p:pic>
         <p:nvPicPr>
-          <p:cNvPr id="24" name="Image 4" descr="chart icon from tabler-icons (MIT)">    </p:cNvPr>
+          <p:cNvPr id="27" name="Image 4" descr="chart icon from tabler-icons (MIT)">    </p:cNvPr>
           <p:cNvPicPr>
             <a:picLocks noChangeAspect="1"/>
           </p:cNvPicPr>
@@ -21667,7 +23599,7 @@
       </p:pic>
       <p:sp>
         <p:nvSpPr>
-          <p:cNvPr id="25" name="mdpr:1-2-32ac08:item-2:block-6-chunk-1"/>
+          <p:cNvPr id="28" name="mdpr:1-2-32ac08:item-2:block-6-chunk-1"/>
           <p:cNvSpPr txBox="1"/>
           <p:nvPr/>
         </p:nvSpPr>
@@ -21726,7 +23658,7 @@
       </p:sp>
       <p:sp>
         <p:nvSpPr>
-          <p:cNvPr id="26" name="Shape 19"/>
+          <p:cNvPr id="29" name="Shape 22"/>
           <p:cNvSpPr/>
           <p:nvPr/>
         </p:nvSpPr>
@@ -21753,7 +23685,7 @@
       </p:sp>
       <p:pic>
         <p:nvPicPr>
-          <p:cNvPr id="27" name="Image 5" descr="article icon from tabler-icons (MIT)">    </p:cNvPr>
+          <p:cNvPr id="30" name="Image 5" descr="article icon from tabler-icons (MIT)">    </p:cNvPr>
           <p:cNvPicPr>
             <a:picLocks noChangeAspect="1"/>
           </p:cNvPicPr>
@@ -21783,7 +23715,7 @@
       </p:pic>
       <p:sp>
         <p:nvSpPr>
-          <p:cNvPr id="28" name="mdpr:1-2-32ac08:item-3:block-6-chunk-1"/>
+          <p:cNvPr id="31" name="mdpr:1-2-32ac08:item-3:block-6-chunk-1"/>
           <p:cNvSpPr txBox="1"/>
           <p:nvPr/>
         </p:nvSpPr>
@@ -21880,6 +23812,42 @@
         </p:nvSpPr>
         <p:spPr>
           <a:xfrm>
+            <a:off x="457200" y="402336"/>
+            <a:ext cx="11277295" cy="6053328"/>
+          </a:xfrm>
+          <a:prstGeom prst="roundRect">
+            <a:avLst>
+              <a:gd name="adj" fmla="val 2115"/>
+            </a:avLst>
+          </a:prstGeom>
+          <a:solidFill>
+            <a:srgbClr val="E6EAF0"/>
+          </a:solidFill>
+          <a:ln w="12700">
+            <a:solidFill>
+              <a:srgbClr val="8793A3">
+                <a:alpha val="84000"/>
+              </a:srgbClr>
+            </a:solidFill>
+            <a:prstDash val="solid"/>
+          </a:ln>
+          <a:effectLst>
+            <a:outerShdw sx="100000" sy="100000" kx="0" ky="0" algn="bl" rotWithShape="0" blurRad="13970" dist="50800" dir="2700000">
+              <a:srgbClr val="475569">
+                <a:alpha val="18000"/>
+              </a:srgbClr>
+            </a:outerShdw>
+          </a:effectLst>
+        </p:spPr>
+      </p:sp>
+      <p:sp>
+        <p:nvSpPr>
+          <p:cNvPr id="3" name="Shape 1"/>
+          <p:cNvSpPr/>
+          <p:nvPr/>
+        </p:nvSpPr>
+        <p:spPr>
+          <a:xfrm>
             <a:off x="530352" y="457200"/>
             <a:ext cx="11130991" cy="5943600"/>
           </a:xfrm>
@@ -21910,7 +23878,7 @@
       </p:sp>
       <p:sp>
         <p:nvSpPr>
-          <p:cNvPr id="3" name="Shape 1"/>
+          <p:cNvPr id="4" name="Shape 2"/>
           <p:cNvSpPr/>
           <p:nvPr/>
         </p:nvSpPr>
@@ -21933,7 +23901,63 @@
       </p:sp>
       <p:sp>
         <p:nvSpPr>
-          <p:cNvPr id="4" name="Shape 2"/>
+          <p:cNvPr id="5" name="Shape 3"/>
+          <p:cNvSpPr/>
+          <p:nvPr/>
+        </p:nvSpPr>
+        <p:spPr>
+          <a:xfrm>
+            <a:off x="658368" y="6217920"/>
+            <a:ext cx="10874959" cy="0"/>
+          </a:xfrm>
+          <a:prstGeom prst="line">
+            <a:avLst/>
+          </a:prstGeom>
+          <a:noFill/>
+          <a:ln w="12700">
+            <a:solidFill>
+              <a:srgbClr val="94A3B8">
+                <a:alpha val="66000"/>
+              </a:srgbClr>
+            </a:solidFill>
+            <a:prstDash val="solid"/>
+          </a:ln>
+        </p:spPr>
+      </p:sp>
+      <p:sp>
+        <p:nvSpPr>
+          <p:cNvPr id="6" name="Shape 4"/>
+          <p:cNvSpPr/>
+          <p:nvPr/>
+        </p:nvSpPr>
+        <p:spPr>
+          <a:xfrm>
+            <a:off x="10600639" y="512064"/>
+            <a:ext cx="877824" cy="201168"/>
+          </a:xfrm>
+          <a:prstGeom prst="roundRect">
+            <a:avLst>
+              <a:gd name="adj" fmla="val 18182"/>
+            </a:avLst>
+          </a:prstGeom>
+          <a:solidFill>
+            <a:srgbClr val="D7DDE6">
+              <a:alpha val="92000"/>
+            </a:srgbClr>
+          </a:solidFill>
+          <a:ln w="12700">
+            <a:solidFill>
+              <a:srgbClr val="FFFFFF">
+                <a:alpha val="82000"/>
+              </a:srgbClr>
+            </a:solidFill>
+            <a:prstDash val="solid"/>
+          </a:ln>
+        </p:spPr>
+      </p:sp>
+      <p:sp>
+        <p:nvSpPr>
+          <p:cNvPr id="7" name="Shape 5"/>
           <p:cNvSpPr/>
           <p:nvPr/>
         </p:nvSpPr>
@@ -21962,7 +23986,7 @@
       </p:sp>
       <p:sp>
         <p:nvSpPr>
-          <p:cNvPr id="5" name="Shape 3"/>
+          <p:cNvPr id="8" name="Shape 6"/>
           <p:cNvSpPr/>
           <p:nvPr/>
         </p:nvSpPr>
@@ -21991,7 +24015,7 @@
       </p:sp>
       <p:sp>
         <p:nvSpPr>
-          <p:cNvPr id="6" name="Shape 4"/>
+          <p:cNvPr id="9" name="Shape 7"/>
           <p:cNvSpPr/>
           <p:nvPr/>
         </p:nvSpPr>
@@ -22018,7 +24042,7 @@
       </p:sp>
       <p:sp>
         <p:nvSpPr>
-          <p:cNvPr id="7" name="Shape 5"/>
+          <p:cNvPr id="10" name="Shape 8"/>
           <p:cNvSpPr/>
           <p:nvPr/>
         </p:nvSpPr>
@@ -22045,7 +24069,7 @@
       </p:sp>
       <p:sp>
         <p:nvSpPr>
-          <p:cNvPr id="8" name="Shape 6"/>
+          <p:cNvPr id="11" name="Shape 9"/>
           <p:cNvSpPr/>
           <p:nvPr/>
         </p:nvSpPr>
@@ -22072,7 +24096,7 @@
       </p:sp>
       <p:sp>
         <p:nvSpPr>
-          <p:cNvPr id="9" name="Shape 7"/>
+          <p:cNvPr id="12" name="Shape 10"/>
           <p:cNvSpPr/>
           <p:nvPr/>
         </p:nvSpPr>
@@ -22099,7 +24123,7 @@
       </p:sp>
       <p:sp>
         <p:nvSpPr>
-          <p:cNvPr id="10" name="Shape 8"/>
+          <p:cNvPr id="13" name="Shape 11"/>
           <p:cNvSpPr/>
           <p:nvPr/>
         </p:nvSpPr>
@@ -22126,7 +24150,7 @@
       </p:sp>
       <p:sp>
         <p:nvSpPr>
-          <p:cNvPr id="11" name="mdpr:2-2-14f8eb:title:__title:2-2-14f8eb"/>
+          <p:cNvPr id="14" name="mdpr:2-2-14f8eb:title:__title:2-2-14f8eb"/>
           <p:cNvSpPr txBox="1"/>
           <p:nvPr/>
         </p:nvSpPr>
@@ -22168,7 +24192,7 @@
       </p:sp>
       <p:sp>
         <p:nvSpPr>
-          <p:cNvPr id="12" name="mdpr:2-2-14f8eb:left:block-6-chunk-2"/>
+          <p:cNvPr id="15" name="mdpr:2-2-14f8eb:left:block-6-chunk-2"/>
           <p:cNvSpPr txBox="1"/>
           <p:nvPr/>
         </p:nvSpPr>
@@ -22227,7 +24251,7 @@
       </p:sp>
       <p:sp>
         <p:nvSpPr>
-          <p:cNvPr id="13" name="mdpr:2-2-14f8eb:right:block-6-chunk-2"/>
+          <p:cNvPr id="16" name="mdpr:2-2-14f8eb:right:block-6-chunk-2"/>
           <p:cNvSpPr txBox="1"/>
           <p:nvPr/>
         </p:nvSpPr>
@@ -22324,6 +24348,42 @@
         </p:nvSpPr>
         <p:spPr>
           <a:xfrm>
+            <a:off x="457200" y="402336"/>
+            <a:ext cx="11277295" cy="6053328"/>
+          </a:xfrm>
+          <a:prstGeom prst="roundRect">
+            <a:avLst>
+              <a:gd name="adj" fmla="val 2115"/>
+            </a:avLst>
+          </a:prstGeom>
+          <a:solidFill>
+            <a:srgbClr val="E6EAF0"/>
+          </a:solidFill>
+          <a:ln w="12700">
+            <a:solidFill>
+              <a:srgbClr val="8793A3">
+                <a:alpha val="84000"/>
+              </a:srgbClr>
+            </a:solidFill>
+            <a:prstDash val="solid"/>
+          </a:ln>
+          <a:effectLst>
+            <a:outerShdw sx="100000" sy="100000" kx="0" ky="0" algn="bl" rotWithShape="0" blurRad="13970" dist="50800" dir="2700000">
+              <a:srgbClr val="475569">
+                <a:alpha val="18000"/>
+              </a:srgbClr>
+            </a:outerShdw>
+          </a:effectLst>
+        </p:spPr>
+      </p:sp>
+      <p:sp>
+        <p:nvSpPr>
+          <p:cNvPr id="3" name="Shape 1"/>
+          <p:cNvSpPr/>
+          <p:nvPr/>
+        </p:nvSpPr>
+        <p:spPr>
+          <a:xfrm>
             <a:off x="530352" y="457200"/>
             <a:ext cx="11130991" cy="5943600"/>
           </a:xfrm>
@@ -22354,7 +24414,7 @@
       </p:sp>
       <p:sp>
         <p:nvSpPr>
-          <p:cNvPr id="3" name="Shape 1"/>
+          <p:cNvPr id="4" name="Shape 2"/>
           <p:cNvSpPr/>
           <p:nvPr/>
         </p:nvSpPr>
@@ -22377,7 +24437,63 @@
       </p:sp>
       <p:sp>
         <p:nvSpPr>
-          <p:cNvPr id="4" name="Shape 2"/>
+          <p:cNvPr id="5" name="Shape 3"/>
+          <p:cNvSpPr/>
+          <p:nvPr/>
+        </p:nvSpPr>
+        <p:spPr>
+          <a:xfrm>
+            <a:off x="658368" y="6217920"/>
+            <a:ext cx="10874959" cy="0"/>
+          </a:xfrm>
+          <a:prstGeom prst="line">
+            <a:avLst/>
+          </a:prstGeom>
+          <a:noFill/>
+          <a:ln w="12700">
+            <a:solidFill>
+              <a:srgbClr val="94A3B8">
+                <a:alpha val="66000"/>
+              </a:srgbClr>
+            </a:solidFill>
+            <a:prstDash val="solid"/>
+          </a:ln>
+        </p:spPr>
+      </p:sp>
+      <p:sp>
+        <p:nvSpPr>
+          <p:cNvPr id="6" name="Shape 4"/>
+          <p:cNvSpPr/>
+          <p:nvPr/>
+        </p:nvSpPr>
+        <p:spPr>
+          <a:xfrm>
+            <a:off x="10600639" y="512064"/>
+            <a:ext cx="877824" cy="201168"/>
+          </a:xfrm>
+          <a:prstGeom prst="roundRect">
+            <a:avLst>
+              <a:gd name="adj" fmla="val 18182"/>
+            </a:avLst>
+          </a:prstGeom>
+          <a:solidFill>
+            <a:srgbClr val="D7DDE6">
+              <a:alpha val="92000"/>
+            </a:srgbClr>
+          </a:solidFill>
+          <a:ln w="12700">
+            <a:solidFill>
+              <a:srgbClr val="FFFFFF">
+                <a:alpha val="82000"/>
+              </a:srgbClr>
+            </a:solidFill>
+            <a:prstDash val="solid"/>
+          </a:ln>
+        </p:spPr>
+      </p:sp>
+      <p:sp>
+        <p:nvSpPr>
+          <p:cNvPr id="7" name="Shape 5"/>
           <p:cNvSpPr/>
           <p:nvPr/>
         </p:nvSpPr>
@@ -22406,7 +24522,7 @@
       </p:sp>
       <p:sp>
         <p:nvSpPr>
-          <p:cNvPr id="5" name="Shape 3"/>
+          <p:cNvPr id="8" name="Shape 6"/>
           <p:cNvSpPr/>
           <p:nvPr/>
         </p:nvSpPr>
@@ -22435,7 +24551,7 @@
       </p:sp>
       <p:sp>
         <p:nvSpPr>
-          <p:cNvPr id="6" name="Shape 4"/>
+          <p:cNvPr id="9" name="Shape 7"/>
           <p:cNvSpPr/>
           <p:nvPr/>
         </p:nvSpPr>
@@ -22462,7 +24578,7 @@
       </p:sp>
       <p:sp>
         <p:nvSpPr>
-          <p:cNvPr id="7" name="Shape 5"/>
+          <p:cNvPr id="10" name="Shape 8"/>
           <p:cNvSpPr/>
           <p:nvPr/>
         </p:nvSpPr>
@@ -22489,7 +24605,7 @@
       </p:sp>
       <p:sp>
         <p:nvSpPr>
-          <p:cNvPr id="8" name="Shape 6"/>
+          <p:cNvPr id="11" name="Shape 9"/>
           <p:cNvSpPr/>
           <p:nvPr/>
         </p:nvSpPr>
@@ -22516,7 +24632,7 @@
       </p:sp>
       <p:pic>
         <p:nvPicPr>
-          <p:cNvPr id="9" name="Image 0" descr="preencoded.png">    </p:cNvPr>
+          <p:cNvPr id="12" name="Image 0" descr="preencoded.png">    </p:cNvPr>
           <p:cNvPicPr>
             <a:picLocks noChangeAspect="1"/>
           </p:cNvPicPr>
@@ -22546,7 +24662,7 @@
       </p:pic>
       <p:sp>
         <p:nvSpPr>
-          <p:cNvPr id="10" name="Shape 7"/>
+          <p:cNvPr id="13" name="Shape 10"/>
           <p:cNvSpPr/>
           <p:nvPr/>
         </p:nvSpPr>
@@ -22582,7 +24698,7 @@
       </p:sp>
       <p:pic>
         <p:nvPicPr>
-          <p:cNvPr id="11" name="Image 1" descr="preencoded.png">    </p:cNvPr>
+          <p:cNvPr id="14" name="Image 1" descr="preencoded.png">    </p:cNvPr>
           <p:cNvPicPr>
             <a:picLocks noChangeAspect="1"/>
           </p:cNvPicPr>
@@ -22612,7 +24728,7 @@
       </p:pic>
       <p:sp>
         <p:nvSpPr>
-          <p:cNvPr id="12" name="Shape 8"/>
+          <p:cNvPr id="15" name="Shape 11"/>
           <p:cNvSpPr/>
           <p:nvPr/>
         </p:nvSpPr>
@@ -22648,7 +24764,7 @@
       </p:sp>
       <p:pic>
         <p:nvPicPr>
-          <p:cNvPr id="13" name="Image 2" descr="preencoded.png">    </p:cNvPr>
+          <p:cNvPr id="16" name="Image 2" descr="preencoded.png">    </p:cNvPr>
           <p:cNvPicPr>
             <a:picLocks noChangeAspect="1"/>
           </p:cNvPicPr>
@@ -22678,7 +24794,7 @@
       </p:pic>
       <p:sp>
         <p:nvSpPr>
-          <p:cNvPr id="14" name="Shape 9"/>
+          <p:cNvPr id="17" name="Shape 12"/>
           <p:cNvSpPr/>
           <p:nvPr/>
         </p:nvSpPr>
@@ -22714,7 +24830,7 @@
       </p:sp>
       <p:sp>
         <p:nvSpPr>
-          <p:cNvPr id="15" name="Shape 10"/>
+          <p:cNvPr id="18" name="Shape 13"/>
           <p:cNvSpPr/>
           <p:nvPr/>
         </p:nvSpPr>
@@ -22743,7 +24859,7 @@
       </p:sp>
       <p:sp>
         <p:nvSpPr>
-          <p:cNvPr id="16" name="Shape 11"/>
+          <p:cNvPr id="19" name="Shape 14"/>
           <p:cNvSpPr/>
           <p:nvPr/>
         </p:nvSpPr>
@@ -22770,7 +24886,7 @@
       </p:sp>
       <p:sp>
         <p:nvSpPr>
-          <p:cNvPr id="17" name="Shape 12"/>
+          <p:cNvPr id="20" name="Shape 15"/>
           <p:cNvSpPr/>
           <p:nvPr/>
         </p:nvSpPr>
@@ -22797,7 +24913,7 @@
       </p:sp>
       <p:sp>
         <p:nvSpPr>
-          <p:cNvPr id="18" name="Shape 13"/>
+          <p:cNvPr id="21" name="Shape 16"/>
           <p:cNvSpPr/>
           <p:nvPr/>
         </p:nvSpPr>
@@ -22824,7 +24940,7 @@
       </p:sp>
       <p:sp>
         <p:nvSpPr>
-          <p:cNvPr id="19" name="mdpr:1-2-dfa474:title:__title:1-2-dfa474"/>
+          <p:cNvPr id="22" name="mdpr:1-2-dfa474:title:__title:1-2-dfa474"/>
           <p:cNvSpPr txBox="1"/>
           <p:nvPr/>
         </p:nvSpPr>
@@ -22866,7 +24982,7 @@
       </p:sp>
       <p:sp>
         <p:nvSpPr>
-          <p:cNvPr id="20" name="Shape 15"/>
+          <p:cNvPr id="23" name="Shape 18"/>
           <p:cNvSpPr/>
           <p:nvPr/>
         </p:nvSpPr>
@@ -22893,7 +25009,7 @@
       </p:sp>
       <p:pic>
         <p:nvPicPr>
-          <p:cNvPr id="21" name="Image 3" descr="article icon from tabler-icons (MIT)">    </p:cNvPr>
+          <p:cNvPr id="24" name="Image 3" descr="article icon from tabler-icons (MIT)">    </p:cNvPr>
           <p:cNvPicPr>
             <a:picLocks noChangeAspect="1"/>
           </p:cNvPicPr>
@@ -22923,7 +25039,7 @@
       </p:pic>
       <p:sp>
         <p:nvSpPr>
-          <p:cNvPr id="22" name="mdpr:1-2-dfa474:item-1:block-8-chunk-1"/>
+          <p:cNvPr id="25" name="mdpr:1-2-dfa474:item-1:block-8-chunk-1"/>
           <p:cNvSpPr txBox="1"/>
           <p:nvPr/>
         </p:nvSpPr>
@@ -22982,7 +25098,7 @@
       </p:sp>
       <p:sp>
         <p:nvSpPr>
-          <p:cNvPr id="23" name="Shape 17"/>
+          <p:cNvPr id="26" name="Shape 20"/>
           <p:cNvSpPr/>
           <p:nvPr/>
         </p:nvSpPr>
@@ -23009,7 +25125,7 @@
       </p:sp>
       <p:pic>
         <p:nvPicPr>
-          <p:cNvPr id="24" name="Image 4" descr="article icon from tabler-icons (MIT)">    </p:cNvPr>
+          <p:cNvPr id="27" name="Image 4" descr="article icon from tabler-icons (MIT)">    </p:cNvPr>
           <p:cNvPicPr>
             <a:picLocks noChangeAspect="1"/>
           </p:cNvPicPr>
@@ -23039,7 +25155,7 @@
       </p:pic>
       <p:sp>
         <p:nvSpPr>
-          <p:cNvPr id="25" name="mdpr:1-2-dfa474:item-2:block-8-chunk-1"/>
+          <p:cNvPr id="28" name="mdpr:1-2-dfa474:item-2:block-8-chunk-1"/>
           <p:cNvSpPr txBox="1"/>
           <p:nvPr/>
         </p:nvSpPr>
@@ -23098,7 +25214,7 @@
       </p:sp>
       <p:sp>
         <p:nvSpPr>
-          <p:cNvPr id="26" name="Shape 19"/>
+          <p:cNvPr id="29" name="Shape 22"/>
           <p:cNvSpPr/>
           <p:nvPr/>
         </p:nvSpPr>
@@ -23125,7 +25241,7 @@
       </p:sp>
       <p:pic>
         <p:nvPicPr>
-          <p:cNvPr id="27" name="Image 5" descr="article icon from tabler-icons (MIT)">    </p:cNvPr>
+          <p:cNvPr id="30" name="Image 5" descr="article icon from tabler-icons (MIT)">    </p:cNvPr>
           <p:cNvPicPr>
             <a:picLocks noChangeAspect="1"/>
           </p:cNvPicPr>
@@ -23155,7 +25271,7 @@
       </p:pic>
       <p:sp>
         <p:nvSpPr>
-          <p:cNvPr id="28" name="mdpr:1-2-dfa474:item-3:block-8-chunk-1"/>
+          <p:cNvPr id="31" name="mdpr:1-2-dfa474:item-3:block-8-chunk-1"/>
           <p:cNvSpPr txBox="1"/>
           <p:nvPr/>
         </p:nvSpPr>
@@ -23252,6 +25368,42 @@
         </p:nvSpPr>
         <p:spPr>
           <a:xfrm>
+            <a:off x="457200" y="402336"/>
+            <a:ext cx="11277295" cy="6053328"/>
+          </a:xfrm>
+          <a:prstGeom prst="roundRect">
+            <a:avLst>
+              <a:gd name="adj" fmla="val 2115"/>
+            </a:avLst>
+          </a:prstGeom>
+          <a:solidFill>
+            <a:srgbClr val="E6EAF0"/>
+          </a:solidFill>
+          <a:ln w="12700">
+            <a:solidFill>
+              <a:srgbClr val="8793A3">
+                <a:alpha val="84000"/>
+              </a:srgbClr>
+            </a:solidFill>
+            <a:prstDash val="solid"/>
+          </a:ln>
+          <a:effectLst>
+            <a:outerShdw sx="100000" sy="100000" kx="0" ky="0" algn="bl" rotWithShape="0" blurRad="13970" dist="50800" dir="2700000">
+              <a:srgbClr val="475569">
+                <a:alpha val="18000"/>
+              </a:srgbClr>
+            </a:outerShdw>
+          </a:effectLst>
+        </p:spPr>
+      </p:sp>
+      <p:sp>
+        <p:nvSpPr>
+          <p:cNvPr id="3" name="Shape 1"/>
+          <p:cNvSpPr/>
+          <p:nvPr/>
+        </p:nvSpPr>
+        <p:spPr>
+          <a:xfrm>
             <a:off x="530352" y="457200"/>
             <a:ext cx="11130991" cy="5943600"/>
           </a:xfrm>
@@ -23282,7 +25434,7 @@
       </p:sp>
       <p:sp>
         <p:nvSpPr>
-          <p:cNvPr id="3" name="Shape 1"/>
+          <p:cNvPr id="4" name="Shape 2"/>
           <p:cNvSpPr/>
           <p:nvPr/>
         </p:nvSpPr>
@@ -23305,7 +25457,63 @@
       </p:sp>
       <p:sp>
         <p:nvSpPr>
-          <p:cNvPr id="4" name="Shape 2"/>
+          <p:cNvPr id="5" name="Shape 3"/>
+          <p:cNvSpPr/>
+          <p:nvPr/>
+        </p:nvSpPr>
+        <p:spPr>
+          <a:xfrm>
+            <a:off x="658368" y="6217920"/>
+            <a:ext cx="10874959" cy="0"/>
+          </a:xfrm>
+          <a:prstGeom prst="line">
+            <a:avLst/>
+          </a:prstGeom>
+          <a:noFill/>
+          <a:ln w="12700">
+            <a:solidFill>
+              <a:srgbClr val="94A3B8">
+                <a:alpha val="66000"/>
+              </a:srgbClr>
+            </a:solidFill>
+            <a:prstDash val="solid"/>
+          </a:ln>
+        </p:spPr>
+      </p:sp>
+      <p:sp>
+        <p:nvSpPr>
+          <p:cNvPr id="6" name="Shape 4"/>
+          <p:cNvSpPr/>
+          <p:nvPr/>
+        </p:nvSpPr>
+        <p:spPr>
+          <a:xfrm>
+            <a:off x="10600639" y="512064"/>
+            <a:ext cx="877824" cy="201168"/>
+          </a:xfrm>
+          <a:prstGeom prst="roundRect">
+            <a:avLst>
+              <a:gd name="adj" fmla="val 18182"/>
+            </a:avLst>
+          </a:prstGeom>
+          <a:solidFill>
+            <a:srgbClr val="D7DDE6">
+              <a:alpha val="92000"/>
+            </a:srgbClr>
+          </a:solidFill>
+          <a:ln w="12700">
+            <a:solidFill>
+              <a:srgbClr val="FFFFFF">
+                <a:alpha val="82000"/>
+              </a:srgbClr>
+            </a:solidFill>
+            <a:prstDash val="solid"/>
+          </a:ln>
+        </p:spPr>
+      </p:sp>
+      <p:sp>
+        <p:nvSpPr>
+          <p:cNvPr id="7" name="Shape 5"/>
           <p:cNvSpPr/>
           <p:nvPr/>
         </p:nvSpPr>
@@ -23334,7 +25542,7 @@
       </p:sp>
       <p:sp>
         <p:nvSpPr>
-          <p:cNvPr id="5" name="Shape 3"/>
+          <p:cNvPr id="8" name="Shape 6"/>
           <p:cNvSpPr/>
           <p:nvPr/>
         </p:nvSpPr>
@@ -23363,7 +25571,7 @@
       </p:sp>
       <p:sp>
         <p:nvSpPr>
-          <p:cNvPr id="6" name="Shape 4"/>
+          <p:cNvPr id="9" name="Shape 7"/>
           <p:cNvSpPr/>
           <p:nvPr/>
         </p:nvSpPr>
@@ -23390,7 +25598,7 @@
       </p:sp>
       <p:sp>
         <p:nvSpPr>
-          <p:cNvPr id="7" name="Shape 5"/>
+          <p:cNvPr id="10" name="Shape 8"/>
           <p:cNvSpPr/>
           <p:nvPr/>
         </p:nvSpPr>
@@ -23417,7 +25625,7 @@
       </p:sp>
       <p:sp>
         <p:nvSpPr>
-          <p:cNvPr id="8" name="Shape 6"/>
+          <p:cNvPr id="11" name="Shape 9"/>
           <p:cNvSpPr/>
           <p:nvPr/>
         </p:nvSpPr>
@@ -23444,7 +25652,7 @@
       </p:sp>
       <p:sp>
         <p:nvSpPr>
-          <p:cNvPr id="9" name="Shape 7"/>
+          <p:cNvPr id="12" name="Shape 10"/>
           <p:cNvSpPr/>
           <p:nvPr/>
         </p:nvSpPr>
@@ -23471,7 +25679,7 @@
       </p:sp>
       <p:sp>
         <p:nvSpPr>
-          <p:cNvPr id="10" name="Shape 8"/>
+          <p:cNvPr id="13" name="Shape 11"/>
           <p:cNvSpPr/>
           <p:nvPr/>
         </p:nvSpPr>
@@ -23498,7 +25706,7 @@
       </p:sp>
       <p:sp>
         <p:nvSpPr>
-          <p:cNvPr id="11" name="mdpr:2-2-149bde:title:__title:2-2-149bde"/>
+          <p:cNvPr id="14" name="mdpr:2-2-149bde:title:__title:2-2-149bde"/>
           <p:cNvSpPr txBox="1"/>
           <p:nvPr/>
         </p:nvSpPr>
@@ -23540,7 +25748,7 @@
       </p:sp>
       <p:sp>
         <p:nvSpPr>
-          <p:cNvPr id="12" name="mdpr:2-2-149bde:left:block-8-chunk-2"/>
+          <p:cNvPr id="15" name="mdpr:2-2-149bde:left:block-8-chunk-2"/>
           <p:cNvSpPr txBox="1"/>
           <p:nvPr/>
         </p:nvSpPr>
@@ -23599,7 +25807,7 @@
       </p:sp>
       <p:sp>
         <p:nvSpPr>
-          <p:cNvPr id="13" name="mdpr:2-2-149bde:right:block-8-chunk-2"/>
+          <p:cNvPr id="16" name="mdpr:2-2-149bde:right:block-8-chunk-2"/>
           <p:cNvSpPr txBox="1"/>
           <p:nvPr/>
         </p:nvSpPr>
@@ -23696,6 +25904,42 @@
         </p:nvSpPr>
         <p:spPr>
           <a:xfrm>
+            <a:off x="457200" y="402336"/>
+            <a:ext cx="11277295" cy="6053328"/>
+          </a:xfrm>
+          <a:prstGeom prst="roundRect">
+            <a:avLst>
+              <a:gd name="adj" fmla="val 2115"/>
+            </a:avLst>
+          </a:prstGeom>
+          <a:solidFill>
+            <a:srgbClr val="E6EAF0"/>
+          </a:solidFill>
+          <a:ln w="12700">
+            <a:solidFill>
+              <a:srgbClr val="8793A3">
+                <a:alpha val="84000"/>
+              </a:srgbClr>
+            </a:solidFill>
+            <a:prstDash val="solid"/>
+          </a:ln>
+          <a:effectLst>
+            <a:outerShdw sx="100000" sy="100000" kx="0" ky="0" algn="bl" rotWithShape="0" blurRad="13970" dist="50800" dir="2700000">
+              <a:srgbClr val="475569">
+                <a:alpha val="18000"/>
+              </a:srgbClr>
+            </a:outerShdw>
+          </a:effectLst>
+        </p:spPr>
+      </p:sp>
+      <p:sp>
+        <p:nvSpPr>
+          <p:cNvPr id="3" name="Shape 1"/>
+          <p:cNvSpPr/>
+          <p:nvPr/>
+        </p:nvSpPr>
+        <p:spPr>
+          <a:xfrm>
             <a:off x="530352" y="457200"/>
             <a:ext cx="11130991" cy="5943600"/>
           </a:xfrm>
@@ -23726,7 +25970,7 @@
       </p:sp>
       <p:sp>
         <p:nvSpPr>
-          <p:cNvPr id="3" name="Shape 1"/>
+          <p:cNvPr id="4" name="Shape 2"/>
           <p:cNvSpPr/>
           <p:nvPr/>
         </p:nvSpPr>
@@ -23749,7 +25993,63 @@
       </p:sp>
       <p:sp>
         <p:nvSpPr>
-          <p:cNvPr id="4" name="Shape 2"/>
+          <p:cNvPr id="5" name="Shape 3"/>
+          <p:cNvSpPr/>
+          <p:nvPr/>
+        </p:nvSpPr>
+        <p:spPr>
+          <a:xfrm>
+            <a:off x="658368" y="6217920"/>
+            <a:ext cx="10874959" cy="0"/>
+          </a:xfrm>
+          <a:prstGeom prst="line">
+            <a:avLst/>
+          </a:prstGeom>
+          <a:noFill/>
+          <a:ln w="12700">
+            <a:solidFill>
+              <a:srgbClr val="94A3B8">
+                <a:alpha val="66000"/>
+              </a:srgbClr>
+            </a:solidFill>
+            <a:prstDash val="solid"/>
+          </a:ln>
+        </p:spPr>
+      </p:sp>
+      <p:sp>
+        <p:nvSpPr>
+          <p:cNvPr id="6" name="Shape 4"/>
+          <p:cNvSpPr/>
+          <p:nvPr/>
+        </p:nvSpPr>
+        <p:spPr>
+          <a:xfrm>
+            <a:off x="10600639" y="512064"/>
+            <a:ext cx="877824" cy="201168"/>
+          </a:xfrm>
+          <a:prstGeom prst="roundRect">
+            <a:avLst>
+              <a:gd name="adj" fmla="val 18182"/>
+            </a:avLst>
+          </a:prstGeom>
+          <a:solidFill>
+            <a:srgbClr val="D7DDE6">
+              <a:alpha val="92000"/>
+            </a:srgbClr>
+          </a:solidFill>
+          <a:ln w="12700">
+            <a:solidFill>
+              <a:srgbClr val="FFFFFF">
+                <a:alpha val="82000"/>
+              </a:srgbClr>
+            </a:solidFill>
+            <a:prstDash val="solid"/>
+          </a:ln>
+        </p:spPr>
+      </p:sp>
+      <p:sp>
+        <p:nvSpPr>
+          <p:cNvPr id="7" name="Shape 5"/>
           <p:cNvSpPr/>
           <p:nvPr/>
         </p:nvSpPr>
@@ -23778,7 +26078,7 @@
       </p:sp>
       <p:sp>
         <p:nvSpPr>
-          <p:cNvPr id="5" name="Shape 3"/>
+          <p:cNvPr id="8" name="Shape 6"/>
           <p:cNvSpPr/>
           <p:nvPr/>
         </p:nvSpPr>
@@ -23807,7 +26107,7 @@
       </p:sp>
       <p:sp>
         <p:nvSpPr>
-          <p:cNvPr id="6" name="Shape 4"/>
+          <p:cNvPr id="9" name="Shape 7"/>
           <p:cNvSpPr/>
           <p:nvPr/>
         </p:nvSpPr>
@@ -23834,7 +26134,7 @@
       </p:sp>
       <p:sp>
         <p:nvSpPr>
-          <p:cNvPr id="7" name="Shape 5"/>
+          <p:cNvPr id="10" name="Shape 8"/>
           <p:cNvSpPr/>
           <p:nvPr/>
         </p:nvSpPr>
@@ -23861,7 +26161,7 @@
       </p:sp>
       <p:sp>
         <p:nvSpPr>
-          <p:cNvPr id="8" name="Shape 6"/>
+          <p:cNvPr id="11" name="Shape 9"/>
           <p:cNvSpPr/>
           <p:nvPr/>
         </p:nvSpPr>
@@ -23888,7 +26188,7 @@
       </p:sp>
       <p:sp>
         <p:nvSpPr>
-          <p:cNvPr id="9" name="Shape 7"/>
+          <p:cNvPr id="12" name="Shape 10"/>
           <p:cNvSpPr/>
           <p:nvPr/>
         </p:nvSpPr>
@@ -23915,7 +26215,7 @@
       </p:sp>
       <p:sp>
         <p:nvSpPr>
-          <p:cNvPr id="10" name="Shape 8"/>
+          <p:cNvPr id="13" name="Shape 11"/>
           <p:cNvSpPr/>
           <p:nvPr/>
         </p:nvSpPr>
@@ -23942,7 +26242,7 @@
       </p:sp>
       <p:sp>
         <p:nvSpPr>
-          <p:cNvPr id="11" name="mdpr:1-2-5a84f1:title:__title:1-2-5a84f1"/>
+          <p:cNvPr id="14" name="mdpr:1-2-5a84f1:title:__title:1-2-5a84f1"/>
           <p:cNvSpPr txBox="1"/>
           <p:nvPr/>
         </p:nvSpPr>
@@ -23984,7 +26284,7 @@
       </p:sp>
       <p:sp>
         <p:nvSpPr>
-          <p:cNvPr id="12" name="mdpr:1-2-5a84f1:left:block-10-chunk-1"/>
+          <p:cNvPr id="15" name="mdpr:1-2-5a84f1:left:block-10-chunk-1"/>
           <p:cNvSpPr txBox="1"/>
           <p:nvPr/>
         </p:nvSpPr>
@@ -24043,7 +26343,7 @@
       </p:sp>
       <p:sp>
         <p:nvSpPr>
-          <p:cNvPr id="13" name="mdpr:1-2-5a84f1:right:block-10-chunk-1"/>
+          <p:cNvPr id="16" name="mdpr:1-2-5a84f1:right:block-10-chunk-1"/>
           <p:cNvSpPr txBox="1"/>
           <p:nvPr/>
         </p:nvSpPr>

--- a/docs/theme-preview/pptx/skeuomorphism.pptx
+++ b/docs/theme-preview/pptx/skeuomorphism.pptx
@@ -6380,280 +6380,16 @@
           </a:ln>
         </p:spPr>
       </p:sp>
-      <p:pic>
-        <p:nvPicPr>
-          <p:cNvPr id="12" name="Image 0" descr="preencoded.png">    </p:cNvPr>
-          <p:cNvPicPr>
-            <a:picLocks noChangeAspect="1"/>
-          </p:cNvPicPr>
-          <p:nvPr/>
-        </p:nvPicPr>
-        <p:blipFill>
-          <a:blip r:embed="rId1">
-            <a:extLst>
-              <a:ext uri="{96DAC541-7B7A-43D3-8B79-37D633B846F1}">
-                <asvg:svgBlip xmlns:asvg="http://schemas.microsoft.com/office/drawing/2016/SVG/main" r:embed="rId2"/>
-              </a:ext>
-            </a:extLst>
-          </a:blip>
-          <a:stretch>
-            <a:fillRect/>
-          </a:stretch>
-        </p:blipFill>
-        <p:spPr>
-          <a:xfrm>
-            <a:off x="822960" y="1463040"/>
-            <a:ext cx="5029200" cy="1920240"/>
-          </a:xfrm>
-          <a:prstGeom prst="rect">
-            <a:avLst/>
-          </a:prstGeom>
-        </p:spPr>
-      </p:pic>
-      <p:sp>
-        <p:nvSpPr>
-          <p:cNvPr id="13" name="Shape 10"/>
-          <p:cNvSpPr/>
-          <p:nvPr/>
-        </p:nvSpPr>
-        <p:spPr>
-          <a:xfrm>
-            <a:off x="822960" y="1463040"/>
-            <a:ext cx="5029200" cy="1920240"/>
-          </a:xfrm>
-          <a:prstGeom prst="rect">
-            <a:avLst/>
-          </a:prstGeom>
-          <a:solidFill>
-            <a:srgbClr val="FDFDFE">
-              <a:alpha val="0"/>
-            </a:srgbClr>
-          </a:solidFill>
-          <a:ln w="12700">
-            <a:solidFill>
-              <a:srgbClr val="AEB7C4">
-                <a:alpha val="0"/>
-              </a:srgbClr>
-            </a:solidFill>
-            <a:prstDash val="solid"/>
-          </a:ln>
-          <a:effectLst>
-            <a:outerShdw sx="100000" sy="100000" kx="0" ky="0" algn="bl" rotWithShape="0" blurRad="12700" dist="50800" dir="2700000">
-              <a:srgbClr val="000000">
-                <a:alpha val="8000"/>
-              </a:srgbClr>
-            </a:outerShdw>
-          </a:effectLst>
-        </p:spPr>
-      </p:sp>
-      <p:pic>
-        <p:nvPicPr>
-          <p:cNvPr id="14" name="Image 1" descr="preencoded.png">    </p:cNvPr>
-          <p:cNvPicPr>
-            <a:picLocks noChangeAspect="1"/>
-          </p:cNvPicPr>
-          <p:nvPr/>
-        </p:nvPicPr>
-        <p:blipFill>
-          <a:blip r:embed="rId3">
-            <a:extLst>
-              <a:ext uri="{96DAC541-7B7A-43D3-8B79-37D633B846F1}">
-                <asvg:svgBlip xmlns:asvg="http://schemas.microsoft.com/office/drawing/2016/SVG/main" r:embed="rId4"/>
-              </a:ext>
-            </a:extLst>
-          </a:blip>
-          <a:stretch>
-            <a:fillRect/>
-          </a:stretch>
-        </p:blipFill>
-        <p:spPr>
-          <a:xfrm>
-            <a:off x="6309360" y="1463040"/>
-            <a:ext cx="5029200" cy="1920240"/>
-          </a:xfrm>
-          <a:prstGeom prst="rect">
-            <a:avLst/>
-          </a:prstGeom>
-        </p:spPr>
-      </p:pic>
-      <p:sp>
-        <p:nvSpPr>
-          <p:cNvPr id="15" name="Shape 11"/>
-          <p:cNvSpPr/>
-          <p:nvPr/>
-        </p:nvSpPr>
-        <p:spPr>
-          <a:xfrm>
-            <a:off x="6309360" y="1463040"/>
-            <a:ext cx="5029200" cy="1920240"/>
-          </a:xfrm>
-          <a:prstGeom prst="rect">
-            <a:avLst/>
-          </a:prstGeom>
-          <a:solidFill>
-            <a:srgbClr val="FDFDFE">
-              <a:alpha val="0"/>
-            </a:srgbClr>
-          </a:solidFill>
-          <a:ln w="12700">
-            <a:solidFill>
-              <a:srgbClr val="AEB7C4">
-                <a:alpha val="0"/>
-              </a:srgbClr>
-            </a:solidFill>
-            <a:prstDash val="solid"/>
-          </a:ln>
-          <a:effectLst>
-            <a:outerShdw sx="100000" sy="100000" kx="0" ky="0" algn="bl" rotWithShape="0" blurRad="12700" dist="50800" dir="2700000">
-              <a:srgbClr val="000000">
-                <a:alpha val="8000"/>
-              </a:srgbClr>
-            </a:outerShdw>
-          </a:effectLst>
-        </p:spPr>
-      </p:sp>
-      <p:pic>
-        <p:nvPicPr>
-          <p:cNvPr id="16" name="Image 2" descr="preencoded.png">    </p:cNvPr>
-          <p:cNvPicPr>
-            <a:picLocks noChangeAspect="1"/>
-          </p:cNvPicPr>
-          <p:nvPr/>
-        </p:nvPicPr>
-        <p:blipFill>
-          <a:blip r:embed="rId5">
-            <a:extLst>
-              <a:ext uri="{96DAC541-7B7A-43D3-8B79-37D633B846F1}">
-                <asvg:svgBlip xmlns:asvg="http://schemas.microsoft.com/office/drawing/2016/SVG/main" r:embed="rId6"/>
-              </a:ext>
-            </a:extLst>
-          </a:blip>
-          <a:stretch>
-            <a:fillRect/>
-          </a:stretch>
-        </p:blipFill>
-        <p:spPr>
-          <a:xfrm>
-            <a:off x="822960" y="3749040"/>
-            <a:ext cx="5029200" cy="1920240"/>
-          </a:xfrm>
-          <a:prstGeom prst="rect">
-            <a:avLst/>
-          </a:prstGeom>
-        </p:spPr>
-      </p:pic>
-      <p:sp>
-        <p:nvSpPr>
-          <p:cNvPr id="17" name="Shape 12"/>
-          <p:cNvSpPr/>
-          <p:nvPr/>
-        </p:nvSpPr>
-        <p:spPr>
-          <a:xfrm>
-            <a:off x="822960" y="3749040"/>
-            <a:ext cx="5029200" cy="1920240"/>
-          </a:xfrm>
-          <a:prstGeom prst="rect">
-            <a:avLst/>
-          </a:prstGeom>
-          <a:solidFill>
-            <a:srgbClr val="FDFDFE">
-              <a:alpha val="0"/>
-            </a:srgbClr>
-          </a:solidFill>
-          <a:ln w="12700">
-            <a:solidFill>
-              <a:srgbClr val="AEB7C4">
-                <a:alpha val="0"/>
-              </a:srgbClr>
-            </a:solidFill>
-            <a:prstDash val="solid"/>
-          </a:ln>
-          <a:effectLst>
-            <a:outerShdw sx="100000" sy="100000" kx="0" ky="0" algn="bl" rotWithShape="0" blurRad="12700" dist="50800" dir="2700000">
-              <a:srgbClr val="000000">
-                <a:alpha val="8000"/>
-              </a:srgbClr>
-            </a:outerShdw>
-          </a:effectLst>
-        </p:spPr>
-      </p:sp>
-      <p:pic>
-        <p:nvPicPr>
-          <p:cNvPr id="18" name="Image 3" descr="preencoded.png">    </p:cNvPr>
-          <p:cNvPicPr>
-            <a:picLocks noChangeAspect="1"/>
-          </p:cNvPicPr>
-          <p:nvPr/>
-        </p:nvPicPr>
-        <p:blipFill>
-          <a:blip r:embed="rId7">
-            <a:extLst>
-              <a:ext uri="{96DAC541-7B7A-43D3-8B79-37D633B846F1}">
-                <asvg:svgBlip xmlns:asvg="http://schemas.microsoft.com/office/drawing/2016/SVG/main" r:embed="rId8"/>
-              </a:ext>
-            </a:extLst>
-          </a:blip>
-          <a:stretch>
-            <a:fillRect/>
-          </a:stretch>
-        </p:blipFill>
-        <p:spPr>
-          <a:xfrm>
-            <a:off x="6309360" y="3749040"/>
-            <a:ext cx="5029200" cy="1920240"/>
-          </a:xfrm>
-          <a:prstGeom prst="rect">
-            <a:avLst/>
-          </a:prstGeom>
-        </p:spPr>
-      </p:pic>
-      <p:sp>
-        <p:nvSpPr>
-          <p:cNvPr id="19" name="Shape 13"/>
-          <p:cNvSpPr/>
-          <p:nvPr/>
-        </p:nvSpPr>
-        <p:spPr>
-          <a:xfrm>
-            <a:off x="6309360" y="3749040"/>
-            <a:ext cx="5029200" cy="1920240"/>
-          </a:xfrm>
-          <a:prstGeom prst="rect">
-            <a:avLst/>
-          </a:prstGeom>
-          <a:solidFill>
-            <a:srgbClr val="FDFDFE">
-              <a:alpha val="0"/>
-            </a:srgbClr>
-          </a:solidFill>
-          <a:ln w="12700">
-            <a:solidFill>
-              <a:srgbClr val="AEB7C4">
-                <a:alpha val="0"/>
-              </a:srgbClr>
-            </a:solidFill>
-            <a:prstDash val="solid"/>
-          </a:ln>
-          <a:effectLst>
-            <a:outerShdw sx="100000" sy="100000" kx="0" ky="0" algn="bl" rotWithShape="0" blurRad="12700" dist="50800" dir="2700000">
-              <a:srgbClr val="000000">
-                <a:alpha val="8000"/>
-              </a:srgbClr>
-            </a:outerShdw>
-          </a:effectLst>
-        </p:spPr>
-      </p:sp>
-      <p:sp>
-        <p:nvSpPr>
-          <p:cNvPr id="20" name="Shape 14"/>
-          <p:cNvSpPr/>
-          <p:nvPr/>
-        </p:nvSpPr>
-        <p:spPr>
-          <a:xfrm>
-            <a:off x="822960" y="1463040"/>
-            <a:ext cx="73152" cy="1920240"/>
+      <p:sp>
+        <p:nvSpPr>
+          <p:cNvPr id="12" name="Shape 10"/>
+          <p:cNvSpPr/>
+          <p:nvPr/>
+        </p:nvSpPr>
+        <p:spPr>
+          <a:xfrm>
+            <a:off x="822960" y="1389888"/>
+            <a:ext cx="4937760" cy="73152"/>
           </a:xfrm>
           <a:prstGeom prst="rect">
             <a:avLst/>
@@ -6673,41 +6409,14 @@
       </p:sp>
       <p:sp>
         <p:nvSpPr>
-          <p:cNvPr id="21" name="Shape 15"/>
-          <p:cNvSpPr/>
-          <p:nvPr/>
-        </p:nvSpPr>
-        <p:spPr>
-          <a:xfrm>
-            <a:off x="6309360" y="1463040"/>
-            <a:ext cx="73152" cy="1920240"/>
-          </a:xfrm>
-          <a:prstGeom prst="rect">
-            <a:avLst/>
-          </a:prstGeom>
-          <a:solidFill>
-            <a:srgbClr val="C7D2FE"/>
-          </a:solidFill>
-          <a:ln w="12700">
-            <a:solidFill>
-              <a:srgbClr val="C7D2FE">
-                <a:alpha val="0"/>
-              </a:srgbClr>
-            </a:solidFill>
-            <a:prstDash val="solid"/>
-          </a:ln>
-        </p:spPr>
-      </p:sp>
-      <p:sp>
-        <p:nvSpPr>
-          <p:cNvPr id="22" name="Shape 16"/>
-          <p:cNvSpPr/>
-          <p:nvPr/>
-        </p:nvSpPr>
-        <p:spPr>
-          <a:xfrm>
-            <a:off x="822960" y="3749040"/>
-            <a:ext cx="73152" cy="1920240"/>
+          <p:cNvPr id="13" name="Shape 11"/>
+          <p:cNvSpPr/>
+          <p:nvPr/>
+        </p:nvSpPr>
+        <p:spPr>
+          <a:xfrm>
+            <a:off x="6400800" y="1389888"/>
+            <a:ext cx="4937760" cy="73152"/>
           </a:xfrm>
           <a:prstGeom prst="rect">
             <a:avLst/>
@@ -6727,34 +6436,7 @@
       </p:sp>
       <p:sp>
         <p:nvSpPr>
-          <p:cNvPr id="23" name="Shape 17"/>
-          <p:cNvSpPr/>
-          <p:nvPr/>
-        </p:nvSpPr>
-        <p:spPr>
-          <a:xfrm>
-            <a:off x="6309360" y="3749040"/>
-            <a:ext cx="73152" cy="1920240"/>
-          </a:xfrm>
-          <a:prstGeom prst="rect">
-            <a:avLst/>
-          </a:prstGeom>
-          <a:solidFill>
-            <a:srgbClr val="C7D2FE"/>
-          </a:solidFill>
-          <a:ln w="12700">
-            <a:solidFill>
-              <a:srgbClr val="C7D2FE">
-                <a:alpha val="0"/>
-              </a:srgbClr>
-            </a:solidFill>
-            <a:prstDash val="solid"/>
-          </a:ln>
-        </p:spPr>
-      </p:sp>
-      <p:sp>
-        <p:nvSpPr>
-          <p:cNvPr id="24" name="mdpr:1-2-e3669a:title:__title:1-2-e3669a"/>
+          <p:cNvPr id="14" name="mdpr:1-2-e3669a:title:__title:1-2-e3669a"/>
           <p:cNvSpPr txBox="1"/>
           <p:nvPr/>
         </p:nvSpPr>
@@ -6796,71 +6478,14 @@
       </p:sp>
       <p:sp>
         <p:nvSpPr>
-          <p:cNvPr id="25" name="Shape 19"/>
-          <p:cNvSpPr/>
-          <p:nvPr/>
-        </p:nvSpPr>
-        <p:spPr>
-          <a:xfrm>
-            <a:off x="976122" y="2130552"/>
-            <a:ext cx="585216" cy="585216"/>
-          </a:xfrm>
-          <a:prstGeom prst="roundRect">
-            <a:avLst>
-              <a:gd name="adj" fmla="val 6250"/>
-            </a:avLst>
-          </a:prstGeom>
-          <a:solidFill>
-            <a:srgbClr val="F4F6F8"/>
-          </a:solidFill>
-          <a:ln w="12700">
-            <a:solidFill>
-              <a:srgbClr val="AEB7C4"/>
-            </a:solidFill>
-            <a:prstDash val="solid"/>
-          </a:ln>
-        </p:spPr>
-      </p:sp>
-      <p:pic>
-        <p:nvPicPr>
-          <p:cNvPr id="26" name="Image 4" descr="article icon from tabler-icons (MIT)">    </p:cNvPr>
-          <p:cNvPicPr>
-            <a:picLocks noChangeAspect="1"/>
-          </p:cNvPicPr>
-          <p:nvPr/>
-        </p:nvPicPr>
-        <p:blipFill>
-          <a:blip r:embed="rId9">
-            <a:extLst>
-              <a:ext uri="{96DAC541-7B7A-43D3-8B79-37D633B846F1}">
-                <asvg:svgBlip xmlns:asvg="http://schemas.microsoft.com/office/drawing/2016/SVG/main" r:embed="rId10"/>
-              </a:ext>
-            </a:extLst>
-          </a:blip>
-          <a:stretch>
-            <a:fillRect/>
-          </a:stretch>
-        </p:blipFill>
-        <p:spPr>
-          <a:xfrm>
-            <a:off x="1049274" y="2203704"/>
-            <a:ext cx="438912" cy="438912"/>
-          </a:xfrm>
-          <a:prstGeom prst="rect">
-            <a:avLst/>
-          </a:prstGeom>
-        </p:spPr>
-      </p:pic>
-      <p:sp>
-        <p:nvSpPr>
-          <p:cNvPr id="27" name="mdpr:1-2-e3669a:item-1:block-15-chunk-1"/>
+          <p:cNvPr id="15" name="mdpr:1-2-e3669a:left:block-15-chunk-1-block-15-chunk-1"/>
           <p:cNvSpPr txBox="1"/>
           <p:nvPr/>
         </p:nvSpPr>
         <p:spPr>
           <a:xfrm>
-            <a:off x="1689354" y="1627632"/>
-            <a:ext cx="3961638" cy="1591056"/>
+            <a:off x="896112" y="1499616"/>
+            <a:ext cx="4791456" cy="4398264"/>
           </a:xfrm>
           <a:prstGeom prst="rect">
             <a:avLst/>
@@ -6869,7 +6494,7 @@
           <a:ln/>
         </p:spPr>
         <p:txBody>
-          <a:bodyPr wrap="square" lIns="0" tIns="25400" rIns="25400" bIns="0" rtlCol="0" anchor="ctr"/>
+          <a:bodyPr wrap="square" lIns="0" tIns="25400" rIns="25400" bIns="0" rtlCol="0" anchor="t"/>
           <a:lstStyle/>
           <a:p>
             <a:pPr algn="l" indent="0" marL="0">
@@ -6879,7 +6504,7 @@
               <a:buNone/>
             </a:pPr>
             <a:r>
-              <a:rPr lang="en-US" sz="2200" b="1" dirty="0">
+              <a:rPr lang="en-US" sz="1800" b="1" dirty="0">
                 <a:solidFill>
                   <a:srgbClr val="6B7280"/>
                 </a:solidFill>
@@ -6887,7 +6512,7 @@
                 <a:ea typeface="Pretendard" pitchFamily="34" charset="-122"/>
                 <a:cs typeface="Pretendard" pitchFamily="34" charset="-120"/>
               </a:rPr>
-              <a:t>Surfaces</a:t>
+              <a:t>- Surfaces</a:t>
             </a:r>
             <a:pPr algn="l" indent="0" marL="0">
               <a:lnSpc>
@@ -6896,7 +6521,7 @@
               <a:buNone/>
             </a:pPr>
             <a:r>
-              <a:rPr lang="en-US" sz="2200" dirty="0">
+              <a:rPr lang="en-US" sz="1800" dirty="0">
                 <a:solidFill>
                   <a:srgbClr val="111111"/>
                 </a:solidFill>
@@ -6906,77 +6531,60 @@
               </a:rPr>
               <a:t>  rounded-card, two-corner-card, flag-drop, ticket-panel, notched-panel, circle-vine.</a:t>
             </a:r>
-            <a:endParaRPr lang="en-US" sz="2200" dirty="0"/>
+            <a:endParaRPr lang="en-US" sz="1800" dirty="0"/>
+          </a:p>
+          <a:p>
+            <a:pPr algn="l" indent="0" marL="0">
+              <a:lnSpc>
+                <a:spcPct val="120000"/>
+              </a:lnSpc>
+              <a:buNone/>
+            </a:pPr>
+            <a:r>
+              <a:rPr lang="en-US" sz="1800" b="1" dirty="0">
+                <a:solidFill>
+                  <a:srgbClr val="6B7280"/>
+                </a:solidFill>
+                <a:latin typeface="Pretendard" pitchFamily="34" charset="0"/>
+                <a:ea typeface="Pretendard" pitchFamily="34" charset="-122"/>
+                <a:cs typeface="Pretendard" pitchFamily="34" charset="-120"/>
+              </a:rPr>
+              <a:t>- Layouts</a:t>
+            </a:r>
+            <a:endParaRPr lang="en-US" sz="1800" dirty="0"/>
+          </a:p>
+          <a:p>
+            <a:pPr algn="l" indent="0" marL="0">
+              <a:lnSpc>
+                <a:spcPct val="120000"/>
+              </a:lnSpc>
+              <a:buNone/>
+            </a:pPr>
+            <a:r>
+              <a:rPr lang="en-US" sz="1800" dirty="0">
+                <a:solidFill>
+                  <a:srgbClr val="111111"/>
+                </a:solidFill>
+                <a:latin typeface="Pretendard" pitchFamily="34" charset="0"/>
+                <a:ea typeface="Pretendard" pitchFamily="34" charset="-122"/>
+                <a:cs typeface="Pretendard" pitchFamily="34" charset="-120"/>
+              </a:rPr>
+              <a:t>  toc-strips, two-column-compare, three-card-grid, six-tile-grid, timeline-rail, pipeline-chain.</a:t>
+            </a:r>
+            <a:endParaRPr lang="en-US" sz="1800" dirty="0"/>
           </a:p>
         </p:txBody>
       </p:sp>
       <p:sp>
         <p:nvSpPr>
-          <p:cNvPr id="28" name="Shape 21"/>
-          <p:cNvSpPr/>
-          <p:nvPr/>
-        </p:nvSpPr>
-        <p:spPr>
-          <a:xfrm>
-            <a:off x="6462522" y="2130552"/>
-            <a:ext cx="585216" cy="585216"/>
-          </a:xfrm>
-          <a:prstGeom prst="roundRect">
-            <a:avLst>
-              <a:gd name="adj" fmla="val 6250"/>
-            </a:avLst>
-          </a:prstGeom>
-          <a:solidFill>
-            <a:srgbClr val="F4F6F8"/>
-          </a:solidFill>
-          <a:ln w="12700">
-            <a:solidFill>
-              <a:srgbClr val="AEB7C4"/>
-            </a:solidFill>
-            <a:prstDash val="solid"/>
-          </a:ln>
-        </p:spPr>
-      </p:sp>
-      <p:pic>
-        <p:nvPicPr>
-          <p:cNvPr id="29" name="Image 5" descr="table icon from tabler-icons (MIT)">    </p:cNvPr>
-          <p:cNvPicPr>
-            <a:picLocks noChangeAspect="1"/>
-          </p:cNvPicPr>
-          <p:nvPr/>
-        </p:nvPicPr>
-        <p:blipFill>
-          <a:blip r:embed="rId11">
-            <a:extLst>
-              <a:ext uri="{96DAC541-7B7A-43D3-8B79-37D633B846F1}">
-                <asvg:svgBlip xmlns:asvg="http://schemas.microsoft.com/office/drawing/2016/SVG/main" r:embed="rId12"/>
-              </a:ext>
-            </a:extLst>
-          </a:blip>
-          <a:stretch>
-            <a:fillRect/>
-          </a:stretch>
-        </p:blipFill>
-        <p:spPr>
-          <a:xfrm>
-            <a:off x="6535674" y="2203704"/>
-            <a:ext cx="438912" cy="438912"/>
-          </a:xfrm>
-          <a:prstGeom prst="rect">
-            <a:avLst/>
-          </a:prstGeom>
-        </p:spPr>
-      </p:pic>
-      <p:sp>
-        <p:nvSpPr>
-          <p:cNvPr id="30" name="mdpr:1-2-e3669a:item-2:block-15-chunk-1"/>
+          <p:cNvPr id="16" name="mdpr:1-2-e3669a:right:block-15-chunk-1-block-15-chunk-1"/>
           <p:cNvSpPr txBox="1"/>
           <p:nvPr/>
         </p:nvSpPr>
         <p:spPr>
           <a:xfrm>
-            <a:off x="7175754" y="1627632"/>
-            <a:ext cx="3961638" cy="1591056"/>
+            <a:off x="6473952" y="1499616"/>
+            <a:ext cx="4791456" cy="4398264"/>
           </a:xfrm>
           <a:prstGeom prst="rect">
             <a:avLst/>
@@ -6985,7 +6593,7 @@
           <a:ln/>
         </p:spPr>
         <p:txBody>
-          <a:bodyPr wrap="square" lIns="0" tIns="25400" rIns="25400" bIns="0" rtlCol="0" anchor="ctr"/>
+          <a:bodyPr wrap="square" lIns="0" tIns="25400" rIns="25400" bIns="0" rtlCol="0" anchor="t"/>
           <a:lstStyle/>
           <a:p>
             <a:pPr algn="l" indent="0" marL="0">
@@ -6995,7 +6603,7 @@
               <a:buNone/>
             </a:pPr>
             <a:r>
-              <a:rPr lang="en-US" sz="2200" b="1" dirty="0">
+              <a:rPr lang="en-US" sz="1800" b="1" dirty="0">
                 <a:solidFill>
                   <a:srgbClr val="6B7280"/>
                 </a:solidFill>
@@ -7003,7 +6611,7 @@
                 <a:ea typeface="Pretendard" pitchFamily="34" charset="-122"/>
                 <a:cs typeface="Pretendard" pitchFamily="34" charset="-120"/>
               </a:rPr>
-              <a:t>Layouts</a:t>
+              <a:t>- Evidence</a:t>
             </a:r>
             <a:pPr algn="l" indent="0" marL="0">
               <a:lnSpc>
@@ -7012,123 +6620,7 @@
               <a:buNone/>
             </a:pPr>
             <a:r>
-              <a:rPr lang="en-US" sz="2200" dirty="0">
-                <a:solidFill>
-                  <a:srgbClr val="111111"/>
-                </a:solidFill>
-                <a:latin typeface="Pretendard" pitchFamily="34" charset="0"/>
-                <a:ea typeface="Pretendard" pitchFamily="34" charset="-122"/>
-                <a:cs typeface="Pretendard" pitchFamily="34" charset="-120"/>
-              </a:rPr>
-              <a:t>  toc-strips, two-column-compare, three-card-grid, six-tile-grid, timeline-rail, pipeline-chain.</a:t>
-            </a:r>
-            <a:endParaRPr lang="en-US" sz="2200" dirty="0"/>
-          </a:p>
-        </p:txBody>
-      </p:sp>
-      <p:sp>
-        <p:nvSpPr>
-          <p:cNvPr id="31" name="Shape 23"/>
-          <p:cNvSpPr/>
-          <p:nvPr/>
-        </p:nvSpPr>
-        <p:spPr>
-          <a:xfrm>
-            <a:off x="976122" y="4416552"/>
-            <a:ext cx="585216" cy="585216"/>
-          </a:xfrm>
-          <a:prstGeom prst="roundRect">
-            <a:avLst>
-              <a:gd name="adj" fmla="val 6250"/>
-            </a:avLst>
-          </a:prstGeom>
-          <a:solidFill>
-            <a:srgbClr val="F4F6F8"/>
-          </a:solidFill>
-          <a:ln w="12700">
-            <a:solidFill>
-              <a:srgbClr val="AEB7C4"/>
-            </a:solidFill>
-            <a:prstDash val="solid"/>
-          </a:ln>
-        </p:spPr>
-      </p:sp>
-      <p:pic>
-        <p:nvPicPr>
-          <p:cNvPr id="32" name="Image 6" descr="chart icon from tabler-icons (MIT)">    </p:cNvPr>
-          <p:cNvPicPr>
-            <a:picLocks noChangeAspect="1"/>
-          </p:cNvPicPr>
-          <p:nvPr/>
-        </p:nvPicPr>
-        <p:blipFill>
-          <a:blip r:embed="rId13">
-            <a:extLst>
-              <a:ext uri="{96DAC541-7B7A-43D3-8B79-37D633B846F1}">
-                <asvg:svgBlip xmlns:asvg="http://schemas.microsoft.com/office/drawing/2016/SVG/main" r:embed="rId14"/>
-              </a:ext>
-            </a:extLst>
-          </a:blip>
-          <a:stretch>
-            <a:fillRect/>
-          </a:stretch>
-        </p:blipFill>
-        <p:spPr>
-          <a:xfrm>
-            <a:off x="1049274" y="4489704"/>
-            <a:ext cx="438912" cy="438912"/>
-          </a:xfrm>
-          <a:prstGeom prst="rect">
-            <a:avLst/>
-          </a:prstGeom>
-        </p:spPr>
-      </p:pic>
-      <p:sp>
-        <p:nvSpPr>
-          <p:cNvPr id="33" name="mdpr:1-2-e3669a:item-3:block-15-chunk-1"/>
-          <p:cNvSpPr txBox="1"/>
-          <p:nvPr/>
-        </p:nvSpPr>
-        <p:spPr>
-          <a:xfrm>
-            <a:off x="1689354" y="3913632"/>
-            <a:ext cx="3961638" cy="1591056"/>
-          </a:xfrm>
-          <a:prstGeom prst="rect">
-            <a:avLst/>
-          </a:prstGeom>
-          <a:noFill/>
-          <a:ln/>
-        </p:spPr>
-        <p:txBody>
-          <a:bodyPr wrap="square" lIns="0" tIns="25400" rIns="25400" bIns="0" rtlCol="0" anchor="ctr"/>
-          <a:lstStyle/>
-          <a:p>
-            <a:pPr algn="l" indent="0" marL="0">
-              <a:lnSpc>
-                <a:spcPct val="120000"/>
-              </a:lnSpc>
-              <a:buNone/>
-            </a:pPr>
-            <a:r>
-              <a:rPr lang="en-US" sz="2200" b="1" dirty="0">
-                <a:solidFill>
-                  <a:srgbClr val="6B7280"/>
-                </a:solidFill>
-                <a:latin typeface="Pretendard" pitchFamily="34" charset="0"/>
-                <a:ea typeface="Pretendard" pitchFamily="34" charset="-122"/>
-                <a:cs typeface="Pretendard" pitchFamily="34" charset="-120"/>
-              </a:rPr>
-              <a:t>Evidence</a:t>
-            </a:r>
-            <a:pPr algn="l" indent="0" marL="0">
-              <a:lnSpc>
-                <a:spcPct val="120000"/>
-              </a:lnSpc>
-              <a:buNone/>
-            </a:pPr>
-            <a:r>
-              <a:rPr lang="en-US" sz="2200" dirty="0">
+              <a:rPr lang="en-US" sz="1800" dirty="0">
                 <a:solidFill>
                   <a:srgbClr val="111111"/>
                 </a:solidFill>
@@ -7138,87 +6630,8 @@
               </a:rPr>
               <a:t>  chart-table-pair, metric-proof, arc-ring-proof, gauge-proof, connected-strip, mixed-object-pack.</a:t>
             </a:r>
-            <a:endParaRPr lang="en-US" sz="2200" dirty="0"/>
+            <a:endParaRPr lang="en-US" sz="1800" dirty="0"/>
           </a:p>
-        </p:txBody>
-      </p:sp>
-      <p:sp>
-        <p:nvSpPr>
-          <p:cNvPr id="34" name="Shape 25"/>
-          <p:cNvSpPr/>
-          <p:nvPr/>
-        </p:nvSpPr>
-        <p:spPr>
-          <a:xfrm>
-            <a:off x="6462522" y="4416552"/>
-            <a:ext cx="585216" cy="585216"/>
-          </a:xfrm>
-          <a:prstGeom prst="roundRect">
-            <a:avLst>
-              <a:gd name="adj" fmla="val 6250"/>
-            </a:avLst>
-          </a:prstGeom>
-          <a:solidFill>
-            <a:srgbClr val="F4F6F8"/>
-          </a:solidFill>
-          <a:ln w="12700">
-            <a:solidFill>
-              <a:srgbClr val="AEB7C4"/>
-            </a:solidFill>
-            <a:prstDash val="solid"/>
-          </a:ln>
-        </p:spPr>
-      </p:sp>
-      <p:pic>
-        <p:nvPicPr>
-          <p:cNvPr id="35" name="Image 7" descr="flow icon from tabler-icons (MIT)">    </p:cNvPr>
-          <p:cNvPicPr>
-            <a:picLocks noChangeAspect="1"/>
-          </p:cNvPicPr>
-          <p:nvPr/>
-        </p:nvPicPr>
-        <p:blipFill>
-          <a:blip r:embed="rId15">
-            <a:extLst>
-              <a:ext uri="{96DAC541-7B7A-43D3-8B79-37D633B846F1}">
-                <asvg:svgBlip xmlns:asvg="http://schemas.microsoft.com/office/drawing/2016/SVG/main" r:embed="rId16"/>
-              </a:ext>
-            </a:extLst>
-          </a:blip>
-          <a:stretch>
-            <a:fillRect/>
-          </a:stretch>
-        </p:blipFill>
-        <p:spPr>
-          <a:xfrm>
-            <a:off x="6535674" y="4489704"/>
-            <a:ext cx="438912" cy="438912"/>
-          </a:xfrm>
-          <a:prstGeom prst="rect">
-            <a:avLst/>
-          </a:prstGeom>
-        </p:spPr>
-      </p:pic>
-      <p:sp>
-        <p:nvSpPr>
-          <p:cNvPr id="36" name="mdpr:1-2-e3669a:item-4:block-15-chunk-1"/>
-          <p:cNvSpPr txBox="1"/>
-          <p:nvPr/>
-        </p:nvSpPr>
-        <p:spPr>
-          <a:xfrm>
-            <a:off x="7175754" y="3913632"/>
-            <a:ext cx="3961638" cy="1591056"/>
-          </a:xfrm>
-          <a:prstGeom prst="rect">
-            <a:avLst/>
-          </a:prstGeom>
-          <a:noFill/>
-          <a:ln/>
-        </p:spPr>
-        <p:txBody>
-          <a:bodyPr wrap="square" lIns="0" tIns="25400" rIns="25400" bIns="0" rtlCol="0" anchor="ctr"/>
-          <a:lstStyle/>
           <a:p>
             <a:pPr algn="l" indent="0" marL="0">
               <a:lnSpc>
@@ -7227,7 +6640,7 @@
               <a:buNone/>
             </a:pPr>
             <a:r>
-              <a:rPr lang="en-US" sz="2200" b="1" dirty="0">
+              <a:rPr lang="en-US" sz="1800" b="1" dirty="0">
                 <a:solidFill>
                   <a:srgbClr val="6B7280"/>
                 </a:solidFill>
@@ -7235,8 +6648,11 @@
                 <a:ea typeface="Pretendard" pitchFamily="34" charset="-122"/>
                 <a:cs typeface="Pretendard" pitchFamily="34" charset="-120"/>
               </a:rPr>
-              <a:t>Connectors</a:t>
+              <a:t>- Connectors</a:t>
             </a:r>
+            <a:endParaRPr lang="en-US" sz="1800" dirty="0"/>
+          </a:p>
+          <a:p>
             <a:pPr algn="l" indent="0" marL="0">
               <a:lnSpc>
                 <a:spcPct val="120000"/>
@@ -7244,7 +6660,7 @@
               <a:buNone/>
             </a:pPr>
             <a:r>
-              <a:rPr lang="en-US" sz="2200" dirty="0">
+              <a:rPr lang="en-US" sz="1800" dirty="0">
                 <a:solidFill>
                   <a:srgbClr val="111111"/>
                 </a:solidFill>
@@ -7254,7 +6670,7 @@
               </a:rPr>
               <a:t>  straight-arrow, elbow-arrow, boundary-attach, overlap-joint, parallel-flow, contrast-flow.</a:t>
             </a:r>
-            <a:endParaRPr lang="en-US" sz="2200" dirty="0"/>
+            <a:endParaRPr lang="en-US" sz="1800" dirty="0"/>
           </a:p>
         </p:txBody>
       </p:sp>
@@ -14041,71 +13457,14 @@
       </p:sp>
       <p:sp>
         <p:nvSpPr>
-          <p:cNvPr id="23" name="Shape 18"/>
-          <p:cNvSpPr/>
-          <p:nvPr/>
-        </p:nvSpPr>
-        <p:spPr>
-          <a:xfrm>
-            <a:off x="1097280" y="2140428"/>
-            <a:ext cx="474025" cy="474025"/>
-          </a:xfrm>
-          <a:prstGeom prst="roundRect">
-            <a:avLst>
-              <a:gd name="adj" fmla="val 7716"/>
-            </a:avLst>
-          </a:prstGeom>
-          <a:solidFill>
-            <a:srgbClr val="F4F6F8"/>
-          </a:solidFill>
-          <a:ln w="12700">
-            <a:solidFill>
-              <a:srgbClr val="AEB7C4"/>
-            </a:solidFill>
-            <a:prstDash val="solid"/>
-          </a:ln>
-        </p:spPr>
-      </p:sp>
-      <p:pic>
-        <p:nvPicPr>
-          <p:cNvPr id="24" name="Image 3" descr="article icon from tabler-icons (MIT)">    </p:cNvPr>
-          <p:cNvPicPr>
-            <a:picLocks noChangeAspect="1"/>
-          </p:cNvPicPr>
-          <p:nvPr/>
-        </p:nvPicPr>
-        <p:blipFill>
-          <a:blip r:embed="rId7">
-            <a:extLst>
-              <a:ext uri="{96DAC541-7B7A-43D3-8B79-37D633B846F1}">
-                <asvg:svgBlip xmlns:asvg="http://schemas.microsoft.com/office/drawing/2016/SVG/main" r:embed="rId8"/>
-              </a:ext>
-            </a:extLst>
-          </a:blip>
-          <a:stretch>
-            <a:fillRect/>
-          </a:stretch>
-        </p:blipFill>
-        <p:spPr>
-          <a:xfrm>
-            <a:off x="1170432" y="2213580"/>
-            <a:ext cx="327721" cy="327721"/>
-          </a:xfrm>
-          <a:prstGeom prst="rect">
-            <a:avLst/>
-          </a:prstGeom>
-        </p:spPr>
-      </p:pic>
-      <p:sp>
-        <p:nvSpPr>
-          <p:cNvPr id="25" name="mdpr:1-2-ea42c8:item-1:block-27-chunk-1"/>
+          <p:cNvPr id="23" name="mdpr:1-2-ea42c8:item-1:block-27-chunk-1"/>
           <p:cNvSpPr txBox="1"/>
           <p:nvPr/>
         </p:nvSpPr>
         <p:spPr>
           <a:xfrm>
-            <a:off x="1699321" y="1987296"/>
-            <a:ext cx="9255191" cy="780288"/>
+            <a:off x="1133856" y="1957548"/>
+            <a:ext cx="9820656" cy="839785"/>
           </a:xfrm>
           <a:prstGeom prst="rect">
             <a:avLst/>
@@ -14157,71 +13516,14 @@
       </p:sp>
       <p:sp>
         <p:nvSpPr>
-          <p:cNvPr id="26" name="Shape 20"/>
-          <p:cNvSpPr/>
-          <p:nvPr/>
-        </p:nvSpPr>
-        <p:spPr>
-          <a:xfrm>
-            <a:off x="1097280" y="3466308"/>
-            <a:ext cx="474025" cy="474025"/>
-          </a:xfrm>
-          <a:prstGeom prst="roundRect">
-            <a:avLst>
-              <a:gd name="adj" fmla="val 7716"/>
-            </a:avLst>
-          </a:prstGeom>
-          <a:solidFill>
-            <a:srgbClr val="F4F6F8"/>
-          </a:solidFill>
-          <a:ln w="12700">
-            <a:solidFill>
-              <a:srgbClr val="AEB7C4"/>
-            </a:solidFill>
-            <a:prstDash val="solid"/>
-          </a:ln>
-        </p:spPr>
-      </p:sp>
-      <p:pic>
-        <p:nvPicPr>
-          <p:cNvPr id="27" name="Image 4" descr="article icon from tabler-icons (MIT)">    </p:cNvPr>
-          <p:cNvPicPr>
-            <a:picLocks noChangeAspect="1"/>
-          </p:cNvPicPr>
-          <p:nvPr/>
-        </p:nvPicPr>
-        <p:blipFill>
-          <a:blip r:embed="rId9">
-            <a:extLst>
-              <a:ext uri="{96DAC541-7B7A-43D3-8B79-37D633B846F1}">
-                <asvg:svgBlip xmlns:asvg="http://schemas.microsoft.com/office/drawing/2016/SVG/main" r:embed="rId10"/>
-              </a:ext>
-            </a:extLst>
-          </a:blip>
-          <a:stretch>
-            <a:fillRect/>
-          </a:stretch>
-        </p:blipFill>
-        <p:spPr>
-          <a:xfrm>
-            <a:off x="1170432" y="3539460"/>
-            <a:ext cx="327721" cy="327721"/>
-          </a:xfrm>
-          <a:prstGeom prst="rect">
-            <a:avLst/>
-          </a:prstGeom>
-        </p:spPr>
-      </p:pic>
-      <p:sp>
-        <p:nvSpPr>
-          <p:cNvPr id="28" name="mdpr:1-2-ea42c8:item-2:block-27-chunk-1"/>
+          <p:cNvPr id="24" name="mdpr:1-2-ea42c8:item-2:block-27-chunk-1"/>
           <p:cNvSpPr txBox="1"/>
           <p:nvPr/>
         </p:nvSpPr>
         <p:spPr>
           <a:xfrm>
-            <a:off x="1699321" y="3313176"/>
-            <a:ext cx="9255191" cy="780288"/>
+            <a:off x="1133856" y="3283428"/>
+            <a:ext cx="9820656" cy="839785"/>
           </a:xfrm>
           <a:prstGeom prst="rect">
             <a:avLst/>
@@ -14273,71 +13575,14 @@
       </p:sp>
       <p:sp>
         <p:nvSpPr>
-          <p:cNvPr id="29" name="Shape 22"/>
-          <p:cNvSpPr/>
-          <p:nvPr/>
-        </p:nvSpPr>
-        <p:spPr>
-          <a:xfrm>
-            <a:off x="1097280" y="4783044"/>
-            <a:ext cx="474025" cy="474025"/>
-          </a:xfrm>
-          <a:prstGeom prst="roundRect">
-            <a:avLst>
-              <a:gd name="adj" fmla="val 7716"/>
-            </a:avLst>
-          </a:prstGeom>
-          <a:solidFill>
-            <a:srgbClr val="F4F6F8"/>
-          </a:solidFill>
-          <a:ln w="12700">
-            <a:solidFill>
-              <a:srgbClr val="AEB7C4"/>
-            </a:solidFill>
-            <a:prstDash val="solid"/>
-          </a:ln>
-        </p:spPr>
-      </p:sp>
-      <p:pic>
-        <p:nvPicPr>
-          <p:cNvPr id="30" name="Image 5" descr="article icon from tabler-icons (MIT)">    </p:cNvPr>
-          <p:cNvPicPr>
-            <a:picLocks noChangeAspect="1"/>
-          </p:cNvPicPr>
-          <p:nvPr/>
-        </p:nvPicPr>
-        <p:blipFill>
-          <a:blip r:embed="rId11">
-            <a:extLst>
-              <a:ext uri="{96DAC541-7B7A-43D3-8B79-37D633B846F1}">
-                <asvg:svgBlip xmlns:asvg="http://schemas.microsoft.com/office/drawing/2016/SVG/main" r:embed="rId12"/>
-              </a:ext>
-            </a:extLst>
-          </a:blip>
-          <a:stretch>
-            <a:fillRect/>
-          </a:stretch>
-        </p:blipFill>
-        <p:spPr>
-          <a:xfrm>
-            <a:off x="1170432" y="4856196"/>
-            <a:ext cx="327721" cy="327721"/>
-          </a:xfrm>
-          <a:prstGeom prst="rect">
-            <a:avLst/>
-          </a:prstGeom>
-        </p:spPr>
-      </p:pic>
-      <p:sp>
-        <p:nvSpPr>
-          <p:cNvPr id="31" name="mdpr:1-2-ea42c8:item-3:block-27-chunk-1"/>
+          <p:cNvPr id="25" name="mdpr:1-2-ea42c8:item-3:block-27-chunk-1"/>
           <p:cNvSpPr txBox="1"/>
           <p:nvPr/>
         </p:nvSpPr>
         <p:spPr>
           <a:xfrm>
-            <a:off x="1699321" y="4629912"/>
-            <a:ext cx="9255191" cy="780288"/>
+            <a:off x="1133856" y="4600164"/>
+            <a:ext cx="9820656" cy="839785"/>
           </a:xfrm>
           <a:prstGeom prst="rect">
             <a:avLst/>
@@ -17074,71 +16319,14 @@
       </p:sp>
       <p:sp>
         <p:nvSpPr>
-          <p:cNvPr id="25" name="Shape 19"/>
-          <p:cNvSpPr/>
-          <p:nvPr/>
-        </p:nvSpPr>
-        <p:spPr>
-          <a:xfrm>
-            <a:off x="976122" y="2130552"/>
-            <a:ext cx="585216" cy="585216"/>
-          </a:xfrm>
-          <a:prstGeom prst="roundRect">
-            <a:avLst>
-              <a:gd name="adj" fmla="val 6250"/>
-            </a:avLst>
-          </a:prstGeom>
-          <a:solidFill>
-            <a:srgbClr val="F4F6F8"/>
-          </a:solidFill>
-          <a:ln w="12700">
-            <a:solidFill>
-              <a:srgbClr val="AEB7C4"/>
-            </a:solidFill>
-            <a:prstDash val="solid"/>
-          </a:ln>
-        </p:spPr>
-      </p:sp>
-      <p:pic>
-        <p:nvPicPr>
-          <p:cNvPr id="26" name="Image 4" descr="article icon from tabler-icons (MIT)">    </p:cNvPr>
-          <p:cNvPicPr>
-            <a:picLocks noChangeAspect="1"/>
-          </p:cNvPicPr>
-          <p:nvPr/>
-        </p:nvPicPr>
-        <p:blipFill>
-          <a:blip r:embed="rId9">
-            <a:extLst>
-              <a:ext uri="{96DAC541-7B7A-43D3-8B79-37D633B846F1}">
-                <asvg:svgBlip xmlns:asvg="http://schemas.microsoft.com/office/drawing/2016/SVG/main" r:embed="rId10"/>
-              </a:ext>
-            </a:extLst>
-          </a:blip>
-          <a:stretch>
-            <a:fillRect/>
-          </a:stretch>
-        </p:blipFill>
-        <p:spPr>
-          <a:xfrm>
-            <a:off x="1049274" y="2203704"/>
-            <a:ext cx="438912" cy="438912"/>
-          </a:xfrm>
-          <a:prstGeom prst="rect">
-            <a:avLst/>
-          </a:prstGeom>
-        </p:spPr>
-      </p:pic>
-      <p:sp>
-        <p:nvSpPr>
-          <p:cNvPr id="27" name="mdpr:icon-and-text-aside-8429fc:item-1:block-29"/>
+          <p:cNvPr id="25" name="mdpr:icon-and-text-aside-8429fc:item-1:block-29"/>
           <p:cNvSpPr txBox="1"/>
           <p:nvPr/>
         </p:nvSpPr>
         <p:spPr>
           <a:xfrm>
-            <a:off x="1689354" y="2033016"/>
-            <a:ext cx="3961638" cy="780288"/>
+            <a:off x="1042416" y="1627632"/>
+            <a:ext cx="4608576" cy="1591056"/>
           </a:xfrm>
           <a:prstGeom prst="rect">
             <a:avLst/>
@@ -17190,71 +16378,14 @@
       </p:sp>
       <p:sp>
         <p:nvSpPr>
-          <p:cNvPr id="28" name="Shape 21"/>
-          <p:cNvSpPr/>
-          <p:nvPr/>
-        </p:nvSpPr>
-        <p:spPr>
-          <a:xfrm>
-            <a:off x="6462522" y="2130552"/>
-            <a:ext cx="585216" cy="585216"/>
-          </a:xfrm>
-          <a:prstGeom prst="roundRect">
-            <a:avLst>
-              <a:gd name="adj" fmla="val 6250"/>
-            </a:avLst>
-          </a:prstGeom>
-          <a:solidFill>
-            <a:srgbClr val="F4F6F8"/>
-          </a:solidFill>
-          <a:ln w="12700">
-            <a:solidFill>
-              <a:srgbClr val="AEB7C4"/>
-            </a:solidFill>
-            <a:prstDash val="solid"/>
-          </a:ln>
-        </p:spPr>
-      </p:sp>
-      <p:pic>
-        <p:nvPicPr>
-          <p:cNvPr id="29" name="Image 5" descr="article icon from tabler-icons (MIT)">    </p:cNvPr>
-          <p:cNvPicPr>
-            <a:picLocks noChangeAspect="1"/>
-          </p:cNvPicPr>
-          <p:nvPr/>
-        </p:nvPicPr>
-        <p:blipFill>
-          <a:blip r:embed="rId11">
-            <a:extLst>
-              <a:ext uri="{96DAC541-7B7A-43D3-8B79-37D633B846F1}">
-                <asvg:svgBlip xmlns:asvg="http://schemas.microsoft.com/office/drawing/2016/SVG/main" r:embed="rId12"/>
-              </a:ext>
-            </a:extLst>
-          </a:blip>
-          <a:stretch>
-            <a:fillRect/>
-          </a:stretch>
-        </p:blipFill>
-        <p:spPr>
-          <a:xfrm>
-            <a:off x="6535674" y="2203704"/>
-            <a:ext cx="438912" cy="438912"/>
-          </a:xfrm>
-          <a:prstGeom prst="rect">
-            <a:avLst/>
-          </a:prstGeom>
-        </p:spPr>
-      </p:pic>
-      <p:sp>
-        <p:nvSpPr>
-          <p:cNvPr id="30" name="mdpr:icon-and-text-aside-8429fc:item-2:block-29"/>
+          <p:cNvPr id="26" name="mdpr:icon-and-text-aside-8429fc:item-2:block-29"/>
           <p:cNvSpPr txBox="1"/>
           <p:nvPr/>
         </p:nvSpPr>
         <p:spPr>
           <a:xfrm>
-            <a:off x="7175754" y="1865376"/>
-            <a:ext cx="3961638" cy="1115568"/>
+            <a:off x="6528816" y="1627632"/>
+            <a:ext cx="4608576" cy="1591056"/>
           </a:xfrm>
           <a:prstGeom prst="rect">
             <a:avLst/>
@@ -17306,71 +16437,14 @@
       </p:sp>
       <p:sp>
         <p:nvSpPr>
-          <p:cNvPr id="31" name="Shape 23"/>
-          <p:cNvSpPr/>
-          <p:nvPr/>
-        </p:nvSpPr>
-        <p:spPr>
-          <a:xfrm>
-            <a:off x="976122" y="4416552"/>
-            <a:ext cx="585216" cy="585216"/>
-          </a:xfrm>
-          <a:prstGeom prst="roundRect">
-            <a:avLst>
-              <a:gd name="adj" fmla="val 6250"/>
-            </a:avLst>
-          </a:prstGeom>
-          <a:solidFill>
-            <a:srgbClr val="F4F6F8"/>
-          </a:solidFill>
-          <a:ln w="12700">
-            <a:solidFill>
-              <a:srgbClr val="AEB7C4"/>
-            </a:solidFill>
-            <a:prstDash val="solid"/>
-          </a:ln>
-        </p:spPr>
-      </p:sp>
-      <p:pic>
-        <p:nvPicPr>
-          <p:cNvPr id="32" name="Image 6" descr="article icon from tabler-icons (MIT)">    </p:cNvPr>
-          <p:cNvPicPr>
-            <a:picLocks noChangeAspect="1"/>
-          </p:cNvPicPr>
-          <p:nvPr/>
-        </p:nvPicPr>
-        <p:blipFill>
-          <a:blip r:embed="rId13">
-            <a:extLst>
-              <a:ext uri="{96DAC541-7B7A-43D3-8B79-37D633B846F1}">
-                <asvg:svgBlip xmlns:asvg="http://schemas.microsoft.com/office/drawing/2016/SVG/main" r:embed="rId14"/>
-              </a:ext>
-            </a:extLst>
-          </a:blip>
-          <a:stretch>
-            <a:fillRect/>
-          </a:stretch>
-        </p:blipFill>
-        <p:spPr>
-          <a:xfrm>
-            <a:off x="1049274" y="4489704"/>
-            <a:ext cx="438912" cy="438912"/>
-          </a:xfrm>
-          <a:prstGeom prst="rect">
-            <a:avLst/>
-          </a:prstGeom>
-        </p:spPr>
-      </p:pic>
-      <p:sp>
-        <p:nvSpPr>
-          <p:cNvPr id="33" name="mdpr:icon-and-text-aside-8429fc:item-3:block-29"/>
+          <p:cNvPr id="27" name="mdpr:icon-and-text-aside-8429fc:item-3:block-29"/>
           <p:cNvSpPr txBox="1"/>
           <p:nvPr/>
         </p:nvSpPr>
         <p:spPr>
           <a:xfrm>
-            <a:off x="1689354" y="4151376"/>
-            <a:ext cx="3961638" cy="1115568"/>
+            <a:off x="1042416" y="3913632"/>
+            <a:ext cx="4608576" cy="1591056"/>
           </a:xfrm>
           <a:prstGeom prst="rect">
             <a:avLst/>
@@ -17422,71 +16496,14 @@
       </p:sp>
       <p:sp>
         <p:nvSpPr>
-          <p:cNvPr id="34" name="Shape 25"/>
-          <p:cNvSpPr/>
-          <p:nvPr/>
-        </p:nvSpPr>
-        <p:spPr>
-          <a:xfrm>
-            <a:off x="6462522" y="4416552"/>
-            <a:ext cx="585216" cy="585216"/>
-          </a:xfrm>
-          <a:prstGeom prst="roundRect">
-            <a:avLst>
-              <a:gd name="adj" fmla="val 6250"/>
-            </a:avLst>
-          </a:prstGeom>
-          <a:solidFill>
-            <a:srgbClr val="F4F6F8"/>
-          </a:solidFill>
-          <a:ln w="12700">
-            <a:solidFill>
-              <a:srgbClr val="AEB7C4"/>
-            </a:solidFill>
-            <a:prstDash val="solid"/>
-          </a:ln>
-        </p:spPr>
-      </p:sp>
-      <p:pic>
-        <p:nvPicPr>
-          <p:cNvPr id="35" name="Image 7" descr="table icon from tabler-icons (MIT)">    </p:cNvPr>
-          <p:cNvPicPr>
-            <a:picLocks noChangeAspect="1"/>
-          </p:cNvPicPr>
-          <p:nvPr/>
-        </p:nvPicPr>
-        <p:blipFill>
-          <a:blip r:embed="rId15">
-            <a:extLst>
-              <a:ext uri="{96DAC541-7B7A-43D3-8B79-37D633B846F1}">
-                <asvg:svgBlip xmlns:asvg="http://schemas.microsoft.com/office/drawing/2016/SVG/main" r:embed="rId16"/>
-              </a:ext>
-            </a:extLst>
-          </a:blip>
-          <a:stretch>
-            <a:fillRect/>
-          </a:stretch>
-        </p:blipFill>
-        <p:spPr>
-          <a:xfrm>
-            <a:off x="6535674" y="4489704"/>
-            <a:ext cx="438912" cy="438912"/>
-          </a:xfrm>
-          <a:prstGeom prst="rect">
-            <a:avLst/>
-          </a:prstGeom>
-        </p:spPr>
-      </p:pic>
-      <p:sp>
-        <p:nvSpPr>
-          <p:cNvPr id="36" name="mdpr:icon-and-text-aside-8429fc:item-4:block-29"/>
+          <p:cNvPr id="28" name="mdpr:icon-and-text-aside-8429fc:item-4:block-29"/>
           <p:cNvSpPr txBox="1"/>
           <p:nvPr/>
         </p:nvSpPr>
         <p:spPr>
           <a:xfrm>
-            <a:off x="7175754" y="4151376"/>
-            <a:ext cx="3961638" cy="1115568"/>
+            <a:off x="6528816" y="3913632"/>
+            <a:ext cx="4608576" cy="1591056"/>
           </a:xfrm>
           <a:prstGeom prst="rect">
             <a:avLst/>
@@ -18274,71 +17291,14 @@
       </p:sp>
       <p:sp>
         <p:nvSpPr>
-          <p:cNvPr id="25" name="Shape 19"/>
-          <p:cNvSpPr/>
-          <p:nvPr/>
-        </p:nvSpPr>
-        <p:spPr>
-          <a:xfrm>
-            <a:off x="976122" y="2130552"/>
-            <a:ext cx="585216" cy="585216"/>
-          </a:xfrm>
-          <a:prstGeom prst="roundRect">
-            <a:avLst>
-              <a:gd name="adj" fmla="val 6250"/>
-            </a:avLst>
-          </a:prstGeom>
-          <a:solidFill>
-            <a:srgbClr val="F4F6F8"/>
-          </a:solidFill>
-          <a:ln w="12700">
-            <a:solidFill>
-              <a:srgbClr val="AEB7C4"/>
-            </a:solidFill>
-            <a:prstDash val="solid"/>
-          </a:ln>
-        </p:spPr>
-      </p:sp>
-      <p:pic>
-        <p:nvPicPr>
-          <p:cNvPr id="26" name="Image 4" descr="verified icon from tabler-icons (MIT)">    </p:cNvPr>
-          <p:cNvPicPr>
-            <a:picLocks noChangeAspect="1"/>
-          </p:cNvPicPr>
-          <p:nvPr/>
-        </p:nvPicPr>
-        <p:blipFill>
-          <a:blip r:embed="rId9">
-            <a:extLst>
-              <a:ext uri="{96DAC541-7B7A-43D3-8B79-37D633B846F1}">
-                <asvg:svgBlip xmlns:asvg="http://schemas.microsoft.com/office/drawing/2016/SVG/main" r:embed="rId10"/>
-              </a:ext>
-            </a:extLst>
-          </a:blip>
-          <a:stretch>
-            <a:fillRect/>
-          </a:stretch>
-        </p:blipFill>
-        <p:spPr>
-          <a:xfrm>
-            <a:off x="1049274" y="2203704"/>
-            <a:ext cx="438912" cy="438912"/>
-          </a:xfrm>
-          <a:prstGeom prst="rect">
-            <a:avLst/>
-          </a:prstGeom>
-        </p:spPr>
-      </p:pic>
-      <p:sp>
-        <p:nvSpPr>
-          <p:cNvPr id="27" name="mdpr:overflow-guard-f8d03e:item-1:block-31"/>
+          <p:cNvPr id="25" name="mdpr:overflow-guard-f8d03e:item-1:block-31"/>
           <p:cNvSpPr txBox="1"/>
           <p:nvPr/>
         </p:nvSpPr>
         <p:spPr>
           <a:xfrm>
-            <a:off x="1689354" y="1865376"/>
-            <a:ext cx="3961638" cy="1115568"/>
+            <a:off x="1042416" y="1627632"/>
+            <a:ext cx="4608576" cy="1591056"/>
           </a:xfrm>
           <a:prstGeom prst="rect">
             <a:avLst/>
@@ -18390,71 +17350,14 @@
       </p:sp>
       <p:sp>
         <p:nvSpPr>
-          <p:cNvPr id="28" name="Shape 21"/>
-          <p:cNvSpPr/>
-          <p:nvPr/>
-        </p:nvSpPr>
-        <p:spPr>
-          <a:xfrm>
-            <a:off x="6462522" y="2130552"/>
-            <a:ext cx="585216" cy="585216"/>
-          </a:xfrm>
-          <a:prstGeom prst="roundRect">
-            <a:avLst>
-              <a:gd name="adj" fmla="val 6250"/>
-            </a:avLst>
-          </a:prstGeom>
-          <a:solidFill>
-            <a:srgbClr val="F4F6F8"/>
-          </a:solidFill>
-          <a:ln w="12700">
-            <a:solidFill>
-              <a:srgbClr val="AEB7C4"/>
-            </a:solidFill>
-            <a:prstDash val="solid"/>
-          </a:ln>
-        </p:spPr>
-      </p:sp>
-      <p:pic>
-        <p:nvPicPr>
-          <p:cNvPr id="29" name="Image 5" descr="table icon from tabler-icons (MIT)">    </p:cNvPr>
-          <p:cNvPicPr>
-            <a:picLocks noChangeAspect="1"/>
-          </p:cNvPicPr>
-          <p:nvPr/>
-        </p:nvPicPr>
-        <p:blipFill>
-          <a:blip r:embed="rId11">
-            <a:extLst>
-              <a:ext uri="{96DAC541-7B7A-43D3-8B79-37D633B846F1}">
-                <asvg:svgBlip xmlns:asvg="http://schemas.microsoft.com/office/drawing/2016/SVG/main" r:embed="rId12"/>
-              </a:ext>
-            </a:extLst>
-          </a:blip>
-          <a:stretch>
-            <a:fillRect/>
-          </a:stretch>
-        </p:blipFill>
-        <p:spPr>
-          <a:xfrm>
-            <a:off x="6535674" y="2203704"/>
-            <a:ext cx="438912" cy="438912"/>
-          </a:xfrm>
-          <a:prstGeom prst="rect">
-            <a:avLst/>
-          </a:prstGeom>
-        </p:spPr>
-      </p:pic>
-      <p:sp>
-        <p:nvSpPr>
-          <p:cNvPr id="30" name="mdpr:overflow-guard-f8d03e:item-2:block-31"/>
+          <p:cNvPr id="26" name="mdpr:overflow-guard-f8d03e:item-2:block-31"/>
           <p:cNvSpPr txBox="1"/>
           <p:nvPr/>
         </p:nvSpPr>
         <p:spPr>
           <a:xfrm>
-            <a:off x="7175754" y="1697736"/>
-            <a:ext cx="3961638" cy="1450848"/>
+            <a:off x="6528816" y="1627632"/>
+            <a:ext cx="4608576" cy="1591056"/>
           </a:xfrm>
           <a:prstGeom prst="rect">
             <a:avLst/>
@@ -18506,71 +17409,14 @@
       </p:sp>
       <p:sp>
         <p:nvSpPr>
-          <p:cNvPr id="31" name="Shape 23"/>
-          <p:cNvSpPr/>
-          <p:nvPr/>
-        </p:nvSpPr>
-        <p:spPr>
-          <a:xfrm>
-            <a:off x="976122" y="4416552"/>
-            <a:ext cx="585216" cy="585216"/>
-          </a:xfrm>
-          <a:prstGeom prst="roundRect">
-            <a:avLst>
-              <a:gd name="adj" fmla="val 6250"/>
-            </a:avLst>
-          </a:prstGeom>
-          <a:solidFill>
-            <a:srgbClr val="F4F6F8"/>
-          </a:solidFill>
-          <a:ln w="12700">
-            <a:solidFill>
-              <a:srgbClr val="AEB7C4"/>
-            </a:solidFill>
-            <a:prstDash val="solid"/>
-          </a:ln>
-        </p:spPr>
-      </p:sp>
-      <p:pic>
-        <p:nvPicPr>
-          <p:cNvPr id="32" name="Image 6" descr="article icon from tabler-icons (MIT)">    </p:cNvPr>
-          <p:cNvPicPr>
-            <a:picLocks noChangeAspect="1"/>
-          </p:cNvPicPr>
-          <p:nvPr/>
-        </p:nvPicPr>
-        <p:blipFill>
-          <a:blip r:embed="rId13">
-            <a:extLst>
-              <a:ext uri="{96DAC541-7B7A-43D3-8B79-37D633B846F1}">
-                <asvg:svgBlip xmlns:asvg="http://schemas.microsoft.com/office/drawing/2016/SVG/main" r:embed="rId14"/>
-              </a:ext>
-            </a:extLst>
-          </a:blip>
-          <a:stretch>
-            <a:fillRect/>
-          </a:stretch>
-        </p:blipFill>
-        <p:spPr>
-          <a:xfrm>
-            <a:off x="1049274" y="4489704"/>
-            <a:ext cx="438912" cy="438912"/>
-          </a:xfrm>
-          <a:prstGeom prst="rect">
-            <a:avLst/>
-          </a:prstGeom>
-        </p:spPr>
-      </p:pic>
-      <p:sp>
-        <p:nvSpPr>
-          <p:cNvPr id="33" name="mdpr:overflow-guard-f8d03e:item-3:block-31"/>
+          <p:cNvPr id="27" name="mdpr:overflow-guard-f8d03e:item-3:block-31"/>
           <p:cNvSpPr txBox="1"/>
           <p:nvPr/>
         </p:nvSpPr>
         <p:spPr>
           <a:xfrm>
-            <a:off x="1689354" y="4151376"/>
-            <a:ext cx="3961638" cy="1115568"/>
+            <a:off x="1042416" y="3913632"/>
+            <a:ext cx="4608576" cy="1591056"/>
           </a:xfrm>
           <a:prstGeom prst="rect">
             <a:avLst/>
@@ -18622,71 +17468,14 @@
       </p:sp>
       <p:sp>
         <p:nvSpPr>
-          <p:cNvPr id="34" name="Shape 25"/>
-          <p:cNvSpPr/>
-          <p:nvPr/>
-        </p:nvSpPr>
-        <p:spPr>
-          <a:xfrm>
-            <a:off x="6462522" y="4416552"/>
-            <a:ext cx="585216" cy="585216"/>
-          </a:xfrm>
-          <a:prstGeom prst="roundRect">
-            <a:avLst>
-              <a:gd name="adj" fmla="val 6250"/>
-            </a:avLst>
-          </a:prstGeom>
-          <a:solidFill>
-            <a:srgbClr val="F4F6F8"/>
-          </a:solidFill>
-          <a:ln w="12700">
-            <a:solidFill>
-              <a:srgbClr val="AEB7C4"/>
-            </a:solidFill>
-            <a:prstDash val="solid"/>
-          </a:ln>
-        </p:spPr>
-      </p:sp>
-      <p:pic>
-        <p:nvPicPr>
-          <p:cNvPr id="35" name="Image 7" descr="article icon from tabler-icons (MIT)">    </p:cNvPr>
-          <p:cNvPicPr>
-            <a:picLocks noChangeAspect="1"/>
-          </p:cNvPicPr>
-          <p:nvPr/>
-        </p:nvPicPr>
-        <p:blipFill>
-          <a:blip r:embed="rId15">
-            <a:extLst>
-              <a:ext uri="{96DAC541-7B7A-43D3-8B79-37D633B846F1}">
-                <asvg:svgBlip xmlns:asvg="http://schemas.microsoft.com/office/drawing/2016/SVG/main" r:embed="rId16"/>
-              </a:ext>
-            </a:extLst>
-          </a:blip>
-          <a:stretch>
-            <a:fillRect/>
-          </a:stretch>
-        </p:blipFill>
-        <p:spPr>
-          <a:xfrm>
-            <a:off x="6535674" y="4489704"/>
-            <a:ext cx="438912" cy="438912"/>
-          </a:xfrm>
-          <a:prstGeom prst="rect">
-            <a:avLst/>
-          </a:prstGeom>
-        </p:spPr>
-      </p:pic>
-      <p:sp>
-        <p:nvSpPr>
-          <p:cNvPr id="36" name="mdpr:overflow-guard-f8d03e:item-4:block-31"/>
+          <p:cNvPr id="28" name="mdpr:overflow-guard-f8d03e:item-4:block-31"/>
           <p:cNvSpPr txBox="1"/>
           <p:nvPr/>
         </p:nvSpPr>
         <p:spPr>
           <a:xfrm>
-            <a:off x="7175754" y="4151376"/>
-            <a:ext cx="3961638" cy="1115568"/>
+            <a:off x="6528816" y="3913632"/>
+            <a:ext cx="4608576" cy="1591056"/>
           </a:xfrm>
           <a:prstGeom prst="rect">
             <a:avLst/>
@@ -21212,71 +20001,14 @@
       </p:sp>
       <p:sp>
         <p:nvSpPr>
-          <p:cNvPr id="23" name="Shape 18"/>
-          <p:cNvSpPr/>
-          <p:nvPr/>
-        </p:nvSpPr>
-        <p:spPr>
-          <a:xfrm>
-            <a:off x="1097280" y="2140428"/>
-            <a:ext cx="474025" cy="474025"/>
-          </a:xfrm>
-          <a:prstGeom prst="roundRect">
-            <a:avLst>
-              <a:gd name="adj" fmla="val 7716"/>
-            </a:avLst>
-          </a:prstGeom>
-          <a:solidFill>
-            <a:srgbClr val="F4F6F8"/>
-          </a:solidFill>
-          <a:ln w="12700">
-            <a:solidFill>
-              <a:srgbClr val="AEB7C4"/>
-            </a:solidFill>
-            <a:prstDash val="solid"/>
-          </a:ln>
-        </p:spPr>
-      </p:sp>
-      <p:pic>
-        <p:nvPicPr>
-          <p:cNvPr id="24" name="Image 3" descr="flow icon from tabler-icons (MIT)">    </p:cNvPr>
-          <p:cNvPicPr>
-            <a:picLocks noChangeAspect="1"/>
-          </p:cNvPicPr>
-          <p:nvPr/>
-        </p:nvPicPr>
-        <p:blipFill>
-          <a:blip r:embed="rId7">
-            <a:extLst>
-              <a:ext uri="{96DAC541-7B7A-43D3-8B79-37D633B846F1}">
-                <asvg:svgBlip xmlns:asvg="http://schemas.microsoft.com/office/drawing/2016/SVG/main" r:embed="rId8"/>
-              </a:ext>
-            </a:extLst>
-          </a:blip>
-          <a:stretch>
-            <a:fillRect/>
-          </a:stretch>
-        </p:blipFill>
-        <p:spPr>
-          <a:xfrm>
-            <a:off x="1170432" y="2213580"/>
-            <a:ext cx="327721" cy="327721"/>
-          </a:xfrm>
-          <a:prstGeom prst="rect">
-            <a:avLst/>
-          </a:prstGeom>
-        </p:spPr>
-      </p:pic>
-      <p:sp>
-        <p:nvSpPr>
-          <p:cNvPr id="25" name="mdpr:actions-output-review-326e07:item-1:block-41"/>
+          <p:cNvPr id="23" name="mdpr:actions-output-review-326e07:item-1:block-41"/>
           <p:cNvSpPr txBox="1"/>
           <p:nvPr/>
         </p:nvSpPr>
         <p:spPr>
           <a:xfrm>
-            <a:off x="1699321" y="1987296"/>
-            <a:ext cx="9255191" cy="780288"/>
+            <a:off x="1133856" y="1957548"/>
+            <a:ext cx="9820656" cy="839785"/>
           </a:xfrm>
           <a:prstGeom prst="rect">
             <a:avLst/>
@@ -21328,71 +20060,14 @@
       </p:sp>
       <p:sp>
         <p:nvSpPr>
-          <p:cNvPr id="26" name="Shape 20"/>
-          <p:cNvSpPr/>
-          <p:nvPr/>
-        </p:nvSpPr>
-        <p:spPr>
-          <a:xfrm>
-            <a:off x="1097280" y="3466308"/>
-            <a:ext cx="474025" cy="474025"/>
-          </a:xfrm>
-          <a:prstGeom prst="roundRect">
-            <a:avLst>
-              <a:gd name="adj" fmla="val 7716"/>
-            </a:avLst>
-          </a:prstGeom>
-          <a:solidFill>
-            <a:srgbClr val="F4F6F8"/>
-          </a:solidFill>
-          <a:ln w="12700">
-            <a:solidFill>
-              <a:srgbClr val="AEB7C4"/>
-            </a:solidFill>
-            <a:prstDash val="solid"/>
-          </a:ln>
-        </p:spPr>
-      </p:sp>
-      <p:pic>
-        <p:nvPicPr>
-          <p:cNvPr id="27" name="Image 4" descr="verified icon from tabler-icons (MIT)">    </p:cNvPr>
-          <p:cNvPicPr>
-            <a:picLocks noChangeAspect="1"/>
-          </p:cNvPicPr>
-          <p:nvPr/>
-        </p:nvPicPr>
-        <p:blipFill>
-          <a:blip r:embed="rId9">
-            <a:extLst>
-              <a:ext uri="{96DAC541-7B7A-43D3-8B79-37D633B846F1}">
-                <asvg:svgBlip xmlns:asvg="http://schemas.microsoft.com/office/drawing/2016/SVG/main" r:embed="rId10"/>
-              </a:ext>
-            </a:extLst>
-          </a:blip>
-          <a:stretch>
-            <a:fillRect/>
-          </a:stretch>
-        </p:blipFill>
-        <p:spPr>
-          <a:xfrm>
-            <a:off x="1170432" y="3539460"/>
-            <a:ext cx="327721" cy="327721"/>
-          </a:xfrm>
-          <a:prstGeom prst="rect">
-            <a:avLst/>
-          </a:prstGeom>
-        </p:spPr>
-      </p:pic>
-      <p:sp>
-        <p:nvSpPr>
-          <p:cNvPr id="28" name="mdpr:actions-output-review-326e07:item-2:block-41"/>
+          <p:cNvPr id="24" name="mdpr:actions-output-review-326e07:item-2:block-41"/>
           <p:cNvSpPr txBox="1"/>
           <p:nvPr/>
         </p:nvSpPr>
         <p:spPr>
           <a:xfrm>
-            <a:off x="1699321" y="3313176"/>
-            <a:ext cx="9255191" cy="780288"/>
+            <a:off x="1133856" y="3283428"/>
+            <a:ext cx="9820656" cy="839785"/>
           </a:xfrm>
           <a:prstGeom prst="rect">
             <a:avLst/>
@@ -21444,71 +20119,14 @@
       </p:sp>
       <p:sp>
         <p:nvSpPr>
-          <p:cNvPr id="29" name="Shape 22"/>
-          <p:cNvSpPr/>
-          <p:nvPr/>
-        </p:nvSpPr>
-        <p:spPr>
-          <a:xfrm>
-            <a:off x="1097280" y="4783044"/>
-            <a:ext cx="474025" cy="474025"/>
-          </a:xfrm>
-          <a:prstGeom prst="roundRect">
-            <a:avLst>
-              <a:gd name="adj" fmla="val 7716"/>
-            </a:avLst>
-          </a:prstGeom>
-          <a:solidFill>
-            <a:srgbClr val="F4F6F8"/>
-          </a:solidFill>
-          <a:ln w="12700">
-            <a:solidFill>
-              <a:srgbClr val="AEB7C4"/>
-            </a:solidFill>
-            <a:prstDash val="solid"/>
-          </a:ln>
-        </p:spPr>
-      </p:sp>
-      <p:pic>
-        <p:nvPicPr>
-          <p:cNvPr id="30" name="Image 5" descr="spark icon from tabler-icons (MIT)">    </p:cNvPr>
-          <p:cNvPicPr>
-            <a:picLocks noChangeAspect="1"/>
-          </p:cNvPicPr>
-          <p:nvPr/>
-        </p:nvPicPr>
-        <p:blipFill>
-          <a:blip r:embed="rId11">
-            <a:extLst>
-              <a:ext uri="{96DAC541-7B7A-43D3-8B79-37D633B846F1}">
-                <asvg:svgBlip xmlns:asvg="http://schemas.microsoft.com/office/drawing/2016/SVG/main" r:embed="rId12"/>
-              </a:ext>
-            </a:extLst>
-          </a:blip>
-          <a:stretch>
-            <a:fillRect/>
-          </a:stretch>
-        </p:blipFill>
-        <p:spPr>
-          <a:xfrm>
-            <a:off x="1170432" y="4856196"/>
-            <a:ext cx="327721" cy="327721"/>
-          </a:xfrm>
-          <a:prstGeom prst="rect">
-            <a:avLst/>
-          </a:prstGeom>
-        </p:spPr>
-      </p:pic>
-      <p:sp>
-        <p:nvSpPr>
-          <p:cNvPr id="31" name="mdpr:actions-output-review-326e07:item-3:block-41"/>
+          <p:cNvPr id="25" name="mdpr:actions-output-review-326e07:item-3:block-41"/>
           <p:cNvSpPr txBox="1"/>
           <p:nvPr/>
         </p:nvSpPr>
         <p:spPr>
           <a:xfrm>
-            <a:off x="1699321" y="4629912"/>
-            <a:ext cx="9255191" cy="780288"/>
+            <a:off x="1133856" y="4600164"/>
+            <a:ext cx="9820656" cy="839785"/>
           </a:xfrm>
           <a:prstGeom prst="rect">
             <a:avLst/>
@@ -23426,71 +22044,14 @@
       </p:sp>
       <p:sp>
         <p:nvSpPr>
-          <p:cNvPr id="23" name="Shape 18"/>
-          <p:cNvSpPr/>
-          <p:nvPr/>
-        </p:nvSpPr>
-        <p:spPr>
-          <a:xfrm>
-            <a:off x="1097280" y="2140428"/>
-            <a:ext cx="474025" cy="474025"/>
-          </a:xfrm>
-          <a:prstGeom prst="roundRect">
-            <a:avLst>
-              <a:gd name="adj" fmla="val 7716"/>
-            </a:avLst>
-          </a:prstGeom>
-          <a:solidFill>
-            <a:srgbClr val="F4F6F8"/>
-          </a:solidFill>
-          <a:ln w="12700">
-            <a:solidFill>
-              <a:srgbClr val="AEB7C4"/>
-            </a:solidFill>
-            <a:prstDash val="solid"/>
-          </a:ln>
-        </p:spPr>
-      </p:sp>
-      <p:pic>
-        <p:nvPicPr>
-          <p:cNvPr id="24" name="Image 3" descr="article icon from tabler-icons (MIT)">    </p:cNvPr>
-          <p:cNvPicPr>
-            <a:picLocks noChangeAspect="1"/>
-          </p:cNvPicPr>
-          <p:nvPr/>
-        </p:nvPicPr>
-        <p:blipFill>
-          <a:blip r:embed="rId7">
-            <a:extLst>
-              <a:ext uri="{96DAC541-7B7A-43D3-8B79-37D633B846F1}">
-                <asvg:svgBlip xmlns:asvg="http://schemas.microsoft.com/office/drawing/2016/SVG/main" r:embed="rId8"/>
-              </a:ext>
-            </a:extLst>
-          </a:blip>
-          <a:stretch>
-            <a:fillRect/>
-          </a:stretch>
-        </p:blipFill>
-        <p:spPr>
-          <a:xfrm>
-            <a:off x="1170432" y="2213580"/>
-            <a:ext cx="327721" cy="327721"/>
-          </a:xfrm>
-          <a:prstGeom prst="rect">
-            <a:avLst/>
-          </a:prstGeom>
-        </p:spPr>
-      </p:pic>
-      <p:sp>
-        <p:nvSpPr>
-          <p:cNvPr id="25" name="mdpr:1-2-32ac08:item-1:block-6-chunk-1"/>
+          <p:cNvPr id="23" name="mdpr:1-2-32ac08:item-1:block-6-chunk-1"/>
           <p:cNvSpPr txBox="1"/>
           <p:nvPr/>
         </p:nvSpPr>
         <p:spPr>
           <a:xfrm>
-            <a:off x="1699321" y="1987296"/>
-            <a:ext cx="9255191" cy="780288"/>
+            <a:off x="1133856" y="1957548"/>
+            <a:ext cx="9820656" cy="839785"/>
           </a:xfrm>
           <a:prstGeom prst="rect">
             <a:avLst/>
@@ -23542,71 +22103,14 @@
       </p:sp>
       <p:sp>
         <p:nvSpPr>
-          <p:cNvPr id="26" name="Shape 20"/>
-          <p:cNvSpPr/>
-          <p:nvPr/>
-        </p:nvSpPr>
-        <p:spPr>
-          <a:xfrm>
-            <a:off x="1097280" y="3466308"/>
-            <a:ext cx="474025" cy="474025"/>
-          </a:xfrm>
-          <a:prstGeom prst="roundRect">
-            <a:avLst>
-              <a:gd name="adj" fmla="val 7716"/>
-            </a:avLst>
-          </a:prstGeom>
-          <a:solidFill>
-            <a:srgbClr val="F4F6F8"/>
-          </a:solidFill>
-          <a:ln w="12700">
-            <a:solidFill>
-              <a:srgbClr val="AEB7C4"/>
-            </a:solidFill>
-            <a:prstDash val="solid"/>
-          </a:ln>
-        </p:spPr>
-      </p:sp>
-      <p:pic>
-        <p:nvPicPr>
-          <p:cNvPr id="27" name="Image 4" descr="chart icon from tabler-icons (MIT)">    </p:cNvPr>
-          <p:cNvPicPr>
-            <a:picLocks noChangeAspect="1"/>
-          </p:cNvPicPr>
-          <p:nvPr/>
-        </p:nvPicPr>
-        <p:blipFill>
-          <a:blip r:embed="rId9">
-            <a:extLst>
-              <a:ext uri="{96DAC541-7B7A-43D3-8B79-37D633B846F1}">
-                <asvg:svgBlip xmlns:asvg="http://schemas.microsoft.com/office/drawing/2016/SVG/main" r:embed="rId10"/>
-              </a:ext>
-            </a:extLst>
-          </a:blip>
-          <a:stretch>
-            <a:fillRect/>
-          </a:stretch>
-        </p:blipFill>
-        <p:spPr>
-          <a:xfrm>
-            <a:off x="1170432" y="3539460"/>
-            <a:ext cx="327721" cy="327721"/>
-          </a:xfrm>
-          <a:prstGeom prst="rect">
-            <a:avLst/>
-          </a:prstGeom>
-        </p:spPr>
-      </p:pic>
-      <p:sp>
-        <p:nvSpPr>
-          <p:cNvPr id="28" name="mdpr:1-2-32ac08:item-2:block-6-chunk-1"/>
+          <p:cNvPr id="24" name="mdpr:1-2-32ac08:item-2:block-6-chunk-1"/>
           <p:cNvSpPr txBox="1"/>
           <p:nvPr/>
         </p:nvSpPr>
         <p:spPr>
           <a:xfrm>
-            <a:off x="1699321" y="3313176"/>
-            <a:ext cx="9255191" cy="780288"/>
+            <a:off x="1133856" y="3283428"/>
+            <a:ext cx="9820656" cy="839785"/>
           </a:xfrm>
           <a:prstGeom prst="rect">
             <a:avLst/>
@@ -23658,71 +22162,14 @@
       </p:sp>
       <p:sp>
         <p:nvSpPr>
-          <p:cNvPr id="29" name="Shape 22"/>
-          <p:cNvSpPr/>
-          <p:nvPr/>
-        </p:nvSpPr>
-        <p:spPr>
-          <a:xfrm>
-            <a:off x="1097280" y="4783044"/>
-            <a:ext cx="474025" cy="474025"/>
-          </a:xfrm>
-          <a:prstGeom prst="roundRect">
-            <a:avLst>
-              <a:gd name="adj" fmla="val 7716"/>
-            </a:avLst>
-          </a:prstGeom>
-          <a:solidFill>
-            <a:srgbClr val="F4F6F8"/>
-          </a:solidFill>
-          <a:ln w="12700">
-            <a:solidFill>
-              <a:srgbClr val="AEB7C4"/>
-            </a:solidFill>
-            <a:prstDash val="solid"/>
-          </a:ln>
-        </p:spPr>
-      </p:sp>
-      <p:pic>
-        <p:nvPicPr>
-          <p:cNvPr id="30" name="Image 5" descr="article icon from tabler-icons (MIT)">    </p:cNvPr>
-          <p:cNvPicPr>
-            <a:picLocks noChangeAspect="1"/>
-          </p:cNvPicPr>
-          <p:nvPr/>
-        </p:nvPicPr>
-        <p:blipFill>
-          <a:blip r:embed="rId11">
-            <a:extLst>
-              <a:ext uri="{96DAC541-7B7A-43D3-8B79-37D633B846F1}">
-                <asvg:svgBlip xmlns:asvg="http://schemas.microsoft.com/office/drawing/2016/SVG/main" r:embed="rId12"/>
-              </a:ext>
-            </a:extLst>
-          </a:blip>
-          <a:stretch>
-            <a:fillRect/>
-          </a:stretch>
-        </p:blipFill>
-        <p:spPr>
-          <a:xfrm>
-            <a:off x="1170432" y="4856196"/>
-            <a:ext cx="327721" cy="327721"/>
-          </a:xfrm>
-          <a:prstGeom prst="rect">
-            <a:avLst/>
-          </a:prstGeom>
-        </p:spPr>
-      </p:pic>
-      <p:sp>
-        <p:nvSpPr>
-          <p:cNvPr id="31" name="mdpr:1-2-32ac08:item-3:block-6-chunk-1"/>
+          <p:cNvPr id="25" name="mdpr:1-2-32ac08:item-3:block-6-chunk-1"/>
           <p:cNvSpPr txBox="1"/>
           <p:nvPr/>
         </p:nvSpPr>
         <p:spPr>
           <a:xfrm>
-            <a:off x="1699321" y="4629912"/>
-            <a:ext cx="9255191" cy="780288"/>
+            <a:off x="1133856" y="4600164"/>
+            <a:ext cx="9820656" cy="839785"/>
           </a:xfrm>
           <a:prstGeom prst="rect">
             <a:avLst/>
@@ -24982,71 +23429,14 @@
       </p:sp>
       <p:sp>
         <p:nvSpPr>
-          <p:cNvPr id="23" name="Shape 18"/>
-          <p:cNvSpPr/>
-          <p:nvPr/>
-        </p:nvSpPr>
-        <p:spPr>
-          <a:xfrm>
-            <a:off x="1097280" y="2140428"/>
-            <a:ext cx="474025" cy="474025"/>
-          </a:xfrm>
-          <a:prstGeom prst="roundRect">
-            <a:avLst>
-              <a:gd name="adj" fmla="val 7716"/>
-            </a:avLst>
-          </a:prstGeom>
-          <a:solidFill>
-            <a:srgbClr val="F4F6F8"/>
-          </a:solidFill>
-          <a:ln w="12700">
-            <a:solidFill>
-              <a:srgbClr val="AEB7C4"/>
-            </a:solidFill>
-            <a:prstDash val="solid"/>
-          </a:ln>
-        </p:spPr>
-      </p:sp>
-      <p:pic>
-        <p:nvPicPr>
-          <p:cNvPr id="24" name="Image 3" descr="article icon from tabler-icons (MIT)">    </p:cNvPr>
-          <p:cNvPicPr>
-            <a:picLocks noChangeAspect="1"/>
-          </p:cNvPicPr>
-          <p:nvPr/>
-        </p:nvPicPr>
-        <p:blipFill>
-          <a:blip r:embed="rId7">
-            <a:extLst>
-              <a:ext uri="{96DAC541-7B7A-43D3-8B79-37D633B846F1}">
-                <asvg:svgBlip xmlns:asvg="http://schemas.microsoft.com/office/drawing/2016/SVG/main" r:embed="rId8"/>
-              </a:ext>
-            </a:extLst>
-          </a:blip>
-          <a:stretch>
-            <a:fillRect/>
-          </a:stretch>
-        </p:blipFill>
-        <p:spPr>
-          <a:xfrm>
-            <a:off x="1170432" y="2213580"/>
-            <a:ext cx="327721" cy="327721"/>
-          </a:xfrm>
-          <a:prstGeom prst="rect">
-            <a:avLst/>
-          </a:prstGeom>
-        </p:spPr>
-      </p:pic>
-      <p:sp>
-        <p:nvSpPr>
-          <p:cNvPr id="25" name="mdpr:1-2-dfa474:item-1:block-8-chunk-1"/>
+          <p:cNvPr id="23" name="mdpr:1-2-dfa474:item-1:block-8-chunk-1"/>
           <p:cNvSpPr txBox="1"/>
           <p:nvPr/>
         </p:nvSpPr>
         <p:spPr>
           <a:xfrm>
-            <a:off x="1699321" y="1987296"/>
-            <a:ext cx="9255191" cy="780288"/>
+            <a:off x="1133856" y="1957548"/>
+            <a:ext cx="9820656" cy="839785"/>
           </a:xfrm>
           <a:prstGeom prst="rect">
             <a:avLst/>
@@ -25098,71 +23488,14 @@
       </p:sp>
       <p:sp>
         <p:nvSpPr>
-          <p:cNvPr id="26" name="Shape 20"/>
-          <p:cNvSpPr/>
-          <p:nvPr/>
-        </p:nvSpPr>
-        <p:spPr>
-          <a:xfrm>
-            <a:off x="1097280" y="3466308"/>
-            <a:ext cx="474025" cy="474025"/>
-          </a:xfrm>
-          <a:prstGeom prst="roundRect">
-            <a:avLst>
-              <a:gd name="adj" fmla="val 7716"/>
-            </a:avLst>
-          </a:prstGeom>
-          <a:solidFill>
-            <a:srgbClr val="F4F6F8"/>
-          </a:solidFill>
-          <a:ln w="12700">
-            <a:solidFill>
-              <a:srgbClr val="AEB7C4"/>
-            </a:solidFill>
-            <a:prstDash val="solid"/>
-          </a:ln>
-        </p:spPr>
-      </p:sp>
-      <p:pic>
-        <p:nvPicPr>
-          <p:cNvPr id="27" name="Image 4" descr="article icon from tabler-icons (MIT)">    </p:cNvPr>
-          <p:cNvPicPr>
-            <a:picLocks noChangeAspect="1"/>
-          </p:cNvPicPr>
-          <p:nvPr/>
-        </p:nvPicPr>
-        <p:blipFill>
-          <a:blip r:embed="rId9">
-            <a:extLst>
-              <a:ext uri="{96DAC541-7B7A-43D3-8B79-37D633B846F1}">
-                <asvg:svgBlip xmlns:asvg="http://schemas.microsoft.com/office/drawing/2016/SVG/main" r:embed="rId10"/>
-              </a:ext>
-            </a:extLst>
-          </a:blip>
-          <a:stretch>
-            <a:fillRect/>
-          </a:stretch>
-        </p:blipFill>
-        <p:spPr>
-          <a:xfrm>
-            <a:off x="1170432" y="3539460"/>
-            <a:ext cx="327721" cy="327721"/>
-          </a:xfrm>
-          <a:prstGeom prst="rect">
-            <a:avLst/>
-          </a:prstGeom>
-        </p:spPr>
-      </p:pic>
-      <p:sp>
-        <p:nvSpPr>
-          <p:cNvPr id="28" name="mdpr:1-2-dfa474:item-2:block-8-chunk-1"/>
+          <p:cNvPr id="24" name="mdpr:1-2-dfa474:item-2:block-8-chunk-1"/>
           <p:cNvSpPr txBox="1"/>
           <p:nvPr/>
         </p:nvSpPr>
         <p:spPr>
           <a:xfrm>
-            <a:off x="1699321" y="3313176"/>
-            <a:ext cx="9255191" cy="780288"/>
+            <a:off x="1133856" y="3283428"/>
+            <a:ext cx="9820656" cy="839785"/>
           </a:xfrm>
           <a:prstGeom prst="rect">
             <a:avLst/>
@@ -25214,71 +23547,14 @@
       </p:sp>
       <p:sp>
         <p:nvSpPr>
-          <p:cNvPr id="29" name="Shape 22"/>
-          <p:cNvSpPr/>
-          <p:nvPr/>
-        </p:nvSpPr>
-        <p:spPr>
-          <a:xfrm>
-            <a:off x="1097280" y="4783044"/>
-            <a:ext cx="474025" cy="474025"/>
-          </a:xfrm>
-          <a:prstGeom prst="roundRect">
-            <a:avLst>
-              <a:gd name="adj" fmla="val 7716"/>
-            </a:avLst>
-          </a:prstGeom>
-          <a:solidFill>
-            <a:srgbClr val="F4F6F8"/>
-          </a:solidFill>
-          <a:ln w="12700">
-            <a:solidFill>
-              <a:srgbClr val="AEB7C4"/>
-            </a:solidFill>
-            <a:prstDash val="solid"/>
-          </a:ln>
-        </p:spPr>
-      </p:sp>
-      <p:pic>
-        <p:nvPicPr>
-          <p:cNvPr id="30" name="Image 5" descr="article icon from tabler-icons (MIT)">    </p:cNvPr>
-          <p:cNvPicPr>
-            <a:picLocks noChangeAspect="1"/>
-          </p:cNvPicPr>
-          <p:nvPr/>
-        </p:nvPicPr>
-        <p:blipFill>
-          <a:blip r:embed="rId11">
-            <a:extLst>
-              <a:ext uri="{96DAC541-7B7A-43D3-8B79-37D633B846F1}">
-                <asvg:svgBlip xmlns:asvg="http://schemas.microsoft.com/office/drawing/2016/SVG/main" r:embed="rId12"/>
-              </a:ext>
-            </a:extLst>
-          </a:blip>
-          <a:stretch>
-            <a:fillRect/>
-          </a:stretch>
-        </p:blipFill>
-        <p:spPr>
-          <a:xfrm>
-            <a:off x="1170432" y="4856196"/>
-            <a:ext cx="327721" cy="327721"/>
-          </a:xfrm>
-          <a:prstGeom prst="rect">
-            <a:avLst/>
-          </a:prstGeom>
-        </p:spPr>
-      </p:pic>
-      <p:sp>
-        <p:nvSpPr>
-          <p:cNvPr id="31" name="mdpr:1-2-dfa474:item-3:block-8-chunk-1"/>
+          <p:cNvPr id="25" name="mdpr:1-2-dfa474:item-3:block-8-chunk-1"/>
           <p:cNvSpPr txBox="1"/>
           <p:nvPr/>
         </p:nvSpPr>
         <p:spPr>
           <a:xfrm>
-            <a:off x="1699321" y="4629912"/>
-            <a:ext cx="9255191" cy="780288"/>
+            <a:off x="1133856" y="4600164"/>
+            <a:ext cx="9820656" cy="839785"/>
           </a:xfrm>
           <a:prstGeom prst="rect">
             <a:avLst/>

--- a/docs/theme-preview/pptx/skeuomorphism.pptx
+++ b/docs/theme-preview/pptx/skeuomorphism.pptx
@@ -3865,33 +3865,6 @@
         </p:nvSpPr>
         <p:spPr>
           <a:xfrm>
-            <a:off x="731520" y="1207008"/>
-            <a:ext cx="1325880" cy="54864"/>
-          </a:xfrm>
-          <a:prstGeom prst="rect">
-            <a:avLst/>
-          </a:prstGeom>
-          <a:solidFill>
-            <a:srgbClr val="6B7280"/>
-          </a:solidFill>
-          <a:ln w="12700">
-            <a:solidFill>
-              <a:srgbClr val="6B7280">
-                <a:alpha val="0"/>
-              </a:srgbClr>
-            </a:solidFill>
-            <a:prstDash val="solid"/>
-          </a:ln>
-        </p:spPr>
-      </p:sp>
-      <p:sp>
-        <p:nvSpPr>
-          <p:cNvPr id="12" name="Shape 10"/>
-          <p:cNvSpPr/>
-          <p:nvPr/>
-        </p:nvSpPr>
-        <p:spPr>
-          <a:xfrm>
             <a:off x="0" y="0"/>
             <a:ext cx="12191695" cy="201168"/>
           </a:xfrm>
@@ -3913,36 +3886,7 @@
       </p:sp>
       <p:sp>
         <p:nvSpPr>
-          <p:cNvPr id="13" name="Shape 11"/>
-          <p:cNvSpPr/>
-          <p:nvPr/>
-        </p:nvSpPr>
-        <p:spPr>
-          <a:xfrm>
-            <a:off x="9357055" y="6528816"/>
-            <a:ext cx="2148840" cy="73152"/>
-          </a:xfrm>
-          <a:prstGeom prst="rect">
-            <a:avLst/>
-          </a:prstGeom>
-          <a:solidFill>
-            <a:srgbClr val="FFFFFF">
-              <a:alpha val="90000"/>
-            </a:srgbClr>
-          </a:solidFill>
-          <a:ln w="12700">
-            <a:solidFill>
-              <a:srgbClr val="FFFFFF">
-                <a:alpha val="0"/>
-              </a:srgbClr>
-            </a:solidFill>
-            <a:prstDash val="solid"/>
-          </a:ln>
-        </p:spPr>
-      </p:sp>
-      <p:sp>
-        <p:nvSpPr>
-          <p:cNvPr id="14" name="mdpr:mdpr-design-grammar-b3a462:title:__title:mdpr-design-grammar-b3a462"/>
+          <p:cNvPr id="12" name="mdpr:mdpr-design-grammar-b3a462:title:__title:mdpr-design-grammar-b3a462"/>
           <p:cNvSpPr txBox="1"/>
           <p:nvPr/>
         </p:nvSpPr>
@@ -4277,16 +4221,148 @@
           </a:ln>
         </p:spPr>
       </p:sp>
-      <p:sp>
-        <p:nvSpPr>
-          <p:cNvPr id="11" name="Shape 9"/>
-          <p:cNvSpPr/>
-          <p:nvPr/>
-        </p:nvSpPr>
-        <p:spPr>
-          <a:xfrm>
-            <a:off x="731520" y="1207008"/>
-            <a:ext cx="1325880" cy="54864"/>
+      <p:pic>
+        <p:nvPicPr>
+          <p:cNvPr id="11" name="Image 0" descr="preencoded.png">    </p:cNvPr>
+          <p:cNvPicPr>
+            <a:picLocks noChangeAspect="1"/>
+          </p:cNvPicPr>
+          <p:nvPr/>
+        </p:nvPicPr>
+        <p:blipFill>
+          <a:blip r:embed="rId1">
+            <a:extLst>
+              <a:ext uri="{96DAC541-7B7A-43D3-8B79-37D633B846F1}">
+                <asvg:svgBlip xmlns:asvg="http://schemas.microsoft.com/office/drawing/2016/SVG/main" r:embed="rId2"/>
+              </a:ext>
+            </a:extLst>
+          </a:blip>
+          <a:stretch>
+            <a:fillRect/>
+          </a:stretch>
+        </p:blipFill>
+        <p:spPr>
+          <a:xfrm>
+            <a:off x="914400" y="2523744"/>
+            <a:ext cx="10241280" cy="1024128"/>
+          </a:xfrm>
+          <a:prstGeom prst="rect">
+            <a:avLst/>
+          </a:prstGeom>
+        </p:spPr>
+      </p:pic>
+      <p:sp>
+        <p:nvSpPr>
+          <p:cNvPr id="12" name="Shape 9"/>
+          <p:cNvSpPr/>
+          <p:nvPr/>
+        </p:nvSpPr>
+        <p:spPr>
+          <a:xfrm>
+            <a:off x="914400" y="2523744"/>
+            <a:ext cx="10241280" cy="1024128"/>
+          </a:xfrm>
+          <a:prstGeom prst="rect">
+            <a:avLst/>
+          </a:prstGeom>
+          <a:solidFill>
+            <a:srgbClr val="FDFDFE">
+              <a:alpha val="0"/>
+            </a:srgbClr>
+          </a:solidFill>
+          <a:ln w="12700">
+            <a:solidFill>
+              <a:srgbClr val="AEB7C4">
+                <a:alpha val="0"/>
+              </a:srgbClr>
+            </a:solidFill>
+            <a:prstDash val="solid"/>
+          </a:ln>
+          <a:effectLst>
+            <a:outerShdw sx="100000" sy="100000" kx="0" ky="0" algn="bl" rotWithShape="0" blurRad="12700" dist="50800" dir="2700000">
+              <a:srgbClr val="000000">
+                <a:alpha val="8000"/>
+              </a:srgbClr>
+            </a:outerShdw>
+          </a:effectLst>
+        </p:spPr>
+      </p:sp>
+      <p:pic>
+        <p:nvPicPr>
+          <p:cNvPr id="13" name="Image 1" descr="preencoded.png">    </p:cNvPr>
+          <p:cNvPicPr>
+            <a:picLocks noChangeAspect="1"/>
+          </p:cNvPicPr>
+          <p:nvPr/>
+        </p:nvPicPr>
+        <p:blipFill>
+          <a:blip r:embed="rId3">
+            <a:extLst>
+              <a:ext uri="{96DAC541-7B7A-43D3-8B79-37D633B846F1}">
+                <asvg:svgBlip xmlns:asvg="http://schemas.microsoft.com/office/drawing/2016/SVG/main" r:embed="rId4"/>
+              </a:ext>
+            </a:extLst>
+          </a:blip>
+          <a:stretch>
+            <a:fillRect/>
+          </a:stretch>
+        </p:blipFill>
+        <p:spPr>
+          <a:xfrm>
+            <a:off x="914400" y="3849624"/>
+            <a:ext cx="10241280" cy="1024128"/>
+          </a:xfrm>
+          <a:prstGeom prst="rect">
+            <a:avLst/>
+          </a:prstGeom>
+        </p:spPr>
+      </p:pic>
+      <p:sp>
+        <p:nvSpPr>
+          <p:cNvPr id="14" name="Shape 10"/>
+          <p:cNvSpPr/>
+          <p:nvPr/>
+        </p:nvSpPr>
+        <p:spPr>
+          <a:xfrm>
+            <a:off x="914400" y="3849624"/>
+            <a:ext cx="10241280" cy="1024128"/>
+          </a:xfrm>
+          <a:prstGeom prst="rect">
+            <a:avLst/>
+          </a:prstGeom>
+          <a:solidFill>
+            <a:srgbClr val="FDFDFE">
+              <a:alpha val="0"/>
+            </a:srgbClr>
+          </a:solidFill>
+          <a:ln w="12700">
+            <a:solidFill>
+              <a:srgbClr val="AEB7C4">
+                <a:alpha val="0"/>
+              </a:srgbClr>
+            </a:solidFill>
+            <a:prstDash val="solid"/>
+          </a:ln>
+          <a:effectLst>
+            <a:outerShdw sx="100000" sy="100000" kx="0" ky="0" algn="bl" rotWithShape="0" blurRad="12700" dist="50800" dir="2700000">
+              <a:srgbClr val="000000">
+                <a:alpha val="8000"/>
+              </a:srgbClr>
+            </a:outerShdw>
+          </a:effectLst>
+        </p:spPr>
+      </p:sp>
+      <p:sp>
+        <p:nvSpPr>
+          <p:cNvPr id="15" name="Shape 11"/>
+          <p:cNvSpPr/>
+          <p:nvPr/>
+        </p:nvSpPr>
+        <p:spPr>
+          <a:xfrm>
+            <a:off x="914400" y="2523744"/>
+            <a:ext cx="73152" cy="1024128"/>
           </a:xfrm>
           <a:prstGeom prst="rect">
             <a:avLst/>
@@ -4306,24 +4382,24 @@
       </p:sp>
       <p:sp>
         <p:nvSpPr>
-          <p:cNvPr id="12" name="Shape 10"/>
-          <p:cNvSpPr/>
-          <p:nvPr/>
-        </p:nvSpPr>
-        <p:spPr>
-          <a:xfrm>
-            <a:off x="822960" y="1554480"/>
-            <a:ext cx="4937760" cy="73152"/>
-          </a:xfrm>
-          <a:prstGeom prst="rect">
-            <a:avLst/>
-          </a:prstGeom>
-          <a:solidFill>
-            <a:srgbClr val="6B7280"/>
-          </a:solidFill>
-          <a:ln w="12700">
-            <a:solidFill>
-              <a:srgbClr val="6B7280">
+          <p:cNvPr id="16" name="Shape 12"/>
+          <p:cNvSpPr/>
+          <p:nvPr/>
+        </p:nvSpPr>
+        <p:spPr>
+          <a:xfrm>
+            <a:off x="914400" y="3849624"/>
+            <a:ext cx="73152" cy="1024128"/>
+          </a:xfrm>
+          <a:prstGeom prst="rect">
+            <a:avLst/>
+          </a:prstGeom>
+          <a:solidFill>
+            <a:srgbClr val="C7D2FE"/>
+          </a:solidFill>
+          <a:ln w="12700">
+            <a:solidFill>
+              <a:srgbClr val="C7D2FE">
                 <a:alpha val="0"/>
               </a:srgbClr>
             </a:solidFill>
@@ -4333,34 +4409,7 @@
       </p:sp>
       <p:sp>
         <p:nvSpPr>
-          <p:cNvPr id="13" name="Shape 11"/>
-          <p:cNvSpPr/>
-          <p:nvPr/>
-        </p:nvSpPr>
-        <p:spPr>
-          <a:xfrm>
-            <a:off x="6400800" y="1554480"/>
-            <a:ext cx="4937760" cy="73152"/>
-          </a:xfrm>
-          <a:prstGeom prst="rect">
-            <a:avLst/>
-          </a:prstGeom>
-          <a:solidFill>
-            <a:srgbClr val="6B7280"/>
-          </a:solidFill>
-          <a:ln w="12700">
-            <a:solidFill>
-              <a:srgbClr val="6B7280">
-                <a:alpha val="0"/>
-              </a:srgbClr>
-            </a:solidFill>
-            <a:prstDash val="solid"/>
-          </a:ln>
-        </p:spPr>
-      </p:sp>
-      <p:sp>
-        <p:nvSpPr>
-          <p:cNvPr id="14" name="mdpr:2-2-a9df10:title:__title:2-2-a9df10"/>
+          <p:cNvPr id="17" name="mdpr:2-2-a9df10:title:__title:2-2-a9df10"/>
           <p:cNvSpPr txBox="1"/>
           <p:nvPr/>
         </p:nvSpPr>
@@ -4394,7 +4443,24 @@
                 <a:ea typeface="Pretendard" pitchFamily="34" charset="-122"/>
                 <a:cs typeface="Pretendard" pitchFamily="34" charset="-120"/>
               </a:rPr>
-              <a:t>Semantic Blocks (Cont. 2/2)</a:t>
+              <a:t>Semantic Blocks</a:t>
+            </a:r>
+            <a:pPr algn="ctr" indent="0" marL="0">
+              <a:lnSpc>
+                <a:spcPct val="120000"/>
+              </a:lnSpc>
+              <a:buNone/>
+            </a:pPr>
+            <a:r>
+              <a:rPr lang="en-US" sz="2000" dirty="0">
+                <a:solidFill>
+                  <a:srgbClr val="8E8E8E"/>
+                </a:solidFill>
+                <a:latin typeface="Pretendard" pitchFamily="34" charset="0"/>
+                <a:ea typeface="Pretendard" pitchFamily="34" charset="-122"/>
+                <a:cs typeface="Pretendard" pitchFamily="34" charset="-120"/>
+              </a:rPr>
+              <a:t> (Cont. 2/2)</a:t>
             </a:r>
             <a:endParaRPr lang="en-US" sz="3400" dirty="0"/>
           </a:p>
@@ -4402,14 +4468,14 @@
       </p:sp>
       <p:sp>
         <p:nvSpPr>
-          <p:cNvPr id="15" name="mdpr:2-2-a9df10:left:block-10-chunk-2"/>
+          <p:cNvPr id="18" name="mdpr:2-2-a9df10:item-1:block-10-chunk-2"/>
           <p:cNvSpPr txBox="1"/>
           <p:nvPr/>
         </p:nvSpPr>
         <p:spPr>
           <a:xfrm>
-            <a:off x="896112" y="1664208"/>
-            <a:ext cx="4791456" cy="4169664"/>
+            <a:off x="1133856" y="2615916"/>
+            <a:ext cx="9820656" cy="839785"/>
           </a:xfrm>
           <a:prstGeom prst="rect">
             <a:avLst/>
@@ -4418,7 +4484,7 @@
           <a:ln/>
         </p:spPr>
         <p:txBody>
-          <a:bodyPr wrap="square" lIns="0" tIns="25400" rIns="25400" bIns="0" rtlCol="0" anchor="t"/>
+          <a:bodyPr wrap="square" lIns="0" tIns="25400" rIns="25400" bIns="0" rtlCol="0" anchor="ctr"/>
           <a:lstStyle/>
           <a:p>
             <a:pPr algn="l" indent="0" marL="0">
@@ -4436,7 +4502,7 @@
                 <a:ea typeface="Pretendard" pitchFamily="34" charset="-122"/>
                 <a:cs typeface="Pretendard" pitchFamily="34" charset="-120"/>
               </a:rPr>
-              <a:t>- Constraint:</a:t>
+              <a:t>Constraint:</a:t>
             </a:r>
             <a:pPr algn="l" indent="0" marL="0">
               <a:lnSpc>
@@ -4461,14 +4527,14 @@
       </p:sp>
       <p:sp>
         <p:nvSpPr>
-          <p:cNvPr id="16" name="mdpr:2-2-a9df10:right:block-10-chunk-2"/>
+          <p:cNvPr id="19" name="mdpr:2-2-a9df10:item-2:block-10-chunk-2"/>
           <p:cNvSpPr txBox="1"/>
           <p:nvPr/>
         </p:nvSpPr>
         <p:spPr>
           <a:xfrm>
-            <a:off x="6473952" y="1664208"/>
-            <a:ext cx="4791456" cy="4169664"/>
+            <a:off x="1133856" y="3941796"/>
+            <a:ext cx="9820656" cy="839785"/>
           </a:xfrm>
           <a:prstGeom prst="rect">
             <a:avLst/>
@@ -4477,7 +4543,7 @@
           <a:ln/>
         </p:spPr>
         <p:txBody>
-          <a:bodyPr wrap="square" lIns="0" tIns="25400" rIns="25400" bIns="0" rtlCol="0" anchor="t"/>
+          <a:bodyPr wrap="square" lIns="0" tIns="25400" rIns="25400" bIns="0" rtlCol="0" anchor="ctr"/>
           <a:lstStyle/>
           <a:p>
             <a:pPr algn="l" indent="0" marL="0">
@@ -4495,7 +4561,7 @@
                 <a:ea typeface="Pretendard" pitchFamily="34" charset="-122"/>
                 <a:cs typeface="Pretendard" pitchFamily="34" charset="-120"/>
               </a:rPr>
-              <a:t>- Emphasis</a:t>
+              <a:t>Emphasis</a:t>
             </a:r>
             <a:pPr algn="l" indent="0" marL="0">
               <a:lnSpc>
@@ -4815,34 +4881,7 @@
       </p:sp>
       <p:sp>
         <p:nvSpPr>
-          <p:cNvPr id="11" name="Shape 9"/>
-          <p:cNvSpPr/>
-          <p:nvPr/>
-        </p:nvSpPr>
-        <p:spPr>
-          <a:xfrm>
-            <a:off x="731520" y="1207008"/>
-            <a:ext cx="1325880" cy="54864"/>
-          </a:xfrm>
-          <a:prstGeom prst="rect">
-            <a:avLst/>
-          </a:prstGeom>
-          <a:solidFill>
-            <a:srgbClr val="6B7280"/>
-          </a:solidFill>
-          <a:ln w="12700">
-            <a:solidFill>
-              <a:srgbClr val="6B7280">
-                <a:alpha val="0"/>
-              </a:srgbClr>
-            </a:solidFill>
-            <a:prstDash val="solid"/>
-          </a:ln>
-        </p:spPr>
-      </p:sp>
-      <p:sp>
-        <p:nvSpPr>
-          <p:cNvPr id="12" name="mdpr:pipeline-diagram-51792c:title:__title:pipeline-diagram-51792c"/>
+          <p:cNvPr id="11" name="mdpr:pipeline-diagram-51792c:title:__title:pipeline-diagram-51792c"/>
           <p:cNvSpPr txBox="1"/>
           <p:nvPr/>
         </p:nvSpPr>
@@ -4884,7 +4923,7 @@
       </p:sp>
       <p:sp>
         <p:nvSpPr>
-          <p:cNvPr id="13" name="Shape 11"/>
+          <p:cNvPr id="12" name="Shape 10"/>
           <p:cNvSpPr/>
           <p:nvPr/>
         </p:nvSpPr>
@@ -4908,7 +4947,7 @@
       </p:sp>
       <p:sp>
         <p:nvSpPr>
-          <p:cNvPr id="14" name="Shape 12"/>
+          <p:cNvPr id="13" name="Shape 11"/>
           <p:cNvSpPr/>
           <p:nvPr/>
         </p:nvSpPr>
@@ -4932,7 +4971,7 @@
       </p:sp>
       <p:sp>
         <p:nvSpPr>
-          <p:cNvPr id="15" name="Shape 13"/>
+          <p:cNvPr id="14" name="Shape 12"/>
           <p:cNvSpPr/>
           <p:nvPr/>
         </p:nvSpPr>
@@ -4956,7 +4995,7 @@
       </p:sp>
       <p:sp>
         <p:nvSpPr>
-          <p:cNvPr id="16" name="Shape 14"/>
+          <p:cNvPr id="15" name="Shape 13"/>
           <p:cNvSpPr/>
           <p:nvPr/>
         </p:nvSpPr>
@@ -4980,7 +5019,7 @@
       </p:sp>
       <p:sp>
         <p:nvSpPr>
-          <p:cNvPr id="17" name="Shape 15"/>
+          <p:cNvPr id="16" name="Shape 14"/>
           <p:cNvSpPr/>
           <p:nvPr/>
         </p:nvSpPr>
@@ -5004,7 +5043,7 @@
       </p:sp>
       <p:sp>
         <p:nvSpPr>
-          <p:cNvPr id="18" name="Shape 16"/>
+          <p:cNvPr id="17" name="Shape 15"/>
           <p:cNvSpPr/>
           <p:nvPr/>
         </p:nvSpPr>
@@ -5038,7 +5077,7 @@
       </p:sp>
       <p:sp>
         <p:nvSpPr>
-          <p:cNvPr id="19" name="Shape 17"/>
+          <p:cNvPr id="18" name="Shape 16"/>
           <p:cNvSpPr/>
           <p:nvPr/>
         </p:nvSpPr>
@@ -5065,7 +5104,7 @@
       </p:sp>
       <p:sp>
         <p:nvSpPr>
-          <p:cNvPr id="20" name="Shape 18"/>
+          <p:cNvPr id="19" name="Shape 17"/>
           <p:cNvSpPr/>
           <p:nvPr/>
         </p:nvSpPr>
@@ -5092,7 +5131,7 @@
       </p:sp>
       <p:sp>
         <p:nvSpPr>
-          <p:cNvPr id="21" name="Text 19"/>
+          <p:cNvPr id="20" name="Text 18"/>
           <p:cNvSpPr txBox="1"/>
           <p:nvPr/>
         </p:nvSpPr>
@@ -5120,7 +5159,7 @@
               <a:buNone/>
             </a:pPr>
             <a:r>
-              <a:rPr lang="en-US" sz="1500" b="1" dirty="0">
+              <a:rPr lang="en-US" sz="1600" b="1" dirty="0">
                 <a:solidFill>
                   <a:srgbClr val="F4F6F8"/>
                 </a:solidFill>
@@ -5130,13 +5169,13 @@
               </a:rPr>
               <a:t>1</a:t>
             </a:r>
-            <a:endParaRPr lang="en-US" sz="1500" dirty="0"/>
+            <a:endParaRPr lang="en-US" sz="1600" dirty="0"/>
           </a:p>
         </p:txBody>
       </p:sp>
       <p:sp>
         <p:nvSpPr>
-          <p:cNvPr id="22" name="Text 20"/>
+          <p:cNvPr id="21" name="Text 19"/>
           <p:cNvSpPr txBox="1"/>
           <p:nvPr/>
         </p:nvSpPr>
@@ -5180,7 +5219,7 @@
       </p:sp>
       <p:sp>
         <p:nvSpPr>
-          <p:cNvPr id="23" name="Shape 21"/>
+          <p:cNvPr id="22" name="Shape 20"/>
           <p:cNvSpPr/>
           <p:nvPr/>
         </p:nvSpPr>
@@ -5214,7 +5253,7 @@
       </p:sp>
       <p:sp>
         <p:nvSpPr>
-          <p:cNvPr id="24" name="Shape 22"/>
+          <p:cNvPr id="23" name="Shape 21"/>
           <p:cNvSpPr/>
           <p:nvPr/>
         </p:nvSpPr>
@@ -5241,7 +5280,7 @@
       </p:sp>
       <p:sp>
         <p:nvSpPr>
-          <p:cNvPr id="25" name="Shape 23"/>
+          <p:cNvPr id="24" name="Shape 22"/>
           <p:cNvSpPr/>
           <p:nvPr/>
         </p:nvSpPr>
@@ -5268,7 +5307,7 @@
       </p:sp>
       <p:sp>
         <p:nvSpPr>
-          <p:cNvPr id="26" name="Text 24"/>
+          <p:cNvPr id="25" name="Text 23"/>
           <p:cNvSpPr txBox="1"/>
           <p:nvPr/>
         </p:nvSpPr>
@@ -5296,7 +5335,7 @@
               <a:buNone/>
             </a:pPr>
             <a:r>
-              <a:rPr lang="en-US" sz="1500" b="1" dirty="0">
+              <a:rPr lang="en-US" sz="1600" b="1" dirty="0">
                 <a:solidFill>
                   <a:srgbClr val="F4F6F8"/>
                 </a:solidFill>
@@ -5306,13 +5345,13 @@
               </a:rPr>
               <a:t>2</a:t>
             </a:r>
-            <a:endParaRPr lang="en-US" sz="1500" dirty="0"/>
+            <a:endParaRPr lang="en-US" sz="1600" dirty="0"/>
           </a:p>
         </p:txBody>
       </p:sp>
       <p:sp>
         <p:nvSpPr>
-          <p:cNvPr id="27" name="Text 25"/>
+          <p:cNvPr id="26" name="Text 24"/>
           <p:cNvSpPr txBox="1"/>
           <p:nvPr/>
         </p:nvSpPr>
@@ -5356,7 +5395,7 @@
       </p:sp>
       <p:sp>
         <p:nvSpPr>
-          <p:cNvPr id="28" name="Shape 26"/>
+          <p:cNvPr id="27" name="Shape 25"/>
           <p:cNvSpPr/>
           <p:nvPr/>
         </p:nvSpPr>
@@ -5390,7 +5429,7 @@
       </p:sp>
       <p:sp>
         <p:nvSpPr>
-          <p:cNvPr id="29" name="Shape 27"/>
+          <p:cNvPr id="28" name="Shape 26"/>
           <p:cNvSpPr/>
           <p:nvPr/>
         </p:nvSpPr>
@@ -5417,7 +5456,7 @@
       </p:sp>
       <p:sp>
         <p:nvSpPr>
-          <p:cNvPr id="30" name="Shape 28"/>
+          <p:cNvPr id="29" name="Shape 27"/>
           <p:cNvSpPr/>
           <p:nvPr/>
         </p:nvSpPr>
@@ -5444,7 +5483,7 @@
       </p:sp>
       <p:sp>
         <p:nvSpPr>
-          <p:cNvPr id="31" name="Text 29"/>
+          <p:cNvPr id="30" name="Text 28"/>
           <p:cNvSpPr txBox="1"/>
           <p:nvPr/>
         </p:nvSpPr>
@@ -5472,7 +5511,7 @@
               <a:buNone/>
             </a:pPr>
             <a:r>
-              <a:rPr lang="en-US" sz="1500" b="1" dirty="0">
+              <a:rPr lang="en-US" sz="1600" b="1" dirty="0">
                 <a:solidFill>
                   <a:srgbClr val="F4F6F8"/>
                 </a:solidFill>
@@ -5482,13 +5521,13 @@
               </a:rPr>
               <a:t>3</a:t>
             </a:r>
-            <a:endParaRPr lang="en-US" sz="1500" dirty="0"/>
+            <a:endParaRPr lang="en-US" sz="1600" dirty="0"/>
           </a:p>
         </p:txBody>
       </p:sp>
       <p:sp>
         <p:nvSpPr>
-          <p:cNvPr id="32" name="Text 30"/>
+          <p:cNvPr id="31" name="Text 29"/>
           <p:cNvSpPr txBox="1"/>
           <p:nvPr/>
         </p:nvSpPr>
@@ -5532,7 +5571,7 @@
       </p:sp>
       <p:sp>
         <p:nvSpPr>
-          <p:cNvPr id="33" name="Shape 31"/>
+          <p:cNvPr id="32" name="Shape 30"/>
           <p:cNvSpPr/>
           <p:nvPr/>
         </p:nvSpPr>
@@ -5566,7 +5605,7 @@
       </p:sp>
       <p:sp>
         <p:nvSpPr>
-          <p:cNvPr id="34" name="Shape 32"/>
+          <p:cNvPr id="33" name="Shape 31"/>
           <p:cNvSpPr/>
           <p:nvPr/>
         </p:nvSpPr>
@@ -5593,7 +5632,7 @@
       </p:sp>
       <p:sp>
         <p:nvSpPr>
-          <p:cNvPr id="35" name="Shape 33"/>
+          <p:cNvPr id="34" name="Shape 32"/>
           <p:cNvSpPr/>
           <p:nvPr/>
         </p:nvSpPr>
@@ -5620,7 +5659,7 @@
       </p:sp>
       <p:sp>
         <p:nvSpPr>
-          <p:cNvPr id="36" name="Text 34"/>
+          <p:cNvPr id="35" name="Text 33"/>
           <p:cNvSpPr txBox="1"/>
           <p:nvPr/>
         </p:nvSpPr>
@@ -5648,7 +5687,7 @@
               <a:buNone/>
             </a:pPr>
             <a:r>
-              <a:rPr lang="en-US" sz="1500" b="1" dirty="0">
+              <a:rPr lang="en-US" sz="1600" b="1" dirty="0">
                 <a:solidFill>
                   <a:srgbClr val="F4F6F8"/>
                 </a:solidFill>
@@ -5658,13 +5697,13 @@
               </a:rPr>
               <a:t>4</a:t>
             </a:r>
-            <a:endParaRPr lang="en-US" sz="1500" dirty="0"/>
+            <a:endParaRPr lang="en-US" sz="1600" dirty="0"/>
           </a:p>
         </p:txBody>
       </p:sp>
       <p:sp>
         <p:nvSpPr>
-          <p:cNvPr id="37" name="Text 35"/>
+          <p:cNvPr id="36" name="Text 34"/>
           <p:cNvSpPr txBox="1"/>
           <p:nvPr/>
         </p:nvSpPr>
@@ -5708,7 +5747,7 @@
       </p:sp>
       <p:sp>
         <p:nvSpPr>
-          <p:cNvPr id="38" name="Shape 36"/>
+          <p:cNvPr id="37" name="Shape 35"/>
           <p:cNvSpPr/>
           <p:nvPr/>
         </p:nvSpPr>
@@ -5742,7 +5781,7 @@
       </p:sp>
       <p:sp>
         <p:nvSpPr>
-          <p:cNvPr id="39" name="Shape 37"/>
+          <p:cNvPr id="38" name="Shape 36"/>
           <p:cNvSpPr/>
           <p:nvPr/>
         </p:nvSpPr>
@@ -5769,7 +5808,7 @@
       </p:sp>
       <p:sp>
         <p:nvSpPr>
-          <p:cNvPr id="40" name="Shape 38"/>
+          <p:cNvPr id="39" name="Shape 37"/>
           <p:cNvSpPr/>
           <p:nvPr/>
         </p:nvSpPr>
@@ -5796,7 +5835,7 @@
       </p:sp>
       <p:sp>
         <p:nvSpPr>
-          <p:cNvPr id="41" name="Text 39"/>
+          <p:cNvPr id="40" name="Text 38"/>
           <p:cNvSpPr txBox="1"/>
           <p:nvPr/>
         </p:nvSpPr>
@@ -5824,7 +5863,7 @@
               <a:buNone/>
             </a:pPr>
             <a:r>
-              <a:rPr lang="en-US" sz="1500" b="1" dirty="0">
+              <a:rPr lang="en-US" sz="1600" b="1" dirty="0">
                 <a:solidFill>
                   <a:srgbClr val="F4F6F8"/>
                 </a:solidFill>
@@ -5834,13 +5873,13 @@
               </a:rPr>
               <a:t>5</a:t>
             </a:r>
-            <a:endParaRPr lang="en-US" sz="1500" dirty="0"/>
+            <a:endParaRPr lang="en-US" sz="1600" dirty="0"/>
           </a:p>
         </p:txBody>
       </p:sp>
       <p:sp>
         <p:nvSpPr>
-          <p:cNvPr id="42" name="Text 40"/>
+          <p:cNvPr id="41" name="Text 39"/>
           <p:cNvSpPr txBox="1"/>
           <p:nvPr/>
         </p:nvSpPr>
@@ -5884,7 +5923,7 @@
       </p:sp>
       <p:sp>
         <p:nvSpPr>
-          <p:cNvPr id="43" name="Shape 41"/>
+          <p:cNvPr id="42" name="Shape 40"/>
           <p:cNvSpPr/>
           <p:nvPr/>
         </p:nvSpPr>
@@ -5918,7 +5957,7 @@
       </p:sp>
       <p:sp>
         <p:nvSpPr>
-          <p:cNvPr id="44" name="Shape 42"/>
+          <p:cNvPr id="43" name="Shape 41"/>
           <p:cNvSpPr/>
           <p:nvPr/>
         </p:nvSpPr>
@@ -5945,7 +5984,7 @@
       </p:sp>
       <p:sp>
         <p:nvSpPr>
-          <p:cNvPr id="45" name="Shape 43"/>
+          <p:cNvPr id="44" name="Shape 42"/>
           <p:cNvSpPr/>
           <p:nvPr/>
         </p:nvSpPr>
@@ -5972,7 +6011,7 @@
       </p:sp>
       <p:sp>
         <p:nvSpPr>
-          <p:cNvPr id="46" name="Text 44"/>
+          <p:cNvPr id="45" name="Text 43"/>
           <p:cNvSpPr txBox="1"/>
           <p:nvPr/>
         </p:nvSpPr>
@@ -6000,7 +6039,7 @@
               <a:buNone/>
             </a:pPr>
             <a:r>
-              <a:rPr lang="en-US" sz="1500" b="1" dirty="0">
+              <a:rPr lang="en-US" sz="1600" b="1" dirty="0">
                 <a:solidFill>
                   <a:srgbClr val="F4F6F8"/>
                 </a:solidFill>
@@ -6010,13 +6049,13 @@
               </a:rPr>
               <a:t>6</a:t>
             </a:r>
-            <a:endParaRPr lang="en-US" sz="1500" dirty="0"/>
+            <a:endParaRPr lang="en-US" sz="1600" dirty="0"/>
           </a:p>
         </p:txBody>
       </p:sp>
       <p:sp>
         <p:nvSpPr>
-          <p:cNvPr id="47" name="Text 45"/>
+          <p:cNvPr id="46" name="Text 44"/>
           <p:cNvSpPr txBox="1"/>
           <p:nvPr/>
         </p:nvSpPr>
@@ -6355,88 +6394,7 @@
       </p:sp>
       <p:sp>
         <p:nvSpPr>
-          <p:cNvPr id="11" name="Shape 9"/>
-          <p:cNvSpPr/>
-          <p:nvPr/>
-        </p:nvSpPr>
-        <p:spPr>
-          <a:xfrm>
-            <a:off x="731520" y="1207008"/>
-            <a:ext cx="1325880" cy="54864"/>
-          </a:xfrm>
-          <a:prstGeom prst="rect">
-            <a:avLst/>
-          </a:prstGeom>
-          <a:solidFill>
-            <a:srgbClr val="6B7280"/>
-          </a:solidFill>
-          <a:ln w="12700">
-            <a:solidFill>
-              <a:srgbClr val="6B7280">
-                <a:alpha val="0"/>
-              </a:srgbClr>
-            </a:solidFill>
-            <a:prstDash val="solid"/>
-          </a:ln>
-        </p:spPr>
-      </p:sp>
-      <p:sp>
-        <p:nvSpPr>
-          <p:cNvPr id="12" name="Shape 10"/>
-          <p:cNvSpPr/>
-          <p:nvPr/>
-        </p:nvSpPr>
-        <p:spPr>
-          <a:xfrm>
-            <a:off x="822960" y="1389888"/>
-            <a:ext cx="4937760" cy="73152"/>
-          </a:xfrm>
-          <a:prstGeom prst="rect">
-            <a:avLst/>
-          </a:prstGeom>
-          <a:solidFill>
-            <a:srgbClr val="6B7280"/>
-          </a:solidFill>
-          <a:ln w="12700">
-            <a:solidFill>
-              <a:srgbClr val="6B7280">
-                <a:alpha val="0"/>
-              </a:srgbClr>
-            </a:solidFill>
-            <a:prstDash val="solid"/>
-          </a:ln>
-        </p:spPr>
-      </p:sp>
-      <p:sp>
-        <p:nvSpPr>
-          <p:cNvPr id="13" name="Shape 11"/>
-          <p:cNvSpPr/>
-          <p:nvPr/>
-        </p:nvSpPr>
-        <p:spPr>
-          <a:xfrm>
-            <a:off x="6400800" y="1389888"/>
-            <a:ext cx="4937760" cy="73152"/>
-          </a:xfrm>
-          <a:prstGeom prst="rect">
-            <a:avLst/>
-          </a:prstGeom>
-          <a:solidFill>
-            <a:srgbClr val="6B7280"/>
-          </a:solidFill>
-          <a:ln w="12700">
-            <a:solidFill>
-              <a:srgbClr val="6B7280">
-                <a:alpha val="0"/>
-              </a:srgbClr>
-            </a:solidFill>
-            <a:prstDash val="solid"/>
-          </a:ln>
-        </p:spPr>
-      </p:sp>
-      <p:sp>
-        <p:nvSpPr>
-          <p:cNvPr id="14" name="mdpr:1-2-e3669a:title:__title:1-2-e3669a"/>
+          <p:cNvPr id="11" name="mdpr:1-2-e3669a:title:__title:1-2-e3669a"/>
           <p:cNvSpPr txBox="1"/>
           <p:nvPr/>
         </p:nvSpPr>
@@ -6478,14 +6436,14 @@
       </p:sp>
       <p:sp>
         <p:nvSpPr>
-          <p:cNvPr id="15" name="mdpr:1-2-e3669a:left:block-15-chunk-1-block-15-chunk-1"/>
+          <p:cNvPr id="12" name="mdpr:1-2-e3669a:left:block-15-chunk-1-block-15-chunk-1"/>
           <p:cNvSpPr txBox="1"/>
           <p:nvPr/>
         </p:nvSpPr>
         <p:spPr>
           <a:xfrm>
-            <a:off x="896112" y="1499616"/>
-            <a:ext cx="4791456" cy="4398264"/>
+            <a:off x="896112" y="1463040"/>
+            <a:ext cx="4791456" cy="4261104"/>
           </a:xfrm>
           <a:prstGeom prst="rect">
             <a:avLst/>
@@ -6577,14 +6535,14 @@
       </p:sp>
       <p:sp>
         <p:nvSpPr>
-          <p:cNvPr id="16" name="mdpr:1-2-e3669a:right:block-15-chunk-1-block-15-chunk-1"/>
+          <p:cNvPr id="13" name="mdpr:1-2-e3669a:right:block-15-chunk-1"/>
           <p:cNvSpPr txBox="1"/>
           <p:nvPr/>
         </p:nvSpPr>
         <p:spPr>
           <a:xfrm>
-            <a:off x="6473952" y="1499616"/>
-            <a:ext cx="4791456" cy="4398264"/>
+            <a:off x="6473952" y="1463040"/>
+            <a:ext cx="4791456" cy="4261104"/>
           </a:xfrm>
           <a:prstGeom prst="rect">
             <a:avLst/>
@@ -6632,46 +6590,6 @@
             </a:r>
             <a:endParaRPr lang="en-US" sz="1800" dirty="0"/>
           </a:p>
-          <a:p>
-            <a:pPr algn="l" indent="0" marL="0">
-              <a:lnSpc>
-                <a:spcPct val="120000"/>
-              </a:lnSpc>
-              <a:buNone/>
-            </a:pPr>
-            <a:r>
-              <a:rPr lang="en-US" sz="1800" b="1" dirty="0">
-                <a:solidFill>
-                  <a:srgbClr val="6B7280"/>
-                </a:solidFill>
-                <a:latin typeface="Pretendard" pitchFamily="34" charset="0"/>
-                <a:ea typeface="Pretendard" pitchFamily="34" charset="-122"/>
-                <a:cs typeface="Pretendard" pitchFamily="34" charset="-120"/>
-              </a:rPr>
-              <a:t>- Connectors</a:t>
-            </a:r>
-            <a:endParaRPr lang="en-US" sz="1800" dirty="0"/>
-          </a:p>
-          <a:p>
-            <a:pPr algn="l" indent="0" marL="0">
-              <a:lnSpc>
-                <a:spcPct val="120000"/>
-              </a:lnSpc>
-              <a:buNone/>
-            </a:pPr>
-            <a:r>
-              <a:rPr lang="en-US" sz="1800" dirty="0">
-                <a:solidFill>
-                  <a:srgbClr val="111111"/>
-                </a:solidFill>
-                <a:latin typeface="Pretendard" pitchFamily="34" charset="0"/>
-                <a:ea typeface="Pretendard" pitchFamily="34" charset="-122"/>
-                <a:cs typeface="Pretendard" pitchFamily="34" charset="-120"/>
-              </a:rPr>
-              <a:t>  straight-arrow, elbow-arrow, boundary-attach, overlap-joint, parallel-flow, contrast-flow.</a:t>
-            </a:r>
-            <a:endParaRPr lang="en-US" sz="1800" dirty="0"/>
-          </a:p>
         </p:txBody>
       </p:sp>
     </p:spTree>
@@ -6971,88 +6889,7 @@
       </p:sp>
       <p:sp>
         <p:nvSpPr>
-          <p:cNvPr id="11" name="Shape 9"/>
-          <p:cNvSpPr/>
-          <p:nvPr/>
-        </p:nvSpPr>
-        <p:spPr>
-          <a:xfrm>
-            <a:off x="731520" y="1207008"/>
-            <a:ext cx="1325880" cy="54864"/>
-          </a:xfrm>
-          <a:prstGeom prst="rect">
-            <a:avLst/>
-          </a:prstGeom>
-          <a:solidFill>
-            <a:srgbClr val="6B7280"/>
-          </a:solidFill>
-          <a:ln w="12700">
-            <a:solidFill>
-              <a:srgbClr val="6B7280">
-                <a:alpha val="0"/>
-              </a:srgbClr>
-            </a:solidFill>
-            <a:prstDash val="solid"/>
-          </a:ln>
-        </p:spPr>
-      </p:sp>
-      <p:sp>
-        <p:nvSpPr>
-          <p:cNvPr id="12" name="Shape 10"/>
-          <p:cNvSpPr/>
-          <p:nvPr/>
-        </p:nvSpPr>
-        <p:spPr>
-          <a:xfrm>
-            <a:off x="822960" y="1554480"/>
-            <a:ext cx="4937760" cy="73152"/>
-          </a:xfrm>
-          <a:prstGeom prst="rect">
-            <a:avLst/>
-          </a:prstGeom>
-          <a:solidFill>
-            <a:srgbClr val="6B7280"/>
-          </a:solidFill>
-          <a:ln w="12700">
-            <a:solidFill>
-              <a:srgbClr val="6B7280">
-                <a:alpha val="0"/>
-              </a:srgbClr>
-            </a:solidFill>
-            <a:prstDash val="solid"/>
-          </a:ln>
-        </p:spPr>
-      </p:sp>
-      <p:sp>
-        <p:nvSpPr>
-          <p:cNvPr id="13" name="Shape 11"/>
-          <p:cNvSpPr/>
-          <p:nvPr/>
-        </p:nvSpPr>
-        <p:spPr>
-          <a:xfrm>
-            <a:off x="6400800" y="1554480"/>
-            <a:ext cx="4937760" cy="73152"/>
-          </a:xfrm>
-          <a:prstGeom prst="rect">
-            <a:avLst/>
-          </a:prstGeom>
-          <a:solidFill>
-            <a:srgbClr val="6B7280"/>
-          </a:solidFill>
-          <a:ln w="12700">
-            <a:solidFill>
-              <a:srgbClr val="6B7280">
-                <a:alpha val="0"/>
-              </a:srgbClr>
-            </a:solidFill>
-            <a:prstDash val="solid"/>
-          </a:ln>
-        </p:spPr>
-      </p:sp>
-      <p:sp>
-        <p:nvSpPr>
-          <p:cNvPr id="14" name="mdpr:2-2-c23e9b:title:__title:2-2-c23e9b"/>
+          <p:cNvPr id="11" name="mdpr:2-2-c23e9b:title:__title:2-2-c23e9b"/>
           <p:cNvSpPr txBox="1"/>
           <p:nvPr/>
         </p:nvSpPr>
@@ -7086,7 +6923,24 @@
                 <a:ea typeface="Pretendard" pitchFamily="34" charset="-122"/>
                 <a:cs typeface="Pretendard" pitchFamily="34" charset="-120"/>
               </a:rPr>
-              <a:t>Decoration Pattern Catalog (Cont. 2/2)</a:t>
+              <a:t>Decoration Pattern Catalog</a:t>
+            </a:r>
+            <a:pPr algn="ctr" indent="0" marL="0">
+              <a:lnSpc>
+                <a:spcPct val="120000"/>
+              </a:lnSpc>
+              <a:buNone/>
+            </a:pPr>
+            <a:r>
+              <a:rPr lang="en-US" sz="2000" dirty="0">
+                <a:solidFill>
+                  <a:srgbClr val="8E8E8E"/>
+                </a:solidFill>
+                <a:latin typeface="Pretendard" pitchFamily="34" charset="0"/>
+                <a:ea typeface="Pretendard" pitchFamily="34" charset="-122"/>
+                <a:cs typeface="Pretendard" pitchFamily="34" charset="-120"/>
+              </a:rPr>
+              <a:t> (Cont. 2/2)</a:t>
             </a:r>
             <a:endParaRPr lang="en-US" sz="3400" dirty="0"/>
           </a:p>
@@ -7094,14 +6948,14 @@
       </p:sp>
       <p:sp>
         <p:nvSpPr>
-          <p:cNvPr id="15" name="mdpr:2-2-c23e9b:left:block-15-chunk-2"/>
+          <p:cNvPr id="12" name="mdpr:2-2-c23e9b:left:block-15-chunk-2-block-15-chunk-2"/>
           <p:cNvSpPr txBox="1"/>
           <p:nvPr/>
         </p:nvSpPr>
         <p:spPr>
           <a:xfrm>
-            <a:off x="896112" y="1664208"/>
-            <a:ext cx="4791456" cy="4169664"/>
+            <a:off x="896112" y="1463040"/>
+            <a:ext cx="4791456" cy="4261104"/>
           </a:xfrm>
           <a:prstGeom prst="rect">
             <a:avLst/>
@@ -7120,7 +6974,44 @@
               <a:buNone/>
             </a:pPr>
             <a:r>
-              <a:rPr lang="en-US" sz="2200" b="1" dirty="0">
+              <a:rPr lang="en-US" sz="1800" b="1" dirty="0">
+                <a:solidFill>
+                  <a:srgbClr val="6B7280"/>
+                </a:solidFill>
+                <a:latin typeface="Pretendard" pitchFamily="34" charset="0"/>
+                <a:ea typeface="Pretendard" pitchFamily="34" charset="-122"/>
+                <a:cs typeface="Pretendard" pitchFamily="34" charset="-120"/>
+              </a:rPr>
+              <a:t>- Connectors</a:t>
+            </a:r>
+            <a:pPr algn="l" indent="0" marL="0">
+              <a:lnSpc>
+                <a:spcPct val="120000"/>
+              </a:lnSpc>
+              <a:buNone/>
+            </a:pPr>
+            <a:r>
+              <a:rPr lang="en-US" sz="1800" dirty="0">
+                <a:solidFill>
+                  <a:srgbClr val="111111"/>
+                </a:solidFill>
+                <a:latin typeface="Pretendard" pitchFamily="34" charset="0"/>
+                <a:ea typeface="Pretendard" pitchFamily="34" charset="-122"/>
+                <a:cs typeface="Pretendard" pitchFamily="34" charset="-120"/>
+              </a:rPr>
+              <a:t>  straight-arrow, elbow-arrow, boundary-attach, overlap-joint, parallel-flow, contrast-flow.</a:t>
+            </a:r>
+            <a:endParaRPr lang="en-US" sz="1800" dirty="0"/>
+          </a:p>
+          <a:p>
+            <a:pPr algn="l" indent="0" marL="0">
+              <a:lnSpc>
+                <a:spcPct val="120000"/>
+              </a:lnSpc>
+              <a:buNone/>
+            </a:pPr>
+            <a:r>
+              <a:rPr lang="en-US" sz="1800" b="1" dirty="0">
                 <a:solidFill>
                   <a:srgbClr val="6B7280"/>
                 </a:solidFill>
@@ -7130,6 +7021,9 @@
               </a:rPr>
               <a:t>- Icons</a:t>
             </a:r>
+            <a:endParaRPr lang="en-US" sz="1800" dirty="0"/>
+          </a:p>
+          <a:p>
             <a:pPr algn="l" indent="0" marL="0">
               <a:lnSpc>
                 <a:spcPct val="120000"/>
@@ -7137,7 +7031,7 @@
               <a:buNone/>
             </a:pPr>
             <a:r>
-              <a:rPr lang="en-US" sz="2200" dirty="0">
+              <a:rPr lang="en-US" sz="1800" dirty="0">
                 <a:solidFill>
                   <a:srgbClr val="111111"/>
                 </a:solidFill>
@@ -7147,20 +7041,20 @@
               </a:rPr>
               <a:t>  number-badge, mono-icon-slot, letter-disc, quiet-aside, image-safe-frame, brand-glyph.</a:t>
             </a:r>
-            <a:endParaRPr lang="en-US" sz="2200" dirty="0"/>
+            <a:endParaRPr lang="en-US" sz="1800" dirty="0"/>
           </a:p>
         </p:txBody>
       </p:sp>
       <p:sp>
         <p:nvSpPr>
-          <p:cNvPr id="16" name="mdpr:2-2-c23e9b:right:block-15-chunk-2"/>
+          <p:cNvPr id="13" name="mdpr:2-2-c23e9b:right:block-15-chunk-2"/>
           <p:cNvSpPr txBox="1"/>
           <p:nvPr/>
         </p:nvSpPr>
         <p:spPr>
           <a:xfrm>
-            <a:off x="6473952" y="1664208"/>
-            <a:ext cx="4791456" cy="4169664"/>
+            <a:off x="6473952" y="1463040"/>
+            <a:ext cx="4791456" cy="4261104"/>
           </a:xfrm>
           <a:prstGeom prst="rect">
             <a:avLst/>
@@ -7179,7 +7073,7 @@
               <a:buNone/>
             </a:pPr>
             <a:r>
-              <a:rPr lang="en-US" sz="2200" b="1" dirty="0">
+              <a:rPr lang="en-US" sz="1800" b="1" dirty="0">
                 <a:solidFill>
                   <a:srgbClr val="6B7280"/>
                 </a:solidFill>
@@ -7196,7 +7090,7 @@
               <a:buNone/>
             </a:pPr>
             <a:r>
-              <a:rPr lang="en-US" sz="2200" dirty="0">
+              <a:rPr lang="en-US" sz="1800" dirty="0">
                 <a:solidFill>
                   <a:srgbClr val="111111"/>
                 </a:solidFill>
@@ -7206,7 +7100,7 @@
               </a:rPr>
               <a:t>  skeuomorphic-bevel, glassmorphism-surface, newmorphic-panel, clay-blob, bento-tile, liquid-lens.</a:t>
             </a:r>
-            <a:endParaRPr lang="en-US" sz="2200" dirty="0"/>
+            <a:endParaRPr lang="en-US" sz="1800" dirty="0"/>
           </a:p>
         </p:txBody>
       </p:sp>
@@ -7505,36 +7399,9 @@
           </a:ln>
         </p:spPr>
       </p:sp>
-      <p:sp>
-        <p:nvSpPr>
-          <p:cNvPr id="11" name="Shape 9"/>
-          <p:cNvSpPr/>
-          <p:nvPr/>
-        </p:nvSpPr>
-        <p:spPr>
-          <a:xfrm>
-            <a:off x="731520" y="1207008"/>
-            <a:ext cx="1325880" cy="54864"/>
-          </a:xfrm>
-          <a:prstGeom prst="rect">
-            <a:avLst/>
-          </a:prstGeom>
-          <a:solidFill>
-            <a:srgbClr val="6B7280"/>
-          </a:solidFill>
-          <a:ln w="12700">
-            <a:solidFill>
-              <a:srgbClr val="6B7280">
-                <a:alpha val="0"/>
-              </a:srgbClr>
-            </a:solidFill>
-            <a:prstDash val="solid"/>
-          </a:ln>
-        </p:spPr>
-      </p:sp>
       <p:pic>
         <p:nvPicPr>
-          <p:cNvPr id="12" name="Image 0" descr="preencoded.png">    </p:cNvPr>
+          <p:cNvPr id="11" name="Image 0" descr="preencoded.png">    </p:cNvPr>
           <p:cNvPicPr>
             <a:picLocks noChangeAspect="1"/>
           </p:cNvPicPr>
@@ -7564,7 +7431,7 @@
       </p:pic>
       <p:sp>
         <p:nvSpPr>
-          <p:cNvPr id="13" name="Shape 10"/>
+          <p:cNvPr id="12" name="Shape 9"/>
           <p:cNvSpPr/>
           <p:nvPr/>
         </p:nvSpPr>
@@ -7600,7 +7467,7 @@
       </p:sp>
       <p:sp>
         <p:nvSpPr>
-          <p:cNvPr id="14" name="mdpr:table-coherence-2f9a7b:title:__title:table-coherence-2f9a7b"/>
+          <p:cNvPr id="13" name="mdpr:table-coherence-2f9a7b:title:__title:table-coherence-2f9a7b"/>
           <p:cNvSpPr txBox="1"/>
           <p:nvPr/>
         </p:nvSpPr>
@@ -8990,36 +8857,9 @@
           </a:ln>
         </p:spPr>
       </p:sp>
-      <p:sp>
-        <p:nvSpPr>
-          <p:cNvPr id="11" name="Shape 9"/>
-          <p:cNvSpPr/>
-          <p:nvPr/>
-        </p:nvSpPr>
-        <p:spPr>
-          <a:xfrm>
-            <a:off x="731520" y="1207008"/>
-            <a:ext cx="1325880" cy="54864"/>
-          </a:xfrm>
-          <a:prstGeom prst="rect">
-            <a:avLst/>
-          </a:prstGeom>
-          <a:solidFill>
-            <a:srgbClr val="6B7280"/>
-          </a:solidFill>
-          <a:ln w="12700">
-            <a:solidFill>
-              <a:srgbClr val="6B7280">
-                <a:alpha val="0"/>
-              </a:srgbClr>
-            </a:solidFill>
-            <a:prstDash val="solid"/>
-          </a:ln>
-        </p:spPr>
-      </p:sp>
       <p:pic>
         <p:nvPicPr>
-          <p:cNvPr id="12" name="Image 0" descr="preencoded.png">    </p:cNvPr>
+          <p:cNvPr id="11" name="Image 0" descr="preencoded.png">    </p:cNvPr>
           <p:cNvPicPr>
             <a:picLocks noChangeAspect="1"/>
           </p:cNvPicPr>
@@ -9049,7 +8889,7 @@
       </p:pic>
       <p:sp>
         <p:nvSpPr>
-          <p:cNvPr id="13" name="Shape 10"/>
+          <p:cNvPr id="12" name="Shape 9"/>
           <p:cNvSpPr/>
           <p:nvPr/>
         </p:nvSpPr>
@@ -9085,7 +8925,7 @@
       </p:sp>
       <p:sp>
         <p:nvSpPr>
-          <p:cNvPr id="14" name="Shape 11"/>
+          <p:cNvPr id="13" name="Shape 10"/>
           <p:cNvSpPr/>
           <p:nvPr/>
         </p:nvSpPr>
@@ -9112,7 +8952,7 @@
       </p:sp>
       <p:sp>
         <p:nvSpPr>
-          <p:cNvPr id="15" name="mdpr:1-2-2ff3f0:title:__title:1-2-2ff3f0"/>
+          <p:cNvPr id="14" name="mdpr:1-2-2ff3f0:title:__title:1-2-2ff3f0"/>
           <p:cNvSpPr txBox="1"/>
           <p:nvPr/>
         </p:nvSpPr>
@@ -9154,7 +8994,7 @@
       </p:sp>
       <p:sp>
         <p:nvSpPr>
-          <p:cNvPr id="16" name="mdpr:1-2-2ff3f0:body:block-19"/>
+          <p:cNvPr id="15" name="mdpr:1-2-2ff3f0:body:block-19"/>
           <p:cNvSpPr txBox="1"/>
           <p:nvPr/>
         </p:nvSpPr>
@@ -9293,7 +9133,7 @@
       </p:sp>
       <p:graphicFrame>
         <p:nvGraphicFramePr>
-          <p:cNvPr id="17" name="Chart 0" descr=""/>
+          <p:cNvPr id="16" name="Chart 0" descr=""/>
           <p:cNvGraphicFramePr/>
           <p:nvPr/>
         </p:nvGraphicFramePr>
@@ -9602,36 +9442,9 @@
           </a:ln>
         </p:spPr>
       </p:sp>
-      <p:sp>
-        <p:nvSpPr>
-          <p:cNvPr id="11" name="Shape 9"/>
-          <p:cNvSpPr/>
-          <p:nvPr/>
-        </p:nvSpPr>
-        <p:spPr>
-          <a:xfrm>
-            <a:off x="731520" y="1207008"/>
-            <a:ext cx="1325880" cy="54864"/>
-          </a:xfrm>
-          <a:prstGeom prst="rect">
-            <a:avLst/>
-          </a:prstGeom>
-          <a:solidFill>
-            <a:srgbClr val="6B7280"/>
-          </a:solidFill>
-          <a:ln w="12700">
-            <a:solidFill>
-              <a:srgbClr val="6B7280">
-                <a:alpha val="0"/>
-              </a:srgbClr>
-            </a:solidFill>
-            <a:prstDash val="solid"/>
-          </a:ln>
-        </p:spPr>
-      </p:sp>
       <p:pic>
         <p:nvPicPr>
-          <p:cNvPr id="12" name="Image 0" descr="preencoded.png">    </p:cNvPr>
+          <p:cNvPr id="11" name="Image 0" descr="preencoded.png">    </p:cNvPr>
           <p:cNvPicPr>
             <a:picLocks noChangeAspect="1"/>
           </p:cNvPicPr>
@@ -9661,7 +9474,7 @@
       </p:pic>
       <p:sp>
         <p:nvSpPr>
-          <p:cNvPr id="13" name="Shape 10"/>
+          <p:cNvPr id="12" name="Shape 9"/>
           <p:cNvSpPr/>
           <p:nvPr/>
         </p:nvSpPr>
@@ -9697,7 +9510,7 @@
       </p:sp>
       <p:sp>
         <p:nvSpPr>
-          <p:cNvPr id="14" name="mdpr:2-2-542095:title:__title:2-2-542095"/>
+          <p:cNvPr id="13" name="mdpr:2-2-542095:title:__title:2-2-542095"/>
           <p:cNvSpPr txBox="1"/>
           <p:nvPr/>
         </p:nvSpPr>
@@ -9731,7 +9544,24 @@
                 <a:ea typeface="Pretendard" pitchFamily="34" charset="-122"/>
                 <a:cs typeface="Pretendard" pitchFamily="34" charset="-120"/>
               </a:rPr>
-              <a:t>Chart and Table Pair (Cont. 2/2)</a:t>
+              <a:t>Chart and Table Pair</a:t>
+            </a:r>
+            <a:pPr algn="ctr" indent="0" marL="0">
+              <a:lnSpc>
+                <a:spcPct val="120000"/>
+              </a:lnSpc>
+              <a:buNone/>
+            </a:pPr>
+            <a:r>
+              <a:rPr lang="en-US" sz="2000" dirty="0">
+                <a:solidFill>
+                  <a:srgbClr val="8E8E8E"/>
+                </a:solidFill>
+                <a:latin typeface="Pretendard" pitchFamily="34" charset="0"/>
+                <a:ea typeface="Pretendard" pitchFamily="34" charset="-122"/>
+                <a:cs typeface="Pretendard" pitchFamily="34" charset="-120"/>
+              </a:rPr>
+              <a:t> (Cont. 2/2)</a:t>
             </a:r>
             <a:endParaRPr lang="en-US" sz="3400" dirty="0"/>
           </a:p>
@@ -10875,36 +10705,9 @@
           </a:ln>
         </p:spPr>
       </p:sp>
-      <p:sp>
-        <p:nvSpPr>
-          <p:cNvPr id="11" name="Shape 9"/>
-          <p:cNvSpPr/>
-          <p:nvPr/>
-        </p:nvSpPr>
-        <p:spPr>
-          <a:xfrm>
-            <a:off x="731520" y="1207008"/>
-            <a:ext cx="1325880" cy="54864"/>
-          </a:xfrm>
-          <a:prstGeom prst="rect">
-            <a:avLst/>
-          </a:prstGeom>
-          <a:solidFill>
-            <a:srgbClr val="6B7280"/>
-          </a:solidFill>
-          <a:ln w="12700">
-            <a:solidFill>
-              <a:srgbClr val="6B7280">
-                <a:alpha val="0"/>
-              </a:srgbClr>
-            </a:solidFill>
-            <a:prstDash val="solid"/>
-          </a:ln>
-        </p:spPr>
-      </p:sp>
       <p:pic>
         <p:nvPicPr>
-          <p:cNvPr id="12" name="Image 0" descr="preencoded.png">    </p:cNvPr>
+          <p:cNvPr id="11" name="Image 0" descr="preencoded.png">    </p:cNvPr>
           <p:cNvPicPr>
             <a:picLocks noChangeAspect="1"/>
           </p:cNvPicPr>
@@ -10934,7 +10737,7 @@
       </p:pic>
       <p:sp>
         <p:nvSpPr>
-          <p:cNvPr id="13" name="Shape 10"/>
+          <p:cNvPr id="12" name="Shape 9"/>
           <p:cNvSpPr/>
           <p:nvPr/>
         </p:nvSpPr>
@@ -10970,7 +10773,7 @@
       </p:sp>
       <p:sp>
         <p:nvSpPr>
-          <p:cNvPr id="14" name="mdpr:1-2-b8955f:title:__title:1-2-b8955f"/>
+          <p:cNvPr id="13" name="mdpr:1-2-b8955f:title:__title:1-2-b8955f"/>
           <p:cNvSpPr txBox="1"/>
           <p:nvPr/>
         </p:nvSpPr>
@@ -11012,7 +10815,7 @@
       </p:sp>
       <p:sp>
         <p:nvSpPr>
-          <p:cNvPr id="15" name="Shape 12"/>
+          <p:cNvPr id="14" name="Shape 11"/>
           <p:cNvSpPr/>
           <p:nvPr/>
         </p:nvSpPr>
@@ -11045,7 +10848,7 @@
       </p:sp>
       <p:sp>
         <p:nvSpPr>
-          <p:cNvPr id="16" name="Shape 13"/>
+          <p:cNvPr id="15" name="Shape 12"/>
           <p:cNvSpPr/>
           <p:nvPr/>
         </p:nvSpPr>
@@ -11076,7 +10879,7 @@
       </p:sp>
       <p:sp>
         <p:nvSpPr>
-          <p:cNvPr id="17" name="Shape 14"/>
+          <p:cNvPr id="16" name="Shape 13"/>
           <p:cNvSpPr/>
           <p:nvPr/>
         </p:nvSpPr>
@@ -11107,7 +10910,7 @@
       </p:sp>
       <p:sp>
         <p:nvSpPr>
-          <p:cNvPr id="18" name="Shape 15"/>
+          <p:cNvPr id="17" name="Shape 14"/>
           <p:cNvSpPr/>
           <p:nvPr/>
         </p:nvSpPr>
@@ -11132,7 +10935,7 @@
       </p:sp>
       <p:sp>
         <p:nvSpPr>
-          <p:cNvPr id="19" name="Shape 16"/>
+          <p:cNvPr id="18" name="Shape 15"/>
           <p:cNvSpPr/>
           <p:nvPr/>
         </p:nvSpPr>
@@ -11159,7 +10962,7 @@
       </p:sp>
       <p:sp>
         <p:nvSpPr>
-          <p:cNvPr id="20" name="Text 17"/>
+          <p:cNvPr id="19" name="Text 16"/>
           <p:cNvSpPr txBox="1"/>
           <p:nvPr/>
         </p:nvSpPr>
@@ -11203,7 +11006,7 @@
       </p:sp>
       <p:sp>
         <p:nvSpPr>
-          <p:cNvPr id="21" name="Text 18"/>
+          <p:cNvPr id="20" name="Text 17"/>
           <p:cNvSpPr txBox="1"/>
           <p:nvPr/>
         </p:nvSpPr>
@@ -11245,7 +11048,7 @@
       </p:sp>
       <p:sp>
         <p:nvSpPr>
-          <p:cNvPr id="22" name="Shape 19"/>
+          <p:cNvPr id="21" name="Shape 18"/>
           <p:cNvSpPr/>
           <p:nvPr/>
         </p:nvSpPr>
@@ -11272,7 +11075,7 @@
       </p:sp>
       <p:sp>
         <p:nvSpPr>
-          <p:cNvPr id="23" name="Text 20"/>
+          <p:cNvPr id="22" name="Text 19"/>
           <p:cNvSpPr txBox="1"/>
           <p:nvPr/>
         </p:nvSpPr>
@@ -11316,7 +11119,7 @@
       </p:sp>
       <p:sp>
         <p:nvSpPr>
-          <p:cNvPr id="24" name="Shape 21"/>
+          <p:cNvPr id="23" name="Shape 20"/>
           <p:cNvSpPr/>
           <p:nvPr/>
         </p:nvSpPr>
@@ -11343,7 +11146,7 @@
       </p:sp>
       <p:sp>
         <p:nvSpPr>
-          <p:cNvPr id="25" name="Text 22"/>
+          <p:cNvPr id="24" name="Text 21"/>
           <p:cNvSpPr txBox="1"/>
           <p:nvPr/>
         </p:nvSpPr>
@@ -11387,7 +11190,7 @@
       </p:sp>
       <p:sp>
         <p:nvSpPr>
-          <p:cNvPr id="26" name="Shape 23"/>
+          <p:cNvPr id="25" name="Shape 22"/>
           <p:cNvSpPr/>
           <p:nvPr/>
         </p:nvSpPr>
@@ -11418,7 +11221,7 @@
       </p:sp>
       <p:sp>
         <p:nvSpPr>
-          <p:cNvPr id="27" name="Shape 24"/>
+          <p:cNvPr id="26" name="Shape 23"/>
           <p:cNvSpPr/>
           <p:nvPr/>
         </p:nvSpPr>
@@ -11447,7 +11250,7 @@
       </p:sp>
       <p:sp>
         <p:nvSpPr>
-          <p:cNvPr id="28" name="Shape 25"/>
+          <p:cNvPr id="27" name="Shape 24"/>
           <p:cNvSpPr/>
           <p:nvPr/>
         </p:nvSpPr>
@@ -11470,7 +11273,7 @@
       </p:sp>
       <p:sp>
         <p:nvSpPr>
-          <p:cNvPr id="29" name="Shape 26"/>
+          <p:cNvPr id="28" name="Shape 25"/>
           <p:cNvSpPr/>
           <p:nvPr/>
         </p:nvSpPr>
@@ -11495,7 +11298,7 @@
       </p:sp>
       <p:sp>
         <p:nvSpPr>
-          <p:cNvPr id="30" name="Shape 27"/>
+          <p:cNvPr id="29" name="Shape 26"/>
           <p:cNvSpPr/>
           <p:nvPr/>
         </p:nvSpPr>
@@ -11520,7 +11323,7 @@
       </p:sp>
       <p:sp>
         <p:nvSpPr>
-          <p:cNvPr id="31" name="Shape 28"/>
+          <p:cNvPr id="30" name="Shape 27"/>
           <p:cNvSpPr/>
           <p:nvPr/>
         </p:nvSpPr>
@@ -11545,7 +11348,7 @@
       </p:sp>
       <p:sp>
         <p:nvSpPr>
-          <p:cNvPr id="32" name="Text 29"/>
+          <p:cNvPr id="31" name="Text 28"/>
           <p:cNvSpPr txBox="1"/>
           <p:nvPr/>
         </p:nvSpPr>
@@ -11589,7 +11392,7 @@
       </p:sp>
       <p:sp>
         <p:nvSpPr>
-          <p:cNvPr id="33" name="Text 30"/>
+          <p:cNvPr id="32" name="Text 29"/>
           <p:cNvSpPr txBox="1"/>
           <p:nvPr/>
         </p:nvSpPr>
@@ -11631,7 +11434,7 @@
       </p:sp>
       <p:sp>
         <p:nvSpPr>
-          <p:cNvPr id="34" name="Text 31"/>
+          <p:cNvPr id="33" name="Text 30"/>
           <p:cNvSpPr txBox="1"/>
           <p:nvPr/>
         </p:nvSpPr>
@@ -11673,7 +11476,7 @@
       </p:sp>
       <p:sp>
         <p:nvSpPr>
-          <p:cNvPr id="35" name="Text 32"/>
+          <p:cNvPr id="34" name="Text 31"/>
           <p:cNvSpPr txBox="1"/>
           <p:nvPr/>
         </p:nvSpPr>
@@ -12008,36 +11811,9 @@
           </a:ln>
         </p:spPr>
       </p:sp>
-      <p:sp>
-        <p:nvSpPr>
-          <p:cNvPr id="11" name="Shape 9"/>
-          <p:cNvSpPr/>
-          <p:nvPr/>
-        </p:nvSpPr>
-        <p:spPr>
-          <a:xfrm>
-            <a:off x="731520" y="1207008"/>
-            <a:ext cx="1325880" cy="54864"/>
-          </a:xfrm>
-          <a:prstGeom prst="rect">
-            <a:avLst/>
-          </a:prstGeom>
-          <a:solidFill>
-            <a:srgbClr val="6B7280"/>
-          </a:solidFill>
-          <a:ln w="12700">
-            <a:solidFill>
-              <a:srgbClr val="6B7280">
-                <a:alpha val="0"/>
-              </a:srgbClr>
-            </a:solidFill>
-            <a:prstDash val="solid"/>
-          </a:ln>
-        </p:spPr>
-      </p:sp>
       <p:pic>
         <p:nvPicPr>
-          <p:cNvPr id="12" name="Image 0" descr="preencoded.png">    </p:cNvPr>
+          <p:cNvPr id="11" name="Image 0" descr="preencoded.png">    </p:cNvPr>
           <p:cNvPicPr>
             <a:picLocks noChangeAspect="1"/>
           </p:cNvPicPr>
@@ -12067,7 +11843,7 @@
       </p:pic>
       <p:sp>
         <p:nvSpPr>
-          <p:cNvPr id="13" name="Shape 10"/>
+          <p:cNvPr id="12" name="Shape 9"/>
           <p:cNvSpPr/>
           <p:nvPr/>
         </p:nvSpPr>
@@ -12103,7 +11879,7 @@
       </p:sp>
       <p:sp>
         <p:nvSpPr>
-          <p:cNvPr id="14" name="mdpr:2-2-4dc4c1:title:__title:2-2-4dc4c1"/>
+          <p:cNvPr id="13" name="mdpr:2-2-4dc4c1:title:__title:2-2-4dc4c1"/>
           <p:cNvSpPr txBox="1"/>
           <p:nvPr/>
         </p:nvSpPr>
@@ -12137,7 +11913,24 @@
                 <a:ea typeface="Pretendard" pitchFamily="34" charset="-122"/>
                 <a:cs typeface="Pretendard" pitchFamily="34" charset="-120"/>
               </a:rPr>
-              <a:t>Editable Proof Objects (Cont. 2/2)</a:t>
+              <a:t>Editable Proof Objects</a:t>
+            </a:r>
+            <a:pPr algn="ctr" indent="0" marL="0">
+              <a:lnSpc>
+                <a:spcPct val="120000"/>
+              </a:lnSpc>
+              <a:buNone/>
+            </a:pPr>
+            <a:r>
+              <a:rPr lang="en-US" sz="2000" dirty="0">
+                <a:solidFill>
+                  <a:srgbClr val="8E8E8E"/>
+                </a:solidFill>
+                <a:latin typeface="Pretendard" pitchFamily="34" charset="0"/>
+                <a:ea typeface="Pretendard" pitchFamily="34" charset="-122"/>
+                <a:cs typeface="Pretendard" pitchFamily="34" charset="-120"/>
+              </a:rPr>
+              <a:t> (Cont. 2/2)</a:t>
             </a:r>
             <a:endParaRPr lang="en-US" sz="3400" dirty="0"/>
           </a:p>
@@ -12145,7 +11938,7 @@
       </p:sp>
       <p:sp>
         <p:nvSpPr>
-          <p:cNvPr id="15" name="Shape 12"/>
+          <p:cNvPr id="14" name="Shape 11"/>
           <p:cNvSpPr/>
           <p:nvPr/>
         </p:nvSpPr>
@@ -12172,7 +11965,7 @@
       </p:sp>
       <p:sp>
         <p:nvSpPr>
-          <p:cNvPr id="16" name="Shape 13"/>
+          <p:cNvPr id="15" name="Shape 12"/>
           <p:cNvSpPr/>
           <p:nvPr/>
         </p:nvSpPr>
@@ -12199,7 +11992,7 @@
       </p:sp>
       <p:sp>
         <p:nvSpPr>
-          <p:cNvPr id="17" name="Text 14"/>
+          <p:cNvPr id="16" name="Text 13"/>
           <p:cNvSpPr txBox="1"/>
           <p:nvPr/>
         </p:nvSpPr>
@@ -12243,7 +12036,7 @@
       </p:sp>
       <p:sp>
         <p:nvSpPr>
-          <p:cNvPr id="18" name="Text 15"/>
+          <p:cNvPr id="17" name="Text 14"/>
           <p:cNvSpPr txBox="1"/>
           <p:nvPr/>
         </p:nvSpPr>
@@ -12287,7 +12080,7 @@
       </p:sp>
       <p:sp>
         <p:nvSpPr>
-          <p:cNvPr id="19" name="Shape 16"/>
+          <p:cNvPr id="18" name="Shape 15"/>
           <p:cNvSpPr/>
           <p:nvPr/>
         </p:nvSpPr>
@@ -12314,7 +12107,7 @@
       </p:sp>
       <p:sp>
         <p:nvSpPr>
-          <p:cNvPr id="20" name="Shape 17"/>
+          <p:cNvPr id="19" name="Shape 16"/>
           <p:cNvSpPr/>
           <p:nvPr/>
         </p:nvSpPr>
@@ -12341,7 +12134,7 @@
       </p:sp>
       <p:sp>
         <p:nvSpPr>
-          <p:cNvPr id="21" name="Text 18"/>
+          <p:cNvPr id="20" name="Text 17"/>
           <p:cNvSpPr txBox="1"/>
           <p:nvPr/>
         </p:nvSpPr>
@@ -12385,7 +12178,7 @@
       </p:sp>
       <p:sp>
         <p:nvSpPr>
-          <p:cNvPr id="22" name="Text 19"/>
+          <p:cNvPr id="21" name="Text 18"/>
           <p:cNvSpPr txBox="1"/>
           <p:nvPr/>
         </p:nvSpPr>
@@ -12429,7 +12222,7 @@
       </p:sp>
       <p:sp>
         <p:nvSpPr>
-          <p:cNvPr id="23" name="Shape 20"/>
+          <p:cNvPr id="22" name="Shape 19"/>
           <p:cNvSpPr/>
           <p:nvPr/>
         </p:nvSpPr>
@@ -12456,7 +12249,7 @@
       </p:sp>
       <p:sp>
         <p:nvSpPr>
-          <p:cNvPr id="24" name="Shape 21"/>
+          <p:cNvPr id="23" name="Shape 20"/>
           <p:cNvSpPr/>
           <p:nvPr/>
         </p:nvSpPr>
@@ -12483,7 +12276,7 @@
       </p:sp>
       <p:sp>
         <p:nvSpPr>
-          <p:cNvPr id="25" name="Text 22"/>
+          <p:cNvPr id="24" name="Text 21"/>
           <p:cNvSpPr txBox="1"/>
           <p:nvPr/>
         </p:nvSpPr>
@@ -12527,7 +12320,7 @@
       </p:sp>
       <p:sp>
         <p:nvSpPr>
-          <p:cNvPr id="26" name="Text 23"/>
+          <p:cNvPr id="25" name="Text 22"/>
           <p:cNvSpPr txBox="1"/>
           <p:nvPr/>
         </p:nvSpPr>
@@ -12571,7 +12364,7 @@
       </p:sp>
       <p:sp>
         <p:nvSpPr>
-          <p:cNvPr id="27" name="Shape 24"/>
+          <p:cNvPr id="26" name="Shape 23"/>
           <p:cNvSpPr/>
           <p:nvPr/>
         </p:nvSpPr>
@@ -12598,7 +12391,7 @@
       </p:sp>
       <p:sp>
         <p:nvSpPr>
-          <p:cNvPr id="28" name="Shape 25"/>
+          <p:cNvPr id="27" name="Shape 24"/>
           <p:cNvSpPr/>
           <p:nvPr/>
         </p:nvSpPr>
@@ -12625,7 +12418,7 @@
       </p:sp>
       <p:sp>
         <p:nvSpPr>
-          <p:cNvPr id="29" name="Text 26"/>
+          <p:cNvPr id="28" name="Text 25"/>
           <p:cNvSpPr txBox="1"/>
           <p:nvPr/>
         </p:nvSpPr>
@@ -12669,7 +12462,7 @@
       </p:sp>
       <p:sp>
         <p:nvSpPr>
-          <p:cNvPr id="30" name="Text 27"/>
+          <p:cNvPr id="29" name="Text 26"/>
           <p:cNvSpPr txBox="1"/>
           <p:nvPr/>
         </p:nvSpPr>
@@ -12713,7 +12506,7 @@
       </p:sp>
       <p:sp>
         <p:nvSpPr>
-          <p:cNvPr id="31" name="Shape 28"/>
+          <p:cNvPr id="30" name="Shape 27"/>
           <p:cNvSpPr/>
           <p:nvPr/>
         </p:nvSpPr>
@@ -12737,7 +12530,7 @@
       </p:sp>
       <p:sp>
         <p:nvSpPr>
-          <p:cNvPr id="32" name="Shape 29"/>
+          <p:cNvPr id="31" name="Shape 28"/>
           <p:cNvSpPr/>
           <p:nvPr/>
         </p:nvSpPr>
@@ -12761,7 +12554,7 @@
       </p:sp>
       <p:sp>
         <p:nvSpPr>
-          <p:cNvPr id="33" name="Shape 30"/>
+          <p:cNvPr id="32" name="Shape 29"/>
           <p:cNvSpPr/>
           <p:nvPr/>
         </p:nvSpPr>
@@ -13086,8 +12879,8 @@
         </p:nvSpPr>
         <p:spPr>
           <a:xfrm>
-            <a:off x="731520" y="1207008"/>
-            <a:ext cx="1325880" cy="54864"/>
+            <a:off x="822960" y="1938528"/>
+            <a:ext cx="73152" cy="2514600"/>
           </a:xfrm>
           <a:prstGeom prst="rect">
             <a:avLst/>
@@ -13105,222 +12898,22 @@
           </a:ln>
         </p:spPr>
       </p:sp>
-      <p:pic>
-        <p:nvPicPr>
-          <p:cNvPr id="12" name="Image 0" descr="preencoded.png">    </p:cNvPr>
-          <p:cNvPicPr>
-            <a:picLocks noChangeAspect="1"/>
-          </p:cNvPicPr>
-          <p:nvPr/>
-        </p:nvPicPr>
-        <p:blipFill>
-          <a:blip r:embed="rId1">
-            <a:extLst>
-              <a:ext uri="{96DAC541-7B7A-43D3-8B79-37D633B846F1}">
-                <asvg:svgBlip xmlns:asvg="http://schemas.microsoft.com/office/drawing/2016/SVG/main" r:embed="rId2"/>
-              </a:ext>
-            </a:extLst>
-          </a:blip>
-          <a:stretch>
-            <a:fillRect/>
-          </a:stretch>
-        </p:blipFill>
-        <p:spPr>
-          <a:xfrm>
-            <a:off x="914400" y="1865376"/>
-            <a:ext cx="10241280" cy="1024128"/>
-          </a:xfrm>
-          <a:prstGeom prst="rect">
-            <a:avLst/>
-          </a:prstGeom>
-        </p:spPr>
-      </p:pic>
-      <p:sp>
-        <p:nvSpPr>
-          <p:cNvPr id="13" name="Shape 10"/>
-          <p:cNvSpPr/>
-          <p:nvPr/>
-        </p:nvSpPr>
-        <p:spPr>
-          <a:xfrm>
-            <a:off x="914400" y="1865376"/>
-            <a:ext cx="10241280" cy="1024128"/>
-          </a:xfrm>
-          <a:prstGeom prst="rect">
-            <a:avLst/>
-          </a:prstGeom>
-          <a:solidFill>
-            <a:srgbClr val="FDFDFE">
-              <a:alpha val="0"/>
-            </a:srgbClr>
-          </a:solidFill>
-          <a:ln w="12700">
-            <a:solidFill>
-              <a:srgbClr val="AEB7C4">
-                <a:alpha val="0"/>
-              </a:srgbClr>
-            </a:solidFill>
-            <a:prstDash val="solid"/>
-          </a:ln>
-          <a:effectLst>
-            <a:outerShdw sx="100000" sy="100000" kx="0" ky="0" algn="bl" rotWithShape="0" blurRad="12700" dist="50800" dir="2700000">
-              <a:srgbClr val="000000">
-                <a:alpha val="8000"/>
-              </a:srgbClr>
-            </a:outerShdw>
-          </a:effectLst>
-        </p:spPr>
-      </p:sp>
-      <p:pic>
-        <p:nvPicPr>
-          <p:cNvPr id="14" name="Image 1" descr="preencoded.png">    </p:cNvPr>
-          <p:cNvPicPr>
-            <a:picLocks noChangeAspect="1"/>
-          </p:cNvPicPr>
-          <p:nvPr/>
-        </p:nvPicPr>
-        <p:blipFill>
-          <a:blip r:embed="rId3">
-            <a:extLst>
-              <a:ext uri="{96DAC541-7B7A-43D3-8B79-37D633B846F1}">
-                <asvg:svgBlip xmlns:asvg="http://schemas.microsoft.com/office/drawing/2016/SVG/main" r:embed="rId4"/>
-              </a:ext>
-            </a:extLst>
-          </a:blip>
-          <a:stretch>
-            <a:fillRect/>
-          </a:stretch>
-        </p:blipFill>
-        <p:spPr>
-          <a:xfrm>
-            <a:off x="914400" y="3191256"/>
-            <a:ext cx="10241280" cy="1024128"/>
-          </a:xfrm>
-          <a:prstGeom prst="rect">
-            <a:avLst/>
-          </a:prstGeom>
-        </p:spPr>
-      </p:pic>
-      <p:sp>
-        <p:nvSpPr>
-          <p:cNvPr id="15" name="Shape 11"/>
-          <p:cNvSpPr/>
-          <p:nvPr/>
-        </p:nvSpPr>
-        <p:spPr>
-          <a:xfrm>
-            <a:off x="914400" y="3191256"/>
-            <a:ext cx="10241280" cy="1024128"/>
-          </a:xfrm>
-          <a:prstGeom prst="rect">
-            <a:avLst/>
-          </a:prstGeom>
-          <a:solidFill>
-            <a:srgbClr val="FDFDFE">
-              <a:alpha val="0"/>
-            </a:srgbClr>
-          </a:solidFill>
-          <a:ln w="12700">
-            <a:solidFill>
-              <a:srgbClr val="AEB7C4">
-                <a:alpha val="0"/>
-              </a:srgbClr>
-            </a:solidFill>
-            <a:prstDash val="solid"/>
-          </a:ln>
-          <a:effectLst>
-            <a:outerShdw sx="100000" sy="100000" kx="0" ky="0" algn="bl" rotWithShape="0" blurRad="12700" dist="50800" dir="2700000">
-              <a:srgbClr val="000000">
-                <a:alpha val="8000"/>
-              </a:srgbClr>
-            </a:outerShdw>
-          </a:effectLst>
-        </p:spPr>
-      </p:sp>
-      <p:pic>
-        <p:nvPicPr>
-          <p:cNvPr id="16" name="Image 2" descr="preencoded.png">    </p:cNvPr>
-          <p:cNvPicPr>
-            <a:picLocks noChangeAspect="1"/>
-          </p:cNvPicPr>
-          <p:nvPr/>
-        </p:nvPicPr>
-        <p:blipFill>
-          <a:blip r:embed="rId5">
-            <a:extLst>
-              <a:ext uri="{96DAC541-7B7A-43D3-8B79-37D633B846F1}">
-                <asvg:svgBlip xmlns:asvg="http://schemas.microsoft.com/office/drawing/2016/SVG/main" r:embed="rId6"/>
-              </a:ext>
-            </a:extLst>
-          </a:blip>
-          <a:stretch>
-            <a:fillRect/>
-          </a:stretch>
-        </p:blipFill>
-        <p:spPr>
-          <a:xfrm>
-            <a:off x="914400" y="4507992"/>
-            <a:ext cx="10241280" cy="1024128"/>
-          </a:xfrm>
-          <a:prstGeom prst="rect">
-            <a:avLst/>
-          </a:prstGeom>
-        </p:spPr>
-      </p:pic>
-      <p:sp>
-        <p:nvSpPr>
-          <p:cNvPr id="17" name="Shape 12"/>
-          <p:cNvSpPr/>
-          <p:nvPr/>
-        </p:nvSpPr>
-        <p:spPr>
-          <a:xfrm>
-            <a:off x="914400" y="4507992"/>
-            <a:ext cx="10241280" cy="1024128"/>
-          </a:xfrm>
-          <a:prstGeom prst="rect">
-            <a:avLst/>
-          </a:prstGeom>
-          <a:solidFill>
-            <a:srgbClr val="FDFDFE">
-              <a:alpha val="0"/>
-            </a:srgbClr>
-          </a:solidFill>
-          <a:ln w="12700">
-            <a:solidFill>
-              <a:srgbClr val="AEB7C4">
-                <a:alpha val="0"/>
-              </a:srgbClr>
-            </a:solidFill>
-            <a:prstDash val="solid"/>
-          </a:ln>
-          <a:effectLst>
-            <a:outerShdw sx="100000" sy="100000" kx="0" ky="0" algn="bl" rotWithShape="0" blurRad="12700" dist="50800" dir="2700000">
-              <a:srgbClr val="000000">
-                <a:alpha val="8000"/>
-              </a:srgbClr>
-            </a:outerShdw>
-          </a:effectLst>
-        </p:spPr>
-      </p:sp>
-      <p:sp>
-        <p:nvSpPr>
-          <p:cNvPr id="18" name="Shape 13"/>
-          <p:cNvSpPr/>
-          <p:nvPr/>
-        </p:nvSpPr>
-        <p:spPr>
-          <a:xfrm>
-            <a:off x="786384" y="1956816"/>
-            <a:ext cx="32004" cy="3483864"/>
-          </a:xfrm>
-          <a:prstGeom prst="rect">
-            <a:avLst/>
-          </a:prstGeom>
-          <a:solidFill>
-            <a:srgbClr val="C7D2FE">
-              <a:alpha val="80000"/>
-            </a:srgbClr>
+      <p:sp>
+        <p:nvSpPr>
+          <p:cNvPr id="12" name="Shape 10"/>
+          <p:cNvSpPr/>
+          <p:nvPr/>
+        </p:nvSpPr>
+        <p:spPr>
+          <a:xfrm>
+            <a:off x="4343400" y="1938528"/>
+            <a:ext cx="73152" cy="2514600"/>
+          </a:xfrm>
+          <a:prstGeom prst="rect">
+            <a:avLst/>
+          </a:prstGeom>
+          <a:solidFill>
+            <a:srgbClr val="C7D2FE"/>
           </a:solidFill>
           <a:ln w="12700">
             <a:solidFill>
@@ -13334,14 +12927,14 @@
       </p:sp>
       <p:sp>
         <p:nvSpPr>
-          <p:cNvPr id="19" name="Shape 14"/>
-          <p:cNvSpPr/>
-          <p:nvPr/>
-        </p:nvSpPr>
-        <p:spPr>
-          <a:xfrm>
-            <a:off x="914400" y="1865376"/>
-            <a:ext cx="73152" cy="1024128"/>
+          <p:cNvPr id="13" name="Shape 11"/>
+          <p:cNvSpPr/>
+          <p:nvPr/>
+        </p:nvSpPr>
+        <p:spPr>
+          <a:xfrm>
+            <a:off x="7863840" y="1938528"/>
+            <a:ext cx="73152" cy="2514600"/>
           </a:xfrm>
           <a:prstGeom prst="rect">
             <a:avLst/>
@@ -13361,61 +12954,7 @@
       </p:sp>
       <p:sp>
         <p:nvSpPr>
-          <p:cNvPr id="20" name="Shape 15"/>
-          <p:cNvSpPr/>
-          <p:nvPr/>
-        </p:nvSpPr>
-        <p:spPr>
-          <a:xfrm>
-            <a:off x="914400" y="3191256"/>
-            <a:ext cx="73152" cy="1024128"/>
-          </a:xfrm>
-          <a:prstGeom prst="rect">
-            <a:avLst/>
-          </a:prstGeom>
-          <a:solidFill>
-            <a:srgbClr val="C7D2FE"/>
-          </a:solidFill>
-          <a:ln w="12700">
-            <a:solidFill>
-              <a:srgbClr val="C7D2FE">
-                <a:alpha val="0"/>
-              </a:srgbClr>
-            </a:solidFill>
-            <a:prstDash val="solid"/>
-          </a:ln>
-        </p:spPr>
-      </p:sp>
-      <p:sp>
-        <p:nvSpPr>
-          <p:cNvPr id="21" name="Shape 16"/>
-          <p:cNvSpPr/>
-          <p:nvPr/>
-        </p:nvSpPr>
-        <p:spPr>
-          <a:xfrm>
-            <a:off x="914400" y="4507992"/>
-            <a:ext cx="73152" cy="1024128"/>
-          </a:xfrm>
-          <a:prstGeom prst="rect">
-            <a:avLst/>
-          </a:prstGeom>
-          <a:solidFill>
-            <a:srgbClr val="6B7280"/>
-          </a:solidFill>
-          <a:ln w="12700">
-            <a:solidFill>
-              <a:srgbClr val="6B7280">
-                <a:alpha val="0"/>
-              </a:srgbClr>
-            </a:solidFill>
-            <a:prstDash val="solid"/>
-          </a:ln>
-        </p:spPr>
-      </p:sp>
-      <p:sp>
-        <p:nvSpPr>
-          <p:cNvPr id="22" name="mdpr:1-2-ea42c8:title:__title:1-2-ea42c8"/>
+          <p:cNvPr id="14" name="mdpr:1-2-ea42c8:title:__title:1-2-ea42c8"/>
           <p:cNvSpPr txBox="1"/>
           <p:nvPr/>
         </p:nvSpPr>
@@ -13457,14 +12996,14 @@
       </p:sp>
       <p:sp>
         <p:nvSpPr>
-          <p:cNvPr id="23" name="mdpr:1-2-ea42c8:item-1:block-27-chunk-1"/>
+          <p:cNvPr id="15" name="mdpr:1-2-ea42c8:item-1:block-27-chunk-1"/>
           <p:cNvSpPr txBox="1"/>
           <p:nvPr/>
         </p:nvSpPr>
         <p:spPr>
           <a:xfrm>
-            <a:off x="1133856" y="1957548"/>
-            <a:ext cx="9820656" cy="839785"/>
+            <a:off x="1042416" y="2103120"/>
+            <a:ext cx="2825496" cy="2185416"/>
           </a:xfrm>
           <a:prstGeom prst="rect">
             <a:avLst/>
@@ -13516,14 +13055,14 @@
       </p:sp>
       <p:sp>
         <p:nvSpPr>
-          <p:cNvPr id="24" name="mdpr:1-2-ea42c8:item-2:block-27-chunk-1"/>
+          <p:cNvPr id="16" name="mdpr:1-2-ea42c8:item-2:block-27-chunk-1"/>
           <p:cNvSpPr txBox="1"/>
           <p:nvPr/>
         </p:nvSpPr>
         <p:spPr>
           <a:xfrm>
-            <a:off x="1133856" y="3283428"/>
-            <a:ext cx="9820656" cy="839785"/>
+            <a:off x="4562856" y="2103120"/>
+            <a:ext cx="2825496" cy="2185416"/>
           </a:xfrm>
           <a:prstGeom prst="rect">
             <a:avLst/>
@@ -13575,14 +13114,14 @@
       </p:sp>
       <p:sp>
         <p:nvSpPr>
-          <p:cNvPr id="25" name="mdpr:1-2-ea42c8:item-3:block-27-chunk-1"/>
+          <p:cNvPr id="17" name="mdpr:1-2-ea42c8:item-3:block-27-chunk-1"/>
           <p:cNvSpPr txBox="1"/>
           <p:nvPr/>
         </p:nvSpPr>
         <p:spPr>
           <a:xfrm>
-            <a:off x="1133856" y="4600164"/>
-            <a:ext cx="9820656" cy="839785"/>
+            <a:off x="8083296" y="2103120"/>
+            <a:ext cx="2825496" cy="2185416"/>
           </a:xfrm>
           <a:prstGeom prst="rect">
             <a:avLst/>
@@ -13935,8 +13474,8 @@
         </p:nvSpPr>
         <p:spPr>
           <a:xfrm>
-            <a:off x="731520" y="1207008"/>
-            <a:ext cx="1325880" cy="54864"/>
+            <a:off x="822960" y="1737360"/>
+            <a:ext cx="73152" cy="841248"/>
           </a:xfrm>
           <a:prstGeom prst="rect">
             <a:avLst/>
@@ -13962,8 +13501,35 @@
         </p:nvSpPr>
         <p:spPr>
           <a:xfrm>
-            <a:off x="822960" y="1188720"/>
-            <a:ext cx="10515600" cy="45720"/>
+            <a:off x="822960" y="2779776"/>
+            <a:ext cx="73152" cy="841248"/>
+          </a:xfrm>
+          <a:prstGeom prst="rect">
+            <a:avLst/>
+          </a:prstGeom>
+          <a:solidFill>
+            <a:srgbClr val="C7D2FE"/>
+          </a:solidFill>
+          <a:ln w="12700">
+            <a:solidFill>
+              <a:srgbClr val="C7D2FE">
+                <a:alpha val="0"/>
+              </a:srgbClr>
+            </a:solidFill>
+            <a:prstDash val="solid"/>
+          </a:ln>
+        </p:spPr>
+      </p:sp>
+      <p:sp>
+        <p:nvSpPr>
+          <p:cNvPr id="13" name="Shape 11"/>
+          <p:cNvSpPr/>
+          <p:nvPr/>
+        </p:nvSpPr>
+        <p:spPr>
+          <a:xfrm>
+            <a:off x="822960" y="3822192"/>
+            <a:ext cx="73152" cy="841248"/>
           </a:xfrm>
           <a:prstGeom prst="rect">
             <a:avLst/>
@@ -13983,14 +13549,14 @@
       </p:sp>
       <p:sp>
         <p:nvSpPr>
-          <p:cNvPr id="13" name="Shape 11"/>
-          <p:cNvSpPr/>
-          <p:nvPr/>
-        </p:nvSpPr>
-        <p:spPr>
-          <a:xfrm>
-            <a:off x="822960" y="6382512"/>
-            <a:ext cx="2011680" cy="45720"/>
+          <p:cNvPr id="14" name="Shape 12"/>
+          <p:cNvSpPr/>
+          <p:nvPr/>
+        </p:nvSpPr>
+        <p:spPr>
+          <a:xfrm>
+            <a:off x="822960" y="4864608"/>
+            <a:ext cx="73152" cy="841248"/>
           </a:xfrm>
           <a:prstGeom prst="rect">
             <a:avLst/>
@@ -14010,43 +13576,14 @@
       </p:sp>
       <p:sp>
         <p:nvSpPr>
-          <p:cNvPr id="14" name="Shape 12"/>
-          <p:cNvSpPr/>
-          <p:nvPr/>
-        </p:nvSpPr>
-        <p:spPr>
-          <a:xfrm>
-            <a:off x="6080760" y="1389888"/>
-            <a:ext cx="22860" cy="4846320"/>
-          </a:xfrm>
-          <a:prstGeom prst="rect">
-            <a:avLst/>
-          </a:prstGeom>
-          <a:solidFill>
-            <a:srgbClr val="AEB7C4">
-              <a:alpha val="90000"/>
-            </a:srgbClr>
-          </a:solidFill>
-          <a:ln w="12700">
-            <a:solidFill>
-              <a:srgbClr val="AEB7C4">
-                <a:alpha val="0"/>
-              </a:srgbClr>
-            </a:solidFill>
-            <a:prstDash val="solid"/>
-          </a:ln>
-        </p:spPr>
-      </p:sp>
-      <p:sp>
-        <p:nvSpPr>
           <p:cNvPr id="15" name="Shape 13"/>
           <p:cNvSpPr/>
           <p:nvPr/>
         </p:nvSpPr>
         <p:spPr>
           <a:xfrm>
-            <a:off x="822960" y="1389888"/>
-            <a:ext cx="73152" cy="566928"/>
+            <a:off x="6272784" y="1737360"/>
+            <a:ext cx="73152" cy="841248"/>
           </a:xfrm>
           <a:prstGeom prst="rect">
             <a:avLst/>
@@ -14072,8 +13609,8 @@
         </p:nvSpPr>
         <p:spPr>
           <a:xfrm>
-            <a:off x="822960" y="2103120"/>
-            <a:ext cx="73152" cy="566928"/>
+            <a:off x="6272784" y="2779776"/>
+            <a:ext cx="73152" cy="841248"/>
           </a:xfrm>
           <a:prstGeom prst="rect">
             <a:avLst/>
@@ -14099,8 +13636,8 @@
         </p:nvSpPr>
         <p:spPr>
           <a:xfrm>
-            <a:off x="822960" y="2816352"/>
-            <a:ext cx="73152" cy="566928"/>
+            <a:off x="6272784" y="3822192"/>
+            <a:ext cx="73152" cy="841248"/>
           </a:xfrm>
           <a:prstGeom prst="rect">
             <a:avLst/>
@@ -14126,8 +13663,8 @@
         </p:nvSpPr>
         <p:spPr>
           <a:xfrm>
-            <a:off x="822960" y="3529584"/>
-            <a:ext cx="73152" cy="566928"/>
+            <a:off x="6272784" y="4864608"/>
+            <a:ext cx="73152" cy="841248"/>
           </a:xfrm>
           <a:prstGeom prst="rect">
             <a:avLst/>
@@ -14147,277 +13684,7 @@
       </p:sp>
       <p:sp>
         <p:nvSpPr>
-          <p:cNvPr id="19" name="Shape 17"/>
-          <p:cNvSpPr/>
-          <p:nvPr/>
-        </p:nvSpPr>
-        <p:spPr>
-          <a:xfrm>
-            <a:off x="822960" y="4242816"/>
-            <a:ext cx="73152" cy="566928"/>
-          </a:xfrm>
-          <a:prstGeom prst="rect">
-            <a:avLst/>
-          </a:prstGeom>
-          <a:solidFill>
-            <a:srgbClr val="6B7280"/>
-          </a:solidFill>
-          <a:ln w="12700">
-            <a:solidFill>
-              <a:srgbClr val="6B7280">
-                <a:alpha val="0"/>
-              </a:srgbClr>
-            </a:solidFill>
-            <a:prstDash val="solid"/>
-          </a:ln>
-        </p:spPr>
-      </p:sp>
-      <p:sp>
-        <p:nvSpPr>
-          <p:cNvPr id="20" name="Shape 18"/>
-          <p:cNvSpPr/>
-          <p:nvPr/>
-        </p:nvSpPr>
-        <p:spPr>
-          <a:xfrm>
-            <a:off x="822960" y="4956048"/>
-            <a:ext cx="73152" cy="566928"/>
-          </a:xfrm>
-          <a:prstGeom prst="rect">
-            <a:avLst/>
-          </a:prstGeom>
-          <a:solidFill>
-            <a:srgbClr val="C7D2FE"/>
-          </a:solidFill>
-          <a:ln w="12700">
-            <a:solidFill>
-              <a:srgbClr val="C7D2FE">
-                <a:alpha val="0"/>
-              </a:srgbClr>
-            </a:solidFill>
-            <a:prstDash val="solid"/>
-          </a:ln>
-        </p:spPr>
-      </p:sp>
-      <p:sp>
-        <p:nvSpPr>
-          <p:cNvPr id="21" name="Shape 19"/>
-          <p:cNvSpPr/>
-          <p:nvPr/>
-        </p:nvSpPr>
-        <p:spPr>
-          <a:xfrm>
-            <a:off x="822960" y="5669280"/>
-            <a:ext cx="73152" cy="566928"/>
-          </a:xfrm>
-          <a:prstGeom prst="rect">
-            <a:avLst/>
-          </a:prstGeom>
-          <a:solidFill>
-            <a:srgbClr val="6B7280"/>
-          </a:solidFill>
-          <a:ln w="12700">
-            <a:solidFill>
-              <a:srgbClr val="6B7280">
-                <a:alpha val="0"/>
-              </a:srgbClr>
-            </a:solidFill>
-            <a:prstDash val="solid"/>
-          </a:ln>
-        </p:spPr>
-      </p:sp>
-      <p:sp>
-        <p:nvSpPr>
-          <p:cNvPr id="22" name="Shape 20"/>
-          <p:cNvSpPr/>
-          <p:nvPr/>
-        </p:nvSpPr>
-        <p:spPr>
-          <a:xfrm>
-            <a:off x="6272784" y="1389888"/>
-            <a:ext cx="73152" cy="566928"/>
-          </a:xfrm>
-          <a:prstGeom prst="rect">
-            <a:avLst/>
-          </a:prstGeom>
-          <a:solidFill>
-            <a:srgbClr val="C7D2FE"/>
-          </a:solidFill>
-          <a:ln w="12700">
-            <a:solidFill>
-              <a:srgbClr val="C7D2FE">
-                <a:alpha val="0"/>
-              </a:srgbClr>
-            </a:solidFill>
-            <a:prstDash val="solid"/>
-          </a:ln>
-        </p:spPr>
-      </p:sp>
-      <p:sp>
-        <p:nvSpPr>
-          <p:cNvPr id="23" name="Shape 21"/>
-          <p:cNvSpPr/>
-          <p:nvPr/>
-        </p:nvSpPr>
-        <p:spPr>
-          <a:xfrm>
-            <a:off x="6272784" y="2103120"/>
-            <a:ext cx="73152" cy="566928"/>
-          </a:xfrm>
-          <a:prstGeom prst="rect">
-            <a:avLst/>
-          </a:prstGeom>
-          <a:solidFill>
-            <a:srgbClr val="6B7280"/>
-          </a:solidFill>
-          <a:ln w="12700">
-            <a:solidFill>
-              <a:srgbClr val="6B7280">
-                <a:alpha val="0"/>
-              </a:srgbClr>
-            </a:solidFill>
-            <a:prstDash val="solid"/>
-          </a:ln>
-        </p:spPr>
-      </p:sp>
-      <p:sp>
-        <p:nvSpPr>
-          <p:cNvPr id="24" name="Shape 22"/>
-          <p:cNvSpPr/>
-          <p:nvPr/>
-        </p:nvSpPr>
-        <p:spPr>
-          <a:xfrm>
-            <a:off x="6272784" y="2816352"/>
-            <a:ext cx="73152" cy="566928"/>
-          </a:xfrm>
-          <a:prstGeom prst="rect">
-            <a:avLst/>
-          </a:prstGeom>
-          <a:solidFill>
-            <a:srgbClr val="C7D2FE"/>
-          </a:solidFill>
-          <a:ln w="12700">
-            <a:solidFill>
-              <a:srgbClr val="C7D2FE">
-                <a:alpha val="0"/>
-              </a:srgbClr>
-            </a:solidFill>
-            <a:prstDash val="solid"/>
-          </a:ln>
-        </p:spPr>
-      </p:sp>
-      <p:sp>
-        <p:nvSpPr>
-          <p:cNvPr id="25" name="Shape 23"/>
-          <p:cNvSpPr/>
-          <p:nvPr/>
-        </p:nvSpPr>
-        <p:spPr>
-          <a:xfrm>
-            <a:off x="6272784" y="3529584"/>
-            <a:ext cx="73152" cy="566928"/>
-          </a:xfrm>
-          <a:prstGeom prst="rect">
-            <a:avLst/>
-          </a:prstGeom>
-          <a:solidFill>
-            <a:srgbClr val="6B7280"/>
-          </a:solidFill>
-          <a:ln w="12700">
-            <a:solidFill>
-              <a:srgbClr val="6B7280">
-                <a:alpha val="0"/>
-              </a:srgbClr>
-            </a:solidFill>
-            <a:prstDash val="solid"/>
-          </a:ln>
-        </p:spPr>
-      </p:sp>
-      <p:sp>
-        <p:nvSpPr>
-          <p:cNvPr id="26" name="Shape 24"/>
-          <p:cNvSpPr/>
-          <p:nvPr/>
-        </p:nvSpPr>
-        <p:spPr>
-          <a:xfrm>
-            <a:off x="6272784" y="4242816"/>
-            <a:ext cx="73152" cy="566928"/>
-          </a:xfrm>
-          <a:prstGeom prst="rect">
-            <a:avLst/>
-          </a:prstGeom>
-          <a:solidFill>
-            <a:srgbClr val="C7D2FE"/>
-          </a:solidFill>
-          <a:ln w="12700">
-            <a:solidFill>
-              <a:srgbClr val="C7D2FE">
-                <a:alpha val="0"/>
-              </a:srgbClr>
-            </a:solidFill>
-            <a:prstDash val="solid"/>
-          </a:ln>
-        </p:spPr>
-      </p:sp>
-      <p:sp>
-        <p:nvSpPr>
-          <p:cNvPr id="27" name="Shape 25"/>
-          <p:cNvSpPr/>
-          <p:nvPr/>
-        </p:nvSpPr>
-        <p:spPr>
-          <a:xfrm>
-            <a:off x="6272784" y="4956048"/>
-            <a:ext cx="73152" cy="566928"/>
-          </a:xfrm>
-          <a:prstGeom prst="rect">
-            <a:avLst/>
-          </a:prstGeom>
-          <a:solidFill>
-            <a:srgbClr val="6B7280"/>
-          </a:solidFill>
-          <a:ln w="12700">
-            <a:solidFill>
-              <a:srgbClr val="6B7280">
-                <a:alpha val="0"/>
-              </a:srgbClr>
-            </a:solidFill>
-            <a:prstDash val="solid"/>
-          </a:ln>
-        </p:spPr>
-      </p:sp>
-      <p:sp>
-        <p:nvSpPr>
-          <p:cNvPr id="28" name="Shape 26"/>
-          <p:cNvSpPr/>
-          <p:nvPr/>
-        </p:nvSpPr>
-        <p:spPr>
-          <a:xfrm>
-            <a:off x="6272784" y="5669280"/>
-            <a:ext cx="73152" cy="566928"/>
-          </a:xfrm>
-          <a:prstGeom prst="rect">
-            <a:avLst/>
-          </a:prstGeom>
-          <a:solidFill>
-            <a:srgbClr val="C7D2FE"/>
-          </a:solidFill>
-          <a:ln w="12700">
-            <a:solidFill>
-              <a:srgbClr val="C7D2FE">
-                <a:alpha val="0"/>
-              </a:srgbClr>
-            </a:solidFill>
-            <a:prstDash val="solid"/>
-          </a:ln>
-        </p:spPr>
-      </p:sp>
-      <p:sp>
-        <p:nvSpPr>
-          <p:cNvPr id="29" name="mdpr:1-2-0772f8:title:__title:1-2-0772f8"/>
+          <p:cNvPr id="19" name="mdpr:1-2-0772f8:title:__title:1-2-0772f8"/>
           <p:cNvSpPr txBox="1"/>
           <p:nvPr/>
         </p:nvSpPr>
@@ -14459,14 +13726,14 @@
       </p:sp>
       <p:sp>
         <p:nvSpPr>
-          <p:cNvPr id="30" name="mdpr:1-2-0772f8:toc-item-1:toc-item-1"/>
+          <p:cNvPr id="20" name="mdpr:1-2-0772f8:toc-item-1:toc-item-1"/>
           <p:cNvSpPr txBox="1"/>
           <p:nvPr/>
         </p:nvSpPr>
         <p:spPr>
           <a:xfrm>
-            <a:off x="1042416" y="1481328"/>
-            <a:ext cx="4645152" cy="384048"/>
+            <a:off x="1042416" y="1828800"/>
+            <a:ext cx="4645152" cy="658368"/>
           </a:xfrm>
           <a:prstGeom prst="rect">
             <a:avLst/>
@@ -14501,14 +13768,14 @@
       </p:sp>
       <p:sp>
         <p:nvSpPr>
-          <p:cNvPr id="31" name="mdpr:1-2-0772f8:toc-item-2:toc-item-2"/>
+          <p:cNvPr id="21" name="mdpr:1-2-0772f8:toc-item-2:toc-item-2"/>
           <p:cNvSpPr txBox="1"/>
           <p:nvPr/>
         </p:nvSpPr>
         <p:spPr>
           <a:xfrm>
-            <a:off x="1042416" y="2194560"/>
-            <a:ext cx="4645152" cy="384048"/>
+            <a:off x="1042416" y="2871216"/>
+            <a:ext cx="4645152" cy="658368"/>
           </a:xfrm>
           <a:prstGeom prst="rect">
             <a:avLst/>
@@ -14543,14 +13810,14 @@
       </p:sp>
       <p:sp>
         <p:nvSpPr>
-          <p:cNvPr id="32" name="mdpr:1-2-0772f8:toc-item-3:toc-item-3"/>
+          <p:cNvPr id="22" name="mdpr:1-2-0772f8:toc-item-3:toc-item-3"/>
           <p:cNvSpPr txBox="1"/>
           <p:nvPr/>
         </p:nvSpPr>
         <p:spPr>
           <a:xfrm>
-            <a:off x="1042416" y="2907792"/>
-            <a:ext cx="4645152" cy="384048"/>
+            <a:off x="1042416" y="3913632"/>
+            <a:ext cx="4645152" cy="658368"/>
           </a:xfrm>
           <a:prstGeom prst="rect">
             <a:avLst/>
@@ -14585,14 +13852,14 @@
       </p:sp>
       <p:sp>
         <p:nvSpPr>
-          <p:cNvPr id="33" name="mdpr:1-2-0772f8:toc-item-4:toc-item-4"/>
+          <p:cNvPr id="23" name="mdpr:1-2-0772f8:toc-item-4:toc-item-4"/>
           <p:cNvSpPr txBox="1"/>
           <p:nvPr/>
         </p:nvSpPr>
         <p:spPr>
           <a:xfrm>
-            <a:off x="1042416" y="3621024"/>
-            <a:ext cx="4645152" cy="384048"/>
+            <a:off x="1042416" y="4956048"/>
+            <a:ext cx="4645152" cy="658368"/>
           </a:xfrm>
           <a:prstGeom prst="rect">
             <a:avLst/>
@@ -14627,14 +13894,14 @@
       </p:sp>
       <p:sp>
         <p:nvSpPr>
-          <p:cNvPr id="34" name="mdpr:1-2-0772f8:toc-item-5:toc-item-5"/>
+          <p:cNvPr id="24" name="mdpr:1-2-0772f8:toc-item-5:toc-item-5"/>
           <p:cNvSpPr txBox="1"/>
           <p:nvPr/>
         </p:nvSpPr>
         <p:spPr>
           <a:xfrm>
-            <a:off x="1042416" y="4334256"/>
-            <a:ext cx="4645152" cy="384048"/>
+            <a:off x="6492240" y="1828800"/>
+            <a:ext cx="4645152" cy="658368"/>
           </a:xfrm>
           <a:prstGeom prst="rect">
             <a:avLst/>
@@ -14669,14 +13936,14 @@
       </p:sp>
       <p:sp>
         <p:nvSpPr>
-          <p:cNvPr id="35" name="mdpr:1-2-0772f8:toc-item-6:toc-item-6"/>
+          <p:cNvPr id="25" name="mdpr:1-2-0772f8:toc-item-6:toc-item-6"/>
           <p:cNvSpPr txBox="1"/>
           <p:nvPr/>
         </p:nvSpPr>
         <p:spPr>
           <a:xfrm>
-            <a:off x="1042416" y="5047488"/>
-            <a:ext cx="4645152" cy="384048"/>
+            <a:off x="6492240" y="2871216"/>
+            <a:ext cx="4645152" cy="658368"/>
           </a:xfrm>
           <a:prstGeom prst="rect">
             <a:avLst/>
@@ -14711,14 +13978,14 @@
       </p:sp>
       <p:sp>
         <p:nvSpPr>
-          <p:cNvPr id="36" name="mdpr:1-2-0772f8:toc-item-7:toc-item-7"/>
+          <p:cNvPr id="26" name="mdpr:1-2-0772f8:toc-item-7:toc-item-7"/>
           <p:cNvSpPr txBox="1"/>
           <p:nvPr/>
         </p:nvSpPr>
         <p:spPr>
           <a:xfrm>
-            <a:off x="1042416" y="5760720"/>
-            <a:ext cx="4645152" cy="384048"/>
+            <a:off x="6492240" y="3913632"/>
+            <a:ext cx="4645152" cy="658368"/>
           </a:xfrm>
           <a:prstGeom prst="rect">
             <a:avLst/>
@@ -14753,14 +14020,14 @@
       </p:sp>
       <p:sp>
         <p:nvSpPr>
-          <p:cNvPr id="37" name="mdpr:1-2-0772f8:toc-item-8:toc-item-8"/>
+          <p:cNvPr id="27" name="mdpr:1-2-0772f8:toc-item-8:toc-item-8"/>
           <p:cNvSpPr txBox="1"/>
           <p:nvPr/>
         </p:nvSpPr>
         <p:spPr>
           <a:xfrm>
-            <a:off x="6492240" y="1481328"/>
-            <a:ext cx="4645152" cy="384048"/>
+            <a:off x="6492240" y="4956048"/>
+            <a:ext cx="4645152" cy="658368"/>
           </a:xfrm>
           <a:prstGeom prst="rect">
             <a:avLst/>
@@ -14788,258 +14055,6 @@
                 <a:cs typeface="Pretendard" pitchFamily="34" charset="-120"/>
               </a:rPr>
               <a:t>08  Chart and Table Pair</a:t>
-            </a:r>
-            <a:endParaRPr lang="en-US" sz="1800" dirty="0"/>
-          </a:p>
-        </p:txBody>
-      </p:sp>
-      <p:sp>
-        <p:nvSpPr>
-          <p:cNvPr id="38" name="mdpr:1-2-0772f8:toc-item-9:toc-item-9"/>
-          <p:cNvSpPr txBox="1"/>
-          <p:nvPr/>
-        </p:nvSpPr>
-        <p:spPr>
-          <a:xfrm>
-            <a:off x="6492240" y="2194560"/>
-            <a:ext cx="4645152" cy="384048"/>
-          </a:xfrm>
-          <a:prstGeom prst="rect">
-            <a:avLst/>
-          </a:prstGeom>
-          <a:noFill/>
-          <a:ln/>
-        </p:spPr>
-        <p:txBody>
-          <a:bodyPr wrap="square" lIns="0" tIns="25400" rIns="25400" bIns="0" rtlCol="0" anchor="ctr"/>
-          <a:lstStyle/>
-          <a:p>
-            <a:pPr algn="ctr" indent="0" marL="0">
-              <a:lnSpc>
-                <a:spcPct val="120000"/>
-              </a:lnSpc>
-              <a:buNone/>
-            </a:pPr>
-            <a:r>
-              <a:rPr lang="en-US" sz="1800" dirty="0">
-                <a:solidFill>
-                  <a:srgbClr val="111111"/>
-                </a:solidFill>
-                <a:latin typeface="Pretendard" pitchFamily="34" charset="0"/>
-                <a:ea typeface="Pretendard" pitchFamily="34" charset="-122"/>
-                <a:cs typeface="Pretendard" pitchFamily="34" charset="-120"/>
-              </a:rPr>
-              <a:t>09  Editable Proof Objects</a:t>
-            </a:r>
-            <a:endParaRPr lang="en-US" sz="1800" dirty="0"/>
-          </a:p>
-        </p:txBody>
-      </p:sp>
-      <p:sp>
-        <p:nvSpPr>
-          <p:cNvPr id="39" name="mdpr:1-2-0772f8:toc-item-10:toc-item-10"/>
-          <p:cNvSpPr txBox="1"/>
-          <p:nvPr/>
-        </p:nvSpPr>
-        <p:spPr>
-          <a:xfrm>
-            <a:off x="6492240" y="2907792"/>
-            <a:ext cx="4645152" cy="384048"/>
-          </a:xfrm>
-          <a:prstGeom prst="rect">
-            <a:avLst/>
-          </a:prstGeom>
-          <a:noFill/>
-          <a:ln/>
-        </p:spPr>
-        <p:txBody>
-          <a:bodyPr wrap="square" lIns="0" tIns="25400" rIns="25400" bIns="0" rtlCol="0" anchor="ctr"/>
-          <a:lstStyle/>
-          <a:p>
-            <a:pPr algn="ctr" indent="0" marL="0">
-              <a:lnSpc>
-                <a:spcPct val="120000"/>
-              </a:lnSpc>
-              <a:buNone/>
-            </a:pPr>
-            <a:r>
-              <a:rPr lang="en-US" sz="1800" dirty="0">
-                <a:solidFill>
-                  <a:srgbClr val="111111"/>
-                </a:solidFill>
-                <a:latin typeface="Pretendard" pitchFamily="34" charset="0"/>
-                <a:ea typeface="Pretendard" pitchFamily="34" charset="-122"/>
-                <a:cs typeface="Pretendard" pitchFamily="34" charset="-120"/>
-              </a:rPr>
-              <a:t>10  Object Shape Grammar</a:t>
-            </a:r>
-            <a:endParaRPr lang="en-US" sz="1800" dirty="0"/>
-          </a:p>
-        </p:txBody>
-      </p:sp>
-      <p:sp>
-        <p:nvSpPr>
-          <p:cNvPr id="40" name="mdpr:1-2-0772f8:toc-item-11:toc-item-11"/>
-          <p:cNvSpPr txBox="1"/>
-          <p:nvPr/>
-        </p:nvSpPr>
-        <p:spPr>
-          <a:xfrm>
-            <a:off x="6492240" y="3621024"/>
-            <a:ext cx="4645152" cy="384048"/>
-          </a:xfrm>
-          <a:prstGeom prst="rect">
-            <a:avLst/>
-          </a:prstGeom>
-          <a:noFill/>
-          <a:ln/>
-        </p:spPr>
-        <p:txBody>
-          <a:bodyPr wrap="square" lIns="0" tIns="25400" rIns="25400" bIns="0" rtlCol="0" anchor="ctr"/>
-          <a:lstStyle/>
-          <a:p>
-            <a:pPr algn="ctr" indent="0" marL="0">
-              <a:lnSpc>
-                <a:spcPct val="120000"/>
-              </a:lnSpc>
-              <a:buNone/>
-            </a:pPr>
-            <a:r>
-              <a:rPr lang="en-US" sz="1800" dirty="0">
-                <a:solidFill>
-                  <a:srgbClr val="111111"/>
-                </a:solidFill>
-                <a:latin typeface="Pretendard" pitchFamily="34" charset="0"/>
-                <a:ea typeface="Pretendard" pitchFamily="34" charset="-122"/>
-                <a:cs typeface="Pretendard" pitchFamily="34" charset="-120"/>
-              </a:rPr>
-              <a:t>11  Icon and Text Aside</a:t>
-            </a:r>
-            <a:endParaRPr lang="en-US" sz="1800" dirty="0"/>
-          </a:p>
-        </p:txBody>
-      </p:sp>
-      <p:sp>
-        <p:nvSpPr>
-          <p:cNvPr id="41" name="mdpr:1-2-0772f8:toc-item-12:toc-item-12"/>
-          <p:cNvSpPr txBox="1"/>
-          <p:nvPr/>
-        </p:nvSpPr>
-        <p:spPr>
-          <a:xfrm>
-            <a:off x="6492240" y="4334256"/>
-            <a:ext cx="4645152" cy="384048"/>
-          </a:xfrm>
-          <a:prstGeom prst="rect">
-            <a:avLst/>
-          </a:prstGeom>
-          <a:noFill/>
-          <a:ln/>
-        </p:spPr>
-        <p:txBody>
-          <a:bodyPr wrap="square" lIns="0" tIns="25400" rIns="25400" bIns="0" rtlCol="0" anchor="ctr"/>
-          <a:lstStyle/>
-          <a:p>
-            <a:pPr algn="ctr" indent="0" marL="0">
-              <a:lnSpc>
-                <a:spcPct val="120000"/>
-              </a:lnSpc>
-              <a:buNone/>
-            </a:pPr>
-            <a:r>
-              <a:rPr lang="en-US" sz="1800" dirty="0">
-                <a:solidFill>
-                  <a:srgbClr val="111111"/>
-                </a:solidFill>
-                <a:latin typeface="Pretendard" pitchFamily="34" charset="0"/>
-                <a:ea typeface="Pretendard" pitchFamily="34" charset="-122"/>
-                <a:cs typeface="Pretendard" pitchFamily="34" charset="-120"/>
-              </a:rPr>
-              <a:t>12  Overflow Guard</a:t>
-            </a:r>
-            <a:endParaRPr lang="en-US" sz="1800" dirty="0"/>
-          </a:p>
-        </p:txBody>
-      </p:sp>
-      <p:sp>
-        <p:nvSpPr>
-          <p:cNvPr id="42" name="mdpr:1-2-0772f8:toc-item-13:toc-item-13"/>
-          <p:cNvSpPr txBox="1"/>
-          <p:nvPr/>
-        </p:nvSpPr>
-        <p:spPr>
-          <a:xfrm>
-            <a:off x="6492240" y="5047488"/>
-            <a:ext cx="4645152" cy="384048"/>
-          </a:xfrm>
-          <a:prstGeom prst="rect">
-            <a:avLst/>
-          </a:prstGeom>
-          <a:noFill/>
-          <a:ln/>
-        </p:spPr>
-        <p:txBody>
-          <a:bodyPr wrap="square" lIns="0" tIns="25400" rIns="25400" bIns="0" rtlCol="0" anchor="ctr"/>
-          <a:lstStyle/>
-          <a:p>
-            <a:pPr algn="ctr" indent="0" marL="0">
-              <a:lnSpc>
-                <a:spcPct val="120000"/>
-              </a:lnSpc>
-              <a:buNone/>
-            </a:pPr>
-            <a:r>
-              <a:rPr lang="en-US" sz="1800" dirty="0">
-                <a:solidFill>
-                  <a:srgbClr val="111111"/>
-                </a:solidFill>
-                <a:latin typeface="Pretendard" pitchFamily="34" charset="0"/>
-                <a:ea typeface="Pretendard" pitchFamily="34" charset="-122"/>
-                <a:cs typeface="Pretendard" pitchFamily="34" charset="-120"/>
-              </a:rPr>
-              <a:t>13  Image Safe Frame</a:t>
-            </a:r>
-            <a:endParaRPr lang="en-US" sz="1800" dirty="0"/>
-          </a:p>
-        </p:txBody>
-      </p:sp>
-      <p:sp>
-        <p:nvSpPr>
-          <p:cNvPr id="43" name="mdpr:1-2-0772f8:toc-item-14:toc-item-14"/>
-          <p:cNvSpPr txBox="1"/>
-          <p:nvPr/>
-        </p:nvSpPr>
-        <p:spPr>
-          <a:xfrm>
-            <a:off x="6492240" y="5760720"/>
-            <a:ext cx="4645152" cy="384048"/>
-          </a:xfrm>
-          <a:prstGeom prst="rect">
-            <a:avLst/>
-          </a:prstGeom>
-          <a:noFill/>
-          <a:ln/>
-        </p:spPr>
-        <p:txBody>
-          <a:bodyPr wrap="square" lIns="0" tIns="25400" rIns="25400" bIns="0" rtlCol="0" anchor="ctr"/>
-          <a:lstStyle/>
-          <a:p>
-            <a:pPr algn="ctr" indent="0" marL="0">
-              <a:lnSpc>
-                <a:spcPct val="120000"/>
-              </a:lnSpc>
-              <a:buNone/>
-            </a:pPr>
-            <a:r>
-              <a:rPr lang="en-US" sz="1800" dirty="0">
-                <a:solidFill>
-                  <a:srgbClr val="111111"/>
-                </a:solidFill>
-                <a:latin typeface="Pretendard" pitchFamily="34" charset="0"/>
-                <a:ea typeface="Pretendard" pitchFamily="34" charset="-122"/>
-                <a:cs typeface="Pretendard" pitchFamily="34" charset="-120"/>
-              </a:rPr>
-              <a:t>14  Mixed Object Packing</a:t>
             </a:r>
             <a:endParaRPr lang="en-US" sz="1800" dirty="0"/>
           </a:p>
@@ -15348,8 +14363,8 @@
         </p:nvSpPr>
         <p:spPr>
           <a:xfrm>
-            <a:off x="731520" y="1207008"/>
-            <a:ext cx="1325880" cy="54864"/>
+            <a:off x="914400" y="1463040"/>
+            <a:ext cx="10241280" cy="73152"/>
           </a:xfrm>
           <a:prstGeom prst="rect">
             <a:avLst/>
@@ -15369,61 +14384,7 @@
       </p:sp>
       <p:sp>
         <p:nvSpPr>
-          <p:cNvPr id="12" name="Shape 10"/>
-          <p:cNvSpPr/>
-          <p:nvPr/>
-        </p:nvSpPr>
-        <p:spPr>
-          <a:xfrm>
-            <a:off x="822960" y="1554480"/>
-            <a:ext cx="4937760" cy="73152"/>
-          </a:xfrm>
-          <a:prstGeom prst="rect">
-            <a:avLst/>
-          </a:prstGeom>
-          <a:solidFill>
-            <a:srgbClr val="6B7280"/>
-          </a:solidFill>
-          <a:ln w="12700">
-            <a:solidFill>
-              <a:srgbClr val="6B7280">
-                <a:alpha val="0"/>
-              </a:srgbClr>
-            </a:solidFill>
-            <a:prstDash val="solid"/>
-          </a:ln>
-        </p:spPr>
-      </p:sp>
-      <p:sp>
-        <p:nvSpPr>
-          <p:cNvPr id="13" name="Shape 11"/>
-          <p:cNvSpPr/>
-          <p:nvPr/>
-        </p:nvSpPr>
-        <p:spPr>
-          <a:xfrm>
-            <a:off x="6400800" y="1554480"/>
-            <a:ext cx="4937760" cy="73152"/>
-          </a:xfrm>
-          <a:prstGeom prst="rect">
-            <a:avLst/>
-          </a:prstGeom>
-          <a:solidFill>
-            <a:srgbClr val="6B7280"/>
-          </a:solidFill>
-          <a:ln w="12700">
-            <a:solidFill>
-              <a:srgbClr val="6B7280">
-                <a:alpha val="0"/>
-              </a:srgbClr>
-            </a:solidFill>
-            <a:prstDash val="solid"/>
-          </a:ln>
-        </p:spPr>
-      </p:sp>
-      <p:sp>
-        <p:nvSpPr>
-          <p:cNvPr id="14" name="mdpr:2-2-4f71ba:title:__title:2-2-4f71ba"/>
+          <p:cNvPr id="12" name="mdpr:2-2-4f71ba:title:__title:2-2-4f71ba"/>
           <p:cNvSpPr txBox="1"/>
           <p:nvPr/>
         </p:nvSpPr>
@@ -15457,7 +14418,24 @@
                 <a:ea typeface="Pretendard" pitchFamily="34" charset="-122"/>
                 <a:cs typeface="Pretendard" pitchFamily="34" charset="-120"/>
               </a:rPr>
-              <a:t>Object Shape Grammar (Cont. 2/2)</a:t>
+              <a:t>Object Shape Grammar</a:t>
+            </a:r>
+            <a:pPr algn="ctr" indent="0" marL="0">
+              <a:lnSpc>
+                <a:spcPct val="120000"/>
+              </a:lnSpc>
+              <a:buNone/>
+            </a:pPr>
+            <a:r>
+              <a:rPr lang="en-US" sz="2000" dirty="0">
+                <a:solidFill>
+                  <a:srgbClr val="8E8E8E"/>
+                </a:solidFill>
+                <a:latin typeface="Pretendard" pitchFamily="34" charset="0"/>
+                <a:ea typeface="Pretendard" pitchFamily="34" charset="-122"/>
+                <a:cs typeface="Pretendard" pitchFamily="34" charset="-120"/>
+              </a:rPr>
+              <a:t> (Cont. 2/2)</a:t>
             </a:r>
             <a:endParaRPr lang="en-US" sz="3400" dirty="0"/>
           </a:p>
@@ -15465,14 +14443,14 @@
       </p:sp>
       <p:sp>
         <p:nvSpPr>
-          <p:cNvPr id="15" name="mdpr:2-2-4f71ba:left:block-27-chunk-2"/>
+          <p:cNvPr id="13" name="mdpr:2-2-4f71ba:body:block-27-chunk-2"/>
           <p:cNvSpPr txBox="1"/>
           <p:nvPr/>
         </p:nvSpPr>
         <p:spPr>
           <a:xfrm>
-            <a:off x="896112" y="1664208"/>
-            <a:ext cx="4791456" cy="4169664"/>
+            <a:off x="987552" y="1572768"/>
+            <a:ext cx="10094976" cy="4261104"/>
           </a:xfrm>
           <a:prstGeom prst="rect">
             <a:avLst/>
@@ -15520,28 +14498,6 @@
             </a:r>
             <a:endParaRPr lang="en-US" sz="2200" dirty="0"/>
           </a:p>
-        </p:txBody>
-      </p:sp>
-      <p:sp>
-        <p:nvSpPr>
-          <p:cNvPr id="16" name="mdpr:2-2-4f71ba:right:block-27-chunk-2"/>
-          <p:cNvSpPr txBox="1"/>
-          <p:nvPr/>
-        </p:nvSpPr>
-        <p:spPr>
-          <a:xfrm>
-            <a:off x="6473952" y="1664208"/>
-            <a:ext cx="4791456" cy="4169664"/>
-          </a:xfrm>
-          <a:prstGeom prst="rect">
-            <a:avLst/>
-          </a:prstGeom>
-          <a:noFill/>
-          <a:ln/>
-        </p:spPr>
-        <p:txBody>
-          <a:bodyPr wrap="square" lIns="0" tIns="25400" rIns="25400" bIns="0" rtlCol="0" anchor="t"/>
-          <a:lstStyle/>
           <a:p>
             <a:pPr algn="l" indent="0" marL="0">
               <a:lnSpc>
@@ -15560,6 +14516,9 @@
               </a:rPr>
               <a:t>- Rounded panel</a:t>
             </a:r>
+            <a:endParaRPr lang="en-US" sz="2200" dirty="0"/>
+          </a:p>
+          <a:p>
             <a:pPr algn="l" indent="0" marL="0">
               <a:lnSpc>
                 <a:spcPct val="120000"/>
@@ -15876,36 +14835,9 @@
           </a:ln>
         </p:spPr>
       </p:sp>
-      <p:sp>
-        <p:nvSpPr>
-          <p:cNvPr id="11" name="Shape 9"/>
-          <p:cNvSpPr/>
-          <p:nvPr/>
-        </p:nvSpPr>
-        <p:spPr>
-          <a:xfrm>
-            <a:off x="731520" y="1207008"/>
-            <a:ext cx="1325880" cy="54864"/>
-          </a:xfrm>
-          <a:prstGeom prst="rect">
-            <a:avLst/>
-          </a:prstGeom>
-          <a:solidFill>
-            <a:srgbClr val="6B7280"/>
-          </a:solidFill>
-          <a:ln w="12700">
-            <a:solidFill>
-              <a:srgbClr val="6B7280">
-                <a:alpha val="0"/>
-              </a:srgbClr>
-            </a:solidFill>
-            <a:prstDash val="solid"/>
-          </a:ln>
-        </p:spPr>
-      </p:sp>
       <p:pic>
         <p:nvPicPr>
-          <p:cNvPr id="12" name="Image 0" descr="preencoded.png">    </p:cNvPr>
+          <p:cNvPr id="11" name="Image 0" descr="preencoded.png">    </p:cNvPr>
           <p:cNvPicPr>
             <a:picLocks noChangeAspect="1"/>
           </p:cNvPicPr>
@@ -15935,7 +14867,7 @@
       </p:pic>
       <p:sp>
         <p:nvSpPr>
-          <p:cNvPr id="13" name="Shape 10"/>
+          <p:cNvPr id="12" name="Shape 9"/>
           <p:cNvSpPr/>
           <p:nvPr/>
         </p:nvSpPr>
@@ -15971,7 +14903,7 @@
       </p:sp>
       <p:pic>
         <p:nvPicPr>
-          <p:cNvPr id="14" name="Image 1" descr="preencoded.png">    </p:cNvPr>
+          <p:cNvPr id="13" name="Image 1" descr="preencoded.png">    </p:cNvPr>
           <p:cNvPicPr>
             <a:picLocks noChangeAspect="1"/>
           </p:cNvPicPr>
@@ -16001,7 +14933,7 @@
       </p:pic>
       <p:sp>
         <p:nvSpPr>
-          <p:cNvPr id="15" name="Shape 11"/>
+          <p:cNvPr id="14" name="Shape 10"/>
           <p:cNvSpPr/>
           <p:nvPr/>
         </p:nvSpPr>
@@ -16037,7 +14969,7 @@
       </p:sp>
       <p:pic>
         <p:nvPicPr>
-          <p:cNvPr id="16" name="Image 2" descr="preencoded.png">    </p:cNvPr>
+          <p:cNvPr id="15" name="Image 2" descr="preencoded.png">    </p:cNvPr>
           <p:cNvPicPr>
             <a:picLocks noChangeAspect="1"/>
           </p:cNvPicPr>
@@ -16067,7 +14999,7 @@
       </p:pic>
       <p:sp>
         <p:nvSpPr>
-          <p:cNvPr id="17" name="Shape 12"/>
+          <p:cNvPr id="16" name="Shape 11"/>
           <p:cNvSpPr/>
           <p:nvPr/>
         </p:nvSpPr>
@@ -16103,7 +15035,7 @@
       </p:sp>
       <p:pic>
         <p:nvPicPr>
-          <p:cNvPr id="18" name="Image 3" descr="preencoded.png">    </p:cNvPr>
+          <p:cNvPr id="17" name="Image 3" descr="preencoded.png">    </p:cNvPr>
           <p:cNvPicPr>
             <a:picLocks noChangeAspect="1"/>
           </p:cNvPicPr>
@@ -16133,7 +15065,7 @@
       </p:pic>
       <p:sp>
         <p:nvSpPr>
-          <p:cNvPr id="19" name="Shape 13"/>
+          <p:cNvPr id="18" name="Shape 12"/>
           <p:cNvSpPr/>
           <p:nvPr/>
         </p:nvSpPr>
@@ -16169,7 +15101,7 @@
       </p:sp>
       <p:sp>
         <p:nvSpPr>
-          <p:cNvPr id="20" name="Shape 14"/>
+          <p:cNvPr id="19" name="Shape 13"/>
           <p:cNvSpPr/>
           <p:nvPr/>
         </p:nvSpPr>
@@ -16196,7 +15128,7 @@
       </p:sp>
       <p:sp>
         <p:nvSpPr>
-          <p:cNvPr id="21" name="Shape 15"/>
+          <p:cNvPr id="20" name="Shape 14"/>
           <p:cNvSpPr/>
           <p:nvPr/>
         </p:nvSpPr>
@@ -16223,7 +15155,7 @@
       </p:sp>
       <p:sp>
         <p:nvSpPr>
-          <p:cNvPr id="22" name="Shape 16"/>
+          <p:cNvPr id="21" name="Shape 15"/>
           <p:cNvSpPr/>
           <p:nvPr/>
         </p:nvSpPr>
@@ -16250,7 +15182,7 @@
       </p:sp>
       <p:sp>
         <p:nvSpPr>
-          <p:cNvPr id="23" name="Shape 17"/>
+          <p:cNvPr id="22" name="Shape 16"/>
           <p:cNvSpPr/>
           <p:nvPr/>
         </p:nvSpPr>
@@ -16277,7 +15209,7 @@
       </p:sp>
       <p:sp>
         <p:nvSpPr>
-          <p:cNvPr id="24" name="mdpr:icon-and-text-aside-8429fc:title:__title:icon-and-text-aside-8429fc"/>
+          <p:cNvPr id="23" name="mdpr:icon-and-text-aside-8429fc:title:__title:icon-and-text-aside-8429fc"/>
           <p:cNvSpPr txBox="1"/>
           <p:nvPr/>
         </p:nvSpPr>
@@ -16319,7 +15251,7 @@
       </p:sp>
       <p:sp>
         <p:nvSpPr>
-          <p:cNvPr id="25" name="mdpr:icon-and-text-aside-8429fc:item-1:block-29"/>
+          <p:cNvPr id="24" name="mdpr:icon-and-text-aside-8429fc:item-1:block-29"/>
           <p:cNvSpPr txBox="1"/>
           <p:nvPr/>
         </p:nvSpPr>
@@ -16378,7 +15310,7 @@
       </p:sp>
       <p:sp>
         <p:nvSpPr>
-          <p:cNvPr id="26" name="mdpr:icon-and-text-aside-8429fc:item-2:block-29"/>
+          <p:cNvPr id="25" name="mdpr:icon-and-text-aside-8429fc:item-2:block-29"/>
           <p:cNvSpPr txBox="1"/>
           <p:nvPr/>
         </p:nvSpPr>
@@ -16437,7 +15369,7 @@
       </p:sp>
       <p:sp>
         <p:nvSpPr>
-          <p:cNvPr id="27" name="mdpr:icon-and-text-aside-8429fc:item-3:block-29"/>
+          <p:cNvPr id="26" name="mdpr:icon-and-text-aside-8429fc:item-3:block-29"/>
           <p:cNvSpPr txBox="1"/>
           <p:nvPr/>
         </p:nvSpPr>
@@ -16496,7 +15428,7 @@
       </p:sp>
       <p:sp>
         <p:nvSpPr>
-          <p:cNvPr id="28" name="mdpr:icon-and-text-aside-8429fc:item-4:block-29"/>
+          <p:cNvPr id="27" name="mdpr:icon-and-text-aside-8429fc:item-4:block-29"/>
           <p:cNvSpPr txBox="1"/>
           <p:nvPr/>
         </p:nvSpPr>
@@ -16848,36 +15780,9 @@
           </a:ln>
         </p:spPr>
       </p:sp>
-      <p:sp>
-        <p:nvSpPr>
-          <p:cNvPr id="11" name="Shape 9"/>
-          <p:cNvSpPr/>
-          <p:nvPr/>
-        </p:nvSpPr>
-        <p:spPr>
-          <a:xfrm>
-            <a:off x="731520" y="1207008"/>
-            <a:ext cx="1325880" cy="54864"/>
-          </a:xfrm>
-          <a:prstGeom prst="rect">
-            <a:avLst/>
-          </a:prstGeom>
-          <a:solidFill>
-            <a:srgbClr val="6B7280"/>
-          </a:solidFill>
-          <a:ln w="12700">
-            <a:solidFill>
-              <a:srgbClr val="6B7280">
-                <a:alpha val="0"/>
-              </a:srgbClr>
-            </a:solidFill>
-            <a:prstDash val="solid"/>
-          </a:ln>
-        </p:spPr>
-      </p:sp>
       <p:pic>
         <p:nvPicPr>
-          <p:cNvPr id="12" name="Image 0" descr="preencoded.png">    </p:cNvPr>
+          <p:cNvPr id="11" name="Image 0" descr="preencoded.png">    </p:cNvPr>
           <p:cNvPicPr>
             <a:picLocks noChangeAspect="1"/>
           </p:cNvPicPr>
@@ -16907,7 +15812,7 @@
       </p:pic>
       <p:sp>
         <p:nvSpPr>
-          <p:cNvPr id="13" name="Shape 10"/>
+          <p:cNvPr id="12" name="Shape 9"/>
           <p:cNvSpPr/>
           <p:nvPr/>
         </p:nvSpPr>
@@ -16943,7 +15848,7 @@
       </p:sp>
       <p:pic>
         <p:nvPicPr>
-          <p:cNvPr id="14" name="Image 1" descr="preencoded.png">    </p:cNvPr>
+          <p:cNvPr id="13" name="Image 1" descr="preencoded.png">    </p:cNvPr>
           <p:cNvPicPr>
             <a:picLocks noChangeAspect="1"/>
           </p:cNvPicPr>
@@ -16973,7 +15878,7 @@
       </p:pic>
       <p:sp>
         <p:nvSpPr>
-          <p:cNvPr id="15" name="Shape 11"/>
+          <p:cNvPr id="14" name="Shape 10"/>
           <p:cNvSpPr/>
           <p:nvPr/>
         </p:nvSpPr>
@@ -17009,7 +15914,7 @@
       </p:sp>
       <p:pic>
         <p:nvPicPr>
-          <p:cNvPr id="16" name="Image 2" descr="preencoded.png">    </p:cNvPr>
+          <p:cNvPr id="15" name="Image 2" descr="preencoded.png">    </p:cNvPr>
           <p:cNvPicPr>
             <a:picLocks noChangeAspect="1"/>
           </p:cNvPicPr>
@@ -17039,7 +15944,7 @@
       </p:pic>
       <p:sp>
         <p:nvSpPr>
-          <p:cNvPr id="17" name="Shape 12"/>
+          <p:cNvPr id="16" name="Shape 11"/>
           <p:cNvSpPr/>
           <p:nvPr/>
         </p:nvSpPr>
@@ -17075,7 +15980,7 @@
       </p:sp>
       <p:pic>
         <p:nvPicPr>
-          <p:cNvPr id="18" name="Image 3" descr="preencoded.png">    </p:cNvPr>
+          <p:cNvPr id="17" name="Image 3" descr="preencoded.png">    </p:cNvPr>
           <p:cNvPicPr>
             <a:picLocks noChangeAspect="1"/>
           </p:cNvPicPr>
@@ -17105,7 +16010,7 @@
       </p:pic>
       <p:sp>
         <p:nvSpPr>
-          <p:cNvPr id="19" name="Shape 13"/>
+          <p:cNvPr id="18" name="Shape 12"/>
           <p:cNvSpPr/>
           <p:nvPr/>
         </p:nvSpPr>
@@ -17141,7 +16046,7 @@
       </p:sp>
       <p:sp>
         <p:nvSpPr>
-          <p:cNvPr id="20" name="Shape 14"/>
+          <p:cNvPr id="19" name="Shape 13"/>
           <p:cNvSpPr/>
           <p:nvPr/>
         </p:nvSpPr>
@@ -17168,7 +16073,7 @@
       </p:sp>
       <p:sp>
         <p:nvSpPr>
-          <p:cNvPr id="21" name="Shape 15"/>
+          <p:cNvPr id="20" name="Shape 14"/>
           <p:cNvSpPr/>
           <p:nvPr/>
         </p:nvSpPr>
@@ -17195,7 +16100,7 @@
       </p:sp>
       <p:sp>
         <p:nvSpPr>
-          <p:cNvPr id="22" name="Shape 16"/>
+          <p:cNvPr id="21" name="Shape 15"/>
           <p:cNvSpPr/>
           <p:nvPr/>
         </p:nvSpPr>
@@ -17222,7 +16127,7 @@
       </p:sp>
       <p:sp>
         <p:nvSpPr>
-          <p:cNvPr id="23" name="Shape 17"/>
+          <p:cNvPr id="22" name="Shape 16"/>
           <p:cNvSpPr/>
           <p:nvPr/>
         </p:nvSpPr>
@@ -17249,7 +16154,7 @@
       </p:sp>
       <p:sp>
         <p:nvSpPr>
-          <p:cNvPr id="24" name="mdpr:overflow-guard-f8d03e:title:__title:overflow-guard-f8d03e"/>
+          <p:cNvPr id="23" name="mdpr:overflow-guard-f8d03e:title:__title:overflow-guard-f8d03e"/>
           <p:cNvSpPr txBox="1"/>
           <p:nvPr/>
         </p:nvSpPr>
@@ -17291,7 +16196,7 @@
       </p:sp>
       <p:sp>
         <p:nvSpPr>
-          <p:cNvPr id="25" name="mdpr:overflow-guard-f8d03e:item-1:block-31"/>
+          <p:cNvPr id="24" name="mdpr:overflow-guard-f8d03e:item-1:block-31"/>
           <p:cNvSpPr txBox="1"/>
           <p:nvPr/>
         </p:nvSpPr>
@@ -17350,7 +16255,7 @@
       </p:sp>
       <p:sp>
         <p:nvSpPr>
-          <p:cNvPr id="26" name="mdpr:overflow-guard-f8d03e:item-2:block-31"/>
+          <p:cNvPr id="25" name="mdpr:overflow-guard-f8d03e:item-2:block-31"/>
           <p:cNvSpPr txBox="1"/>
           <p:nvPr/>
         </p:nvSpPr>
@@ -17409,7 +16314,7 @@
       </p:sp>
       <p:sp>
         <p:nvSpPr>
-          <p:cNvPr id="27" name="mdpr:overflow-guard-f8d03e:item-3:block-31"/>
+          <p:cNvPr id="26" name="mdpr:overflow-guard-f8d03e:item-3:block-31"/>
           <p:cNvSpPr txBox="1"/>
           <p:nvPr/>
         </p:nvSpPr>
@@ -17468,7 +16373,7 @@
       </p:sp>
       <p:sp>
         <p:nvSpPr>
-          <p:cNvPr id="28" name="mdpr:overflow-guard-f8d03e:item-4:block-31"/>
+          <p:cNvPr id="27" name="mdpr:overflow-guard-f8d03e:item-4:block-31"/>
           <p:cNvSpPr txBox="1"/>
           <p:nvPr/>
         </p:nvSpPr>
@@ -17820,36 +16725,9 @@
           </a:ln>
         </p:spPr>
       </p:sp>
-      <p:sp>
-        <p:nvSpPr>
-          <p:cNvPr id="11" name="Shape 9"/>
-          <p:cNvSpPr/>
-          <p:nvPr/>
-        </p:nvSpPr>
-        <p:spPr>
-          <a:xfrm>
-            <a:off x="731520" y="1207008"/>
-            <a:ext cx="1325880" cy="54864"/>
-          </a:xfrm>
-          <a:prstGeom prst="rect">
-            <a:avLst/>
-          </a:prstGeom>
-          <a:solidFill>
-            <a:srgbClr val="6B7280"/>
-          </a:solidFill>
-          <a:ln w="12700">
-            <a:solidFill>
-              <a:srgbClr val="6B7280">
-                <a:alpha val="0"/>
-              </a:srgbClr>
-            </a:solidFill>
-            <a:prstDash val="solid"/>
-          </a:ln>
-        </p:spPr>
-      </p:sp>
       <p:pic>
         <p:nvPicPr>
-          <p:cNvPr id="12" name="Image 0" descr="preencoded.png">    </p:cNvPr>
+          <p:cNvPr id="11" name="Image 0" descr="preencoded.png">    </p:cNvPr>
           <p:cNvPicPr>
             <a:picLocks noChangeAspect="1"/>
           </p:cNvPicPr>
@@ -17879,7 +16757,7 @@
       </p:pic>
       <p:sp>
         <p:nvSpPr>
-          <p:cNvPr id="13" name="Shape 10"/>
+          <p:cNvPr id="12" name="Shape 9"/>
           <p:cNvSpPr/>
           <p:nvPr/>
         </p:nvSpPr>
@@ -17915,7 +16793,7 @@
       </p:sp>
       <p:sp>
         <p:nvSpPr>
-          <p:cNvPr id="14" name="Shape 11"/>
+          <p:cNvPr id="13" name="Shape 10"/>
           <p:cNvSpPr/>
           <p:nvPr/>
         </p:nvSpPr>
@@ -17942,7 +16820,7 @@
       </p:sp>
       <p:sp>
         <p:nvSpPr>
-          <p:cNvPr id="15" name="mdpr:image-safe-frame-d4d6a4:title:__title:image-safe-frame-d4d6a4"/>
+          <p:cNvPr id="14" name="mdpr:image-safe-frame-d4d6a4:title:__title:image-safe-frame-d4d6a4"/>
           <p:cNvSpPr txBox="1"/>
           <p:nvPr/>
         </p:nvSpPr>
@@ -17984,7 +16862,7 @@
       </p:sp>
       <p:sp>
         <p:nvSpPr>
-          <p:cNvPr id="16" name="mdpr:image-safe-frame-d4d6a4:body:block-33-block-33-block-33"/>
+          <p:cNvPr id="15" name="mdpr:image-safe-frame-d4d6a4:body:block-33-block-33-block-33"/>
           <p:cNvSpPr txBox="1"/>
           <p:nvPr/>
         </p:nvSpPr>
@@ -18123,7 +17001,7 @@
       </p:sp>
       <p:pic>
         <p:nvPicPr>
-          <p:cNvPr id="17" name="mdpr:image-safe-frame-d4d6a4:image-1:block-34" descr="{&quot;mdpr&quot;:{&quot;slideId&quot;:&quot;image-safe-frame-d4d6a4&quot;,&quot;layoutSlideId&quot;:&quot;layout-image-safe-frame-d4d6a4&quot;,&quot;regionId&quot;:&quot;image-1&quot;,&quot;blockIds&quot;:[&quot;block-34&quot;],&quot;objectKind&quot;:&quot;native-image&quot;,&quot;role&quot;:&quot;image&quot;,&quot;editable&quot;:false}}">    </p:cNvPr>
+          <p:cNvPr id="16" name="mdpr:image-safe-frame-d4d6a4:image-1:block-34" descr="{&quot;mdpr&quot;:{&quot;slideId&quot;:&quot;image-safe-frame-d4d6a4&quot;,&quot;layoutSlideId&quot;:&quot;layout-image-safe-frame-d4d6a4&quot;,&quot;regionId&quot;:&quot;image-1&quot;,&quot;blockIds&quot;:[&quot;block-34&quot;],&quot;objectKind&quot;:&quot;native-image&quot;,&quot;role&quot;:&quot;image&quot;,&quot;editable&quot;:false}}">    </p:cNvPr>
           <p:cNvPicPr>
             <a:picLocks noChangeAspect="1"/>
           </p:cNvPicPr>
@@ -18446,36 +17324,9 @@
           </a:ln>
         </p:spPr>
       </p:sp>
-      <p:sp>
-        <p:nvSpPr>
-          <p:cNvPr id="11" name="Shape 9"/>
-          <p:cNvSpPr/>
-          <p:nvPr/>
-        </p:nvSpPr>
-        <p:spPr>
-          <a:xfrm>
-            <a:off x="731520" y="1207008"/>
-            <a:ext cx="1325880" cy="54864"/>
-          </a:xfrm>
-          <a:prstGeom prst="rect">
-            <a:avLst/>
-          </a:prstGeom>
-          <a:solidFill>
-            <a:srgbClr val="6B7280"/>
-          </a:solidFill>
-          <a:ln w="12700">
-            <a:solidFill>
-              <a:srgbClr val="6B7280">
-                <a:alpha val="0"/>
-              </a:srgbClr>
-            </a:solidFill>
-            <a:prstDash val="solid"/>
-          </a:ln>
-        </p:spPr>
-      </p:sp>
       <p:pic>
         <p:nvPicPr>
-          <p:cNvPr id="12" name="Image 0" descr="preencoded.png">    </p:cNvPr>
+          <p:cNvPr id="11" name="Image 0" descr="preencoded.png">    </p:cNvPr>
           <p:cNvPicPr>
             <a:picLocks noChangeAspect="1"/>
           </p:cNvPicPr>
@@ -18505,7 +17356,7 @@
       </p:pic>
       <p:sp>
         <p:nvSpPr>
-          <p:cNvPr id="13" name="Shape 10"/>
+          <p:cNvPr id="12" name="Shape 9"/>
           <p:cNvSpPr/>
           <p:nvPr/>
         </p:nvSpPr>
@@ -18541,7 +17392,7 @@
       </p:sp>
       <p:pic>
         <p:nvPicPr>
-          <p:cNvPr id="14" name="Image 1" descr="preencoded.png">    </p:cNvPr>
+          <p:cNvPr id="13" name="Image 1" descr="preencoded.png">    </p:cNvPr>
           <p:cNvPicPr>
             <a:picLocks noChangeAspect="1"/>
           </p:cNvPicPr>
@@ -18571,7 +17422,7 @@
       </p:pic>
       <p:sp>
         <p:nvSpPr>
-          <p:cNvPr id="15" name="Shape 11"/>
+          <p:cNvPr id="14" name="Shape 10"/>
           <p:cNvSpPr/>
           <p:nvPr/>
         </p:nvSpPr>
@@ -18607,7 +17458,7 @@
       </p:sp>
       <p:pic>
         <p:nvPicPr>
-          <p:cNvPr id="16" name="Image 2" descr="preencoded.png">    </p:cNvPr>
+          <p:cNvPr id="15" name="Image 2" descr="preencoded.png">    </p:cNvPr>
           <p:cNvPicPr>
             <a:picLocks noChangeAspect="1"/>
           </p:cNvPicPr>
@@ -18637,7 +17488,7 @@
       </p:pic>
       <p:sp>
         <p:nvSpPr>
-          <p:cNvPr id="17" name="Shape 12"/>
+          <p:cNvPr id="16" name="Shape 11"/>
           <p:cNvSpPr/>
           <p:nvPr/>
         </p:nvSpPr>
@@ -18673,7 +17524,7 @@
       </p:sp>
       <p:sp>
         <p:nvSpPr>
-          <p:cNvPr id="18" name="Shape 13"/>
+          <p:cNvPr id="17" name="Shape 12"/>
           <p:cNvSpPr/>
           <p:nvPr/>
         </p:nvSpPr>
@@ -18700,7 +17551,7 @@
       </p:sp>
       <p:sp>
         <p:nvSpPr>
-          <p:cNvPr id="19" name="mdpr:mixed-object-packing-438299:title:__title:mixed-object-packing-438299"/>
+          <p:cNvPr id="18" name="mdpr:mixed-object-packing-438299:title:__title:mixed-object-packing-438299"/>
           <p:cNvSpPr txBox="1"/>
           <p:nvPr/>
         </p:nvSpPr>
@@ -18742,7 +17593,7 @@
       </p:sp>
       <p:graphicFrame>
         <p:nvGraphicFramePr>
-          <p:cNvPr id="20" name="Chart 0" descr=""/>
+          <p:cNvPr id="19" name="Chart 0" descr=""/>
           <p:cNvGraphicFramePr/>
           <p:nvPr/>
         </p:nvGraphicFramePr>
@@ -19200,7 +18051,7 @@
       </p:graphicFrame>
       <p:sp>
         <p:nvSpPr>
-          <p:cNvPr id="22" name="mdpr:mixed-object-packing-438299:body:block-36"/>
+          <p:cNvPr id="21" name="mdpr:mixed-object-packing-438299:body:block-36"/>
           <p:cNvSpPr txBox="1"/>
           <p:nvPr/>
         </p:nvSpPr>
@@ -19299,7 +18150,7 @@
       </p:sp>
       <p:pic>
         <p:nvPicPr>
-          <p:cNvPr id="23" name="mdpr:mixed-object-packing-438299:image-1:block-39" descr="{&quot;mdpr&quot;:{&quot;slideId&quot;:&quot;mixed-object-packing-438299&quot;,&quot;layoutSlideId&quot;:&quot;layout-mixed-object-packing-438299&quot;,&quot;regionId&quot;:&quot;image-1&quot;,&quot;blockIds&quot;:[&quot;block-39&quot;],&quot;objectKind&quot;:&quot;native-image&quot;,&quot;role&quot;:&quot;image&quot;,&quot;editable&quot;:false}}">    </p:cNvPr>
+          <p:cNvPr id="22" name="mdpr:mixed-object-packing-438299:image-1:block-39" descr="{&quot;mdpr&quot;:{&quot;slideId&quot;:&quot;mixed-object-packing-438299&quot;,&quot;layoutSlideId&quot;:&quot;layout-mixed-object-packing-438299&quot;,&quot;regionId&quot;:&quot;image-1&quot;,&quot;blockIds&quot;:[&quot;block-39&quot;],&quot;objectKind&quot;:&quot;native-image&quot;,&quot;role&quot;:&quot;image&quot;,&quot;editable&quot;:false}}">    </p:cNvPr>
           <p:cNvPicPr>
             <a:picLocks noChangeAspect="1"/>
           </p:cNvPicPr>
@@ -19630,8 +18481,8 @@
         </p:nvSpPr>
         <p:spPr>
           <a:xfrm>
-            <a:off x="731520" y="1207008"/>
-            <a:ext cx="1325880" cy="54864"/>
+            <a:off x="822960" y="1938528"/>
+            <a:ext cx="73152" cy="2514600"/>
           </a:xfrm>
           <a:prstGeom prst="rect">
             <a:avLst/>
@@ -19649,222 +18500,22 @@
           </a:ln>
         </p:spPr>
       </p:sp>
-      <p:pic>
-        <p:nvPicPr>
-          <p:cNvPr id="12" name="Image 0" descr="preencoded.png">    </p:cNvPr>
-          <p:cNvPicPr>
-            <a:picLocks noChangeAspect="1"/>
-          </p:cNvPicPr>
-          <p:nvPr/>
-        </p:nvPicPr>
-        <p:blipFill>
-          <a:blip r:embed="rId1">
-            <a:extLst>
-              <a:ext uri="{96DAC541-7B7A-43D3-8B79-37D633B846F1}">
-                <asvg:svgBlip xmlns:asvg="http://schemas.microsoft.com/office/drawing/2016/SVG/main" r:embed="rId2"/>
-              </a:ext>
-            </a:extLst>
-          </a:blip>
-          <a:stretch>
-            <a:fillRect/>
-          </a:stretch>
-        </p:blipFill>
-        <p:spPr>
-          <a:xfrm>
-            <a:off x="914400" y="1865376"/>
-            <a:ext cx="10241280" cy="1024128"/>
-          </a:xfrm>
-          <a:prstGeom prst="rect">
-            <a:avLst/>
-          </a:prstGeom>
-        </p:spPr>
-      </p:pic>
-      <p:sp>
-        <p:nvSpPr>
-          <p:cNvPr id="13" name="Shape 10"/>
-          <p:cNvSpPr/>
-          <p:nvPr/>
-        </p:nvSpPr>
-        <p:spPr>
-          <a:xfrm>
-            <a:off x="914400" y="1865376"/>
-            <a:ext cx="10241280" cy="1024128"/>
-          </a:xfrm>
-          <a:prstGeom prst="rect">
-            <a:avLst/>
-          </a:prstGeom>
-          <a:solidFill>
-            <a:srgbClr val="FDFDFE">
-              <a:alpha val="0"/>
-            </a:srgbClr>
-          </a:solidFill>
-          <a:ln w="12700">
-            <a:solidFill>
-              <a:srgbClr val="AEB7C4">
-                <a:alpha val="0"/>
-              </a:srgbClr>
-            </a:solidFill>
-            <a:prstDash val="solid"/>
-          </a:ln>
-          <a:effectLst>
-            <a:outerShdw sx="100000" sy="100000" kx="0" ky="0" algn="bl" rotWithShape="0" blurRad="12700" dist="50800" dir="2700000">
-              <a:srgbClr val="000000">
-                <a:alpha val="8000"/>
-              </a:srgbClr>
-            </a:outerShdw>
-          </a:effectLst>
-        </p:spPr>
-      </p:sp>
-      <p:pic>
-        <p:nvPicPr>
-          <p:cNvPr id="14" name="Image 1" descr="preencoded.png">    </p:cNvPr>
-          <p:cNvPicPr>
-            <a:picLocks noChangeAspect="1"/>
-          </p:cNvPicPr>
-          <p:nvPr/>
-        </p:nvPicPr>
-        <p:blipFill>
-          <a:blip r:embed="rId3">
-            <a:extLst>
-              <a:ext uri="{96DAC541-7B7A-43D3-8B79-37D633B846F1}">
-                <asvg:svgBlip xmlns:asvg="http://schemas.microsoft.com/office/drawing/2016/SVG/main" r:embed="rId4"/>
-              </a:ext>
-            </a:extLst>
-          </a:blip>
-          <a:stretch>
-            <a:fillRect/>
-          </a:stretch>
-        </p:blipFill>
-        <p:spPr>
-          <a:xfrm>
-            <a:off x="914400" y="3191256"/>
-            <a:ext cx="10241280" cy="1024128"/>
-          </a:xfrm>
-          <a:prstGeom prst="rect">
-            <a:avLst/>
-          </a:prstGeom>
-        </p:spPr>
-      </p:pic>
-      <p:sp>
-        <p:nvSpPr>
-          <p:cNvPr id="15" name="Shape 11"/>
-          <p:cNvSpPr/>
-          <p:nvPr/>
-        </p:nvSpPr>
-        <p:spPr>
-          <a:xfrm>
-            <a:off x="914400" y="3191256"/>
-            <a:ext cx="10241280" cy="1024128"/>
-          </a:xfrm>
-          <a:prstGeom prst="rect">
-            <a:avLst/>
-          </a:prstGeom>
-          <a:solidFill>
-            <a:srgbClr val="FDFDFE">
-              <a:alpha val="0"/>
-            </a:srgbClr>
-          </a:solidFill>
-          <a:ln w="12700">
-            <a:solidFill>
-              <a:srgbClr val="AEB7C4">
-                <a:alpha val="0"/>
-              </a:srgbClr>
-            </a:solidFill>
-            <a:prstDash val="solid"/>
-          </a:ln>
-          <a:effectLst>
-            <a:outerShdw sx="100000" sy="100000" kx="0" ky="0" algn="bl" rotWithShape="0" blurRad="12700" dist="50800" dir="2700000">
-              <a:srgbClr val="000000">
-                <a:alpha val="8000"/>
-              </a:srgbClr>
-            </a:outerShdw>
-          </a:effectLst>
-        </p:spPr>
-      </p:sp>
-      <p:pic>
-        <p:nvPicPr>
-          <p:cNvPr id="16" name="Image 2" descr="preencoded.png">    </p:cNvPr>
-          <p:cNvPicPr>
-            <a:picLocks noChangeAspect="1"/>
-          </p:cNvPicPr>
-          <p:nvPr/>
-        </p:nvPicPr>
-        <p:blipFill>
-          <a:blip r:embed="rId5">
-            <a:extLst>
-              <a:ext uri="{96DAC541-7B7A-43D3-8B79-37D633B846F1}">
-                <asvg:svgBlip xmlns:asvg="http://schemas.microsoft.com/office/drawing/2016/SVG/main" r:embed="rId6"/>
-              </a:ext>
-            </a:extLst>
-          </a:blip>
-          <a:stretch>
-            <a:fillRect/>
-          </a:stretch>
-        </p:blipFill>
-        <p:spPr>
-          <a:xfrm>
-            <a:off x="914400" y="4507992"/>
-            <a:ext cx="10241280" cy="1024128"/>
-          </a:xfrm>
-          <a:prstGeom prst="rect">
-            <a:avLst/>
-          </a:prstGeom>
-        </p:spPr>
-      </p:pic>
-      <p:sp>
-        <p:nvSpPr>
-          <p:cNvPr id="17" name="Shape 12"/>
-          <p:cNvSpPr/>
-          <p:nvPr/>
-        </p:nvSpPr>
-        <p:spPr>
-          <a:xfrm>
-            <a:off x="914400" y="4507992"/>
-            <a:ext cx="10241280" cy="1024128"/>
-          </a:xfrm>
-          <a:prstGeom prst="rect">
-            <a:avLst/>
-          </a:prstGeom>
-          <a:solidFill>
-            <a:srgbClr val="FDFDFE">
-              <a:alpha val="0"/>
-            </a:srgbClr>
-          </a:solidFill>
-          <a:ln w="12700">
-            <a:solidFill>
-              <a:srgbClr val="AEB7C4">
-                <a:alpha val="0"/>
-              </a:srgbClr>
-            </a:solidFill>
-            <a:prstDash val="solid"/>
-          </a:ln>
-          <a:effectLst>
-            <a:outerShdw sx="100000" sy="100000" kx="0" ky="0" algn="bl" rotWithShape="0" blurRad="12700" dist="50800" dir="2700000">
-              <a:srgbClr val="000000">
-                <a:alpha val="8000"/>
-              </a:srgbClr>
-            </a:outerShdw>
-          </a:effectLst>
-        </p:spPr>
-      </p:sp>
-      <p:sp>
-        <p:nvSpPr>
-          <p:cNvPr id="18" name="Shape 13"/>
-          <p:cNvSpPr/>
-          <p:nvPr/>
-        </p:nvSpPr>
-        <p:spPr>
-          <a:xfrm>
-            <a:off x="786384" y="1956816"/>
-            <a:ext cx="32004" cy="3483864"/>
-          </a:xfrm>
-          <a:prstGeom prst="rect">
-            <a:avLst/>
-          </a:prstGeom>
-          <a:solidFill>
-            <a:srgbClr val="C7D2FE">
-              <a:alpha val="80000"/>
-            </a:srgbClr>
+      <p:sp>
+        <p:nvSpPr>
+          <p:cNvPr id="12" name="Shape 10"/>
+          <p:cNvSpPr/>
+          <p:nvPr/>
+        </p:nvSpPr>
+        <p:spPr>
+          <a:xfrm>
+            <a:off x="4343400" y="1938528"/>
+            <a:ext cx="73152" cy="2514600"/>
+          </a:xfrm>
+          <a:prstGeom prst="rect">
+            <a:avLst/>
+          </a:prstGeom>
+          <a:solidFill>
+            <a:srgbClr val="C7D2FE"/>
           </a:solidFill>
           <a:ln w="12700">
             <a:solidFill>
@@ -19878,14 +18529,14 @@
       </p:sp>
       <p:sp>
         <p:nvSpPr>
-          <p:cNvPr id="19" name="Shape 14"/>
-          <p:cNvSpPr/>
-          <p:nvPr/>
-        </p:nvSpPr>
-        <p:spPr>
-          <a:xfrm>
-            <a:off x="914400" y="1865376"/>
-            <a:ext cx="73152" cy="1024128"/>
+          <p:cNvPr id="13" name="Shape 11"/>
+          <p:cNvSpPr/>
+          <p:nvPr/>
+        </p:nvSpPr>
+        <p:spPr>
+          <a:xfrm>
+            <a:off x="7863840" y="1938528"/>
+            <a:ext cx="73152" cy="2514600"/>
           </a:xfrm>
           <a:prstGeom prst="rect">
             <a:avLst/>
@@ -19905,61 +18556,7 @@
       </p:sp>
       <p:sp>
         <p:nvSpPr>
-          <p:cNvPr id="20" name="Shape 15"/>
-          <p:cNvSpPr/>
-          <p:nvPr/>
-        </p:nvSpPr>
-        <p:spPr>
-          <a:xfrm>
-            <a:off x="914400" y="3191256"/>
-            <a:ext cx="73152" cy="1024128"/>
-          </a:xfrm>
-          <a:prstGeom prst="rect">
-            <a:avLst/>
-          </a:prstGeom>
-          <a:solidFill>
-            <a:srgbClr val="C7D2FE"/>
-          </a:solidFill>
-          <a:ln w="12700">
-            <a:solidFill>
-              <a:srgbClr val="C7D2FE">
-                <a:alpha val="0"/>
-              </a:srgbClr>
-            </a:solidFill>
-            <a:prstDash val="solid"/>
-          </a:ln>
-        </p:spPr>
-      </p:sp>
-      <p:sp>
-        <p:nvSpPr>
-          <p:cNvPr id="21" name="Shape 16"/>
-          <p:cNvSpPr/>
-          <p:nvPr/>
-        </p:nvSpPr>
-        <p:spPr>
-          <a:xfrm>
-            <a:off x="914400" y="4507992"/>
-            <a:ext cx="73152" cy="1024128"/>
-          </a:xfrm>
-          <a:prstGeom prst="rect">
-            <a:avLst/>
-          </a:prstGeom>
-          <a:solidFill>
-            <a:srgbClr val="6B7280"/>
-          </a:solidFill>
-          <a:ln w="12700">
-            <a:solidFill>
-              <a:srgbClr val="6B7280">
-                <a:alpha val="0"/>
-              </a:srgbClr>
-            </a:solidFill>
-            <a:prstDash val="solid"/>
-          </a:ln>
-        </p:spPr>
-      </p:sp>
-      <p:sp>
-        <p:nvSpPr>
-          <p:cNvPr id="22" name="mdpr:actions-output-review-326e07:title:__title:actions-output-review-326e07"/>
+          <p:cNvPr id="14" name="mdpr:actions-output-review-326e07:title:__title:actions-output-review-326e07"/>
           <p:cNvSpPr txBox="1"/>
           <p:nvPr/>
         </p:nvSpPr>
@@ -20001,14 +18598,14 @@
       </p:sp>
       <p:sp>
         <p:nvSpPr>
-          <p:cNvPr id="23" name="mdpr:actions-output-review-326e07:item-1:block-41"/>
+          <p:cNvPr id="15" name="mdpr:actions-output-review-326e07:item-1:block-41"/>
           <p:cNvSpPr txBox="1"/>
           <p:nvPr/>
         </p:nvSpPr>
         <p:spPr>
           <a:xfrm>
-            <a:off x="1133856" y="1957548"/>
-            <a:ext cx="9820656" cy="839785"/>
+            <a:off x="1042416" y="2103120"/>
+            <a:ext cx="2825496" cy="2185416"/>
           </a:xfrm>
           <a:prstGeom prst="rect">
             <a:avLst/>
@@ -20060,14 +18657,14 @@
       </p:sp>
       <p:sp>
         <p:nvSpPr>
-          <p:cNvPr id="24" name="mdpr:actions-output-review-326e07:item-2:block-41"/>
+          <p:cNvPr id="16" name="mdpr:actions-output-review-326e07:item-2:block-41"/>
           <p:cNvSpPr txBox="1"/>
           <p:nvPr/>
         </p:nvSpPr>
         <p:spPr>
           <a:xfrm>
-            <a:off x="1133856" y="3283428"/>
-            <a:ext cx="9820656" cy="839785"/>
+            <a:off x="4562856" y="2103120"/>
+            <a:ext cx="2825496" cy="2185416"/>
           </a:xfrm>
           <a:prstGeom prst="rect">
             <a:avLst/>
@@ -20119,14 +18716,14 @@
       </p:sp>
       <p:sp>
         <p:nvSpPr>
-          <p:cNvPr id="25" name="mdpr:actions-output-review-326e07:item-3:block-41"/>
+          <p:cNvPr id="17" name="mdpr:actions-output-review-326e07:item-3:block-41"/>
           <p:cNvSpPr txBox="1"/>
           <p:nvPr/>
         </p:nvSpPr>
         <p:spPr>
           <a:xfrm>
-            <a:off x="1133856" y="4600164"/>
-            <a:ext cx="9820656" cy="839785"/>
+            <a:off x="8083296" y="2103120"/>
+            <a:ext cx="2825496" cy="2185416"/>
           </a:xfrm>
           <a:prstGeom prst="rect">
             <a:avLst/>
@@ -20479,8 +19076,8 @@
         </p:nvSpPr>
         <p:spPr>
           <a:xfrm>
-            <a:off x="731520" y="1207008"/>
-            <a:ext cx="1325880" cy="54864"/>
+            <a:off x="822960" y="1737360"/>
+            <a:ext cx="73152" cy="841248"/>
           </a:xfrm>
           <a:prstGeom prst="rect">
             <a:avLst/>
@@ -20506,8 +19103,35 @@
         </p:nvSpPr>
         <p:spPr>
           <a:xfrm>
-            <a:off x="822960" y="3099816"/>
-            <a:ext cx="10515600" cy="45720"/>
+            <a:off x="822960" y="2779776"/>
+            <a:ext cx="73152" cy="841248"/>
+          </a:xfrm>
+          <a:prstGeom prst="rect">
+            <a:avLst/>
+          </a:prstGeom>
+          <a:solidFill>
+            <a:srgbClr val="C7D2FE"/>
+          </a:solidFill>
+          <a:ln w="12700">
+            <a:solidFill>
+              <a:srgbClr val="C7D2FE">
+                <a:alpha val="0"/>
+              </a:srgbClr>
+            </a:solidFill>
+            <a:prstDash val="solid"/>
+          </a:ln>
+        </p:spPr>
+      </p:sp>
+      <p:sp>
+        <p:nvSpPr>
+          <p:cNvPr id="13" name="Shape 11"/>
+          <p:cNvSpPr/>
+          <p:nvPr/>
+        </p:nvSpPr>
+        <p:spPr>
+          <a:xfrm>
+            <a:off x="822960" y="3822192"/>
+            <a:ext cx="73152" cy="841248"/>
           </a:xfrm>
           <a:prstGeom prst="rect">
             <a:avLst/>
@@ -20527,14 +19151,14 @@
       </p:sp>
       <p:sp>
         <p:nvSpPr>
-          <p:cNvPr id="13" name="Shape 11"/>
-          <p:cNvSpPr/>
-          <p:nvPr/>
-        </p:nvSpPr>
-        <p:spPr>
-          <a:xfrm>
-            <a:off x="822960" y="4288536"/>
-            <a:ext cx="2011680" cy="45720"/>
+          <p:cNvPr id="14" name="Shape 12"/>
+          <p:cNvSpPr/>
+          <p:nvPr/>
+        </p:nvSpPr>
+        <p:spPr>
+          <a:xfrm>
+            <a:off x="822960" y="4864608"/>
+            <a:ext cx="73152" cy="841248"/>
           </a:xfrm>
           <a:prstGeom prst="rect">
             <a:avLst/>
@@ -20554,13 +19178,13 @@
       </p:sp>
       <p:sp>
         <p:nvSpPr>
-          <p:cNvPr id="14" name="Shape 12"/>
-          <p:cNvSpPr/>
-          <p:nvPr/>
-        </p:nvSpPr>
-        <p:spPr>
-          <a:xfrm>
-            <a:off x="822960" y="3300984"/>
+          <p:cNvPr id="15" name="Shape 13"/>
+          <p:cNvSpPr/>
+          <p:nvPr/>
+        </p:nvSpPr>
+        <p:spPr>
+          <a:xfrm>
+            <a:off x="6272784" y="1737360"/>
             <a:ext cx="73152" cy="841248"/>
           </a:xfrm>
           <a:prstGeom prst="rect">
@@ -20581,7 +19205,61 @@
       </p:sp>
       <p:sp>
         <p:nvSpPr>
-          <p:cNvPr id="15" name="mdpr:2-2-7bfb60:title:__title:2-2-7bfb60"/>
+          <p:cNvPr id="16" name="Shape 14"/>
+          <p:cNvSpPr/>
+          <p:nvPr/>
+        </p:nvSpPr>
+        <p:spPr>
+          <a:xfrm>
+            <a:off x="6272784" y="2779776"/>
+            <a:ext cx="73152" cy="841248"/>
+          </a:xfrm>
+          <a:prstGeom prst="rect">
+            <a:avLst/>
+          </a:prstGeom>
+          <a:solidFill>
+            <a:srgbClr val="C7D2FE"/>
+          </a:solidFill>
+          <a:ln w="12700">
+            <a:solidFill>
+              <a:srgbClr val="C7D2FE">
+                <a:alpha val="0"/>
+              </a:srgbClr>
+            </a:solidFill>
+            <a:prstDash val="solid"/>
+          </a:ln>
+        </p:spPr>
+      </p:sp>
+      <p:sp>
+        <p:nvSpPr>
+          <p:cNvPr id="17" name="Shape 15"/>
+          <p:cNvSpPr/>
+          <p:nvPr/>
+        </p:nvSpPr>
+        <p:spPr>
+          <a:xfrm>
+            <a:off x="6272784" y="3822192"/>
+            <a:ext cx="73152" cy="841248"/>
+          </a:xfrm>
+          <a:prstGeom prst="rect">
+            <a:avLst/>
+          </a:prstGeom>
+          <a:solidFill>
+            <a:srgbClr val="6B7280"/>
+          </a:solidFill>
+          <a:ln w="12700">
+            <a:solidFill>
+              <a:srgbClr val="6B7280">
+                <a:alpha val="0"/>
+              </a:srgbClr>
+            </a:solidFill>
+            <a:prstDash val="solid"/>
+          </a:ln>
+        </p:spPr>
+      </p:sp>
+      <p:sp>
+        <p:nvSpPr>
+          <p:cNvPr id="18" name="mdpr:2-2-7bfb60:title:__title:2-2-7bfb60"/>
           <p:cNvSpPr txBox="1"/>
           <p:nvPr/>
         </p:nvSpPr>
@@ -20615,7 +19293,24 @@
                 <a:ea typeface="Pretendard" pitchFamily="34" charset="-122"/>
                 <a:cs typeface="Pretendard" pitchFamily="34" charset="-120"/>
               </a:rPr>
-              <a:t>Agenda (Cont. 2/2)</a:t>
+              <a:t>Agenda</a:t>
+            </a:r>
+            <a:pPr algn="ctr" indent="0" marL="0">
+              <a:lnSpc>
+                <a:spcPct val="120000"/>
+              </a:lnSpc>
+              <a:buNone/>
+            </a:pPr>
+            <a:r>
+              <a:rPr lang="en-US" sz="2300" dirty="0">
+                <a:solidFill>
+                  <a:srgbClr val="8E8E8E"/>
+                </a:solidFill>
+                <a:latin typeface="Pretendard" pitchFamily="34" charset="0"/>
+                <a:ea typeface="Pretendard" pitchFamily="34" charset="-122"/>
+                <a:cs typeface="Pretendard" pitchFamily="34" charset="-120"/>
+              </a:rPr>
+              <a:t> (Cont. 2/2)</a:t>
             </a:r>
             <a:endParaRPr lang="en-US" sz="3800" dirty="0"/>
           </a:p>
@@ -20623,14 +19318,14 @@
       </p:sp>
       <p:sp>
         <p:nvSpPr>
-          <p:cNvPr id="16" name="mdpr:2-2-7bfb60:toc-item-1:toc-item-15"/>
+          <p:cNvPr id="19" name="mdpr:2-2-7bfb60:toc-item-1:toc-item-9"/>
           <p:cNvSpPr txBox="1"/>
           <p:nvPr/>
         </p:nvSpPr>
         <p:spPr>
           <a:xfrm>
-            <a:off x="1042416" y="3392424"/>
-            <a:ext cx="10094976" cy="658368"/>
+            <a:off x="1042416" y="1828800"/>
+            <a:ext cx="4645152" cy="658368"/>
           </a:xfrm>
           <a:prstGeom prst="rect">
             <a:avLst/>
@@ -20649,7 +19344,7 @@
               <a:buNone/>
             </a:pPr>
             <a:r>
-              <a:rPr lang="en-US" sz="2200" dirty="0">
+              <a:rPr lang="en-US" sz="1800" dirty="0">
                 <a:solidFill>
                   <a:srgbClr val="111111"/>
                 </a:solidFill>
@@ -20657,9 +19352,261 @@
                 <a:ea typeface="Pretendard" pitchFamily="34" charset="-122"/>
                 <a:cs typeface="Pretendard" pitchFamily="34" charset="-120"/>
               </a:rPr>
-              <a:t>01  Actions Output Review</a:t>
+              <a:t>09  Editable Proof Objects</a:t>
             </a:r>
-            <a:endParaRPr lang="en-US" sz="2200" dirty="0"/>
+            <a:endParaRPr lang="en-US" sz="1800" dirty="0"/>
+          </a:p>
+        </p:txBody>
+      </p:sp>
+      <p:sp>
+        <p:nvSpPr>
+          <p:cNvPr id="20" name="mdpr:2-2-7bfb60:toc-item-2:toc-item-10"/>
+          <p:cNvSpPr txBox="1"/>
+          <p:nvPr/>
+        </p:nvSpPr>
+        <p:spPr>
+          <a:xfrm>
+            <a:off x="1042416" y="2871216"/>
+            <a:ext cx="4645152" cy="658368"/>
+          </a:xfrm>
+          <a:prstGeom prst="rect">
+            <a:avLst/>
+          </a:prstGeom>
+          <a:noFill/>
+          <a:ln/>
+        </p:spPr>
+        <p:txBody>
+          <a:bodyPr wrap="square" lIns="0" tIns="25400" rIns="25400" bIns="0" rtlCol="0" anchor="ctr"/>
+          <a:lstStyle/>
+          <a:p>
+            <a:pPr algn="ctr" indent="0" marL="0">
+              <a:lnSpc>
+                <a:spcPct val="120000"/>
+              </a:lnSpc>
+              <a:buNone/>
+            </a:pPr>
+            <a:r>
+              <a:rPr lang="en-US" sz="1800" dirty="0">
+                <a:solidFill>
+                  <a:srgbClr val="111111"/>
+                </a:solidFill>
+                <a:latin typeface="Pretendard" pitchFamily="34" charset="0"/>
+                <a:ea typeface="Pretendard" pitchFamily="34" charset="-122"/>
+                <a:cs typeface="Pretendard" pitchFamily="34" charset="-120"/>
+              </a:rPr>
+              <a:t>10  Object Shape Grammar</a:t>
+            </a:r>
+            <a:endParaRPr lang="en-US" sz="1800" dirty="0"/>
+          </a:p>
+        </p:txBody>
+      </p:sp>
+      <p:sp>
+        <p:nvSpPr>
+          <p:cNvPr id="21" name="mdpr:2-2-7bfb60:toc-item-3:toc-item-11"/>
+          <p:cNvSpPr txBox="1"/>
+          <p:nvPr/>
+        </p:nvSpPr>
+        <p:spPr>
+          <a:xfrm>
+            <a:off x="1042416" y="3913632"/>
+            <a:ext cx="4645152" cy="658368"/>
+          </a:xfrm>
+          <a:prstGeom prst="rect">
+            <a:avLst/>
+          </a:prstGeom>
+          <a:noFill/>
+          <a:ln/>
+        </p:spPr>
+        <p:txBody>
+          <a:bodyPr wrap="square" lIns="0" tIns="25400" rIns="25400" bIns="0" rtlCol="0" anchor="ctr"/>
+          <a:lstStyle/>
+          <a:p>
+            <a:pPr algn="ctr" indent="0" marL="0">
+              <a:lnSpc>
+                <a:spcPct val="120000"/>
+              </a:lnSpc>
+              <a:buNone/>
+            </a:pPr>
+            <a:r>
+              <a:rPr lang="en-US" sz="1800" dirty="0">
+                <a:solidFill>
+                  <a:srgbClr val="111111"/>
+                </a:solidFill>
+                <a:latin typeface="Pretendard" pitchFamily="34" charset="0"/>
+                <a:ea typeface="Pretendard" pitchFamily="34" charset="-122"/>
+                <a:cs typeface="Pretendard" pitchFamily="34" charset="-120"/>
+              </a:rPr>
+              <a:t>11  Icon and Text Aside</a:t>
+            </a:r>
+            <a:endParaRPr lang="en-US" sz="1800" dirty="0"/>
+          </a:p>
+        </p:txBody>
+      </p:sp>
+      <p:sp>
+        <p:nvSpPr>
+          <p:cNvPr id="22" name="mdpr:2-2-7bfb60:toc-item-4:toc-item-12"/>
+          <p:cNvSpPr txBox="1"/>
+          <p:nvPr/>
+        </p:nvSpPr>
+        <p:spPr>
+          <a:xfrm>
+            <a:off x="1042416" y="4956048"/>
+            <a:ext cx="4645152" cy="658368"/>
+          </a:xfrm>
+          <a:prstGeom prst="rect">
+            <a:avLst/>
+          </a:prstGeom>
+          <a:noFill/>
+          <a:ln/>
+        </p:spPr>
+        <p:txBody>
+          <a:bodyPr wrap="square" lIns="0" tIns="25400" rIns="25400" bIns="0" rtlCol="0" anchor="ctr"/>
+          <a:lstStyle/>
+          <a:p>
+            <a:pPr algn="ctr" indent="0" marL="0">
+              <a:lnSpc>
+                <a:spcPct val="120000"/>
+              </a:lnSpc>
+              <a:buNone/>
+            </a:pPr>
+            <a:r>
+              <a:rPr lang="en-US" sz="1800" dirty="0">
+                <a:solidFill>
+                  <a:srgbClr val="111111"/>
+                </a:solidFill>
+                <a:latin typeface="Pretendard" pitchFamily="34" charset="0"/>
+                <a:ea typeface="Pretendard" pitchFamily="34" charset="-122"/>
+                <a:cs typeface="Pretendard" pitchFamily="34" charset="-120"/>
+              </a:rPr>
+              <a:t>12  Overflow Guard</a:t>
+            </a:r>
+            <a:endParaRPr lang="en-US" sz="1800" dirty="0"/>
+          </a:p>
+        </p:txBody>
+      </p:sp>
+      <p:sp>
+        <p:nvSpPr>
+          <p:cNvPr id="23" name="mdpr:2-2-7bfb60:toc-item-5:toc-item-13"/>
+          <p:cNvSpPr txBox="1"/>
+          <p:nvPr/>
+        </p:nvSpPr>
+        <p:spPr>
+          <a:xfrm>
+            <a:off x="6492240" y="1828800"/>
+            <a:ext cx="4645152" cy="658368"/>
+          </a:xfrm>
+          <a:prstGeom prst="rect">
+            <a:avLst/>
+          </a:prstGeom>
+          <a:noFill/>
+          <a:ln/>
+        </p:spPr>
+        <p:txBody>
+          <a:bodyPr wrap="square" lIns="0" tIns="25400" rIns="25400" bIns="0" rtlCol="0" anchor="ctr"/>
+          <a:lstStyle/>
+          <a:p>
+            <a:pPr algn="ctr" indent="0" marL="0">
+              <a:lnSpc>
+                <a:spcPct val="120000"/>
+              </a:lnSpc>
+              <a:buNone/>
+            </a:pPr>
+            <a:r>
+              <a:rPr lang="en-US" sz="1800" dirty="0">
+                <a:solidFill>
+                  <a:srgbClr val="111111"/>
+                </a:solidFill>
+                <a:latin typeface="Pretendard" pitchFamily="34" charset="0"/>
+                <a:ea typeface="Pretendard" pitchFamily="34" charset="-122"/>
+                <a:cs typeface="Pretendard" pitchFamily="34" charset="-120"/>
+              </a:rPr>
+              <a:t>13  Image Safe Frame</a:t>
+            </a:r>
+            <a:endParaRPr lang="en-US" sz="1800" dirty="0"/>
+          </a:p>
+        </p:txBody>
+      </p:sp>
+      <p:sp>
+        <p:nvSpPr>
+          <p:cNvPr id="24" name="mdpr:2-2-7bfb60:toc-item-6:toc-item-14"/>
+          <p:cNvSpPr txBox="1"/>
+          <p:nvPr/>
+        </p:nvSpPr>
+        <p:spPr>
+          <a:xfrm>
+            <a:off x="6492240" y="2871216"/>
+            <a:ext cx="4645152" cy="658368"/>
+          </a:xfrm>
+          <a:prstGeom prst="rect">
+            <a:avLst/>
+          </a:prstGeom>
+          <a:noFill/>
+          <a:ln/>
+        </p:spPr>
+        <p:txBody>
+          <a:bodyPr wrap="square" lIns="0" tIns="25400" rIns="25400" bIns="0" rtlCol="0" anchor="ctr"/>
+          <a:lstStyle/>
+          <a:p>
+            <a:pPr algn="ctr" indent="0" marL="0">
+              <a:lnSpc>
+                <a:spcPct val="120000"/>
+              </a:lnSpc>
+              <a:buNone/>
+            </a:pPr>
+            <a:r>
+              <a:rPr lang="en-US" sz="1800" dirty="0">
+                <a:solidFill>
+                  <a:srgbClr val="111111"/>
+                </a:solidFill>
+                <a:latin typeface="Pretendard" pitchFamily="34" charset="0"/>
+                <a:ea typeface="Pretendard" pitchFamily="34" charset="-122"/>
+                <a:cs typeface="Pretendard" pitchFamily="34" charset="-120"/>
+              </a:rPr>
+              <a:t>14  Mixed Object Packing</a:t>
+            </a:r>
+            <a:endParaRPr lang="en-US" sz="1800" dirty="0"/>
+          </a:p>
+        </p:txBody>
+      </p:sp>
+      <p:sp>
+        <p:nvSpPr>
+          <p:cNvPr id="25" name="mdpr:2-2-7bfb60:toc-item-7:toc-item-15"/>
+          <p:cNvSpPr txBox="1"/>
+          <p:nvPr/>
+        </p:nvSpPr>
+        <p:spPr>
+          <a:xfrm>
+            <a:off x="6492240" y="3913632"/>
+            <a:ext cx="4645152" cy="658368"/>
+          </a:xfrm>
+          <a:prstGeom prst="rect">
+            <a:avLst/>
+          </a:prstGeom>
+          <a:noFill/>
+          <a:ln/>
+        </p:spPr>
+        <p:txBody>
+          <a:bodyPr wrap="square" lIns="0" tIns="25400" rIns="25400" bIns="0" rtlCol="0" anchor="ctr"/>
+          <a:lstStyle/>
+          <a:p>
+            <a:pPr algn="ctr" indent="0" marL="0">
+              <a:lnSpc>
+                <a:spcPct val="120000"/>
+              </a:lnSpc>
+              <a:buNone/>
+            </a:pPr>
+            <a:r>
+              <a:rPr lang="en-US" sz="1800" dirty="0">
+                <a:solidFill>
+                  <a:srgbClr val="111111"/>
+                </a:solidFill>
+                <a:latin typeface="Pretendard" pitchFamily="34" charset="0"/>
+                <a:ea typeface="Pretendard" pitchFamily="34" charset="-122"/>
+                <a:cs typeface="Pretendard" pitchFamily="34" charset="-120"/>
+              </a:rPr>
+              <a:t>15  Actions Output Review</a:t>
+            </a:r>
+            <a:endParaRPr lang="en-US" sz="1800" dirty="0"/>
           </a:p>
         </p:txBody>
       </p:sp>
@@ -20958,36 +19905,9 @@
           </a:ln>
         </p:spPr>
       </p:sp>
-      <p:sp>
-        <p:nvSpPr>
-          <p:cNvPr id="11" name="Shape 9"/>
-          <p:cNvSpPr/>
-          <p:nvPr/>
-        </p:nvSpPr>
-        <p:spPr>
-          <a:xfrm>
-            <a:off x="731520" y="1207008"/>
-            <a:ext cx="1325880" cy="54864"/>
-          </a:xfrm>
-          <a:prstGeom prst="rect">
-            <a:avLst/>
-          </a:prstGeom>
-          <a:solidFill>
-            <a:srgbClr val="6B7280"/>
-          </a:solidFill>
-          <a:ln w="12700">
-            <a:solidFill>
-              <a:srgbClr val="6B7280">
-                <a:alpha val="0"/>
-              </a:srgbClr>
-            </a:solidFill>
-            <a:prstDash val="solid"/>
-          </a:ln>
-        </p:spPr>
-      </p:sp>
       <p:pic>
         <p:nvPicPr>
-          <p:cNvPr id="12" name="Image 0" descr="preencoded.png">    </p:cNvPr>
+          <p:cNvPr id="11" name="Image 0" descr="preencoded.png">    </p:cNvPr>
           <p:cNvPicPr>
             <a:picLocks noChangeAspect="1"/>
           </p:cNvPicPr>
@@ -21017,7 +19937,7 @@
       </p:pic>
       <p:sp>
         <p:nvSpPr>
-          <p:cNvPr id="13" name="Shape 10"/>
+          <p:cNvPr id="12" name="Shape 9"/>
           <p:cNvSpPr/>
           <p:nvPr/>
         </p:nvSpPr>
@@ -21053,7 +19973,7 @@
       </p:sp>
       <p:sp>
         <p:nvSpPr>
-          <p:cNvPr id="14" name="Shape 11"/>
+          <p:cNvPr id="13" name="Shape 10"/>
           <p:cNvSpPr/>
           <p:nvPr/>
         </p:nvSpPr>
@@ -21082,7 +20002,7 @@
       </p:sp>
       <p:sp>
         <p:nvSpPr>
-          <p:cNvPr id="15" name="Shape 12"/>
+          <p:cNvPr id="14" name="Shape 11"/>
           <p:cNvSpPr/>
           <p:nvPr/>
         </p:nvSpPr>
@@ -21109,7 +20029,7 @@
       </p:sp>
       <p:sp>
         <p:nvSpPr>
-          <p:cNvPr id="16" name="mdpr:teaser-summary-7731dc:title:__title:teaser-summary-7731dc"/>
+          <p:cNvPr id="15" name="mdpr:teaser-summary-7731dc:title:__title:teaser-summary-7731dc"/>
           <p:cNvSpPr txBox="1"/>
           <p:nvPr/>
         </p:nvSpPr>
@@ -21151,7 +20071,7 @@
       </p:sp>
       <p:sp>
         <p:nvSpPr>
-          <p:cNvPr id="17" name="mdpr:teaser-summary-7731dc:key-message:block-3"/>
+          <p:cNvPr id="16" name="mdpr:teaser-summary-7731dc:key-message:block-3"/>
           <p:cNvSpPr txBox="1"/>
           <p:nvPr/>
         </p:nvSpPr>
@@ -21193,7 +20113,7 @@
       </p:sp>
       <p:sp>
         <p:nvSpPr>
-          <p:cNvPr id="18" name="mdpr:teaser-summary-7731dc:body:block-4"/>
+          <p:cNvPr id="17" name="mdpr:teaser-summary-7731dc:body:block-4"/>
           <p:cNvSpPr txBox="1"/>
           <p:nvPr/>
         </p:nvSpPr>
@@ -21673,8 +20593,8 @@
         </p:nvSpPr>
         <p:spPr>
           <a:xfrm>
-            <a:off x="731520" y="1207008"/>
-            <a:ext cx="1325880" cy="54864"/>
+            <a:off x="822960" y="1938528"/>
+            <a:ext cx="73152" cy="2514600"/>
           </a:xfrm>
           <a:prstGeom prst="rect">
             <a:avLst/>
@@ -21692,222 +20612,22 @@
           </a:ln>
         </p:spPr>
       </p:sp>
-      <p:pic>
-        <p:nvPicPr>
-          <p:cNvPr id="12" name="Image 0" descr="preencoded.png">    </p:cNvPr>
-          <p:cNvPicPr>
-            <a:picLocks noChangeAspect="1"/>
-          </p:cNvPicPr>
-          <p:nvPr/>
-        </p:nvPicPr>
-        <p:blipFill>
-          <a:blip r:embed="rId1">
-            <a:extLst>
-              <a:ext uri="{96DAC541-7B7A-43D3-8B79-37D633B846F1}">
-                <asvg:svgBlip xmlns:asvg="http://schemas.microsoft.com/office/drawing/2016/SVG/main" r:embed="rId2"/>
-              </a:ext>
-            </a:extLst>
-          </a:blip>
-          <a:stretch>
-            <a:fillRect/>
-          </a:stretch>
-        </p:blipFill>
-        <p:spPr>
-          <a:xfrm>
-            <a:off x="914400" y="1865376"/>
-            <a:ext cx="10241280" cy="1024128"/>
-          </a:xfrm>
-          <a:prstGeom prst="rect">
-            <a:avLst/>
-          </a:prstGeom>
-        </p:spPr>
-      </p:pic>
-      <p:sp>
-        <p:nvSpPr>
-          <p:cNvPr id="13" name="Shape 10"/>
-          <p:cNvSpPr/>
-          <p:nvPr/>
-        </p:nvSpPr>
-        <p:spPr>
-          <a:xfrm>
-            <a:off x="914400" y="1865376"/>
-            <a:ext cx="10241280" cy="1024128"/>
-          </a:xfrm>
-          <a:prstGeom prst="rect">
-            <a:avLst/>
-          </a:prstGeom>
-          <a:solidFill>
-            <a:srgbClr val="FDFDFE">
-              <a:alpha val="0"/>
-            </a:srgbClr>
-          </a:solidFill>
-          <a:ln w="12700">
-            <a:solidFill>
-              <a:srgbClr val="AEB7C4">
-                <a:alpha val="0"/>
-              </a:srgbClr>
-            </a:solidFill>
-            <a:prstDash val="solid"/>
-          </a:ln>
-          <a:effectLst>
-            <a:outerShdw sx="100000" sy="100000" kx="0" ky="0" algn="bl" rotWithShape="0" blurRad="12700" dist="50800" dir="2700000">
-              <a:srgbClr val="000000">
-                <a:alpha val="8000"/>
-              </a:srgbClr>
-            </a:outerShdw>
-          </a:effectLst>
-        </p:spPr>
-      </p:sp>
-      <p:pic>
-        <p:nvPicPr>
-          <p:cNvPr id="14" name="Image 1" descr="preencoded.png">    </p:cNvPr>
-          <p:cNvPicPr>
-            <a:picLocks noChangeAspect="1"/>
-          </p:cNvPicPr>
-          <p:nvPr/>
-        </p:nvPicPr>
-        <p:blipFill>
-          <a:blip r:embed="rId3">
-            <a:extLst>
-              <a:ext uri="{96DAC541-7B7A-43D3-8B79-37D633B846F1}">
-                <asvg:svgBlip xmlns:asvg="http://schemas.microsoft.com/office/drawing/2016/SVG/main" r:embed="rId4"/>
-              </a:ext>
-            </a:extLst>
-          </a:blip>
-          <a:stretch>
-            <a:fillRect/>
-          </a:stretch>
-        </p:blipFill>
-        <p:spPr>
-          <a:xfrm>
-            <a:off x="914400" y="3191256"/>
-            <a:ext cx="10241280" cy="1024128"/>
-          </a:xfrm>
-          <a:prstGeom prst="rect">
-            <a:avLst/>
-          </a:prstGeom>
-        </p:spPr>
-      </p:pic>
-      <p:sp>
-        <p:nvSpPr>
-          <p:cNvPr id="15" name="Shape 11"/>
-          <p:cNvSpPr/>
-          <p:nvPr/>
-        </p:nvSpPr>
-        <p:spPr>
-          <a:xfrm>
-            <a:off x="914400" y="3191256"/>
-            <a:ext cx="10241280" cy="1024128"/>
-          </a:xfrm>
-          <a:prstGeom prst="rect">
-            <a:avLst/>
-          </a:prstGeom>
-          <a:solidFill>
-            <a:srgbClr val="FDFDFE">
-              <a:alpha val="0"/>
-            </a:srgbClr>
-          </a:solidFill>
-          <a:ln w="12700">
-            <a:solidFill>
-              <a:srgbClr val="AEB7C4">
-                <a:alpha val="0"/>
-              </a:srgbClr>
-            </a:solidFill>
-            <a:prstDash val="solid"/>
-          </a:ln>
-          <a:effectLst>
-            <a:outerShdw sx="100000" sy="100000" kx="0" ky="0" algn="bl" rotWithShape="0" blurRad="12700" dist="50800" dir="2700000">
-              <a:srgbClr val="000000">
-                <a:alpha val="8000"/>
-              </a:srgbClr>
-            </a:outerShdw>
-          </a:effectLst>
-        </p:spPr>
-      </p:sp>
-      <p:pic>
-        <p:nvPicPr>
-          <p:cNvPr id="16" name="Image 2" descr="preencoded.png">    </p:cNvPr>
-          <p:cNvPicPr>
-            <a:picLocks noChangeAspect="1"/>
-          </p:cNvPicPr>
-          <p:nvPr/>
-        </p:nvPicPr>
-        <p:blipFill>
-          <a:blip r:embed="rId5">
-            <a:extLst>
-              <a:ext uri="{96DAC541-7B7A-43D3-8B79-37D633B846F1}">
-                <asvg:svgBlip xmlns:asvg="http://schemas.microsoft.com/office/drawing/2016/SVG/main" r:embed="rId6"/>
-              </a:ext>
-            </a:extLst>
-          </a:blip>
-          <a:stretch>
-            <a:fillRect/>
-          </a:stretch>
-        </p:blipFill>
-        <p:spPr>
-          <a:xfrm>
-            <a:off x="914400" y="4507992"/>
-            <a:ext cx="10241280" cy="1024128"/>
-          </a:xfrm>
-          <a:prstGeom prst="rect">
-            <a:avLst/>
-          </a:prstGeom>
-        </p:spPr>
-      </p:pic>
-      <p:sp>
-        <p:nvSpPr>
-          <p:cNvPr id="17" name="Shape 12"/>
-          <p:cNvSpPr/>
-          <p:nvPr/>
-        </p:nvSpPr>
-        <p:spPr>
-          <a:xfrm>
-            <a:off x="914400" y="4507992"/>
-            <a:ext cx="10241280" cy="1024128"/>
-          </a:xfrm>
-          <a:prstGeom prst="rect">
-            <a:avLst/>
-          </a:prstGeom>
-          <a:solidFill>
-            <a:srgbClr val="FDFDFE">
-              <a:alpha val="0"/>
-            </a:srgbClr>
-          </a:solidFill>
-          <a:ln w="12700">
-            <a:solidFill>
-              <a:srgbClr val="AEB7C4">
-                <a:alpha val="0"/>
-              </a:srgbClr>
-            </a:solidFill>
-            <a:prstDash val="solid"/>
-          </a:ln>
-          <a:effectLst>
-            <a:outerShdw sx="100000" sy="100000" kx="0" ky="0" algn="bl" rotWithShape="0" blurRad="12700" dist="50800" dir="2700000">
-              <a:srgbClr val="000000">
-                <a:alpha val="8000"/>
-              </a:srgbClr>
-            </a:outerShdw>
-          </a:effectLst>
-        </p:spPr>
-      </p:sp>
-      <p:sp>
-        <p:nvSpPr>
-          <p:cNvPr id="18" name="Shape 13"/>
-          <p:cNvSpPr/>
-          <p:nvPr/>
-        </p:nvSpPr>
-        <p:spPr>
-          <a:xfrm>
-            <a:off x="786384" y="1956816"/>
-            <a:ext cx="32004" cy="3483864"/>
-          </a:xfrm>
-          <a:prstGeom prst="rect">
-            <a:avLst/>
-          </a:prstGeom>
-          <a:solidFill>
-            <a:srgbClr val="C7D2FE">
-              <a:alpha val="80000"/>
-            </a:srgbClr>
+      <p:sp>
+        <p:nvSpPr>
+          <p:cNvPr id="12" name="Shape 10"/>
+          <p:cNvSpPr/>
+          <p:nvPr/>
+        </p:nvSpPr>
+        <p:spPr>
+          <a:xfrm>
+            <a:off x="4343400" y="1938528"/>
+            <a:ext cx="73152" cy="2514600"/>
+          </a:xfrm>
+          <a:prstGeom prst="rect">
+            <a:avLst/>
+          </a:prstGeom>
+          <a:solidFill>
+            <a:srgbClr val="C7D2FE"/>
           </a:solidFill>
           <a:ln w="12700">
             <a:solidFill>
@@ -21921,14 +20641,14 @@
       </p:sp>
       <p:sp>
         <p:nvSpPr>
-          <p:cNvPr id="19" name="Shape 14"/>
-          <p:cNvSpPr/>
-          <p:nvPr/>
-        </p:nvSpPr>
-        <p:spPr>
-          <a:xfrm>
-            <a:off x="914400" y="1865376"/>
-            <a:ext cx="73152" cy="1024128"/>
+          <p:cNvPr id="13" name="Shape 11"/>
+          <p:cNvSpPr/>
+          <p:nvPr/>
+        </p:nvSpPr>
+        <p:spPr>
+          <a:xfrm>
+            <a:off x="7863840" y="1938528"/>
+            <a:ext cx="73152" cy="2514600"/>
           </a:xfrm>
           <a:prstGeom prst="rect">
             <a:avLst/>
@@ -21948,61 +20668,7 @@
       </p:sp>
       <p:sp>
         <p:nvSpPr>
-          <p:cNvPr id="20" name="Shape 15"/>
-          <p:cNvSpPr/>
-          <p:nvPr/>
-        </p:nvSpPr>
-        <p:spPr>
-          <a:xfrm>
-            <a:off x="914400" y="3191256"/>
-            <a:ext cx="73152" cy="1024128"/>
-          </a:xfrm>
-          <a:prstGeom prst="rect">
-            <a:avLst/>
-          </a:prstGeom>
-          <a:solidFill>
-            <a:srgbClr val="C7D2FE"/>
-          </a:solidFill>
-          <a:ln w="12700">
-            <a:solidFill>
-              <a:srgbClr val="C7D2FE">
-                <a:alpha val="0"/>
-              </a:srgbClr>
-            </a:solidFill>
-            <a:prstDash val="solid"/>
-          </a:ln>
-        </p:spPr>
-      </p:sp>
-      <p:sp>
-        <p:nvSpPr>
-          <p:cNvPr id="21" name="Shape 16"/>
-          <p:cNvSpPr/>
-          <p:nvPr/>
-        </p:nvSpPr>
-        <p:spPr>
-          <a:xfrm>
-            <a:off x="914400" y="4507992"/>
-            <a:ext cx="73152" cy="1024128"/>
-          </a:xfrm>
-          <a:prstGeom prst="rect">
-            <a:avLst/>
-          </a:prstGeom>
-          <a:solidFill>
-            <a:srgbClr val="6B7280"/>
-          </a:solidFill>
-          <a:ln w="12700">
-            <a:solidFill>
-              <a:srgbClr val="6B7280">
-                <a:alpha val="0"/>
-              </a:srgbClr>
-            </a:solidFill>
-            <a:prstDash val="solid"/>
-          </a:ln>
-        </p:spPr>
-      </p:sp>
-      <p:sp>
-        <p:nvSpPr>
-          <p:cNvPr id="22" name="mdpr:1-2-32ac08:title:__title:1-2-32ac08"/>
+          <p:cNvPr id="14" name="mdpr:1-2-32ac08:title:__title:1-2-32ac08"/>
           <p:cNvSpPr txBox="1"/>
           <p:nvPr/>
         </p:nvSpPr>
@@ -22044,14 +20710,14 @@
       </p:sp>
       <p:sp>
         <p:nvSpPr>
-          <p:cNvPr id="23" name="mdpr:1-2-32ac08:item-1:block-6-chunk-1"/>
+          <p:cNvPr id="15" name="mdpr:1-2-32ac08:item-1:block-6-chunk-1"/>
           <p:cNvSpPr txBox="1"/>
           <p:nvPr/>
         </p:nvSpPr>
         <p:spPr>
           <a:xfrm>
-            <a:off x="1133856" y="1957548"/>
-            <a:ext cx="9820656" cy="839785"/>
+            <a:off x="1042416" y="2103120"/>
+            <a:ext cx="2825496" cy="2185416"/>
           </a:xfrm>
           <a:prstGeom prst="rect">
             <a:avLst/>
@@ -22103,14 +20769,14 @@
       </p:sp>
       <p:sp>
         <p:nvSpPr>
-          <p:cNvPr id="24" name="mdpr:1-2-32ac08:item-2:block-6-chunk-1"/>
+          <p:cNvPr id="16" name="mdpr:1-2-32ac08:item-2:block-6-chunk-1"/>
           <p:cNvSpPr txBox="1"/>
           <p:nvPr/>
         </p:nvSpPr>
         <p:spPr>
           <a:xfrm>
-            <a:off x="1133856" y="3283428"/>
-            <a:ext cx="9820656" cy="839785"/>
+            <a:off x="4562856" y="2103120"/>
+            <a:ext cx="2825496" cy="2185416"/>
           </a:xfrm>
           <a:prstGeom prst="rect">
             <a:avLst/>
@@ -22162,14 +20828,14 @@
       </p:sp>
       <p:sp>
         <p:nvSpPr>
-          <p:cNvPr id="25" name="mdpr:1-2-32ac08:item-3:block-6-chunk-1"/>
+          <p:cNvPr id="17" name="mdpr:1-2-32ac08:item-3:block-6-chunk-1"/>
           <p:cNvSpPr txBox="1"/>
           <p:nvPr/>
         </p:nvSpPr>
         <p:spPr>
           <a:xfrm>
-            <a:off x="1133856" y="4600164"/>
-            <a:ext cx="9820656" cy="839785"/>
+            <a:off x="8083296" y="2103120"/>
+            <a:ext cx="2825496" cy="2185416"/>
           </a:xfrm>
           <a:prstGeom prst="rect">
             <a:avLst/>
@@ -22516,88 +21182,7 @@
       </p:sp>
       <p:sp>
         <p:nvSpPr>
-          <p:cNvPr id="11" name="Shape 9"/>
-          <p:cNvSpPr/>
-          <p:nvPr/>
-        </p:nvSpPr>
-        <p:spPr>
-          <a:xfrm>
-            <a:off x="731520" y="1207008"/>
-            <a:ext cx="1325880" cy="54864"/>
-          </a:xfrm>
-          <a:prstGeom prst="rect">
-            <a:avLst/>
-          </a:prstGeom>
-          <a:solidFill>
-            <a:srgbClr val="6B7280"/>
-          </a:solidFill>
-          <a:ln w="12700">
-            <a:solidFill>
-              <a:srgbClr val="6B7280">
-                <a:alpha val="0"/>
-              </a:srgbClr>
-            </a:solidFill>
-            <a:prstDash val="solid"/>
-          </a:ln>
-        </p:spPr>
-      </p:sp>
-      <p:sp>
-        <p:nvSpPr>
-          <p:cNvPr id="12" name="Shape 10"/>
-          <p:cNvSpPr/>
-          <p:nvPr/>
-        </p:nvSpPr>
-        <p:spPr>
-          <a:xfrm>
-            <a:off x="822960" y="1554480"/>
-            <a:ext cx="4937760" cy="73152"/>
-          </a:xfrm>
-          <a:prstGeom prst="rect">
-            <a:avLst/>
-          </a:prstGeom>
-          <a:solidFill>
-            <a:srgbClr val="6B7280"/>
-          </a:solidFill>
-          <a:ln w="12700">
-            <a:solidFill>
-              <a:srgbClr val="6B7280">
-                <a:alpha val="0"/>
-              </a:srgbClr>
-            </a:solidFill>
-            <a:prstDash val="solid"/>
-          </a:ln>
-        </p:spPr>
-      </p:sp>
-      <p:sp>
-        <p:nvSpPr>
-          <p:cNvPr id="13" name="Shape 11"/>
-          <p:cNvSpPr/>
-          <p:nvPr/>
-        </p:nvSpPr>
-        <p:spPr>
-          <a:xfrm>
-            <a:off x="6400800" y="1554480"/>
-            <a:ext cx="4937760" cy="73152"/>
-          </a:xfrm>
-          <a:prstGeom prst="rect">
-            <a:avLst/>
-          </a:prstGeom>
-          <a:solidFill>
-            <a:srgbClr val="6B7280"/>
-          </a:solidFill>
-          <a:ln w="12700">
-            <a:solidFill>
-              <a:srgbClr val="6B7280">
-                <a:alpha val="0"/>
-              </a:srgbClr>
-            </a:solidFill>
-            <a:prstDash val="solid"/>
-          </a:ln>
-        </p:spPr>
-      </p:sp>
-      <p:sp>
-        <p:nvSpPr>
-          <p:cNvPr id="14" name="mdpr:2-2-14f8eb:title:__title:2-2-14f8eb"/>
+          <p:cNvPr id="11" name="mdpr:2-2-14f8eb:title:__title:2-2-14f8eb"/>
           <p:cNvSpPr txBox="1"/>
           <p:nvPr/>
         </p:nvSpPr>
@@ -22631,7 +21216,24 @@
                 <a:ea typeface="Pretendard" pitchFamily="34" charset="-122"/>
                 <a:cs typeface="Pretendard" pitchFamily="34" charset="-120"/>
               </a:rPr>
-              <a:t>Composition Contract (Cont. 2/2)</a:t>
+              <a:t>Composition Contract</a:t>
+            </a:r>
+            <a:pPr algn="ctr" indent="0" marL="0">
+              <a:lnSpc>
+                <a:spcPct val="120000"/>
+              </a:lnSpc>
+              <a:buNone/>
+            </a:pPr>
+            <a:r>
+              <a:rPr lang="en-US" sz="2000" dirty="0">
+                <a:solidFill>
+                  <a:srgbClr val="8E8E8E"/>
+                </a:solidFill>
+                <a:latin typeface="Pretendard" pitchFamily="34" charset="0"/>
+                <a:ea typeface="Pretendard" pitchFamily="34" charset="-122"/>
+                <a:cs typeface="Pretendard" pitchFamily="34" charset="-120"/>
+              </a:rPr>
+              <a:t> (Cont. 2/2)</a:t>
             </a:r>
             <a:endParaRPr lang="en-US" sz="3400" dirty="0"/>
           </a:p>
@@ -22639,14 +21241,14 @@
       </p:sp>
       <p:sp>
         <p:nvSpPr>
-          <p:cNvPr id="15" name="mdpr:2-2-14f8eb:left:block-6-chunk-2"/>
+          <p:cNvPr id="12" name="mdpr:2-2-14f8eb:left:block-6-chunk-2"/>
           <p:cNvSpPr txBox="1"/>
           <p:nvPr/>
         </p:nvSpPr>
         <p:spPr>
           <a:xfrm>
-            <a:off x="896112" y="1664208"/>
-            <a:ext cx="4791456" cy="4169664"/>
+            <a:off x="896112" y="1463040"/>
+            <a:ext cx="4791456" cy="4261104"/>
           </a:xfrm>
           <a:prstGeom prst="rect">
             <a:avLst/>
@@ -22698,14 +21300,14 @@
       </p:sp>
       <p:sp>
         <p:nvSpPr>
-          <p:cNvPr id="16" name="mdpr:2-2-14f8eb:right:block-6-chunk-2"/>
+          <p:cNvPr id="13" name="mdpr:2-2-14f8eb:right:block-6-chunk-2"/>
           <p:cNvSpPr txBox="1"/>
           <p:nvPr/>
         </p:nvSpPr>
         <p:spPr>
           <a:xfrm>
-            <a:off x="6473952" y="1664208"/>
-            <a:ext cx="4791456" cy="4169664"/>
+            <a:off x="6473952" y="1463040"/>
+            <a:ext cx="4791456" cy="4261104"/>
           </a:xfrm>
           <a:prstGeom prst="rect">
             <a:avLst/>
@@ -23058,8 +21660,8 @@
         </p:nvSpPr>
         <p:spPr>
           <a:xfrm>
-            <a:off x="731520" y="1207008"/>
-            <a:ext cx="1325880" cy="54864"/>
+            <a:off x="822960" y="1938528"/>
+            <a:ext cx="73152" cy="2514600"/>
           </a:xfrm>
           <a:prstGeom prst="rect">
             <a:avLst/>
@@ -23077,222 +21679,22 @@
           </a:ln>
         </p:spPr>
       </p:sp>
-      <p:pic>
-        <p:nvPicPr>
-          <p:cNvPr id="12" name="Image 0" descr="preencoded.png">    </p:cNvPr>
-          <p:cNvPicPr>
-            <a:picLocks noChangeAspect="1"/>
-          </p:cNvPicPr>
-          <p:nvPr/>
-        </p:nvPicPr>
-        <p:blipFill>
-          <a:blip r:embed="rId1">
-            <a:extLst>
-              <a:ext uri="{96DAC541-7B7A-43D3-8B79-37D633B846F1}">
-                <asvg:svgBlip xmlns:asvg="http://schemas.microsoft.com/office/drawing/2016/SVG/main" r:embed="rId2"/>
-              </a:ext>
-            </a:extLst>
-          </a:blip>
-          <a:stretch>
-            <a:fillRect/>
-          </a:stretch>
-        </p:blipFill>
-        <p:spPr>
-          <a:xfrm>
-            <a:off x="914400" y="1865376"/>
-            <a:ext cx="10241280" cy="1024128"/>
-          </a:xfrm>
-          <a:prstGeom prst="rect">
-            <a:avLst/>
-          </a:prstGeom>
-        </p:spPr>
-      </p:pic>
-      <p:sp>
-        <p:nvSpPr>
-          <p:cNvPr id="13" name="Shape 10"/>
-          <p:cNvSpPr/>
-          <p:nvPr/>
-        </p:nvSpPr>
-        <p:spPr>
-          <a:xfrm>
-            <a:off x="914400" y="1865376"/>
-            <a:ext cx="10241280" cy="1024128"/>
-          </a:xfrm>
-          <a:prstGeom prst="rect">
-            <a:avLst/>
-          </a:prstGeom>
-          <a:solidFill>
-            <a:srgbClr val="FDFDFE">
-              <a:alpha val="0"/>
-            </a:srgbClr>
-          </a:solidFill>
-          <a:ln w="12700">
-            <a:solidFill>
-              <a:srgbClr val="AEB7C4">
-                <a:alpha val="0"/>
-              </a:srgbClr>
-            </a:solidFill>
-            <a:prstDash val="solid"/>
-          </a:ln>
-          <a:effectLst>
-            <a:outerShdw sx="100000" sy="100000" kx="0" ky="0" algn="bl" rotWithShape="0" blurRad="12700" dist="50800" dir="2700000">
-              <a:srgbClr val="000000">
-                <a:alpha val="8000"/>
-              </a:srgbClr>
-            </a:outerShdw>
-          </a:effectLst>
-        </p:spPr>
-      </p:sp>
-      <p:pic>
-        <p:nvPicPr>
-          <p:cNvPr id="14" name="Image 1" descr="preencoded.png">    </p:cNvPr>
-          <p:cNvPicPr>
-            <a:picLocks noChangeAspect="1"/>
-          </p:cNvPicPr>
-          <p:nvPr/>
-        </p:nvPicPr>
-        <p:blipFill>
-          <a:blip r:embed="rId3">
-            <a:extLst>
-              <a:ext uri="{96DAC541-7B7A-43D3-8B79-37D633B846F1}">
-                <asvg:svgBlip xmlns:asvg="http://schemas.microsoft.com/office/drawing/2016/SVG/main" r:embed="rId4"/>
-              </a:ext>
-            </a:extLst>
-          </a:blip>
-          <a:stretch>
-            <a:fillRect/>
-          </a:stretch>
-        </p:blipFill>
-        <p:spPr>
-          <a:xfrm>
-            <a:off x="914400" y="3191256"/>
-            <a:ext cx="10241280" cy="1024128"/>
-          </a:xfrm>
-          <a:prstGeom prst="rect">
-            <a:avLst/>
-          </a:prstGeom>
-        </p:spPr>
-      </p:pic>
-      <p:sp>
-        <p:nvSpPr>
-          <p:cNvPr id="15" name="Shape 11"/>
-          <p:cNvSpPr/>
-          <p:nvPr/>
-        </p:nvSpPr>
-        <p:spPr>
-          <a:xfrm>
-            <a:off x="914400" y="3191256"/>
-            <a:ext cx="10241280" cy="1024128"/>
-          </a:xfrm>
-          <a:prstGeom prst="rect">
-            <a:avLst/>
-          </a:prstGeom>
-          <a:solidFill>
-            <a:srgbClr val="FDFDFE">
-              <a:alpha val="0"/>
-            </a:srgbClr>
-          </a:solidFill>
-          <a:ln w="12700">
-            <a:solidFill>
-              <a:srgbClr val="AEB7C4">
-                <a:alpha val="0"/>
-              </a:srgbClr>
-            </a:solidFill>
-            <a:prstDash val="solid"/>
-          </a:ln>
-          <a:effectLst>
-            <a:outerShdw sx="100000" sy="100000" kx="0" ky="0" algn="bl" rotWithShape="0" blurRad="12700" dist="50800" dir="2700000">
-              <a:srgbClr val="000000">
-                <a:alpha val="8000"/>
-              </a:srgbClr>
-            </a:outerShdw>
-          </a:effectLst>
-        </p:spPr>
-      </p:sp>
-      <p:pic>
-        <p:nvPicPr>
-          <p:cNvPr id="16" name="Image 2" descr="preencoded.png">    </p:cNvPr>
-          <p:cNvPicPr>
-            <a:picLocks noChangeAspect="1"/>
-          </p:cNvPicPr>
-          <p:nvPr/>
-        </p:nvPicPr>
-        <p:blipFill>
-          <a:blip r:embed="rId5">
-            <a:extLst>
-              <a:ext uri="{96DAC541-7B7A-43D3-8B79-37D633B846F1}">
-                <asvg:svgBlip xmlns:asvg="http://schemas.microsoft.com/office/drawing/2016/SVG/main" r:embed="rId6"/>
-              </a:ext>
-            </a:extLst>
-          </a:blip>
-          <a:stretch>
-            <a:fillRect/>
-          </a:stretch>
-        </p:blipFill>
-        <p:spPr>
-          <a:xfrm>
-            <a:off x="914400" y="4507992"/>
-            <a:ext cx="10241280" cy="1024128"/>
-          </a:xfrm>
-          <a:prstGeom prst="rect">
-            <a:avLst/>
-          </a:prstGeom>
-        </p:spPr>
-      </p:pic>
-      <p:sp>
-        <p:nvSpPr>
-          <p:cNvPr id="17" name="Shape 12"/>
-          <p:cNvSpPr/>
-          <p:nvPr/>
-        </p:nvSpPr>
-        <p:spPr>
-          <a:xfrm>
-            <a:off x="914400" y="4507992"/>
-            <a:ext cx="10241280" cy="1024128"/>
-          </a:xfrm>
-          <a:prstGeom prst="rect">
-            <a:avLst/>
-          </a:prstGeom>
-          <a:solidFill>
-            <a:srgbClr val="FDFDFE">
-              <a:alpha val="0"/>
-            </a:srgbClr>
-          </a:solidFill>
-          <a:ln w="12700">
-            <a:solidFill>
-              <a:srgbClr val="AEB7C4">
-                <a:alpha val="0"/>
-              </a:srgbClr>
-            </a:solidFill>
-            <a:prstDash val="solid"/>
-          </a:ln>
-          <a:effectLst>
-            <a:outerShdw sx="100000" sy="100000" kx="0" ky="0" algn="bl" rotWithShape="0" blurRad="12700" dist="50800" dir="2700000">
-              <a:srgbClr val="000000">
-                <a:alpha val="8000"/>
-              </a:srgbClr>
-            </a:outerShdw>
-          </a:effectLst>
-        </p:spPr>
-      </p:sp>
-      <p:sp>
-        <p:nvSpPr>
-          <p:cNvPr id="18" name="Shape 13"/>
-          <p:cNvSpPr/>
-          <p:nvPr/>
-        </p:nvSpPr>
-        <p:spPr>
-          <a:xfrm>
-            <a:off x="786384" y="1956816"/>
-            <a:ext cx="32004" cy="3483864"/>
-          </a:xfrm>
-          <a:prstGeom prst="rect">
-            <a:avLst/>
-          </a:prstGeom>
-          <a:solidFill>
-            <a:srgbClr val="C7D2FE">
-              <a:alpha val="80000"/>
-            </a:srgbClr>
+      <p:sp>
+        <p:nvSpPr>
+          <p:cNvPr id="12" name="Shape 10"/>
+          <p:cNvSpPr/>
+          <p:nvPr/>
+        </p:nvSpPr>
+        <p:spPr>
+          <a:xfrm>
+            <a:off x="4343400" y="1938528"/>
+            <a:ext cx="73152" cy="2514600"/>
+          </a:xfrm>
+          <a:prstGeom prst="rect">
+            <a:avLst/>
+          </a:prstGeom>
+          <a:solidFill>
+            <a:srgbClr val="C7D2FE"/>
           </a:solidFill>
           <a:ln w="12700">
             <a:solidFill>
@@ -23306,14 +21708,14 @@
       </p:sp>
       <p:sp>
         <p:nvSpPr>
-          <p:cNvPr id="19" name="Shape 14"/>
-          <p:cNvSpPr/>
-          <p:nvPr/>
-        </p:nvSpPr>
-        <p:spPr>
-          <a:xfrm>
-            <a:off x="914400" y="1865376"/>
-            <a:ext cx="73152" cy="1024128"/>
+          <p:cNvPr id="13" name="Shape 11"/>
+          <p:cNvSpPr/>
+          <p:nvPr/>
+        </p:nvSpPr>
+        <p:spPr>
+          <a:xfrm>
+            <a:off x="7863840" y="1938528"/>
+            <a:ext cx="73152" cy="2514600"/>
           </a:xfrm>
           <a:prstGeom prst="rect">
             <a:avLst/>
@@ -23333,61 +21735,7 @@
       </p:sp>
       <p:sp>
         <p:nvSpPr>
-          <p:cNvPr id="20" name="Shape 15"/>
-          <p:cNvSpPr/>
-          <p:nvPr/>
-        </p:nvSpPr>
-        <p:spPr>
-          <a:xfrm>
-            <a:off x="914400" y="3191256"/>
-            <a:ext cx="73152" cy="1024128"/>
-          </a:xfrm>
-          <a:prstGeom prst="rect">
-            <a:avLst/>
-          </a:prstGeom>
-          <a:solidFill>
-            <a:srgbClr val="C7D2FE"/>
-          </a:solidFill>
-          <a:ln w="12700">
-            <a:solidFill>
-              <a:srgbClr val="C7D2FE">
-                <a:alpha val="0"/>
-              </a:srgbClr>
-            </a:solidFill>
-            <a:prstDash val="solid"/>
-          </a:ln>
-        </p:spPr>
-      </p:sp>
-      <p:sp>
-        <p:nvSpPr>
-          <p:cNvPr id="21" name="Shape 16"/>
-          <p:cNvSpPr/>
-          <p:nvPr/>
-        </p:nvSpPr>
-        <p:spPr>
-          <a:xfrm>
-            <a:off x="914400" y="4507992"/>
-            <a:ext cx="73152" cy="1024128"/>
-          </a:xfrm>
-          <a:prstGeom prst="rect">
-            <a:avLst/>
-          </a:prstGeom>
-          <a:solidFill>
-            <a:srgbClr val="6B7280"/>
-          </a:solidFill>
-          <a:ln w="12700">
-            <a:solidFill>
-              <a:srgbClr val="6B7280">
-                <a:alpha val="0"/>
-              </a:srgbClr>
-            </a:solidFill>
-            <a:prstDash val="solid"/>
-          </a:ln>
-        </p:spPr>
-      </p:sp>
-      <p:sp>
-        <p:nvSpPr>
-          <p:cNvPr id="22" name="mdpr:1-2-dfa474:title:__title:1-2-dfa474"/>
+          <p:cNvPr id="14" name="mdpr:1-2-dfa474:title:__title:1-2-dfa474"/>
           <p:cNvSpPr txBox="1"/>
           <p:nvPr/>
         </p:nvSpPr>
@@ -23429,14 +21777,14 @@
       </p:sp>
       <p:sp>
         <p:nvSpPr>
-          <p:cNvPr id="23" name="mdpr:1-2-dfa474:item-1:block-8-chunk-1"/>
+          <p:cNvPr id="15" name="mdpr:1-2-dfa474:item-1:block-8-chunk-1"/>
           <p:cNvSpPr txBox="1"/>
           <p:nvPr/>
         </p:nvSpPr>
         <p:spPr>
           <a:xfrm>
-            <a:off x="1133856" y="1957548"/>
-            <a:ext cx="9820656" cy="839785"/>
+            <a:off x="1042416" y="2103120"/>
+            <a:ext cx="2825496" cy="2185416"/>
           </a:xfrm>
           <a:prstGeom prst="rect">
             <a:avLst/>
@@ -23488,14 +21836,14 @@
       </p:sp>
       <p:sp>
         <p:nvSpPr>
-          <p:cNvPr id="24" name="mdpr:1-2-dfa474:item-2:block-8-chunk-1"/>
+          <p:cNvPr id="16" name="mdpr:1-2-dfa474:item-2:block-8-chunk-1"/>
           <p:cNvSpPr txBox="1"/>
           <p:nvPr/>
         </p:nvSpPr>
         <p:spPr>
           <a:xfrm>
-            <a:off x="1133856" y="3283428"/>
-            <a:ext cx="9820656" cy="839785"/>
+            <a:off x="4562856" y="2103120"/>
+            <a:ext cx="2825496" cy="2185416"/>
           </a:xfrm>
           <a:prstGeom prst="rect">
             <a:avLst/>
@@ -23547,14 +21895,14 @@
       </p:sp>
       <p:sp>
         <p:nvSpPr>
-          <p:cNvPr id="25" name="mdpr:1-2-dfa474:item-3:block-8-chunk-1"/>
+          <p:cNvPr id="17" name="mdpr:1-2-dfa474:item-3:block-8-chunk-1"/>
           <p:cNvSpPr txBox="1"/>
           <p:nvPr/>
         </p:nvSpPr>
         <p:spPr>
           <a:xfrm>
-            <a:off x="1133856" y="4600164"/>
-            <a:ext cx="9820656" cy="839785"/>
+            <a:off x="8083296" y="2103120"/>
+            <a:ext cx="2825496" cy="2185416"/>
           </a:xfrm>
           <a:prstGeom prst="rect">
             <a:avLst/>
@@ -23901,88 +22249,7 @@
       </p:sp>
       <p:sp>
         <p:nvSpPr>
-          <p:cNvPr id="11" name="Shape 9"/>
-          <p:cNvSpPr/>
-          <p:nvPr/>
-        </p:nvSpPr>
-        <p:spPr>
-          <a:xfrm>
-            <a:off x="731520" y="1207008"/>
-            <a:ext cx="1325880" cy="54864"/>
-          </a:xfrm>
-          <a:prstGeom prst="rect">
-            <a:avLst/>
-          </a:prstGeom>
-          <a:solidFill>
-            <a:srgbClr val="6B7280"/>
-          </a:solidFill>
-          <a:ln w="12700">
-            <a:solidFill>
-              <a:srgbClr val="6B7280">
-                <a:alpha val="0"/>
-              </a:srgbClr>
-            </a:solidFill>
-            <a:prstDash val="solid"/>
-          </a:ln>
-        </p:spPr>
-      </p:sp>
-      <p:sp>
-        <p:nvSpPr>
-          <p:cNvPr id="12" name="Shape 10"/>
-          <p:cNvSpPr/>
-          <p:nvPr/>
-        </p:nvSpPr>
-        <p:spPr>
-          <a:xfrm>
-            <a:off x="822960" y="1554480"/>
-            <a:ext cx="4937760" cy="73152"/>
-          </a:xfrm>
-          <a:prstGeom prst="rect">
-            <a:avLst/>
-          </a:prstGeom>
-          <a:solidFill>
-            <a:srgbClr val="6B7280"/>
-          </a:solidFill>
-          <a:ln w="12700">
-            <a:solidFill>
-              <a:srgbClr val="6B7280">
-                <a:alpha val="0"/>
-              </a:srgbClr>
-            </a:solidFill>
-            <a:prstDash val="solid"/>
-          </a:ln>
-        </p:spPr>
-      </p:sp>
-      <p:sp>
-        <p:nvSpPr>
-          <p:cNvPr id="13" name="Shape 11"/>
-          <p:cNvSpPr/>
-          <p:nvPr/>
-        </p:nvSpPr>
-        <p:spPr>
-          <a:xfrm>
-            <a:off x="6400800" y="1554480"/>
-            <a:ext cx="4937760" cy="73152"/>
-          </a:xfrm>
-          <a:prstGeom prst="rect">
-            <a:avLst/>
-          </a:prstGeom>
-          <a:solidFill>
-            <a:srgbClr val="6B7280"/>
-          </a:solidFill>
-          <a:ln w="12700">
-            <a:solidFill>
-              <a:srgbClr val="6B7280">
-                <a:alpha val="0"/>
-              </a:srgbClr>
-            </a:solidFill>
-            <a:prstDash val="solid"/>
-          </a:ln>
-        </p:spPr>
-      </p:sp>
-      <p:sp>
-        <p:nvSpPr>
-          <p:cNvPr id="14" name="mdpr:2-2-149bde:title:__title:2-2-149bde"/>
+          <p:cNvPr id="11" name="mdpr:2-2-149bde:title:__title:2-2-149bde"/>
           <p:cNvSpPr txBox="1"/>
           <p:nvPr/>
         </p:nvSpPr>
@@ -24016,7 +22283,24 @@
                 <a:ea typeface="Pretendard" pitchFamily="34" charset="-122"/>
                 <a:cs typeface="Pretendard" pitchFamily="34" charset="-120"/>
               </a:rPr>
-              <a:t>Pruned Style Families (Cont. 2/2)</a:t>
+              <a:t>Pruned Style Families</a:t>
+            </a:r>
+            <a:pPr algn="ctr" indent="0" marL="0">
+              <a:lnSpc>
+                <a:spcPct val="120000"/>
+              </a:lnSpc>
+              <a:buNone/>
+            </a:pPr>
+            <a:r>
+              <a:rPr lang="en-US" sz="2000" dirty="0">
+                <a:solidFill>
+                  <a:srgbClr val="8E8E8E"/>
+                </a:solidFill>
+                <a:latin typeface="Pretendard" pitchFamily="34" charset="0"/>
+                <a:ea typeface="Pretendard" pitchFamily="34" charset="-122"/>
+                <a:cs typeface="Pretendard" pitchFamily="34" charset="-120"/>
+              </a:rPr>
+              <a:t> (Cont. 2/2)</a:t>
             </a:r>
             <a:endParaRPr lang="en-US" sz="3400" dirty="0"/>
           </a:p>
@@ -24024,14 +22308,14 @@
       </p:sp>
       <p:sp>
         <p:nvSpPr>
-          <p:cNvPr id="15" name="mdpr:2-2-149bde:left:block-8-chunk-2"/>
+          <p:cNvPr id="12" name="mdpr:2-2-149bde:left:block-8-chunk-2"/>
           <p:cNvSpPr txBox="1"/>
           <p:nvPr/>
         </p:nvSpPr>
         <p:spPr>
           <a:xfrm>
-            <a:off x="896112" y="1664208"/>
-            <a:ext cx="4791456" cy="4169664"/>
+            <a:off x="896112" y="1463040"/>
+            <a:ext cx="4791456" cy="4261104"/>
           </a:xfrm>
           <a:prstGeom prst="rect">
             <a:avLst/>
@@ -24083,14 +22367,14 @@
       </p:sp>
       <p:sp>
         <p:nvSpPr>
-          <p:cNvPr id="16" name="mdpr:2-2-149bde:right:block-8-chunk-2"/>
+          <p:cNvPr id="13" name="mdpr:2-2-149bde:right:block-8-chunk-2"/>
           <p:cNvSpPr txBox="1"/>
           <p:nvPr/>
         </p:nvSpPr>
         <p:spPr>
           <a:xfrm>
-            <a:off x="6473952" y="1664208"/>
-            <a:ext cx="4791456" cy="4169664"/>
+            <a:off x="6473952" y="1463040"/>
+            <a:ext cx="4791456" cy="4261104"/>
           </a:xfrm>
           <a:prstGeom prst="rect">
             <a:avLst/>
@@ -24435,16 +22719,148 @@
           </a:ln>
         </p:spPr>
       </p:sp>
-      <p:sp>
-        <p:nvSpPr>
-          <p:cNvPr id="11" name="Shape 9"/>
-          <p:cNvSpPr/>
-          <p:nvPr/>
-        </p:nvSpPr>
-        <p:spPr>
-          <a:xfrm>
-            <a:off x="731520" y="1207008"/>
-            <a:ext cx="1325880" cy="54864"/>
+      <p:pic>
+        <p:nvPicPr>
+          <p:cNvPr id="11" name="Image 0" descr="preencoded.png">    </p:cNvPr>
+          <p:cNvPicPr>
+            <a:picLocks noChangeAspect="1"/>
+          </p:cNvPicPr>
+          <p:nvPr/>
+        </p:nvPicPr>
+        <p:blipFill>
+          <a:blip r:embed="rId1">
+            <a:extLst>
+              <a:ext uri="{96DAC541-7B7A-43D3-8B79-37D633B846F1}">
+                <asvg:svgBlip xmlns:asvg="http://schemas.microsoft.com/office/drawing/2016/SVG/main" r:embed="rId2"/>
+              </a:ext>
+            </a:extLst>
+          </a:blip>
+          <a:stretch>
+            <a:fillRect/>
+          </a:stretch>
+        </p:blipFill>
+        <p:spPr>
+          <a:xfrm>
+            <a:off x="914400" y="2523744"/>
+            <a:ext cx="10241280" cy="1024128"/>
+          </a:xfrm>
+          <a:prstGeom prst="rect">
+            <a:avLst/>
+          </a:prstGeom>
+        </p:spPr>
+      </p:pic>
+      <p:sp>
+        <p:nvSpPr>
+          <p:cNvPr id="12" name="Shape 9"/>
+          <p:cNvSpPr/>
+          <p:nvPr/>
+        </p:nvSpPr>
+        <p:spPr>
+          <a:xfrm>
+            <a:off x="914400" y="2523744"/>
+            <a:ext cx="10241280" cy="1024128"/>
+          </a:xfrm>
+          <a:prstGeom prst="rect">
+            <a:avLst/>
+          </a:prstGeom>
+          <a:solidFill>
+            <a:srgbClr val="FDFDFE">
+              <a:alpha val="0"/>
+            </a:srgbClr>
+          </a:solidFill>
+          <a:ln w="12700">
+            <a:solidFill>
+              <a:srgbClr val="AEB7C4">
+                <a:alpha val="0"/>
+              </a:srgbClr>
+            </a:solidFill>
+            <a:prstDash val="solid"/>
+          </a:ln>
+          <a:effectLst>
+            <a:outerShdw sx="100000" sy="100000" kx="0" ky="0" algn="bl" rotWithShape="0" blurRad="12700" dist="50800" dir="2700000">
+              <a:srgbClr val="000000">
+                <a:alpha val="8000"/>
+              </a:srgbClr>
+            </a:outerShdw>
+          </a:effectLst>
+        </p:spPr>
+      </p:sp>
+      <p:pic>
+        <p:nvPicPr>
+          <p:cNvPr id="13" name="Image 1" descr="preencoded.png">    </p:cNvPr>
+          <p:cNvPicPr>
+            <a:picLocks noChangeAspect="1"/>
+          </p:cNvPicPr>
+          <p:nvPr/>
+        </p:nvPicPr>
+        <p:blipFill>
+          <a:blip r:embed="rId3">
+            <a:extLst>
+              <a:ext uri="{96DAC541-7B7A-43D3-8B79-37D633B846F1}">
+                <asvg:svgBlip xmlns:asvg="http://schemas.microsoft.com/office/drawing/2016/SVG/main" r:embed="rId4"/>
+              </a:ext>
+            </a:extLst>
+          </a:blip>
+          <a:stretch>
+            <a:fillRect/>
+          </a:stretch>
+        </p:blipFill>
+        <p:spPr>
+          <a:xfrm>
+            <a:off x="914400" y="3849624"/>
+            <a:ext cx="10241280" cy="1024128"/>
+          </a:xfrm>
+          <a:prstGeom prst="rect">
+            <a:avLst/>
+          </a:prstGeom>
+        </p:spPr>
+      </p:pic>
+      <p:sp>
+        <p:nvSpPr>
+          <p:cNvPr id="14" name="Shape 10"/>
+          <p:cNvSpPr/>
+          <p:nvPr/>
+        </p:nvSpPr>
+        <p:spPr>
+          <a:xfrm>
+            <a:off x="914400" y="3849624"/>
+            <a:ext cx="10241280" cy="1024128"/>
+          </a:xfrm>
+          <a:prstGeom prst="rect">
+            <a:avLst/>
+          </a:prstGeom>
+          <a:solidFill>
+            <a:srgbClr val="FDFDFE">
+              <a:alpha val="0"/>
+            </a:srgbClr>
+          </a:solidFill>
+          <a:ln w="12700">
+            <a:solidFill>
+              <a:srgbClr val="AEB7C4">
+                <a:alpha val="0"/>
+              </a:srgbClr>
+            </a:solidFill>
+            <a:prstDash val="solid"/>
+          </a:ln>
+          <a:effectLst>
+            <a:outerShdw sx="100000" sy="100000" kx="0" ky="0" algn="bl" rotWithShape="0" blurRad="12700" dist="50800" dir="2700000">
+              <a:srgbClr val="000000">
+                <a:alpha val="8000"/>
+              </a:srgbClr>
+            </a:outerShdw>
+          </a:effectLst>
+        </p:spPr>
+      </p:sp>
+      <p:sp>
+        <p:nvSpPr>
+          <p:cNvPr id="15" name="Shape 11"/>
+          <p:cNvSpPr/>
+          <p:nvPr/>
+        </p:nvSpPr>
+        <p:spPr>
+          <a:xfrm>
+            <a:off x="914400" y="2523744"/>
+            <a:ext cx="73152" cy="1024128"/>
           </a:xfrm>
           <a:prstGeom prst="rect">
             <a:avLst/>
@@ -24464,24 +22880,24 @@
       </p:sp>
       <p:sp>
         <p:nvSpPr>
-          <p:cNvPr id="12" name="Shape 10"/>
-          <p:cNvSpPr/>
-          <p:nvPr/>
-        </p:nvSpPr>
-        <p:spPr>
-          <a:xfrm>
-            <a:off x="822960" y="1554480"/>
-            <a:ext cx="4937760" cy="73152"/>
-          </a:xfrm>
-          <a:prstGeom prst="rect">
-            <a:avLst/>
-          </a:prstGeom>
-          <a:solidFill>
-            <a:srgbClr val="6B7280"/>
-          </a:solidFill>
-          <a:ln w="12700">
-            <a:solidFill>
-              <a:srgbClr val="6B7280">
+          <p:cNvPr id="16" name="Shape 12"/>
+          <p:cNvSpPr/>
+          <p:nvPr/>
+        </p:nvSpPr>
+        <p:spPr>
+          <a:xfrm>
+            <a:off x="914400" y="3849624"/>
+            <a:ext cx="73152" cy="1024128"/>
+          </a:xfrm>
+          <a:prstGeom prst="rect">
+            <a:avLst/>
+          </a:prstGeom>
+          <a:solidFill>
+            <a:srgbClr val="C7D2FE"/>
+          </a:solidFill>
+          <a:ln w="12700">
+            <a:solidFill>
+              <a:srgbClr val="C7D2FE">
                 <a:alpha val="0"/>
               </a:srgbClr>
             </a:solidFill>
@@ -24491,34 +22907,7 @@
       </p:sp>
       <p:sp>
         <p:nvSpPr>
-          <p:cNvPr id="13" name="Shape 11"/>
-          <p:cNvSpPr/>
-          <p:nvPr/>
-        </p:nvSpPr>
-        <p:spPr>
-          <a:xfrm>
-            <a:off x="6400800" y="1554480"/>
-            <a:ext cx="4937760" cy="73152"/>
-          </a:xfrm>
-          <a:prstGeom prst="rect">
-            <a:avLst/>
-          </a:prstGeom>
-          <a:solidFill>
-            <a:srgbClr val="6B7280"/>
-          </a:solidFill>
-          <a:ln w="12700">
-            <a:solidFill>
-              <a:srgbClr val="6B7280">
-                <a:alpha val="0"/>
-              </a:srgbClr>
-            </a:solidFill>
-            <a:prstDash val="solid"/>
-          </a:ln>
-        </p:spPr>
-      </p:sp>
-      <p:sp>
-        <p:nvSpPr>
-          <p:cNvPr id="14" name="mdpr:1-2-5a84f1:title:__title:1-2-5a84f1"/>
+          <p:cNvPr id="17" name="mdpr:1-2-5a84f1:title:__title:1-2-5a84f1"/>
           <p:cNvSpPr txBox="1"/>
           <p:nvPr/>
         </p:nvSpPr>
@@ -24560,14 +22949,14 @@
       </p:sp>
       <p:sp>
         <p:nvSpPr>
-          <p:cNvPr id="15" name="mdpr:1-2-5a84f1:left:block-10-chunk-1"/>
+          <p:cNvPr id="18" name="mdpr:1-2-5a84f1:item-1:block-10-chunk-1"/>
           <p:cNvSpPr txBox="1"/>
           <p:nvPr/>
         </p:nvSpPr>
         <p:spPr>
           <a:xfrm>
-            <a:off x="896112" y="1664208"/>
-            <a:ext cx="4791456" cy="4169664"/>
+            <a:off x="1133856" y="2615916"/>
+            <a:ext cx="9820656" cy="839785"/>
           </a:xfrm>
           <a:prstGeom prst="rect">
             <a:avLst/>
@@ -24576,7 +22965,7 @@
           <a:ln/>
         </p:spPr>
         <p:txBody>
-          <a:bodyPr wrap="square" lIns="0" tIns="25400" rIns="25400" bIns="0" rtlCol="0" anchor="t"/>
+          <a:bodyPr wrap="square" lIns="0" tIns="25400" rIns="25400" bIns="0" rtlCol="0" anchor="ctr"/>
           <a:lstStyle/>
           <a:p>
             <a:pPr algn="l" indent="0" marL="0">
@@ -24594,7 +22983,7 @@
                 <a:ea typeface="Pretendard" pitchFamily="34" charset="-122"/>
                 <a:cs typeface="Pretendard" pitchFamily="34" charset="-120"/>
               </a:rPr>
-              <a:t>- Headings</a:t>
+              <a:t>Headings</a:t>
             </a:r>
             <a:pPr algn="l" indent="0" marL="0">
               <a:lnSpc>
@@ -24619,14 +23008,14 @@
       </p:sp>
       <p:sp>
         <p:nvSpPr>
-          <p:cNvPr id="16" name="mdpr:1-2-5a84f1:right:block-10-chunk-1"/>
+          <p:cNvPr id="19" name="mdpr:1-2-5a84f1:item-2:block-10-chunk-1"/>
           <p:cNvSpPr txBox="1"/>
           <p:nvPr/>
         </p:nvSpPr>
         <p:spPr>
           <a:xfrm>
-            <a:off x="6473952" y="1664208"/>
-            <a:ext cx="4791456" cy="4169664"/>
+            <a:off x="1133856" y="3941796"/>
+            <a:ext cx="9820656" cy="839785"/>
           </a:xfrm>
           <a:prstGeom prst="rect">
             <a:avLst/>
@@ -24635,7 +23024,7 @@
           <a:ln/>
         </p:spPr>
         <p:txBody>
-          <a:bodyPr wrap="square" lIns="0" tIns="25400" rIns="25400" bIns="0" rtlCol="0" anchor="t"/>
+          <a:bodyPr wrap="square" lIns="0" tIns="25400" rIns="25400" bIns="0" rtlCol="0" anchor="ctr"/>
           <a:lstStyle/>
           <a:p>
             <a:pPr algn="l" indent="0" marL="0">
@@ -24653,7 +23042,7 @@
                 <a:ea typeface="Pretendard" pitchFamily="34" charset="-122"/>
                 <a:cs typeface="Pretendard" pitchFamily="34" charset="-120"/>
               </a:rPr>
-              <a:t>- Lists</a:t>
+              <a:t>Lists</a:t>
             </a:r>
             <a:pPr algn="l" indent="0" marL="0">
               <a:lnSpc>
